--- a/carpentry/intake-141/PowerPoint/Day-08_2026-11-09_Week-3.pptx
+++ b/carpentry/intake-141/PowerPoint/Day-08_2026-11-09_Week-3.pptx
@@ -546,17 +546,7 @@
           <a:lstStyle/>
           <a:p>
             <a:r>
-              <a:t>Daily deck uses only this date’s math blocks from the current visible Carpentry Schedule and Math Week sheets.</a:t>
-            </a:r>
-          </a:p>
-          <a:p>
-            <a:r>
-              <a:t>'Carpentry Schedule'!B27 | 'Math Week 3'!A19</a:t>
-            </a:r>
-          </a:p>
-          <a:p>
-            <a:r>
-              <a:t>'Carpentry Schedule'!B29 | 'Math Week 3'!A36</a:t>
+              <a:t>Introduce today’s math topics and review the timetable.</a:t>
             </a:r>
           </a:p>
         </p:txBody>
@@ -685,11 +675,6 @@
               <a:t>Materials/check: Notebook; calculator</a:t>
             </a:r>
           </a:p>
-          <a:p>
-            <a:r>
-              <a:t>Source: 'Math Week 3'!A25:F25</a:t>
-            </a:r>
-          </a:p>
           <a:p/>
           <a:p>
             <a:r>
@@ -711,11 +696,6 @@
               <a:t>Materials/check: Identify support needs</a:t>
             </a:r>
           </a:p>
-          <a:p>
-            <a:r>
-              <a:t>Source: 'Math Week 3'!A26:F26</a:t>
-            </a:r>
-          </a:p>
           <a:p/>
           <a:p>
             <a:r>
@@ -737,11 +717,6 @@
               <a:t>Materials/check: Textbook; worked example</a:t>
             </a:r>
           </a:p>
-          <a:p>
-            <a:r>
-              <a:t>Source: 'Math Week 3'!A27:F27</a:t>
-            </a:r>
-          </a:p>
           <a:p/>
           <a:p>
             <a:r>
@@ -763,11 +738,6 @@
               <a:t>Materials/check: Exercise Book; tool above</a:t>
             </a:r>
           </a:p>
-          <a:p>
-            <a:r>
-              <a:t>Source: 'Math Week 3'!A28:F28</a:t>
-            </a:r>
-          </a:p>
           <a:p/>
           <a:p>
             <a:r>
@@ -789,11 +759,6 @@
               <a:t>Materials/check: Paper first; tool second</a:t>
             </a:r>
           </a:p>
-          <a:p>
-            <a:r>
-              <a:t>Source: 'Math Week 3'!A29:F29</a:t>
-            </a:r>
-          </a:p>
           <a:p/>
           <a:p>
             <a:r>
@@ -815,11 +780,6 @@
               <a:t>Materials/check: Teacher answers below</a:t>
             </a:r>
           </a:p>
-          <a:p>
-            <a:r>
-              <a:t>Source: 'Math Week 3'!A30:F30</a:t>
-            </a:r>
-          </a:p>
           <a:p/>
           <a:p>
             <a:r>
@@ -841,11 +801,6 @@
               <a:t>Materials/check: Notebook / error log</a:t>
             </a:r>
           </a:p>
-          <a:p>
-            <a:r>
-              <a:t>Source: 'Math Week 3'!A31:F31</a:t>
-            </a:r>
-          </a:p>
           <a:p/>
           <a:p>
             <a:r>
@@ -866,12 +821,7 @@
           <a:p/>
           <a:p>
             <a:r>
-              <a:t>Sources: 'Math Week 3'!A10:E10; 'Carpentry Schedule'!B27; 'Math Week 3'!A19</a:t>
-            </a:r>
-          </a:p>
-          <a:p>
-            <a:r>
-              <a:t>Navigation/resource slides support these scheduled steps and do not add instructional time.</a:t>
+              <a:t>Keep activities within the allocated phase time.</a:t>
             </a:r>
           </a:p>
           <a:p/>
@@ -936,11 +886,6 @@
               <a:t>Materials/check: Notebook; calculator</a:t>
             </a:r>
           </a:p>
-          <a:p>
-            <a:r>
-              <a:t>Source: 'Math Week 3'!A42:F42</a:t>
-            </a:r>
-          </a:p>
           <a:p/>
           <a:p>
             <a:r>
@@ -962,11 +907,6 @@
               <a:t>Materials/check: Identify support needs</a:t>
             </a:r>
           </a:p>
-          <a:p>
-            <a:r>
-              <a:t>Source: 'Math Week 3'!A43:F43</a:t>
-            </a:r>
-          </a:p>
           <a:p/>
           <a:p>
             <a:r>
@@ -988,11 +928,6 @@
               <a:t>Materials/check: Textbook; worked example</a:t>
             </a:r>
           </a:p>
-          <a:p>
-            <a:r>
-              <a:t>Source: 'Math Week 3'!A44:F44</a:t>
-            </a:r>
-          </a:p>
           <a:p/>
           <a:p>
             <a:r>
@@ -1014,11 +949,6 @@
               <a:t>Materials/check: Exercise Book; tool above</a:t>
             </a:r>
           </a:p>
-          <a:p>
-            <a:r>
-              <a:t>Source: 'Math Week 3'!A45:F45</a:t>
-            </a:r>
-          </a:p>
           <a:p/>
           <a:p>
             <a:r>
@@ -1040,11 +970,6 @@
               <a:t>Materials/check: Paper first; tool second</a:t>
             </a:r>
           </a:p>
-          <a:p>
-            <a:r>
-              <a:t>Source: 'Math Week 3'!A46:F46</a:t>
-            </a:r>
-          </a:p>
           <a:p/>
           <a:p>
             <a:r>
@@ -1066,11 +991,6 @@
               <a:t>Materials/check: Teacher answers below</a:t>
             </a:r>
           </a:p>
-          <a:p>
-            <a:r>
-              <a:t>Source: 'Math Week 3'!A47:F47</a:t>
-            </a:r>
-          </a:p>
           <a:p/>
           <a:p>
             <a:r>
@@ -1092,11 +1012,6 @@
               <a:t>Materials/check: Notebook / error log</a:t>
             </a:r>
           </a:p>
-          <a:p>
-            <a:r>
-              <a:t>Source: 'Math Week 3'!A48:F48</a:t>
-            </a:r>
-          </a:p>
           <a:p/>
           <a:p>
             <a:r>
@@ -1117,12 +1032,7 @@
           <a:p/>
           <a:p>
             <a:r>
-              <a:t>Sources: 'Math Week 3'!A11:E11; 'Carpentry Schedule'!B29; 'Math Week 3'!A36</a:t>
-            </a:r>
-          </a:p>
-          <a:p>
-            <a:r>
-              <a:t>Navigation/resource slides support these scheduled steps and do not add instructional time.</a:t>
+              <a:t>Keep activities within the allocated phase time.</a:t>
             </a:r>
           </a:p>
         </p:txBody>
@@ -1251,11 +1161,6 @@
               <a:t>Materials/check: Notebook; calculator</a:t>
             </a:r>
           </a:p>
-          <a:p>
-            <a:r>
-              <a:t>Source: 'Math Week 3'!A25:F25</a:t>
-            </a:r>
-          </a:p>
           <a:p/>
           <a:p>
             <a:r>
@@ -1277,11 +1182,6 @@
               <a:t>Materials/check: Identify support needs</a:t>
             </a:r>
           </a:p>
-          <a:p>
-            <a:r>
-              <a:t>Source: 'Math Week 3'!A26:F26</a:t>
-            </a:r>
-          </a:p>
           <a:p/>
           <a:p>
             <a:r>
@@ -1303,11 +1203,6 @@
               <a:t>Materials/check: Textbook; worked example</a:t>
             </a:r>
           </a:p>
-          <a:p>
-            <a:r>
-              <a:t>Source: 'Math Week 3'!A27:F27</a:t>
-            </a:r>
-          </a:p>
           <a:p/>
           <a:p>
             <a:r>
@@ -1329,11 +1224,6 @@
               <a:t>Materials/check: Exercise Book; tool above</a:t>
             </a:r>
           </a:p>
-          <a:p>
-            <a:r>
-              <a:t>Source: 'Math Week 3'!A28:F28</a:t>
-            </a:r>
-          </a:p>
           <a:p/>
           <a:p>
             <a:r>
@@ -1355,11 +1245,6 @@
               <a:t>Materials/check: Paper first; tool second</a:t>
             </a:r>
           </a:p>
-          <a:p>
-            <a:r>
-              <a:t>Source: 'Math Week 3'!A29:F29</a:t>
-            </a:r>
-          </a:p>
           <a:p/>
           <a:p>
             <a:r>
@@ -1381,11 +1266,6 @@
               <a:t>Materials/check: Teacher answers below</a:t>
             </a:r>
           </a:p>
-          <a:p>
-            <a:r>
-              <a:t>Source: 'Math Week 3'!A30:F30</a:t>
-            </a:r>
-          </a:p>
           <a:p/>
           <a:p>
             <a:r>
@@ -1407,11 +1287,6 @@
               <a:t>Materials/check: Notebook / error log</a:t>
             </a:r>
           </a:p>
-          <a:p>
-            <a:r>
-              <a:t>Source: 'Math Week 3'!A31:F31</a:t>
-            </a:r>
-          </a:p>
           <a:p/>
           <a:p>
             <a:r>
@@ -1432,17 +1307,12 @@
           <a:p/>
           <a:p>
             <a:r>
-              <a:t>Sources: 'Math Week 3'!A10:E10; 'Carpentry Schedule'!B27; 'Math Week 3'!A19</a:t>
-            </a:r>
-          </a:p>
-          <a:p>
-            <a:r>
-              <a:t>Navigation/resource slides support these scheduled steps and do not add instructional time.</a:t>
-            </a:r>
-          </a:p>
-          <a:p>
-            <a:r>
-              <a:t>SLIDE PLACEMENT: Start, 12:45 PM–12:50 PM. All slides with this phase share these 5 minutes; do not restart the time allocation for each slide.</a:t>
+              <a:t>Keep activities within the allocated phase time.</a:t>
+            </a:r>
+          </a:p>
+          <a:p>
+            <a:r>
+              <a:t>PHASE TIMING: Start, 12:45 PM–12:50 PM. All slides with this phase share these 5 minutes; do not restart the time allocation for each slide.</a:t>
             </a:r>
           </a:p>
         </p:txBody>
@@ -1571,11 +1441,6 @@
               <a:t>Materials/check: Notebook; calculator</a:t>
             </a:r>
           </a:p>
-          <a:p>
-            <a:r>
-              <a:t>Source: 'Math Week 3'!A25:F25</a:t>
-            </a:r>
-          </a:p>
           <a:p/>
           <a:p>
             <a:r>
@@ -1597,11 +1462,6 @@
               <a:t>Materials/check: Identify support needs</a:t>
             </a:r>
           </a:p>
-          <a:p>
-            <a:r>
-              <a:t>Source: 'Math Week 3'!A26:F26</a:t>
-            </a:r>
-          </a:p>
           <a:p/>
           <a:p>
             <a:r>
@@ -1623,11 +1483,6 @@
               <a:t>Materials/check: Textbook; worked example</a:t>
             </a:r>
           </a:p>
-          <a:p>
-            <a:r>
-              <a:t>Source: 'Math Week 3'!A27:F27</a:t>
-            </a:r>
-          </a:p>
           <a:p/>
           <a:p>
             <a:r>
@@ -1649,11 +1504,6 @@
               <a:t>Materials/check: Exercise Book; tool above</a:t>
             </a:r>
           </a:p>
-          <a:p>
-            <a:r>
-              <a:t>Source: 'Math Week 3'!A28:F28</a:t>
-            </a:r>
-          </a:p>
           <a:p/>
           <a:p>
             <a:r>
@@ -1675,11 +1525,6 @@
               <a:t>Materials/check: Paper first; tool second</a:t>
             </a:r>
           </a:p>
-          <a:p>
-            <a:r>
-              <a:t>Source: 'Math Week 3'!A29:F29</a:t>
-            </a:r>
-          </a:p>
           <a:p/>
           <a:p>
             <a:r>
@@ -1701,11 +1546,6 @@
               <a:t>Materials/check: Teacher answers below</a:t>
             </a:r>
           </a:p>
-          <a:p>
-            <a:r>
-              <a:t>Source: 'Math Week 3'!A30:F30</a:t>
-            </a:r>
-          </a:p>
           <a:p/>
           <a:p>
             <a:r>
@@ -1727,11 +1567,6 @@
               <a:t>Materials/check: Notebook / error log</a:t>
             </a:r>
           </a:p>
-          <a:p>
-            <a:r>
-              <a:t>Source: 'Math Week 3'!A31:F31</a:t>
-            </a:r>
-          </a:p>
           <a:p/>
           <a:p>
             <a:r>
@@ -1752,17 +1587,12 @@
           <a:p/>
           <a:p>
             <a:r>
-              <a:t>Sources: 'Math Week 3'!A10:E10; 'Carpentry Schedule'!B27; 'Math Week 3'!A19</a:t>
-            </a:r>
-          </a:p>
-          <a:p>
-            <a:r>
-              <a:t>Navigation/resource slides support these scheduled steps and do not add instructional time.</a:t>
-            </a:r>
-          </a:p>
-          <a:p>
-            <a:r>
-              <a:t>SLIDE PLACEMENT: Recall, 12:50 PM–12:55 PM. All slides with this phase share these 5 minutes; do not restart the time allocation for each slide.</a:t>
+              <a:t>Keep activities within the allocated phase time.</a:t>
+            </a:r>
+          </a:p>
+          <a:p>
+            <a:r>
+              <a:t>PHASE TIMING: Recall, 12:50 PM–12:55 PM. All slides with this phase share these 5 minutes; do not restart the time allocation for each slide.</a:t>
             </a:r>
           </a:p>
         </p:txBody>
@@ -1891,11 +1721,6 @@
               <a:t>Materials/check: Notebook; calculator</a:t>
             </a:r>
           </a:p>
-          <a:p>
-            <a:r>
-              <a:t>Source: 'Math Week 3'!A25:F25</a:t>
-            </a:r>
-          </a:p>
           <a:p/>
           <a:p>
             <a:r>
@@ -1917,11 +1742,6 @@
               <a:t>Materials/check: Identify support needs</a:t>
             </a:r>
           </a:p>
-          <a:p>
-            <a:r>
-              <a:t>Source: 'Math Week 3'!A26:F26</a:t>
-            </a:r>
-          </a:p>
           <a:p/>
           <a:p>
             <a:r>
@@ -1943,11 +1763,6 @@
               <a:t>Materials/check: Textbook; worked example</a:t>
             </a:r>
           </a:p>
-          <a:p>
-            <a:r>
-              <a:t>Source: 'Math Week 3'!A27:F27</a:t>
-            </a:r>
-          </a:p>
           <a:p/>
           <a:p>
             <a:r>
@@ -1969,11 +1784,6 @@
               <a:t>Materials/check: Exercise Book; tool above</a:t>
             </a:r>
           </a:p>
-          <a:p>
-            <a:r>
-              <a:t>Source: 'Math Week 3'!A28:F28</a:t>
-            </a:r>
-          </a:p>
           <a:p/>
           <a:p>
             <a:r>
@@ -1995,11 +1805,6 @@
               <a:t>Materials/check: Paper first; tool second</a:t>
             </a:r>
           </a:p>
-          <a:p>
-            <a:r>
-              <a:t>Source: 'Math Week 3'!A29:F29</a:t>
-            </a:r>
-          </a:p>
           <a:p/>
           <a:p>
             <a:r>
@@ -2021,11 +1826,6 @@
               <a:t>Materials/check: Teacher answers below</a:t>
             </a:r>
           </a:p>
-          <a:p>
-            <a:r>
-              <a:t>Source: 'Math Week 3'!A30:F30</a:t>
-            </a:r>
-          </a:p>
           <a:p/>
           <a:p>
             <a:r>
@@ -2047,11 +1847,6 @@
               <a:t>Materials/check: Notebook / error log</a:t>
             </a:r>
           </a:p>
-          <a:p>
-            <a:r>
-              <a:t>Source: 'Math Week 3'!A31:F31</a:t>
-            </a:r>
-          </a:p>
           <a:p/>
           <a:p>
             <a:r>
@@ -2072,48 +1867,23 @@
           <a:p/>
           <a:p>
             <a:r>
-              <a:t>Sources: 'Math Week 3'!A10:E10; 'Carpentry Schedule'!B27; 'Math Week 3'!A19</a:t>
-            </a:r>
-          </a:p>
-          <a:p>
-            <a:r>
-              <a:t>Navigation/resource slides support these scheduled steps and do not add instructional time.</a:t>
-            </a:r>
-          </a:p>
-          <a:p>
-            <a:r>
-              <a:t>SLIDE PLACEMENT: Teach, 12:55 PM–1:10 PM. All slides with this phase share these 15 minutes; do not restart the time allocation for each slide.</a:t>
-            </a:r>
-          </a:p>
-          <a:p/>
-          <a:p>
-            <a:r>
-              <a:t>Teaching content sources:</a:t>
-            </a:r>
-          </a:p>
-          <a:p>
-            <a:r>
-              <a:t>'Math Week 3'!A19</a:t>
-            </a:r>
-          </a:p>
-          <a:p>
-            <a:r>
-              <a:t>'Math Week 3'!B21</a:t>
-            </a:r>
-          </a:p>
-          <a:p>
-            <a:r>
-              <a:t>'Math Week 3'!B23</a:t>
+              <a:t>Keep activities within the allocated phase time.</a:t>
+            </a:r>
+          </a:p>
+          <a:p>
+            <a:r>
+              <a:t>PHASE TIMING: Teach, 12:55 PM–1:10 PM. All slides with this phase share these 15 minutes; do not restart the time allocation for each slide.</a:t>
+            </a:r>
+          </a:p>
+          <a:p/>
+          <a:p>
+            <a:r>
+              <a:t>Teaching references:</a:t>
             </a:r>
           </a:p>
           <a:p>
             <a:r>
               <a:t>Textbook Chapter 4 pp.59–66</a:t>
-            </a:r>
-          </a:p>
-          <a:p>
-            <a:r>
-              <a:t>ACCESS CARPENTRY SLIDES.pptx slides 48–50</a:t>
             </a:r>
           </a:p>
           <a:p>
@@ -2247,11 +2017,6 @@
               <a:t>Materials/check: Notebook; calculator</a:t>
             </a:r>
           </a:p>
-          <a:p>
-            <a:r>
-              <a:t>Source: 'Math Week 3'!A25:F25</a:t>
-            </a:r>
-          </a:p>
           <a:p/>
           <a:p>
             <a:r>
@@ -2273,11 +2038,6 @@
               <a:t>Materials/check: Identify support needs</a:t>
             </a:r>
           </a:p>
-          <a:p>
-            <a:r>
-              <a:t>Source: 'Math Week 3'!A26:F26</a:t>
-            </a:r>
-          </a:p>
           <a:p/>
           <a:p>
             <a:r>
@@ -2299,11 +2059,6 @@
               <a:t>Materials/check: Textbook; worked example</a:t>
             </a:r>
           </a:p>
-          <a:p>
-            <a:r>
-              <a:t>Source: 'Math Week 3'!A27:F27</a:t>
-            </a:r>
-          </a:p>
           <a:p/>
           <a:p>
             <a:r>
@@ -2325,11 +2080,6 @@
               <a:t>Materials/check: Exercise Book; tool above</a:t>
             </a:r>
           </a:p>
-          <a:p>
-            <a:r>
-              <a:t>Source: 'Math Week 3'!A28:F28</a:t>
-            </a:r>
-          </a:p>
           <a:p/>
           <a:p>
             <a:r>
@@ -2351,11 +2101,6 @@
               <a:t>Materials/check: Paper first; tool second</a:t>
             </a:r>
           </a:p>
-          <a:p>
-            <a:r>
-              <a:t>Source: 'Math Week 3'!A29:F29</a:t>
-            </a:r>
-          </a:p>
           <a:p/>
           <a:p>
             <a:r>
@@ -2377,11 +2122,6 @@
               <a:t>Materials/check: Teacher answers below</a:t>
             </a:r>
           </a:p>
-          <a:p>
-            <a:r>
-              <a:t>Source: 'Math Week 3'!A30:F30</a:t>
-            </a:r>
-          </a:p>
           <a:p/>
           <a:p>
             <a:r>
@@ -2403,11 +2143,6 @@
               <a:t>Materials/check: Notebook / error log</a:t>
             </a:r>
           </a:p>
-          <a:p>
-            <a:r>
-              <a:t>Source: 'Math Week 3'!A31:F31</a:t>
-            </a:r>
-          </a:p>
           <a:p/>
           <a:p>
             <a:r>
@@ -2428,48 +2163,23 @@
           <a:p/>
           <a:p>
             <a:r>
-              <a:t>Sources: 'Math Week 3'!A10:E10; 'Carpentry Schedule'!B27; 'Math Week 3'!A19</a:t>
-            </a:r>
-          </a:p>
-          <a:p>
-            <a:r>
-              <a:t>Navigation/resource slides support these scheduled steps and do not add instructional time.</a:t>
-            </a:r>
-          </a:p>
-          <a:p>
-            <a:r>
-              <a:t>SLIDE PLACEMENT: Teach, 12:55 PM–1:10 PM. All slides with this phase share these 15 minutes; do not restart the time allocation for each slide.</a:t>
-            </a:r>
-          </a:p>
-          <a:p/>
-          <a:p>
-            <a:r>
-              <a:t>Teaching content sources:</a:t>
-            </a:r>
-          </a:p>
-          <a:p>
-            <a:r>
-              <a:t>'Math Week 3'!A19</a:t>
-            </a:r>
-          </a:p>
-          <a:p>
-            <a:r>
-              <a:t>'Math Week 3'!B21</a:t>
-            </a:r>
-          </a:p>
-          <a:p>
-            <a:r>
-              <a:t>'Math Week 3'!B23</a:t>
+              <a:t>Keep activities within the allocated phase time.</a:t>
+            </a:r>
+          </a:p>
+          <a:p>
+            <a:r>
+              <a:t>PHASE TIMING: Teach, 12:55 PM–1:10 PM. All slides with this phase share these 15 minutes; do not restart the time allocation for each slide.</a:t>
+            </a:r>
+          </a:p>
+          <a:p/>
+          <a:p>
+            <a:r>
+              <a:t>Teaching references:</a:t>
             </a:r>
           </a:p>
           <a:p>
             <a:r>
               <a:t>Textbook Chapter 4 pp.59–66</a:t>
-            </a:r>
-          </a:p>
-          <a:p>
-            <a:r>
-              <a:t>ACCESS CARPENTRY SLIDES.pptx slides 48–50</a:t>
             </a:r>
           </a:p>
           <a:p>
@@ -2603,11 +2313,6 @@
               <a:t>Materials/check: Notebook; calculator</a:t>
             </a:r>
           </a:p>
-          <a:p>
-            <a:r>
-              <a:t>Source: 'Math Week 3'!A25:F25</a:t>
-            </a:r>
-          </a:p>
           <a:p/>
           <a:p>
             <a:r>
@@ -2629,11 +2334,6 @@
               <a:t>Materials/check: Identify support needs</a:t>
             </a:r>
           </a:p>
-          <a:p>
-            <a:r>
-              <a:t>Source: 'Math Week 3'!A26:F26</a:t>
-            </a:r>
-          </a:p>
           <a:p/>
           <a:p>
             <a:r>
@@ -2655,11 +2355,6 @@
               <a:t>Materials/check: Textbook; worked example</a:t>
             </a:r>
           </a:p>
-          <a:p>
-            <a:r>
-              <a:t>Source: 'Math Week 3'!A27:F27</a:t>
-            </a:r>
-          </a:p>
           <a:p/>
           <a:p>
             <a:r>
@@ -2681,11 +2376,6 @@
               <a:t>Materials/check: Exercise Book; tool above</a:t>
             </a:r>
           </a:p>
-          <a:p>
-            <a:r>
-              <a:t>Source: 'Math Week 3'!A28:F28</a:t>
-            </a:r>
-          </a:p>
           <a:p/>
           <a:p>
             <a:r>
@@ -2707,11 +2397,6 @@
               <a:t>Materials/check: Paper first; tool second</a:t>
             </a:r>
           </a:p>
-          <a:p>
-            <a:r>
-              <a:t>Source: 'Math Week 3'!A29:F29</a:t>
-            </a:r>
-          </a:p>
           <a:p/>
           <a:p>
             <a:r>
@@ -2733,11 +2418,6 @@
               <a:t>Materials/check: Teacher answers below</a:t>
             </a:r>
           </a:p>
-          <a:p>
-            <a:r>
-              <a:t>Source: 'Math Week 3'!A30:F30</a:t>
-            </a:r>
-          </a:p>
           <a:p/>
           <a:p>
             <a:r>
@@ -2759,11 +2439,6 @@
               <a:t>Materials/check: Notebook / error log</a:t>
             </a:r>
           </a:p>
-          <a:p>
-            <a:r>
-              <a:t>Source: 'Math Week 3'!A31:F31</a:t>
-            </a:r>
-          </a:p>
           <a:p/>
           <a:p>
             <a:r>
@@ -2784,17 +2459,12 @@
           <a:p/>
           <a:p>
             <a:r>
-              <a:t>Sources: 'Math Week 3'!A10:E10; 'Carpentry Schedule'!B27; 'Math Week 3'!A19</a:t>
-            </a:r>
-          </a:p>
-          <a:p>
-            <a:r>
-              <a:t>Navigation/resource slides support these scheduled steps and do not add instructional time.</a:t>
-            </a:r>
-          </a:p>
-          <a:p>
-            <a:r>
-              <a:t>SLIDE PLACEMENT: Teach, 12:55 PM–1:10 PM. All slides with this phase share these 15 minutes; do not restart the time allocation for each slide.</a:t>
+              <a:t>Keep activities within the allocated phase time.</a:t>
+            </a:r>
+          </a:p>
+          <a:p>
+            <a:r>
+              <a:t>PHASE TIMING: Teach, 12:55 PM–1:10 PM. All slides with this phase share these 15 minutes; do not restart the time allocation for each slide.</a:t>
             </a:r>
           </a:p>
           <a:p/>
@@ -2805,7 +2475,7 @@
           </a:p>
           <a:p>
             <a:r>
-              <a:t>Exact PDF/printed page: 65. Excerpt reproduced from the supplied ACCESS Textbook.</a:t>
+              <a:t>Exact PDF/printed page: 65. ACCESS Textbook excerpt.</a:t>
             </a:r>
           </a:p>
           <a:p>
@@ -2939,11 +2609,6 @@
               <a:t>Materials/check: Notebook; calculator</a:t>
             </a:r>
           </a:p>
-          <a:p>
-            <a:r>
-              <a:t>Source: 'Math Week 3'!A25:F25</a:t>
-            </a:r>
-          </a:p>
           <a:p/>
           <a:p>
             <a:r>
@@ -2965,11 +2630,6 @@
               <a:t>Materials/check: Identify support needs</a:t>
             </a:r>
           </a:p>
-          <a:p>
-            <a:r>
-              <a:t>Source: 'Math Week 3'!A26:F26</a:t>
-            </a:r>
-          </a:p>
           <a:p/>
           <a:p>
             <a:r>
@@ -2991,11 +2651,6 @@
               <a:t>Materials/check: Textbook; worked example</a:t>
             </a:r>
           </a:p>
-          <a:p>
-            <a:r>
-              <a:t>Source: 'Math Week 3'!A27:F27</a:t>
-            </a:r>
-          </a:p>
           <a:p/>
           <a:p>
             <a:r>
@@ -3017,11 +2672,6 @@
               <a:t>Materials/check: Exercise Book; tool above</a:t>
             </a:r>
           </a:p>
-          <a:p>
-            <a:r>
-              <a:t>Source: 'Math Week 3'!A28:F28</a:t>
-            </a:r>
-          </a:p>
           <a:p/>
           <a:p>
             <a:r>
@@ -3043,11 +2693,6 @@
               <a:t>Materials/check: Paper first; tool second</a:t>
             </a:r>
           </a:p>
-          <a:p>
-            <a:r>
-              <a:t>Source: 'Math Week 3'!A29:F29</a:t>
-            </a:r>
-          </a:p>
           <a:p/>
           <a:p>
             <a:r>
@@ -3069,11 +2714,6 @@
               <a:t>Materials/check: Teacher answers below</a:t>
             </a:r>
           </a:p>
-          <a:p>
-            <a:r>
-              <a:t>Source: 'Math Week 3'!A30:F30</a:t>
-            </a:r>
-          </a:p>
           <a:p/>
           <a:p>
             <a:r>
@@ -3095,11 +2735,6 @@
               <a:t>Materials/check: Notebook / error log</a:t>
             </a:r>
           </a:p>
-          <a:p>
-            <a:r>
-              <a:t>Source: 'Math Week 3'!A31:F31</a:t>
-            </a:r>
-          </a:p>
           <a:p/>
           <a:p>
             <a:r>
@@ -3120,17 +2755,12 @@
           <a:p/>
           <a:p>
             <a:r>
-              <a:t>Sources: 'Math Week 3'!A10:E10; 'Carpentry Schedule'!B27; 'Math Week 3'!A19</a:t>
-            </a:r>
-          </a:p>
-          <a:p>
-            <a:r>
-              <a:t>Navigation/resource slides support these scheduled steps and do not add instructional time.</a:t>
-            </a:r>
-          </a:p>
-          <a:p>
-            <a:r>
-              <a:t>SLIDE PLACEMENT: Teach, 12:55 PM–1:10 PM. All slides with this phase share these 15 minutes; do not restart the time allocation for each slide.</a:t>
+              <a:t>Keep activities within the allocated phase time.</a:t>
+            </a:r>
+          </a:p>
+          <a:p>
+            <a:r>
+              <a:t>PHASE TIMING: Teach, 12:55 PM–1:10 PM. All slides with this phase share these 15 minutes; do not restart the time allocation for each slide.</a:t>
             </a:r>
           </a:p>
           <a:p/>
@@ -3141,7 +2771,7 @@
           </a:p>
           <a:p>
             <a:r>
-              <a:t>Exact PDF/printed page: 65. Excerpt reproduced from the supplied ACCESS Textbook.</a:t>
+              <a:t>Exact PDF/printed page: 65. ACCESS Textbook excerpt.</a:t>
             </a:r>
           </a:p>
           <a:p>
@@ -3275,11 +2905,6 @@
               <a:t>Materials/check: Notebook; calculator</a:t>
             </a:r>
           </a:p>
-          <a:p>
-            <a:r>
-              <a:t>Source: 'Math Week 3'!A25:F25</a:t>
-            </a:r>
-          </a:p>
           <a:p/>
           <a:p>
             <a:r>
@@ -3301,11 +2926,6 @@
               <a:t>Materials/check: Identify support needs</a:t>
             </a:r>
           </a:p>
-          <a:p>
-            <a:r>
-              <a:t>Source: 'Math Week 3'!A26:F26</a:t>
-            </a:r>
-          </a:p>
           <a:p/>
           <a:p>
             <a:r>
@@ -3327,11 +2947,6 @@
               <a:t>Materials/check: Textbook; worked example</a:t>
             </a:r>
           </a:p>
-          <a:p>
-            <a:r>
-              <a:t>Source: 'Math Week 3'!A27:F27</a:t>
-            </a:r>
-          </a:p>
           <a:p/>
           <a:p>
             <a:r>
@@ -3353,11 +2968,6 @@
               <a:t>Materials/check: Exercise Book; tool above</a:t>
             </a:r>
           </a:p>
-          <a:p>
-            <a:r>
-              <a:t>Source: 'Math Week 3'!A28:F28</a:t>
-            </a:r>
-          </a:p>
           <a:p/>
           <a:p>
             <a:r>
@@ -3379,11 +2989,6 @@
               <a:t>Materials/check: Paper first; tool second</a:t>
             </a:r>
           </a:p>
-          <a:p>
-            <a:r>
-              <a:t>Source: 'Math Week 3'!A29:F29</a:t>
-            </a:r>
-          </a:p>
           <a:p/>
           <a:p>
             <a:r>
@@ -3405,11 +3010,6 @@
               <a:t>Materials/check: Teacher answers below</a:t>
             </a:r>
           </a:p>
-          <a:p>
-            <a:r>
-              <a:t>Source: 'Math Week 3'!A30:F30</a:t>
-            </a:r>
-          </a:p>
           <a:p/>
           <a:p>
             <a:r>
@@ -3431,11 +3031,6 @@
               <a:t>Materials/check: Notebook / error log</a:t>
             </a:r>
           </a:p>
-          <a:p>
-            <a:r>
-              <a:t>Source: 'Math Week 3'!A31:F31</a:t>
-            </a:r>
-          </a:p>
           <a:p/>
           <a:p>
             <a:r>
@@ -3456,17 +3051,12 @@
           <a:p/>
           <a:p>
             <a:r>
-              <a:t>Sources: 'Math Week 3'!A10:E10; 'Carpentry Schedule'!B27; 'Math Week 3'!A19</a:t>
-            </a:r>
-          </a:p>
-          <a:p>
-            <a:r>
-              <a:t>Navigation/resource slides support these scheduled steps and do not add instructional time.</a:t>
-            </a:r>
-          </a:p>
-          <a:p>
-            <a:r>
-              <a:t>SLIDE PLACEMENT: Teach, 12:55 PM–1:10 PM. All slides with this phase share these 15 minutes; do not restart the time allocation for each slide.</a:t>
+              <a:t>Keep activities within the allocated phase time.</a:t>
+            </a:r>
+          </a:p>
+          <a:p>
+            <a:r>
+              <a:t>PHASE TIMING: Teach, 12:55 PM–1:10 PM. All slides with this phase share these 15 minutes; do not restart the time allocation for each slide.</a:t>
             </a:r>
           </a:p>
           <a:p/>
@@ -3601,11 +3191,6 @@
               <a:t>Materials/check: Notebook; calculator</a:t>
             </a:r>
           </a:p>
-          <a:p>
-            <a:r>
-              <a:t>Source: 'Math Week 3'!A25:F25</a:t>
-            </a:r>
-          </a:p>
           <a:p/>
           <a:p>
             <a:r>
@@ -3627,11 +3212,6 @@
               <a:t>Materials/check: Identify support needs</a:t>
             </a:r>
           </a:p>
-          <a:p>
-            <a:r>
-              <a:t>Source: 'Math Week 3'!A26:F26</a:t>
-            </a:r>
-          </a:p>
           <a:p/>
           <a:p>
             <a:r>
@@ -3653,11 +3233,6 @@
               <a:t>Materials/check: Textbook; worked example</a:t>
             </a:r>
           </a:p>
-          <a:p>
-            <a:r>
-              <a:t>Source: 'Math Week 3'!A27:F27</a:t>
-            </a:r>
-          </a:p>
           <a:p/>
           <a:p>
             <a:r>
@@ -3679,11 +3254,6 @@
               <a:t>Materials/check: Exercise Book; tool above</a:t>
             </a:r>
           </a:p>
-          <a:p>
-            <a:r>
-              <a:t>Source: 'Math Week 3'!A28:F28</a:t>
-            </a:r>
-          </a:p>
           <a:p/>
           <a:p>
             <a:r>
@@ -3705,11 +3275,6 @@
               <a:t>Materials/check: Paper first; tool second</a:t>
             </a:r>
           </a:p>
-          <a:p>
-            <a:r>
-              <a:t>Source: 'Math Week 3'!A29:F29</a:t>
-            </a:r>
-          </a:p>
           <a:p/>
           <a:p>
             <a:r>
@@ -3731,11 +3296,6 @@
               <a:t>Materials/check: Teacher answers below</a:t>
             </a:r>
           </a:p>
-          <a:p>
-            <a:r>
-              <a:t>Source: 'Math Week 3'!A30:F30</a:t>
-            </a:r>
-          </a:p>
           <a:p/>
           <a:p>
             <a:r>
@@ -3757,11 +3317,6 @@
               <a:t>Materials/check: Notebook / error log</a:t>
             </a:r>
           </a:p>
-          <a:p>
-            <a:r>
-              <a:t>Source: 'Math Week 3'!A31:F31</a:t>
-            </a:r>
-          </a:p>
           <a:p/>
           <a:p>
             <a:r>
@@ -3782,17 +3337,12 @@
           <a:p/>
           <a:p>
             <a:r>
-              <a:t>Sources: 'Math Week 3'!A10:E10; 'Carpentry Schedule'!B27; 'Math Week 3'!A19</a:t>
-            </a:r>
-          </a:p>
-          <a:p>
-            <a:r>
-              <a:t>Navigation/resource slides support these scheduled steps and do not add instructional time.</a:t>
-            </a:r>
-          </a:p>
-          <a:p>
-            <a:r>
-              <a:t>SLIDE PLACEMENT: Together, 1:10 PM–1:25 PM. All slides with this phase share these 15 minutes; do not restart the time allocation for each slide.</a:t>
+              <a:t>Keep activities within the allocated phase time.</a:t>
+            </a:r>
+          </a:p>
+          <a:p>
+            <a:r>
+              <a:t>PHASE TIMING: Together, 1:10 PM–1:25 PM. All slides with this phase share these 15 minutes; do not restart the time allocation for each slide.</a:t>
             </a:r>
           </a:p>
         </p:txBody>
@@ -3921,11 +3471,6 @@
               <a:t>Materials/check: Notebook; calculator</a:t>
             </a:r>
           </a:p>
-          <a:p>
-            <a:r>
-              <a:t>Source: 'Math Week 3'!A25:F25</a:t>
-            </a:r>
-          </a:p>
           <a:p/>
           <a:p>
             <a:r>
@@ -3947,11 +3492,6 @@
               <a:t>Materials/check: Identify support needs</a:t>
             </a:r>
           </a:p>
-          <a:p>
-            <a:r>
-              <a:t>Source: 'Math Week 3'!A26:F26</a:t>
-            </a:r>
-          </a:p>
           <a:p/>
           <a:p>
             <a:r>
@@ -3973,11 +3513,6 @@
               <a:t>Materials/check: Textbook; worked example</a:t>
             </a:r>
           </a:p>
-          <a:p>
-            <a:r>
-              <a:t>Source: 'Math Week 3'!A27:F27</a:t>
-            </a:r>
-          </a:p>
           <a:p/>
           <a:p>
             <a:r>
@@ -3999,11 +3534,6 @@
               <a:t>Materials/check: Exercise Book; tool above</a:t>
             </a:r>
           </a:p>
-          <a:p>
-            <a:r>
-              <a:t>Source: 'Math Week 3'!A28:F28</a:t>
-            </a:r>
-          </a:p>
           <a:p/>
           <a:p>
             <a:r>
@@ -4025,11 +3555,6 @@
               <a:t>Materials/check: Paper first; tool second</a:t>
             </a:r>
           </a:p>
-          <a:p>
-            <a:r>
-              <a:t>Source: 'Math Week 3'!A29:F29</a:t>
-            </a:r>
-          </a:p>
           <a:p/>
           <a:p>
             <a:r>
@@ -4051,11 +3576,6 @@
               <a:t>Materials/check: Teacher answers below</a:t>
             </a:r>
           </a:p>
-          <a:p>
-            <a:r>
-              <a:t>Source: 'Math Week 3'!A30:F30</a:t>
-            </a:r>
-          </a:p>
           <a:p/>
           <a:p>
             <a:r>
@@ -4077,11 +3597,6 @@
               <a:t>Materials/check: Notebook / error log</a:t>
             </a:r>
           </a:p>
-          <a:p>
-            <a:r>
-              <a:t>Source: 'Math Week 3'!A31:F31</a:t>
-            </a:r>
-          </a:p>
           <a:p/>
           <a:p>
             <a:r>
@@ -4102,17 +3617,12 @@
           <a:p/>
           <a:p>
             <a:r>
-              <a:t>Sources: 'Math Week 3'!A10:E10; 'Carpentry Schedule'!B27; 'Math Week 3'!A19</a:t>
-            </a:r>
-          </a:p>
-          <a:p>
-            <a:r>
-              <a:t>Navigation/resource slides support these scheduled steps and do not add instructional time.</a:t>
-            </a:r>
-          </a:p>
-          <a:p>
-            <a:r>
-              <a:t>SLIDE PLACEMENT: Together, 1:10 PM–1:25 PM. All slides with this phase share these 15 minutes; do not restart the time allocation for each slide.</a:t>
+              <a:t>Keep activities within the allocated phase time.</a:t>
+            </a:r>
+          </a:p>
+          <a:p>
+            <a:r>
+              <a:t>PHASE TIMING: Together, 1:10 PM–1:25 PM. All slides with this phase share these 15 minutes; do not restart the time allocation for each slide.</a:t>
             </a:r>
           </a:p>
           <a:p/>
@@ -4267,11 +3777,6 @@
               <a:t>Materials/check: Notebook; calculator</a:t>
             </a:r>
           </a:p>
-          <a:p>
-            <a:r>
-              <a:t>Source: 'Math Week 3'!A25:F25</a:t>
-            </a:r>
-          </a:p>
           <a:p/>
           <a:p>
             <a:r>
@@ -4293,11 +3798,6 @@
               <a:t>Materials/check: Identify support needs</a:t>
             </a:r>
           </a:p>
-          <a:p>
-            <a:r>
-              <a:t>Source: 'Math Week 3'!A26:F26</a:t>
-            </a:r>
-          </a:p>
           <a:p/>
           <a:p>
             <a:r>
@@ -4319,11 +3819,6 @@
               <a:t>Materials/check: Textbook; worked example</a:t>
             </a:r>
           </a:p>
-          <a:p>
-            <a:r>
-              <a:t>Source: 'Math Week 3'!A27:F27</a:t>
-            </a:r>
-          </a:p>
           <a:p/>
           <a:p>
             <a:r>
@@ -4345,11 +3840,6 @@
               <a:t>Materials/check: Exercise Book; tool above</a:t>
             </a:r>
           </a:p>
-          <a:p>
-            <a:r>
-              <a:t>Source: 'Math Week 3'!A28:F28</a:t>
-            </a:r>
-          </a:p>
           <a:p/>
           <a:p>
             <a:r>
@@ -4371,11 +3861,6 @@
               <a:t>Materials/check: Paper first; tool second</a:t>
             </a:r>
           </a:p>
-          <a:p>
-            <a:r>
-              <a:t>Source: 'Math Week 3'!A29:F29</a:t>
-            </a:r>
-          </a:p>
           <a:p/>
           <a:p>
             <a:r>
@@ -4397,11 +3882,6 @@
               <a:t>Materials/check: Teacher answers below</a:t>
             </a:r>
           </a:p>
-          <a:p>
-            <a:r>
-              <a:t>Source: 'Math Week 3'!A30:F30</a:t>
-            </a:r>
-          </a:p>
           <a:p/>
           <a:p>
             <a:r>
@@ -4423,11 +3903,6 @@
               <a:t>Materials/check: Notebook / error log</a:t>
             </a:r>
           </a:p>
-          <a:p>
-            <a:r>
-              <a:t>Source: 'Math Week 3'!A31:F31</a:t>
-            </a:r>
-          </a:p>
           <a:p/>
           <a:p>
             <a:r>
@@ -4448,17 +3923,12 @@
           <a:p/>
           <a:p>
             <a:r>
-              <a:t>Sources: 'Math Week 3'!A10:E10; 'Carpentry Schedule'!B27; 'Math Week 3'!A19</a:t>
-            </a:r>
-          </a:p>
-          <a:p>
-            <a:r>
-              <a:t>Navigation/resource slides support these scheduled steps and do not add instructional time.</a:t>
-            </a:r>
-          </a:p>
-          <a:p>
-            <a:r>
-              <a:t>SLIDE PLACEMENT: Together, 1:10 PM–1:25 PM. All slides with this phase share these 15 minutes; do not restart the time allocation for each slide.</a:t>
+              <a:t>Keep activities within the allocated phase time.</a:t>
+            </a:r>
+          </a:p>
+          <a:p>
+            <a:r>
+              <a:t>PHASE TIMING: Together, 1:10 PM–1:25 PM. All slides with this phase share these 15 minutes; do not restart the time allocation for each slide.</a:t>
             </a:r>
           </a:p>
           <a:p/>
@@ -4613,11 +4083,6 @@
               <a:t>Materials/check: Notebook; calculator</a:t>
             </a:r>
           </a:p>
-          <a:p>
-            <a:r>
-              <a:t>Source: 'Math Week 3'!A25:F25</a:t>
-            </a:r>
-          </a:p>
           <a:p/>
           <a:p>
             <a:r>
@@ -4639,11 +4104,6 @@
               <a:t>Materials/check: Identify support needs</a:t>
             </a:r>
           </a:p>
-          <a:p>
-            <a:r>
-              <a:t>Source: 'Math Week 3'!A26:F26</a:t>
-            </a:r>
-          </a:p>
           <a:p/>
           <a:p>
             <a:r>
@@ -4665,11 +4125,6 @@
               <a:t>Materials/check: Textbook; worked example</a:t>
             </a:r>
           </a:p>
-          <a:p>
-            <a:r>
-              <a:t>Source: 'Math Week 3'!A27:F27</a:t>
-            </a:r>
-          </a:p>
           <a:p/>
           <a:p>
             <a:r>
@@ -4691,11 +4146,6 @@
               <a:t>Materials/check: Exercise Book; tool above</a:t>
             </a:r>
           </a:p>
-          <a:p>
-            <a:r>
-              <a:t>Source: 'Math Week 3'!A28:F28</a:t>
-            </a:r>
-          </a:p>
           <a:p/>
           <a:p>
             <a:r>
@@ -4717,11 +4167,6 @@
               <a:t>Materials/check: Paper first; tool second</a:t>
             </a:r>
           </a:p>
-          <a:p>
-            <a:r>
-              <a:t>Source: 'Math Week 3'!A29:F29</a:t>
-            </a:r>
-          </a:p>
           <a:p/>
           <a:p>
             <a:r>
@@ -4743,11 +4188,6 @@
               <a:t>Materials/check: Teacher answers below</a:t>
             </a:r>
           </a:p>
-          <a:p>
-            <a:r>
-              <a:t>Source: 'Math Week 3'!A30:F30</a:t>
-            </a:r>
-          </a:p>
           <a:p/>
           <a:p>
             <a:r>
@@ -4769,11 +4209,6 @@
               <a:t>Materials/check: Notebook / error log</a:t>
             </a:r>
           </a:p>
-          <a:p>
-            <a:r>
-              <a:t>Source: 'Math Week 3'!A31:F31</a:t>
-            </a:r>
-          </a:p>
           <a:p/>
           <a:p>
             <a:r>
@@ -4794,17 +4229,12 @@
           <a:p/>
           <a:p>
             <a:r>
-              <a:t>Sources: 'Math Week 3'!A10:E10; 'Carpentry Schedule'!B27; 'Math Week 3'!A19</a:t>
-            </a:r>
-          </a:p>
-          <a:p>
-            <a:r>
-              <a:t>Navigation/resource slides support these scheduled steps and do not add instructional time.</a:t>
-            </a:r>
-          </a:p>
-          <a:p>
-            <a:r>
-              <a:t>SLIDE PLACEMENT: Practise, 1:25 PM–1:45 PM. All slides with this phase share these 20 minutes; do not restart the time allocation for each slide.</a:t>
+              <a:t>Keep activities within the allocated phase time.</a:t>
+            </a:r>
+          </a:p>
+          <a:p>
+            <a:r>
+              <a:t>PHASE TIMING: Practise, 1:25 PM–1:45 PM. All slides with this phase share these 20 minutes; do not restart the time allocation for each slide.</a:t>
             </a:r>
           </a:p>
         </p:txBody>
@@ -4933,11 +4363,6 @@
               <a:t>Materials/check: Notebook; calculator</a:t>
             </a:r>
           </a:p>
-          <a:p>
-            <a:r>
-              <a:t>Source: 'Math Week 3'!A25:F25</a:t>
-            </a:r>
-          </a:p>
           <a:p/>
           <a:p>
             <a:r>
@@ -4959,11 +4384,6 @@
               <a:t>Materials/check: Identify support needs</a:t>
             </a:r>
           </a:p>
-          <a:p>
-            <a:r>
-              <a:t>Source: 'Math Week 3'!A26:F26</a:t>
-            </a:r>
-          </a:p>
           <a:p/>
           <a:p>
             <a:r>
@@ -4985,11 +4405,6 @@
               <a:t>Materials/check: Textbook; worked example</a:t>
             </a:r>
           </a:p>
-          <a:p>
-            <a:r>
-              <a:t>Source: 'Math Week 3'!A27:F27</a:t>
-            </a:r>
-          </a:p>
           <a:p/>
           <a:p>
             <a:r>
@@ -5011,11 +4426,6 @@
               <a:t>Materials/check: Exercise Book; tool above</a:t>
             </a:r>
           </a:p>
-          <a:p>
-            <a:r>
-              <a:t>Source: 'Math Week 3'!A28:F28</a:t>
-            </a:r>
-          </a:p>
           <a:p/>
           <a:p>
             <a:r>
@@ -5037,11 +4447,6 @@
               <a:t>Materials/check: Paper first; tool second</a:t>
             </a:r>
           </a:p>
-          <a:p>
-            <a:r>
-              <a:t>Source: 'Math Week 3'!A29:F29</a:t>
-            </a:r>
-          </a:p>
           <a:p/>
           <a:p>
             <a:r>
@@ -5063,11 +4468,6 @@
               <a:t>Materials/check: Teacher answers below</a:t>
             </a:r>
           </a:p>
-          <a:p>
-            <a:r>
-              <a:t>Source: 'Math Week 3'!A30:F30</a:t>
-            </a:r>
-          </a:p>
           <a:p/>
           <a:p>
             <a:r>
@@ -5089,11 +4489,6 @@
               <a:t>Materials/check: Notebook / error log</a:t>
             </a:r>
           </a:p>
-          <a:p>
-            <a:r>
-              <a:t>Source: 'Math Week 3'!A31:F31</a:t>
-            </a:r>
-          </a:p>
           <a:p/>
           <a:p>
             <a:r>
@@ -5114,23 +4509,18 @@
           <a:p/>
           <a:p>
             <a:r>
-              <a:t>Sources: 'Math Week 3'!A10:E10; 'Carpentry Schedule'!B27; 'Math Week 3'!A19</a:t>
-            </a:r>
-          </a:p>
-          <a:p>
-            <a:r>
-              <a:t>Navigation/resource slides support these scheduled steps and do not add instructional time.</a:t>
-            </a:r>
-          </a:p>
-          <a:p>
-            <a:r>
-              <a:t>SLIDE PLACEMENT: Practise, 1:25 PM–1:45 PM. All slides with this phase share these 20 minutes; do not restart the time allocation for each slide.</a:t>
-            </a:r>
-          </a:p>
-          <a:p/>
-          <a:p>
-            <a:r>
-              <a:t>Live-tool screenshot, not an answer to the scheduled task. Open the resource link and follow the exact values in the assignment. Keep worked answers hidden until learners attempt the task. Screenshot illustrates navigation and occupies time within the same scheduled practice phase.</a:t>
+              <a:t>Keep activities within the allocated phase time.</a:t>
+            </a:r>
+          </a:p>
+          <a:p>
+            <a:r>
+              <a:t>PHASE TIMING: Practise, 1:25 PM–1:45 PM. All slides with this phase share these 20 minutes; do not restart the time allocation for each slide.</a:t>
+            </a:r>
+          </a:p>
+          <a:p/>
+          <a:p>
+            <a:r>
+              <a:t>Demonstrate navigation, then open the tool and use the assigned values. Keep worked answers hidden until learners attempt the task. Include this activity within the allocated practice time.</a:t>
             </a:r>
           </a:p>
         </p:txBody>
@@ -5259,11 +4649,6 @@
               <a:t>Materials/check: Notebook; calculator</a:t>
             </a:r>
           </a:p>
-          <a:p>
-            <a:r>
-              <a:t>Source: 'Math Week 3'!A25:F25</a:t>
-            </a:r>
-          </a:p>
           <a:p/>
           <a:p>
             <a:r>
@@ -5285,11 +4670,6 @@
               <a:t>Materials/check: Identify support needs</a:t>
             </a:r>
           </a:p>
-          <a:p>
-            <a:r>
-              <a:t>Source: 'Math Week 3'!A26:F26</a:t>
-            </a:r>
-          </a:p>
           <a:p/>
           <a:p>
             <a:r>
@@ -5311,11 +4691,6 @@
               <a:t>Materials/check: Textbook; worked example</a:t>
             </a:r>
           </a:p>
-          <a:p>
-            <a:r>
-              <a:t>Source: 'Math Week 3'!A27:F27</a:t>
-            </a:r>
-          </a:p>
           <a:p/>
           <a:p>
             <a:r>
@@ -5337,11 +4712,6 @@
               <a:t>Materials/check: Exercise Book; tool above</a:t>
             </a:r>
           </a:p>
-          <a:p>
-            <a:r>
-              <a:t>Source: 'Math Week 3'!A28:F28</a:t>
-            </a:r>
-          </a:p>
           <a:p/>
           <a:p>
             <a:r>
@@ -5363,11 +4733,6 @@
               <a:t>Materials/check: Paper first; tool second</a:t>
             </a:r>
           </a:p>
-          <a:p>
-            <a:r>
-              <a:t>Source: 'Math Week 3'!A29:F29</a:t>
-            </a:r>
-          </a:p>
           <a:p/>
           <a:p>
             <a:r>
@@ -5389,11 +4754,6 @@
               <a:t>Materials/check: Teacher answers below</a:t>
             </a:r>
           </a:p>
-          <a:p>
-            <a:r>
-              <a:t>Source: 'Math Week 3'!A30:F30</a:t>
-            </a:r>
-          </a:p>
           <a:p/>
           <a:p>
             <a:r>
@@ -5415,11 +4775,6 @@
               <a:t>Materials/check: Notebook / error log</a:t>
             </a:r>
           </a:p>
-          <a:p>
-            <a:r>
-              <a:t>Source: 'Math Week 3'!A31:F31</a:t>
-            </a:r>
-          </a:p>
           <a:p/>
           <a:p>
             <a:r>
@@ -5440,17 +4795,12 @@
           <a:p/>
           <a:p>
             <a:r>
-              <a:t>Sources: 'Math Week 3'!A10:E10; 'Carpentry Schedule'!B27; 'Math Week 3'!A19</a:t>
-            </a:r>
-          </a:p>
-          <a:p>
-            <a:r>
-              <a:t>Navigation/resource slides support these scheduled steps and do not add instructional time.</a:t>
-            </a:r>
-          </a:p>
-          <a:p>
-            <a:r>
-              <a:t>SLIDE PLACEMENT: Practise, 1:25 PM–1:45 PM. All slides with this phase share these 20 minutes; do not restart the time allocation for each slide.</a:t>
+              <a:t>Keep activities within the allocated phase time.</a:t>
+            </a:r>
+          </a:p>
+          <a:p>
+            <a:r>
+              <a:t>PHASE TIMING: Practise, 1:25 PM–1:45 PM. All slides with this phase share these 20 minutes; do not restart the time allocation for each slide.</a:t>
             </a:r>
           </a:p>
           <a:p/>
@@ -5600,11 +4950,6 @@
               <a:t>Materials/check: Notebook; calculator</a:t>
             </a:r>
           </a:p>
-          <a:p>
-            <a:r>
-              <a:t>Source: 'Math Week 3'!A25:F25</a:t>
-            </a:r>
-          </a:p>
           <a:p/>
           <a:p>
             <a:r>
@@ -5626,11 +4971,6 @@
               <a:t>Materials/check: Identify support needs</a:t>
             </a:r>
           </a:p>
-          <a:p>
-            <a:r>
-              <a:t>Source: 'Math Week 3'!A26:F26</a:t>
-            </a:r>
-          </a:p>
           <a:p/>
           <a:p>
             <a:r>
@@ -5652,11 +4992,6 @@
               <a:t>Materials/check: Textbook; worked example</a:t>
             </a:r>
           </a:p>
-          <a:p>
-            <a:r>
-              <a:t>Source: 'Math Week 3'!A27:F27</a:t>
-            </a:r>
-          </a:p>
           <a:p/>
           <a:p>
             <a:r>
@@ -5678,11 +5013,6 @@
               <a:t>Materials/check: Exercise Book; tool above</a:t>
             </a:r>
           </a:p>
-          <a:p>
-            <a:r>
-              <a:t>Source: 'Math Week 3'!A28:F28</a:t>
-            </a:r>
-          </a:p>
           <a:p/>
           <a:p>
             <a:r>
@@ -5704,11 +5034,6 @@
               <a:t>Materials/check: Paper first; tool second</a:t>
             </a:r>
           </a:p>
-          <a:p>
-            <a:r>
-              <a:t>Source: 'Math Week 3'!A29:F29</a:t>
-            </a:r>
-          </a:p>
           <a:p/>
           <a:p>
             <a:r>
@@ -5730,11 +5055,6 @@
               <a:t>Materials/check: Teacher answers below</a:t>
             </a:r>
           </a:p>
-          <a:p>
-            <a:r>
-              <a:t>Source: 'Math Week 3'!A30:F30</a:t>
-            </a:r>
-          </a:p>
           <a:p/>
           <a:p>
             <a:r>
@@ -5756,11 +5076,6 @@
               <a:t>Materials/check: Notebook / error log</a:t>
             </a:r>
           </a:p>
-          <a:p>
-            <a:r>
-              <a:t>Source: 'Math Week 3'!A31:F31</a:t>
-            </a:r>
-          </a:p>
           <a:p/>
           <a:p>
             <a:r>
@@ -5781,17 +5096,12 @@
           <a:p/>
           <a:p>
             <a:r>
-              <a:t>Sources: 'Math Week 3'!A10:E10; 'Carpentry Schedule'!B27; 'Math Week 3'!A19</a:t>
-            </a:r>
-          </a:p>
-          <a:p>
-            <a:r>
-              <a:t>Navigation/resource slides support these scheduled steps and do not add instructional time.</a:t>
-            </a:r>
-          </a:p>
-          <a:p>
-            <a:r>
-              <a:t>SLIDE PLACEMENT: Practise, 1:25 PM–1:45 PM. All slides with this phase share these 20 minutes; do not restart the time allocation for each slide.</a:t>
+              <a:t>Keep activities within the allocated phase time.</a:t>
+            </a:r>
+          </a:p>
+          <a:p>
+            <a:r>
+              <a:t>PHASE TIMING: Practise, 1:25 PM–1:45 PM. All slides with this phase share these 20 minutes; do not restart the time allocation for each slide.</a:t>
             </a:r>
           </a:p>
           <a:p/>
@@ -5946,11 +5256,6 @@
               <a:t>Materials/check: Notebook; calculator</a:t>
             </a:r>
           </a:p>
-          <a:p>
-            <a:r>
-              <a:t>Source: 'Math Week 3'!A25:F25</a:t>
-            </a:r>
-          </a:p>
           <a:p/>
           <a:p>
             <a:r>
@@ -5972,11 +5277,6 @@
               <a:t>Materials/check: Identify support needs</a:t>
             </a:r>
           </a:p>
-          <a:p>
-            <a:r>
-              <a:t>Source: 'Math Week 3'!A26:F26</a:t>
-            </a:r>
-          </a:p>
           <a:p/>
           <a:p>
             <a:r>
@@ -5998,11 +5298,6 @@
               <a:t>Materials/check: Textbook; worked example</a:t>
             </a:r>
           </a:p>
-          <a:p>
-            <a:r>
-              <a:t>Source: 'Math Week 3'!A27:F27</a:t>
-            </a:r>
-          </a:p>
           <a:p/>
           <a:p>
             <a:r>
@@ -6024,11 +5319,6 @@
               <a:t>Materials/check: Exercise Book; tool above</a:t>
             </a:r>
           </a:p>
-          <a:p>
-            <a:r>
-              <a:t>Source: 'Math Week 3'!A28:F28</a:t>
-            </a:r>
-          </a:p>
           <a:p/>
           <a:p>
             <a:r>
@@ -6050,11 +5340,6 @@
               <a:t>Materials/check: Paper first; tool second</a:t>
             </a:r>
           </a:p>
-          <a:p>
-            <a:r>
-              <a:t>Source: 'Math Week 3'!A29:F29</a:t>
-            </a:r>
-          </a:p>
           <a:p/>
           <a:p>
             <a:r>
@@ -6076,11 +5361,6 @@
               <a:t>Materials/check: Teacher answers below</a:t>
             </a:r>
           </a:p>
-          <a:p>
-            <a:r>
-              <a:t>Source: 'Math Week 3'!A30:F30</a:t>
-            </a:r>
-          </a:p>
           <a:p/>
           <a:p>
             <a:r>
@@ -6102,11 +5382,6 @@
               <a:t>Materials/check: Notebook / error log</a:t>
             </a:r>
           </a:p>
-          <a:p>
-            <a:r>
-              <a:t>Source: 'Math Week 3'!A31:F31</a:t>
-            </a:r>
-          </a:p>
           <a:p/>
           <a:p>
             <a:r>
@@ -6127,17 +5402,12 @@
           <a:p/>
           <a:p>
             <a:r>
-              <a:t>Sources: 'Math Week 3'!A10:E10; 'Carpentry Schedule'!B27; 'Math Week 3'!A19</a:t>
-            </a:r>
-          </a:p>
-          <a:p>
-            <a:r>
-              <a:t>Navigation/resource slides support these scheduled steps and do not add instructional time.</a:t>
-            </a:r>
-          </a:p>
-          <a:p>
-            <a:r>
-              <a:t>SLIDE PLACEMENT: Practise, 1:25 PM–1:45 PM. All slides with this phase share these 20 minutes; do not restart the time allocation for each slide.</a:t>
+              <a:t>Keep activities within the allocated phase time.</a:t>
+            </a:r>
+          </a:p>
+          <a:p>
+            <a:r>
+              <a:t>PHASE TIMING: Practise, 1:25 PM–1:45 PM. All slides with this phase share these 20 minutes; do not restart the time allocation for each slide.</a:t>
             </a:r>
           </a:p>
           <a:p/>
@@ -6292,11 +5562,6 @@
               <a:t>Materials/check: Notebook; calculator</a:t>
             </a:r>
           </a:p>
-          <a:p>
-            <a:r>
-              <a:t>Source: 'Math Week 3'!A25:F25</a:t>
-            </a:r>
-          </a:p>
           <a:p/>
           <a:p>
             <a:r>
@@ -6318,11 +5583,6 @@
               <a:t>Materials/check: Identify support needs</a:t>
             </a:r>
           </a:p>
-          <a:p>
-            <a:r>
-              <a:t>Source: 'Math Week 3'!A26:F26</a:t>
-            </a:r>
-          </a:p>
           <a:p/>
           <a:p>
             <a:r>
@@ -6344,11 +5604,6 @@
               <a:t>Materials/check: Textbook; worked example</a:t>
             </a:r>
           </a:p>
-          <a:p>
-            <a:r>
-              <a:t>Source: 'Math Week 3'!A27:F27</a:t>
-            </a:r>
-          </a:p>
           <a:p/>
           <a:p>
             <a:r>
@@ -6370,11 +5625,6 @@
               <a:t>Materials/check: Exercise Book; tool above</a:t>
             </a:r>
           </a:p>
-          <a:p>
-            <a:r>
-              <a:t>Source: 'Math Week 3'!A28:F28</a:t>
-            </a:r>
-          </a:p>
           <a:p/>
           <a:p>
             <a:r>
@@ -6396,11 +5646,6 @@
               <a:t>Materials/check: Paper first; tool second</a:t>
             </a:r>
           </a:p>
-          <a:p>
-            <a:r>
-              <a:t>Source: 'Math Week 3'!A29:F29</a:t>
-            </a:r>
-          </a:p>
           <a:p/>
           <a:p>
             <a:r>
@@ -6422,11 +5667,6 @@
               <a:t>Materials/check: Teacher answers below</a:t>
             </a:r>
           </a:p>
-          <a:p>
-            <a:r>
-              <a:t>Source: 'Math Week 3'!A30:F30</a:t>
-            </a:r>
-          </a:p>
           <a:p/>
           <a:p>
             <a:r>
@@ -6448,11 +5688,6 @@
               <a:t>Materials/check: Notebook / error log</a:t>
             </a:r>
           </a:p>
-          <a:p>
-            <a:r>
-              <a:t>Source: 'Math Week 3'!A31:F31</a:t>
-            </a:r>
-          </a:p>
           <a:p/>
           <a:p>
             <a:r>
@@ -6473,17 +5708,12 @@
           <a:p/>
           <a:p>
             <a:r>
-              <a:t>Sources: 'Math Week 3'!A10:E10; 'Carpentry Schedule'!B27; 'Math Week 3'!A19</a:t>
-            </a:r>
-          </a:p>
-          <a:p>
-            <a:r>
-              <a:t>Navigation/resource slides support these scheduled steps and do not add instructional time.</a:t>
-            </a:r>
-          </a:p>
-          <a:p>
-            <a:r>
-              <a:t>SLIDE PLACEMENT: Check, 1:45 PM–1:55 PM. All slides with this phase share these 10 minutes; do not restart the time allocation for each slide.</a:t>
+              <a:t>Keep activities within the allocated phase time.</a:t>
+            </a:r>
+          </a:p>
+          <a:p>
+            <a:r>
+              <a:t>PHASE TIMING: Check, 1:45 PM–1:55 PM. All slides with this phase share these 10 minutes; do not restart the time allocation for each slide.</a:t>
             </a:r>
           </a:p>
         </p:txBody>
@@ -6612,11 +5842,6 @@
               <a:t>Materials/check: Notebook; calculator</a:t>
             </a:r>
           </a:p>
-          <a:p>
-            <a:r>
-              <a:t>Source: 'Math Week 3'!A25:F25</a:t>
-            </a:r>
-          </a:p>
           <a:p/>
           <a:p>
             <a:r>
@@ -6638,11 +5863,6 @@
               <a:t>Materials/check: Identify support needs</a:t>
             </a:r>
           </a:p>
-          <a:p>
-            <a:r>
-              <a:t>Source: 'Math Week 3'!A26:F26</a:t>
-            </a:r>
-          </a:p>
           <a:p/>
           <a:p>
             <a:r>
@@ -6664,11 +5884,6 @@
               <a:t>Materials/check: Textbook; worked example</a:t>
             </a:r>
           </a:p>
-          <a:p>
-            <a:r>
-              <a:t>Source: 'Math Week 3'!A27:F27</a:t>
-            </a:r>
-          </a:p>
           <a:p/>
           <a:p>
             <a:r>
@@ -6690,11 +5905,6 @@
               <a:t>Materials/check: Exercise Book; tool above</a:t>
             </a:r>
           </a:p>
-          <a:p>
-            <a:r>
-              <a:t>Source: 'Math Week 3'!A28:F28</a:t>
-            </a:r>
-          </a:p>
           <a:p/>
           <a:p>
             <a:r>
@@ -6716,11 +5926,6 @@
               <a:t>Materials/check: Paper first; tool second</a:t>
             </a:r>
           </a:p>
-          <a:p>
-            <a:r>
-              <a:t>Source: 'Math Week 3'!A29:F29</a:t>
-            </a:r>
-          </a:p>
           <a:p/>
           <a:p>
             <a:r>
@@ -6742,11 +5947,6 @@
               <a:t>Materials/check: Teacher answers below</a:t>
             </a:r>
           </a:p>
-          <a:p>
-            <a:r>
-              <a:t>Source: 'Math Week 3'!A30:F30</a:t>
-            </a:r>
-          </a:p>
           <a:p/>
           <a:p>
             <a:r>
@@ -6768,11 +5968,6 @@
               <a:t>Materials/check: Notebook / error log</a:t>
             </a:r>
           </a:p>
-          <a:p>
-            <a:r>
-              <a:t>Source: 'Math Week 3'!A31:F31</a:t>
-            </a:r>
-          </a:p>
           <a:p/>
           <a:p>
             <a:r>
@@ -6793,17 +5988,12 @@
           <a:p/>
           <a:p>
             <a:r>
-              <a:t>Sources: 'Math Week 3'!A10:E10; 'Carpentry Schedule'!B27; 'Math Week 3'!A19</a:t>
-            </a:r>
-          </a:p>
-          <a:p>
-            <a:r>
-              <a:t>Navigation/resource slides support these scheduled steps and do not add instructional time.</a:t>
-            </a:r>
-          </a:p>
-          <a:p>
-            <a:r>
-              <a:t>SLIDE PLACEMENT: Check, 1:45 PM–1:55 PM. All slides with this phase share these 10 minutes; do not restart the time allocation for each slide.</a:t>
+              <a:t>Keep activities within the allocated phase time.</a:t>
+            </a:r>
+          </a:p>
+          <a:p>
+            <a:r>
+              <a:t>PHASE TIMING: Check, 1:45 PM–1:55 PM. All slides with this phase share these 10 minutes; do not restart the time allocation for each slide.</a:t>
             </a:r>
           </a:p>
           <a:p/>
@@ -6958,11 +6148,6 @@
               <a:t>Materials/check: Notebook; calculator</a:t>
             </a:r>
           </a:p>
-          <a:p>
-            <a:r>
-              <a:t>Source: 'Math Week 3'!A25:F25</a:t>
-            </a:r>
-          </a:p>
           <a:p/>
           <a:p>
             <a:r>
@@ -6984,11 +6169,6 @@
               <a:t>Materials/check: Identify support needs</a:t>
             </a:r>
           </a:p>
-          <a:p>
-            <a:r>
-              <a:t>Source: 'Math Week 3'!A26:F26</a:t>
-            </a:r>
-          </a:p>
           <a:p/>
           <a:p>
             <a:r>
@@ -7010,11 +6190,6 @@
               <a:t>Materials/check: Textbook; worked example</a:t>
             </a:r>
           </a:p>
-          <a:p>
-            <a:r>
-              <a:t>Source: 'Math Week 3'!A27:F27</a:t>
-            </a:r>
-          </a:p>
           <a:p/>
           <a:p>
             <a:r>
@@ -7036,11 +6211,6 @@
               <a:t>Materials/check: Exercise Book; tool above</a:t>
             </a:r>
           </a:p>
-          <a:p>
-            <a:r>
-              <a:t>Source: 'Math Week 3'!A28:F28</a:t>
-            </a:r>
-          </a:p>
           <a:p/>
           <a:p>
             <a:r>
@@ -7062,11 +6232,6 @@
               <a:t>Materials/check: Paper first; tool second</a:t>
             </a:r>
           </a:p>
-          <a:p>
-            <a:r>
-              <a:t>Source: 'Math Week 3'!A29:F29</a:t>
-            </a:r>
-          </a:p>
           <a:p/>
           <a:p>
             <a:r>
@@ -7088,11 +6253,6 @@
               <a:t>Materials/check: Teacher answers below</a:t>
             </a:r>
           </a:p>
-          <a:p>
-            <a:r>
-              <a:t>Source: 'Math Week 3'!A30:F30</a:t>
-            </a:r>
-          </a:p>
           <a:p/>
           <a:p>
             <a:r>
@@ -7114,11 +6274,6 @@
               <a:t>Materials/check: Notebook / error log</a:t>
             </a:r>
           </a:p>
-          <a:p>
-            <a:r>
-              <a:t>Source: 'Math Week 3'!A31:F31</a:t>
-            </a:r>
-          </a:p>
           <a:p/>
           <a:p>
             <a:r>
@@ -7139,17 +6294,12 @@
           <a:p/>
           <a:p>
             <a:r>
-              <a:t>Sources: 'Math Week 3'!A10:E10; 'Carpentry Schedule'!B27; 'Math Week 3'!A19</a:t>
-            </a:r>
-          </a:p>
-          <a:p>
-            <a:r>
-              <a:t>Navigation/resource slides support these scheduled steps and do not add instructional time.</a:t>
-            </a:r>
-          </a:p>
-          <a:p>
-            <a:r>
-              <a:t>SLIDE PLACEMENT: Wrap up, 1:55 PM–2:00 PM. All slides with this phase share these 5 minutes; do not restart the time allocation for each slide.</a:t>
+              <a:t>Keep activities within the allocated phase time.</a:t>
+            </a:r>
+          </a:p>
+          <a:p>
+            <a:r>
+              <a:t>PHASE TIMING: Wrap up, 1:55 PM–2:00 PM. All slides with this phase share these 5 minutes; do not restart the time allocation for each slide.</a:t>
             </a:r>
           </a:p>
           <a:p/>
@@ -7354,11 +6504,6 @@
               <a:t>Materials/check: Notebook; calculator</a:t>
             </a:r>
           </a:p>
-          <a:p>
-            <a:r>
-              <a:t>Source: 'Math Week 3'!A42:F42</a:t>
-            </a:r>
-          </a:p>
           <a:p/>
           <a:p>
             <a:r>
@@ -7380,11 +6525,6 @@
               <a:t>Materials/check: Identify support needs</a:t>
             </a:r>
           </a:p>
-          <a:p>
-            <a:r>
-              <a:t>Source: 'Math Week 3'!A43:F43</a:t>
-            </a:r>
-          </a:p>
           <a:p/>
           <a:p>
             <a:r>
@@ -7406,11 +6546,6 @@
               <a:t>Materials/check: Textbook; worked example</a:t>
             </a:r>
           </a:p>
-          <a:p>
-            <a:r>
-              <a:t>Source: 'Math Week 3'!A44:F44</a:t>
-            </a:r>
-          </a:p>
           <a:p/>
           <a:p>
             <a:r>
@@ -7432,11 +6567,6 @@
               <a:t>Materials/check: Exercise Book; tool above</a:t>
             </a:r>
           </a:p>
-          <a:p>
-            <a:r>
-              <a:t>Source: 'Math Week 3'!A45:F45</a:t>
-            </a:r>
-          </a:p>
           <a:p/>
           <a:p>
             <a:r>
@@ -7458,11 +6588,6 @@
               <a:t>Materials/check: Paper first; tool second</a:t>
             </a:r>
           </a:p>
-          <a:p>
-            <a:r>
-              <a:t>Source: 'Math Week 3'!A46:F46</a:t>
-            </a:r>
-          </a:p>
           <a:p/>
           <a:p>
             <a:r>
@@ -7484,11 +6609,6 @@
               <a:t>Materials/check: Teacher answers below</a:t>
             </a:r>
           </a:p>
-          <a:p>
-            <a:r>
-              <a:t>Source: 'Math Week 3'!A47:F47</a:t>
-            </a:r>
-          </a:p>
           <a:p/>
           <a:p>
             <a:r>
@@ -7510,11 +6630,6 @@
               <a:t>Materials/check: Notebook / error log</a:t>
             </a:r>
           </a:p>
-          <a:p>
-            <a:r>
-              <a:t>Source: 'Math Week 3'!A48:F48</a:t>
-            </a:r>
-          </a:p>
           <a:p/>
           <a:p>
             <a:r>
@@ -7535,17 +6650,12 @@
           <a:p/>
           <a:p>
             <a:r>
-              <a:t>Sources: 'Math Week 3'!A11:E11; 'Carpentry Schedule'!B29; 'Math Week 3'!A36</a:t>
-            </a:r>
-          </a:p>
-          <a:p>
-            <a:r>
-              <a:t>Navigation/resource slides support these scheduled steps and do not add instructional time.</a:t>
-            </a:r>
-          </a:p>
-          <a:p>
-            <a:r>
-              <a:t>SLIDE PLACEMENT: Start, 2:15 PM–2:20 PM. All slides with this phase share these 5 minutes; do not restart the time allocation for each slide.</a:t>
+              <a:t>Keep activities within the allocated phase time.</a:t>
+            </a:r>
+          </a:p>
+          <a:p>
+            <a:r>
+              <a:t>PHASE TIMING: Start, 2:15 PM–2:20 PM. All slides with this phase share these 5 minutes; do not restart the time allocation for each slide.</a:t>
             </a:r>
           </a:p>
         </p:txBody>
@@ -7674,11 +6784,6 @@
               <a:t>Materials/check: Notebook; calculator</a:t>
             </a:r>
           </a:p>
-          <a:p>
-            <a:r>
-              <a:t>Source: 'Math Week 3'!A42:F42</a:t>
-            </a:r>
-          </a:p>
           <a:p/>
           <a:p>
             <a:r>
@@ -7700,11 +6805,6 @@
               <a:t>Materials/check: Identify support needs</a:t>
             </a:r>
           </a:p>
-          <a:p>
-            <a:r>
-              <a:t>Source: 'Math Week 3'!A43:F43</a:t>
-            </a:r>
-          </a:p>
           <a:p/>
           <a:p>
             <a:r>
@@ -7726,11 +6826,6 @@
               <a:t>Materials/check: Textbook; worked example</a:t>
             </a:r>
           </a:p>
-          <a:p>
-            <a:r>
-              <a:t>Source: 'Math Week 3'!A44:F44</a:t>
-            </a:r>
-          </a:p>
           <a:p/>
           <a:p>
             <a:r>
@@ -7752,11 +6847,6 @@
               <a:t>Materials/check: Exercise Book; tool above</a:t>
             </a:r>
           </a:p>
-          <a:p>
-            <a:r>
-              <a:t>Source: 'Math Week 3'!A45:F45</a:t>
-            </a:r>
-          </a:p>
           <a:p/>
           <a:p>
             <a:r>
@@ -7778,11 +6868,6 @@
               <a:t>Materials/check: Paper first; tool second</a:t>
             </a:r>
           </a:p>
-          <a:p>
-            <a:r>
-              <a:t>Source: 'Math Week 3'!A46:F46</a:t>
-            </a:r>
-          </a:p>
           <a:p/>
           <a:p>
             <a:r>
@@ -7804,11 +6889,6 @@
               <a:t>Materials/check: Teacher answers below</a:t>
             </a:r>
           </a:p>
-          <a:p>
-            <a:r>
-              <a:t>Source: 'Math Week 3'!A47:F47</a:t>
-            </a:r>
-          </a:p>
           <a:p/>
           <a:p>
             <a:r>
@@ -7830,11 +6910,6 @@
               <a:t>Materials/check: Notebook / error log</a:t>
             </a:r>
           </a:p>
-          <a:p>
-            <a:r>
-              <a:t>Source: 'Math Week 3'!A48:F48</a:t>
-            </a:r>
-          </a:p>
           <a:p/>
           <a:p>
             <a:r>
@@ -7855,17 +6930,12 @@
           <a:p/>
           <a:p>
             <a:r>
-              <a:t>Sources: 'Math Week 3'!A11:E11; 'Carpentry Schedule'!B29; 'Math Week 3'!A36</a:t>
-            </a:r>
-          </a:p>
-          <a:p>
-            <a:r>
-              <a:t>Navigation/resource slides support these scheduled steps and do not add instructional time.</a:t>
-            </a:r>
-          </a:p>
-          <a:p>
-            <a:r>
-              <a:t>SLIDE PLACEMENT: Recall, 2:20 PM–2:25 PM. All slides with this phase share these 5 minutes; do not restart the time allocation for each slide.</a:t>
+              <a:t>Keep activities within the allocated phase time.</a:t>
+            </a:r>
+          </a:p>
+          <a:p>
+            <a:r>
+              <a:t>PHASE TIMING: Recall, 2:20 PM–2:25 PM. All slides with this phase share these 5 minutes; do not restart the time allocation for each slide.</a:t>
             </a:r>
           </a:p>
         </p:txBody>
@@ -7994,11 +7064,6 @@
               <a:t>Materials/check: Notebook; calculator</a:t>
             </a:r>
           </a:p>
-          <a:p>
-            <a:r>
-              <a:t>Source: 'Math Week 3'!A42:F42</a:t>
-            </a:r>
-          </a:p>
           <a:p/>
           <a:p>
             <a:r>
@@ -8020,11 +7085,6 @@
               <a:t>Materials/check: Identify support needs</a:t>
             </a:r>
           </a:p>
-          <a:p>
-            <a:r>
-              <a:t>Source: 'Math Week 3'!A43:F43</a:t>
-            </a:r>
-          </a:p>
           <a:p/>
           <a:p>
             <a:r>
@@ -8046,11 +7106,6 @@
               <a:t>Materials/check: Textbook; worked example</a:t>
             </a:r>
           </a:p>
-          <a:p>
-            <a:r>
-              <a:t>Source: 'Math Week 3'!A44:F44</a:t>
-            </a:r>
-          </a:p>
           <a:p/>
           <a:p>
             <a:r>
@@ -8072,11 +7127,6 @@
               <a:t>Materials/check: Exercise Book; tool above</a:t>
             </a:r>
           </a:p>
-          <a:p>
-            <a:r>
-              <a:t>Source: 'Math Week 3'!A45:F45</a:t>
-            </a:r>
-          </a:p>
           <a:p/>
           <a:p>
             <a:r>
@@ -8098,11 +7148,6 @@
               <a:t>Materials/check: Paper first; tool second</a:t>
             </a:r>
           </a:p>
-          <a:p>
-            <a:r>
-              <a:t>Source: 'Math Week 3'!A46:F46</a:t>
-            </a:r>
-          </a:p>
           <a:p/>
           <a:p>
             <a:r>
@@ -8124,11 +7169,6 @@
               <a:t>Materials/check: Teacher answers below</a:t>
             </a:r>
           </a:p>
-          <a:p>
-            <a:r>
-              <a:t>Source: 'Math Week 3'!A47:F47</a:t>
-            </a:r>
-          </a:p>
           <a:p/>
           <a:p>
             <a:r>
@@ -8150,11 +7190,6 @@
               <a:t>Materials/check: Notebook / error log</a:t>
             </a:r>
           </a:p>
-          <a:p>
-            <a:r>
-              <a:t>Source: 'Math Week 3'!A48:F48</a:t>
-            </a:r>
-          </a:p>
           <a:p/>
           <a:p>
             <a:r>
@@ -8175,48 +7210,23 @@
           <a:p/>
           <a:p>
             <a:r>
-              <a:t>Sources: 'Math Week 3'!A11:E11; 'Carpentry Schedule'!B29; 'Math Week 3'!A36</a:t>
-            </a:r>
-          </a:p>
-          <a:p>
-            <a:r>
-              <a:t>Navigation/resource slides support these scheduled steps and do not add instructional time.</a:t>
-            </a:r>
-          </a:p>
-          <a:p>
-            <a:r>
-              <a:t>SLIDE PLACEMENT: Teach, 2:25 PM–2:40 PM. All slides with this phase share these 15 minutes; do not restart the time allocation for each slide.</a:t>
-            </a:r>
-          </a:p>
-          <a:p/>
-          <a:p>
-            <a:r>
-              <a:t>Teaching content sources:</a:t>
-            </a:r>
-          </a:p>
-          <a:p>
-            <a:r>
-              <a:t>'Math Week 3'!A36</a:t>
-            </a:r>
-          </a:p>
-          <a:p>
-            <a:r>
-              <a:t>'Math Week 3'!B38</a:t>
-            </a:r>
-          </a:p>
-          <a:p>
-            <a:r>
-              <a:t>'Math Week 3'!B40</a:t>
+              <a:t>Keep activities within the allocated phase time.</a:t>
+            </a:r>
+          </a:p>
+          <a:p>
+            <a:r>
+              <a:t>PHASE TIMING: Teach, 2:25 PM–2:40 PM. All slides with this phase share these 15 minutes; do not restart the time allocation for each slide.</a:t>
+            </a:r>
+          </a:p>
+          <a:p/>
+          <a:p>
+            <a:r>
+              <a:t>Teaching references:</a:t>
             </a:r>
           </a:p>
           <a:p>
             <a:r>
               <a:t>Textbook Chapter 4 pp.64–66</a:t>
-            </a:r>
-          </a:p>
-          <a:p>
-            <a:r>
-              <a:t>ACCESS CARPENTRY SLIDES.pptx slides 51–53</a:t>
             </a:r>
           </a:p>
           <a:p>
@@ -8350,11 +7360,6 @@
               <a:t>Materials/check: Notebook; calculator</a:t>
             </a:r>
           </a:p>
-          <a:p>
-            <a:r>
-              <a:t>Source: 'Math Week 3'!A42:F42</a:t>
-            </a:r>
-          </a:p>
           <a:p/>
           <a:p>
             <a:r>
@@ -8376,11 +7381,6 @@
               <a:t>Materials/check: Identify support needs</a:t>
             </a:r>
           </a:p>
-          <a:p>
-            <a:r>
-              <a:t>Source: 'Math Week 3'!A43:F43</a:t>
-            </a:r>
-          </a:p>
           <a:p/>
           <a:p>
             <a:r>
@@ -8402,11 +7402,6 @@
               <a:t>Materials/check: Textbook; worked example</a:t>
             </a:r>
           </a:p>
-          <a:p>
-            <a:r>
-              <a:t>Source: 'Math Week 3'!A44:F44</a:t>
-            </a:r>
-          </a:p>
           <a:p/>
           <a:p>
             <a:r>
@@ -8428,11 +7423,6 @@
               <a:t>Materials/check: Exercise Book; tool above</a:t>
             </a:r>
           </a:p>
-          <a:p>
-            <a:r>
-              <a:t>Source: 'Math Week 3'!A45:F45</a:t>
-            </a:r>
-          </a:p>
           <a:p/>
           <a:p>
             <a:r>
@@ -8454,11 +7444,6 @@
               <a:t>Materials/check: Paper first; tool second</a:t>
             </a:r>
           </a:p>
-          <a:p>
-            <a:r>
-              <a:t>Source: 'Math Week 3'!A46:F46</a:t>
-            </a:r>
-          </a:p>
           <a:p/>
           <a:p>
             <a:r>
@@ -8480,11 +7465,6 @@
               <a:t>Materials/check: Teacher answers below</a:t>
             </a:r>
           </a:p>
-          <a:p>
-            <a:r>
-              <a:t>Source: 'Math Week 3'!A47:F47</a:t>
-            </a:r>
-          </a:p>
           <a:p/>
           <a:p>
             <a:r>
@@ -8506,11 +7486,6 @@
               <a:t>Materials/check: Notebook / error log</a:t>
             </a:r>
           </a:p>
-          <a:p>
-            <a:r>
-              <a:t>Source: 'Math Week 3'!A48:F48</a:t>
-            </a:r>
-          </a:p>
           <a:p/>
           <a:p>
             <a:r>
@@ -8531,48 +7506,23 @@
           <a:p/>
           <a:p>
             <a:r>
-              <a:t>Sources: 'Math Week 3'!A11:E11; 'Carpentry Schedule'!B29; 'Math Week 3'!A36</a:t>
-            </a:r>
-          </a:p>
-          <a:p>
-            <a:r>
-              <a:t>Navigation/resource slides support these scheduled steps and do not add instructional time.</a:t>
-            </a:r>
-          </a:p>
-          <a:p>
-            <a:r>
-              <a:t>SLIDE PLACEMENT: Teach, 2:25 PM–2:40 PM. All slides with this phase share these 15 minutes; do not restart the time allocation for each slide.</a:t>
-            </a:r>
-          </a:p>
-          <a:p/>
-          <a:p>
-            <a:r>
-              <a:t>Teaching content sources:</a:t>
-            </a:r>
-          </a:p>
-          <a:p>
-            <a:r>
-              <a:t>'Math Week 3'!A36</a:t>
-            </a:r>
-          </a:p>
-          <a:p>
-            <a:r>
-              <a:t>'Math Week 3'!B38</a:t>
-            </a:r>
-          </a:p>
-          <a:p>
-            <a:r>
-              <a:t>'Math Week 3'!B40</a:t>
+              <a:t>Keep activities within the allocated phase time.</a:t>
+            </a:r>
+          </a:p>
+          <a:p>
+            <a:r>
+              <a:t>PHASE TIMING: Teach, 2:25 PM–2:40 PM. All slides with this phase share these 15 minutes; do not restart the time allocation for each slide.</a:t>
+            </a:r>
+          </a:p>
+          <a:p/>
+          <a:p>
+            <a:r>
+              <a:t>Teaching references:</a:t>
             </a:r>
           </a:p>
           <a:p>
             <a:r>
               <a:t>Textbook Chapter 4 pp.64–66</a:t>
-            </a:r>
-          </a:p>
-          <a:p>
-            <a:r>
-              <a:t>ACCESS CARPENTRY SLIDES.pptx slides 51–53</a:t>
             </a:r>
           </a:p>
           <a:p>
@@ -8706,11 +7656,6 @@
               <a:t>Materials/check: Notebook; calculator</a:t>
             </a:r>
           </a:p>
-          <a:p>
-            <a:r>
-              <a:t>Source: 'Math Week 3'!A42:F42</a:t>
-            </a:r>
-          </a:p>
           <a:p/>
           <a:p>
             <a:r>
@@ -8732,11 +7677,6 @@
               <a:t>Materials/check: Identify support needs</a:t>
             </a:r>
           </a:p>
-          <a:p>
-            <a:r>
-              <a:t>Source: 'Math Week 3'!A43:F43</a:t>
-            </a:r>
-          </a:p>
           <a:p/>
           <a:p>
             <a:r>
@@ -8758,11 +7698,6 @@
               <a:t>Materials/check: Textbook; worked example</a:t>
             </a:r>
           </a:p>
-          <a:p>
-            <a:r>
-              <a:t>Source: 'Math Week 3'!A44:F44</a:t>
-            </a:r>
-          </a:p>
           <a:p/>
           <a:p>
             <a:r>
@@ -8784,11 +7719,6 @@
               <a:t>Materials/check: Exercise Book; tool above</a:t>
             </a:r>
           </a:p>
-          <a:p>
-            <a:r>
-              <a:t>Source: 'Math Week 3'!A45:F45</a:t>
-            </a:r>
-          </a:p>
           <a:p/>
           <a:p>
             <a:r>
@@ -8810,11 +7740,6 @@
               <a:t>Materials/check: Paper first; tool second</a:t>
             </a:r>
           </a:p>
-          <a:p>
-            <a:r>
-              <a:t>Source: 'Math Week 3'!A46:F46</a:t>
-            </a:r>
-          </a:p>
           <a:p/>
           <a:p>
             <a:r>
@@ -8836,11 +7761,6 @@
               <a:t>Materials/check: Teacher answers below</a:t>
             </a:r>
           </a:p>
-          <a:p>
-            <a:r>
-              <a:t>Source: 'Math Week 3'!A47:F47</a:t>
-            </a:r>
-          </a:p>
           <a:p/>
           <a:p>
             <a:r>
@@ -8862,11 +7782,6 @@
               <a:t>Materials/check: Notebook / error log</a:t>
             </a:r>
           </a:p>
-          <a:p>
-            <a:r>
-              <a:t>Source: 'Math Week 3'!A48:F48</a:t>
-            </a:r>
-          </a:p>
           <a:p/>
           <a:p>
             <a:r>
@@ -8887,17 +7802,12 @@
           <a:p/>
           <a:p>
             <a:r>
-              <a:t>Sources: 'Math Week 3'!A11:E11; 'Carpentry Schedule'!B29; 'Math Week 3'!A36</a:t>
-            </a:r>
-          </a:p>
-          <a:p>
-            <a:r>
-              <a:t>Navigation/resource slides support these scheduled steps and do not add instructional time.</a:t>
-            </a:r>
-          </a:p>
-          <a:p>
-            <a:r>
-              <a:t>SLIDE PLACEMENT: Teach, 2:25 PM–2:40 PM. All slides with this phase share these 15 minutes; do not restart the time allocation for each slide.</a:t>
+              <a:t>Keep activities within the allocated phase time.</a:t>
+            </a:r>
+          </a:p>
+          <a:p>
+            <a:r>
+              <a:t>PHASE TIMING: Teach, 2:25 PM–2:40 PM. All slides with this phase share these 15 minutes; do not restart the time allocation for each slide.</a:t>
             </a:r>
           </a:p>
           <a:p/>
@@ -8908,7 +7818,7 @@
           </a:p>
           <a:p>
             <a:r>
-              <a:t>Exact PDF/printed page: 66. Excerpt reproduced from the supplied ACCESS Textbook.</a:t>
+              <a:t>Exact PDF/printed page: 66. ACCESS Textbook excerpt.</a:t>
             </a:r>
           </a:p>
           <a:p>
@@ -9042,11 +7952,6 @@
               <a:t>Materials/check: Notebook; calculator</a:t>
             </a:r>
           </a:p>
-          <a:p>
-            <a:r>
-              <a:t>Source: 'Math Week 3'!A42:F42</a:t>
-            </a:r>
-          </a:p>
           <a:p/>
           <a:p>
             <a:r>
@@ -9068,11 +7973,6 @@
               <a:t>Materials/check: Identify support needs</a:t>
             </a:r>
           </a:p>
-          <a:p>
-            <a:r>
-              <a:t>Source: 'Math Week 3'!A43:F43</a:t>
-            </a:r>
-          </a:p>
           <a:p/>
           <a:p>
             <a:r>
@@ -9094,11 +7994,6 @@
               <a:t>Materials/check: Textbook; worked example</a:t>
             </a:r>
           </a:p>
-          <a:p>
-            <a:r>
-              <a:t>Source: 'Math Week 3'!A44:F44</a:t>
-            </a:r>
-          </a:p>
           <a:p/>
           <a:p>
             <a:r>
@@ -9120,11 +8015,6 @@
               <a:t>Materials/check: Exercise Book; tool above</a:t>
             </a:r>
           </a:p>
-          <a:p>
-            <a:r>
-              <a:t>Source: 'Math Week 3'!A45:F45</a:t>
-            </a:r>
-          </a:p>
           <a:p/>
           <a:p>
             <a:r>
@@ -9146,11 +8036,6 @@
               <a:t>Materials/check: Paper first; tool second</a:t>
             </a:r>
           </a:p>
-          <a:p>
-            <a:r>
-              <a:t>Source: 'Math Week 3'!A46:F46</a:t>
-            </a:r>
-          </a:p>
           <a:p/>
           <a:p>
             <a:r>
@@ -9172,11 +8057,6 @@
               <a:t>Materials/check: Teacher answers below</a:t>
             </a:r>
           </a:p>
-          <a:p>
-            <a:r>
-              <a:t>Source: 'Math Week 3'!A47:F47</a:t>
-            </a:r>
-          </a:p>
           <a:p/>
           <a:p>
             <a:r>
@@ -9198,11 +8078,6 @@
               <a:t>Materials/check: Notebook / error log</a:t>
             </a:r>
           </a:p>
-          <a:p>
-            <a:r>
-              <a:t>Source: 'Math Week 3'!A48:F48</a:t>
-            </a:r>
-          </a:p>
           <a:p/>
           <a:p>
             <a:r>
@@ -9223,17 +8098,12 @@
           <a:p/>
           <a:p>
             <a:r>
-              <a:t>Sources: 'Math Week 3'!A11:E11; 'Carpentry Schedule'!B29; 'Math Week 3'!A36</a:t>
-            </a:r>
-          </a:p>
-          <a:p>
-            <a:r>
-              <a:t>Navigation/resource slides support these scheduled steps and do not add instructional time.</a:t>
-            </a:r>
-          </a:p>
-          <a:p>
-            <a:r>
-              <a:t>SLIDE PLACEMENT: Teach, 2:25 PM–2:40 PM. All slides with this phase share these 15 minutes; do not restart the time allocation for each slide.</a:t>
+              <a:t>Keep activities within the allocated phase time.</a:t>
+            </a:r>
+          </a:p>
+          <a:p>
+            <a:r>
+              <a:t>PHASE TIMING: Teach, 2:25 PM–2:40 PM. All slides with this phase share these 15 minutes; do not restart the time allocation for each slide.</a:t>
             </a:r>
           </a:p>
           <a:p/>
@@ -9244,7 +8114,7 @@
           </a:p>
           <a:p>
             <a:r>
-              <a:t>Exact PDF/printed page: 66. Excerpt reproduced from the supplied ACCESS Textbook.</a:t>
+              <a:t>Exact PDF/printed page: 66. ACCESS Textbook excerpt.</a:t>
             </a:r>
           </a:p>
           <a:p>
@@ -9378,11 +8248,6 @@
               <a:t>Materials/check: Notebook; calculator</a:t>
             </a:r>
           </a:p>
-          <a:p>
-            <a:r>
-              <a:t>Source: 'Math Week 3'!A42:F42</a:t>
-            </a:r>
-          </a:p>
           <a:p/>
           <a:p>
             <a:r>
@@ -9404,11 +8269,6 @@
               <a:t>Materials/check: Identify support needs</a:t>
             </a:r>
           </a:p>
-          <a:p>
-            <a:r>
-              <a:t>Source: 'Math Week 3'!A43:F43</a:t>
-            </a:r>
-          </a:p>
           <a:p/>
           <a:p>
             <a:r>
@@ -9430,11 +8290,6 @@
               <a:t>Materials/check: Textbook; worked example</a:t>
             </a:r>
           </a:p>
-          <a:p>
-            <a:r>
-              <a:t>Source: 'Math Week 3'!A44:F44</a:t>
-            </a:r>
-          </a:p>
           <a:p/>
           <a:p>
             <a:r>
@@ -9456,11 +8311,6 @@
               <a:t>Materials/check: Exercise Book; tool above</a:t>
             </a:r>
           </a:p>
-          <a:p>
-            <a:r>
-              <a:t>Source: 'Math Week 3'!A45:F45</a:t>
-            </a:r>
-          </a:p>
           <a:p/>
           <a:p>
             <a:r>
@@ -9482,11 +8332,6 @@
               <a:t>Materials/check: Paper first; tool second</a:t>
             </a:r>
           </a:p>
-          <a:p>
-            <a:r>
-              <a:t>Source: 'Math Week 3'!A46:F46</a:t>
-            </a:r>
-          </a:p>
           <a:p/>
           <a:p>
             <a:r>
@@ -9508,11 +8353,6 @@
               <a:t>Materials/check: Teacher answers below</a:t>
             </a:r>
           </a:p>
-          <a:p>
-            <a:r>
-              <a:t>Source: 'Math Week 3'!A47:F47</a:t>
-            </a:r>
-          </a:p>
           <a:p/>
           <a:p>
             <a:r>
@@ -9534,11 +8374,6 @@
               <a:t>Materials/check: Notebook / error log</a:t>
             </a:r>
           </a:p>
-          <a:p>
-            <a:r>
-              <a:t>Source: 'Math Week 3'!A48:F48</a:t>
-            </a:r>
-          </a:p>
           <a:p/>
           <a:p>
             <a:r>
@@ -9559,17 +8394,12 @@
           <a:p/>
           <a:p>
             <a:r>
-              <a:t>Sources: 'Math Week 3'!A11:E11; 'Carpentry Schedule'!B29; 'Math Week 3'!A36</a:t>
-            </a:r>
-          </a:p>
-          <a:p>
-            <a:r>
-              <a:t>Navigation/resource slides support these scheduled steps and do not add instructional time.</a:t>
-            </a:r>
-          </a:p>
-          <a:p>
-            <a:r>
-              <a:t>SLIDE PLACEMENT: Teach, 2:25 PM–2:40 PM. All slides with this phase share these 15 minutes; do not restart the time allocation for each slide.</a:t>
+              <a:t>Keep activities within the allocated phase time.</a:t>
+            </a:r>
+          </a:p>
+          <a:p>
+            <a:r>
+              <a:t>PHASE TIMING: Teach, 2:25 PM–2:40 PM. All slides with this phase share these 15 minutes; do not restart the time allocation for each slide.</a:t>
             </a:r>
           </a:p>
           <a:p/>
@@ -9704,11 +8534,6 @@
               <a:t>Materials/check: Notebook; calculator</a:t>
             </a:r>
           </a:p>
-          <a:p>
-            <a:r>
-              <a:t>Source: 'Math Week 3'!A42:F42</a:t>
-            </a:r>
-          </a:p>
           <a:p/>
           <a:p>
             <a:r>
@@ -9730,11 +8555,6 @@
               <a:t>Materials/check: Identify support needs</a:t>
             </a:r>
           </a:p>
-          <a:p>
-            <a:r>
-              <a:t>Source: 'Math Week 3'!A43:F43</a:t>
-            </a:r>
-          </a:p>
           <a:p/>
           <a:p>
             <a:r>
@@ -9756,11 +8576,6 @@
               <a:t>Materials/check: Textbook; worked example</a:t>
             </a:r>
           </a:p>
-          <a:p>
-            <a:r>
-              <a:t>Source: 'Math Week 3'!A44:F44</a:t>
-            </a:r>
-          </a:p>
           <a:p/>
           <a:p>
             <a:r>
@@ -9782,11 +8597,6 @@
               <a:t>Materials/check: Exercise Book; tool above</a:t>
             </a:r>
           </a:p>
-          <a:p>
-            <a:r>
-              <a:t>Source: 'Math Week 3'!A45:F45</a:t>
-            </a:r>
-          </a:p>
           <a:p/>
           <a:p>
             <a:r>
@@ -9808,11 +8618,6 @@
               <a:t>Materials/check: Paper first; tool second</a:t>
             </a:r>
           </a:p>
-          <a:p>
-            <a:r>
-              <a:t>Source: 'Math Week 3'!A46:F46</a:t>
-            </a:r>
-          </a:p>
           <a:p/>
           <a:p>
             <a:r>
@@ -9834,11 +8639,6 @@
               <a:t>Materials/check: Teacher answers below</a:t>
             </a:r>
           </a:p>
-          <a:p>
-            <a:r>
-              <a:t>Source: 'Math Week 3'!A47:F47</a:t>
-            </a:r>
-          </a:p>
           <a:p/>
           <a:p>
             <a:r>
@@ -9860,11 +8660,6 @@
               <a:t>Materials/check: Notebook / error log</a:t>
             </a:r>
           </a:p>
-          <a:p>
-            <a:r>
-              <a:t>Source: 'Math Week 3'!A48:F48</a:t>
-            </a:r>
-          </a:p>
           <a:p/>
           <a:p>
             <a:r>
@@ -9885,17 +8680,12 @@
           <a:p/>
           <a:p>
             <a:r>
-              <a:t>Sources: 'Math Week 3'!A11:E11; 'Carpentry Schedule'!B29; 'Math Week 3'!A36</a:t>
-            </a:r>
-          </a:p>
-          <a:p>
-            <a:r>
-              <a:t>Navigation/resource slides support these scheduled steps and do not add instructional time.</a:t>
-            </a:r>
-          </a:p>
-          <a:p>
-            <a:r>
-              <a:t>SLIDE PLACEMENT: Together, 2:40 PM–2:55 PM. All slides with this phase share these 15 minutes; do not restart the time allocation for each slide.</a:t>
+              <a:t>Keep activities within the allocated phase time.</a:t>
+            </a:r>
+          </a:p>
+          <a:p>
+            <a:r>
+              <a:t>PHASE TIMING: Together, 2:40 PM–2:55 PM. All slides with this phase share these 15 minutes; do not restart the time allocation for each slide.</a:t>
             </a:r>
           </a:p>
         </p:txBody>
@@ -10024,11 +8814,6 @@
               <a:t>Materials/check: Notebook; calculator</a:t>
             </a:r>
           </a:p>
-          <a:p>
-            <a:r>
-              <a:t>Source: 'Math Week 3'!A42:F42</a:t>
-            </a:r>
-          </a:p>
           <a:p/>
           <a:p>
             <a:r>
@@ -10050,11 +8835,6 @@
               <a:t>Materials/check: Identify support needs</a:t>
             </a:r>
           </a:p>
-          <a:p>
-            <a:r>
-              <a:t>Source: 'Math Week 3'!A43:F43</a:t>
-            </a:r>
-          </a:p>
           <a:p/>
           <a:p>
             <a:r>
@@ -10076,11 +8856,6 @@
               <a:t>Materials/check: Textbook; worked example</a:t>
             </a:r>
           </a:p>
-          <a:p>
-            <a:r>
-              <a:t>Source: 'Math Week 3'!A44:F44</a:t>
-            </a:r>
-          </a:p>
           <a:p/>
           <a:p>
             <a:r>
@@ -10102,11 +8877,6 @@
               <a:t>Materials/check: Exercise Book; tool above</a:t>
             </a:r>
           </a:p>
-          <a:p>
-            <a:r>
-              <a:t>Source: 'Math Week 3'!A45:F45</a:t>
-            </a:r>
-          </a:p>
           <a:p/>
           <a:p>
             <a:r>
@@ -10128,11 +8898,6 @@
               <a:t>Materials/check: Paper first; tool second</a:t>
             </a:r>
           </a:p>
-          <a:p>
-            <a:r>
-              <a:t>Source: 'Math Week 3'!A46:F46</a:t>
-            </a:r>
-          </a:p>
           <a:p/>
           <a:p>
             <a:r>
@@ -10154,11 +8919,6 @@
               <a:t>Materials/check: Teacher answers below</a:t>
             </a:r>
           </a:p>
-          <a:p>
-            <a:r>
-              <a:t>Source: 'Math Week 3'!A47:F47</a:t>
-            </a:r>
-          </a:p>
           <a:p/>
           <a:p>
             <a:r>
@@ -10180,11 +8940,6 @@
               <a:t>Materials/check: Notebook / error log</a:t>
             </a:r>
           </a:p>
-          <a:p>
-            <a:r>
-              <a:t>Source: 'Math Week 3'!A48:F48</a:t>
-            </a:r>
-          </a:p>
           <a:p/>
           <a:p>
             <a:r>
@@ -10205,17 +8960,12 @@
           <a:p/>
           <a:p>
             <a:r>
-              <a:t>Sources: 'Math Week 3'!A11:E11; 'Carpentry Schedule'!B29; 'Math Week 3'!A36</a:t>
-            </a:r>
-          </a:p>
-          <a:p>
-            <a:r>
-              <a:t>Navigation/resource slides support these scheduled steps and do not add instructional time.</a:t>
-            </a:r>
-          </a:p>
-          <a:p>
-            <a:r>
-              <a:t>SLIDE PLACEMENT: Together, 2:40 PM–2:55 PM. All slides with this phase share these 15 minutes; do not restart the time allocation for each slide.</a:t>
+              <a:t>Keep activities within the allocated phase time.</a:t>
+            </a:r>
+          </a:p>
+          <a:p>
+            <a:r>
+              <a:t>PHASE TIMING: Together, 2:40 PM–2:55 PM. All slides with this phase share these 15 minutes; do not restart the time allocation for each slide.</a:t>
             </a:r>
           </a:p>
           <a:p/>
@@ -10370,11 +9120,6 @@
               <a:t>Materials/check: Notebook; calculator</a:t>
             </a:r>
           </a:p>
-          <a:p>
-            <a:r>
-              <a:t>Source: 'Math Week 3'!A42:F42</a:t>
-            </a:r>
-          </a:p>
           <a:p/>
           <a:p>
             <a:r>
@@ -10396,11 +9141,6 @@
               <a:t>Materials/check: Identify support needs</a:t>
             </a:r>
           </a:p>
-          <a:p>
-            <a:r>
-              <a:t>Source: 'Math Week 3'!A43:F43</a:t>
-            </a:r>
-          </a:p>
           <a:p/>
           <a:p>
             <a:r>
@@ -10422,11 +9162,6 @@
               <a:t>Materials/check: Textbook; worked example</a:t>
             </a:r>
           </a:p>
-          <a:p>
-            <a:r>
-              <a:t>Source: 'Math Week 3'!A44:F44</a:t>
-            </a:r>
-          </a:p>
           <a:p/>
           <a:p>
             <a:r>
@@ -10448,11 +9183,6 @@
               <a:t>Materials/check: Exercise Book; tool above</a:t>
             </a:r>
           </a:p>
-          <a:p>
-            <a:r>
-              <a:t>Source: 'Math Week 3'!A45:F45</a:t>
-            </a:r>
-          </a:p>
           <a:p/>
           <a:p>
             <a:r>
@@ -10474,11 +9204,6 @@
               <a:t>Materials/check: Paper first; tool second</a:t>
             </a:r>
           </a:p>
-          <a:p>
-            <a:r>
-              <a:t>Source: 'Math Week 3'!A46:F46</a:t>
-            </a:r>
-          </a:p>
           <a:p/>
           <a:p>
             <a:r>
@@ -10500,11 +9225,6 @@
               <a:t>Materials/check: Teacher answers below</a:t>
             </a:r>
           </a:p>
-          <a:p>
-            <a:r>
-              <a:t>Source: 'Math Week 3'!A47:F47</a:t>
-            </a:r>
-          </a:p>
           <a:p/>
           <a:p>
             <a:r>
@@ -10526,11 +9246,6 @@
               <a:t>Materials/check: Notebook / error log</a:t>
             </a:r>
           </a:p>
-          <a:p>
-            <a:r>
-              <a:t>Source: 'Math Week 3'!A48:F48</a:t>
-            </a:r>
-          </a:p>
           <a:p/>
           <a:p>
             <a:r>
@@ -10551,17 +9266,12 @@
           <a:p/>
           <a:p>
             <a:r>
-              <a:t>Sources: 'Math Week 3'!A11:E11; 'Carpentry Schedule'!B29; 'Math Week 3'!A36</a:t>
-            </a:r>
-          </a:p>
-          <a:p>
-            <a:r>
-              <a:t>Navigation/resource slides support these scheduled steps and do not add instructional time.</a:t>
-            </a:r>
-          </a:p>
-          <a:p>
-            <a:r>
-              <a:t>SLIDE PLACEMENT: Together, 2:40 PM–2:55 PM. All slides with this phase share these 15 minutes; do not restart the time allocation for each slide.</a:t>
+              <a:t>Keep activities within the allocated phase time.</a:t>
+            </a:r>
+          </a:p>
+          <a:p>
+            <a:r>
+              <a:t>PHASE TIMING: Together, 2:40 PM–2:55 PM. All slides with this phase share these 15 minutes; do not restart the time allocation for each slide.</a:t>
             </a:r>
           </a:p>
           <a:p/>
@@ -10716,11 +9426,6 @@
               <a:t>Materials/check: Notebook; calculator</a:t>
             </a:r>
           </a:p>
-          <a:p>
-            <a:r>
-              <a:t>Source: 'Math Week 3'!A42:F42</a:t>
-            </a:r>
-          </a:p>
           <a:p/>
           <a:p>
             <a:r>
@@ -10742,11 +9447,6 @@
               <a:t>Materials/check: Identify support needs</a:t>
             </a:r>
           </a:p>
-          <a:p>
-            <a:r>
-              <a:t>Source: 'Math Week 3'!A43:F43</a:t>
-            </a:r>
-          </a:p>
           <a:p/>
           <a:p>
             <a:r>
@@ -10768,11 +9468,6 @@
               <a:t>Materials/check: Textbook; worked example</a:t>
             </a:r>
           </a:p>
-          <a:p>
-            <a:r>
-              <a:t>Source: 'Math Week 3'!A44:F44</a:t>
-            </a:r>
-          </a:p>
           <a:p/>
           <a:p>
             <a:r>
@@ -10794,11 +9489,6 @@
               <a:t>Materials/check: Exercise Book; tool above</a:t>
             </a:r>
           </a:p>
-          <a:p>
-            <a:r>
-              <a:t>Source: 'Math Week 3'!A45:F45</a:t>
-            </a:r>
-          </a:p>
           <a:p/>
           <a:p>
             <a:r>
@@ -10820,11 +9510,6 @@
               <a:t>Materials/check: Paper first; tool second</a:t>
             </a:r>
           </a:p>
-          <a:p>
-            <a:r>
-              <a:t>Source: 'Math Week 3'!A46:F46</a:t>
-            </a:r>
-          </a:p>
           <a:p/>
           <a:p>
             <a:r>
@@ -10846,11 +9531,6 @@
               <a:t>Materials/check: Teacher answers below</a:t>
             </a:r>
           </a:p>
-          <a:p>
-            <a:r>
-              <a:t>Source: 'Math Week 3'!A47:F47</a:t>
-            </a:r>
-          </a:p>
           <a:p/>
           <a:p>
             <a:r>
@@ -10872,11 +9552,6 @@
               <a:t>Materials/check: Notebook / error log</a:t>
             </a:r>
           </a:p>
-          <a:p>
-            <a:r>
-              <a:t>Source: 'Math Week 3'!A48:F48</a:t>
-            </a:r>
-          </a:p>
           <a:p/>
           <a:p>
             <a:r>
@@ -10897,17 +9572,12 @@
           <a:p/>
           <a:p>
             <a:r>
-              <a:t>Sources: 'Math Week 3'!A11:E11; 'Carpentry Schedule'!B29; 'Math Week 3'!A36</a:t>
-            </a:r>
-          </a:p>
-          <a:p>
-            <a:r>
-              <a:t>Navigation/resource slides support these scheduled steps and do not add instructional time.</a:t>
-            </a:r>
-          </a:p>
-          <a:p>
-            <a:r>
-              <a:t>SLIDE PLACEMENT: Practise, 2:55 PM–3:15 PM. All slides with this phase share these 20 minutes; do not restart the time allocation for each slide.</a:t>
+              <a:t>Keep activities within the allocated phase time.</a:t>
+            </a:r>
+          </a:p>
+          <a:p>
+            <a:r>
+              <a:t>PHASE TIMING: Practise, 2:55 PM–3:15 PM. All slides with this phase share these 20 minutes; do not restart the time allocation for each slide.</a:t>
             </a:r>
           </a:p>
         </p:txBody>
@@ -11036,11 +9706,6 @@
               <a:t>Materials/check: Notebook; calculator</a:t>
             </a:r>
           </a:p>
-          <a:p>
-            <a:r>
-              <a:t>Source: 'Math Week 3'!A42:F42</a:t>
-            </a:r>
-          </a:p>
           <a:p/>
           <a:p>
             <a:r>
@@ -11062,11 +9727,6 @@
               <a:t>Materials/check: Identify support needs</a:t>
             </a:r>
           </a:p>
-          <a:p>
-            <a:r>
-              <a:t>Source: 'Math Week 3'!A43:F43</a:t>
-            </a:r>
-          </a:p>
           <a:p/>
           <a:p>
             <a:r>
@@ -11088,11 +9748,6 @@
               <a:t>Materials/check: Textbook; worked example</a:t>
             </a:r>
           </a:p>
-          <a:p>
-            <a:r>
-              <a:t>Source: 'Math Week 3'!A44:F44</a:t>
-            </a:r>
-          </a:p>
           <a:p/>
           <a:p>
             <a:r>
@@ -11114,11 +9769,6 @@
               <a:t>Materials/check: Exercise Book; tool above</a:t>
             </a:r>
           </a:p>
-          <a:p>
-            <a:r>
-              <a:t>Source: 'Math Week 3'!A45:F45</a:t>
-            </a:r>
-          </a:p>
           <a:p/>
           <a:p>
             <a:r>
@@ -11140,11 +9790,6 @@
               <a:t>Materials/check: Paper first; tool second</a:t>
             </a:r>
           </a:p>
-          <a:p>
-            <a:r>
-              <a:t>Source: 'Math Week 3'!A46:F46</a:t>
-            </a:r>
-          </a:p>
           <a:p/>
           <a:p>
             <a:r>
@@ -11166,11 +9811,6 @@
               <a:t>Materials/check: Teacher answers below</a:t>
             </a:r>
           </a:p>
-          <a:p>
-            <a:r>
-              <a:t>Source: 'Math Week 3'!A47:F47</a:t>
-            </a:r>
-          </a:p>
           <a:p/>
           <a:p>
             <a:r>
@@ -11192,11 +9832,6 @@
               <a:t>Materials/check: Notebook / error log</a:t>
             </a:r>
           </a:p>
-          <a:p>
-            <a:r>
-              <a:t>Source: 'Math Week 3'!A48:F48</a:t>
-            </a:r>
-          </a:p>
           <a:p/>
           <a:p>
             <a:r>
@@ -11217,23 +9852,18 @@
           <a:p/>
           <a:p>
             <a:r>
-              <a:t>Sources: 'Math Week 3'!A11:E11; 'Carpentry Schedule'!B29; 'Math Week 3'!A36</a:t>
-            </a:r>
-          </a:p>
-          <a:p>
-            <a:r>
-              <a:t>Navigation/resource slides support these scheduled steps and do not add instructional time.</a:t>
-            </a:r>
-          </a:p>
-          <a:p>
-            <a:r>
-              <a:t>SLIDE PLACEMENT: Practise, 2:55 PM–3:15 PM. All slides with this phase share these 20 minutes; do not restart the time allocation for each slide.</a:t>
-            </a:r>
-          </a:p>
-          <a:p/>
-          <a:p>
-            <a:r>
-              <a:t>Live-tool screenshot, not an answer to the scheduled task. Open the resource link and follow the exact values in the assignment. Keep worked answers hidden until learners attempt the task. Screenshot illustrates navigation and occupies time within the same scheduled practice phase.</a:t>
+              <a:t>Keep activities within the allocated phase time.</a:t>
+            </a:r>
+          </a:p>
+          <a:p>
+            <a:r>
+              <a:t>PHASE TIMING: Practise, 2:55 PM–3:15 PM. All slides with this phase share these 20 minutes; do not restart the time allocation for each slide.</a:t>
+            </a:r>
+          </a:p>
+          <a:p/>
+          <a:p>
+            <a:r>
+              <a:t>Demonstrate navigation, then open the tool and use the assigned values. Keep worked answers hidden until learners attempt the task. Include this activity within the allocated practice time.</a:t>
             </a:r>
           </a:p>
         </p:txBody>
@@ -11362,11 +9992,6 @@
               <a:t>Materials/check: Notebook; calculator</a:t>
             </a:r>
           </a:p>
-          <a:p>
-            <a:r>
-              <a:t>Source: 'Math Week 3'!A42:F42</a:t>
-            </a:r>
-          </a:p>
           <a:p/>
           <a:p>
             <a:r>
@@ -11388,11 +10013,6 @@
               <a:t>Materials/check: Identify support needs</a:t>
             </a:r>
           </a:p>
-          <a:p>
-            <a:r>
-              <a:t>Source: 'Math Week 3'!A43:F43</a:t>
-            </a:r>
-          </a:p>
           <a:p/>
           <a:p>
             <a:r>
@@ -11414,11 +10034,6 @@
               <a:t>Materials/check: Textbook; worked example</a:t>
             </a:r>
           </a:p>
-          <a:p>
-            <a:r>
-              <a:t>Source: 'Math Week 3'!A44:F44</a:t>
-            </a:r>
-          </a:p>
           <a:p/>
           <a:p>
             <a:r>
@@ -11440,11 +10055,6 @@
               <a:t>Materials/check: Exercise Book; tool above</a:t>
             </a:r>
           </a:p>
-          <a:p>
-            <a:r>
-              <a:t>Source: 'Math Week 3'!A45:F45</a:t>
-            </a:r>
-          </a:p>
           <a:p/>
           <a:p>
             <a:r>
@@ -11466,11 +10076,6 @@
               <a:t>Materials/check: Paper first; tool second</a:t>
             </a:r>
           </a:p>
-          <a:p>
-            <a:r>
-              <a:t>Source: 'Math Week 3'!A46:F46</a:t>
-            </a:r>
-          </a:p>
           <a:p/>
           <a:p>
             <a:r>
@@ -11492,11 +10097,6 @@
               <a:t>Materials/check: Teacher answers below</a:t>
             </a:r>
           </a:p>
-          <a:p>
-            <a:r>
-              <a:t>Source: 'Math Week 3'!A47:F47</a:t>
-            </a:r>
-          </a:p>
           <a:p/>
           <a:p>
             <a:r>
@@ -11518,11 +10118,6 @@
               <a:t>Materials/check: Notebook / error log</a:t>
             </a:r>
           </a:p>
-          <a:p>
-            <a:r>
-              <a:t>Source: 'Math Week 3'!A48:F48</a:t>
-            </a:r>
-          </a:p>
           <a:p/>
           <a:p>
             <a:r>
@@ -11543,17 +10138,12 @@
           <a:p/>
           <a:p>
             <a:r>
-              <a:t>Sources: 'Math Week 3'!A11:E11; 'Carpentry Schedule'!B29; 'Math Week 3'!A36</a:t>
-            </a:r>
-          </a:p>
-          <a:p>
-            <a:r>
-              <a:t>Navigation/resource slides support these scheduled steps and do not add instructional time.</a:t>
-            </a:r>
-          </a:p>
-          <a:p>
-            <a:r>
-              <a:t>SLIDE PLACEMENT: Practise, 2:55 PM–3:15 PM. All slides with this phase share these 20 minutes; do not restart the time allocation for each slide.</a:t>
+              <a:t>Keep activities within the allocated phase time.</a:t>
+            </a:r>
+          </a:p>
+          <a:p>
+            <a:r>
+              <a:t>PHASE TIMING: Practise, 2:55 PM–3:15 PM. All slides with this phase share these 20 minutes; do not restart the time allocation for each slide.</a:t>
             </a:r>
           </a:p>
           <a:p/>
@@ -11703,11 +10293,6 @@
               <a:t>Materials/check: Notebook; calculator</a:t>
             </a:r>
           </a:p>
-          <a:p>
-            <a:r>
-              <a:t>Source: 'Math Week 3'!A42:F42</a:t>
-            </a:r>
-          </a:p>
           <a:p/>
           <a:p>
             <a:r>
@@ -11729,11 +10314,6 @@
               <a:t>Materials/check: Identify support needs</a:t>
             </a:r>
           </a:p>
-          <a:p>
-            <a:r>
-              <a:t>Source: 'Math Week 3'!A43:F43</a:t>
-            </a:r>
-          </a:p>
           <a:p/>
           <a:p>
             <a:r>
@@ -11755,11 +10335,6 @@
               <a:t>Materials/check: Textbook; worked example</a:t>
             </a:r>
           </a:p>
-          <a:p>
-            <a:r>
-              <a:t>Source: 'Math Week 3'!A44:F44</a:t>
-            </a:r>
-          </a:p>
           <a:p/>
           <a:p>
             <a:r>
@@ -11781,11 +10356,6 @@
               <a:t>Materials/check: Exercise Book; tool above</a:t>
             </a:r>
           </a:p>
-          <a:p>
-            <a:r>
-              <a:t>Source: 'Math Week 3'!A45:F45</a:t>
-            </a:r>
-          </a:p>
           <a:p/>
           <a:p>
             <a:r>
@@ -11807,11 +10377,6 @@
               <a:t>Materials/check: Paper first; tool second</a:t>
             </a:r>
           </a:p>
-          <a:p>
-            <a:r>
-              <a:t>Source: 'Math Week 3'!A46:F46</a:t>
-            </a:r>
-          </a:p>
           <a:p/>
           <a:p>
             <a:r>
@@ -11833,11 +10398,6 @@
               <a:t>Materials/check: Teacher answers below</a:t>
             </a:r>
           </a:p>
-          <a:p>
-            <a:r>
-              <a:t>Source: 'Math Week 3'!A47:F47</a:t>
-            </a:r>
-          </a:p>
           <a:p/>
           <a:p>
             <a:r>
@@ -11859,11 +10419,6 @@
               <a:t>Materials/check: Notebook / error log</a:t>
             </a:r>
           </a:p>
-          <a:p>
-            <a:r>
-              <a:t>Source: 'Math Week 3'!A48:F48</a:t>
-            </a:r>
-          </a:p>
           <a:p/>
           <a:p>
             <a:r>
@@ -11884,17 +10439,12 @@
           <a:p/>
           <a:p>
             <a:r>
-              <a:t>Sources: 'Math Week 3'!A11:E11; 'Carpentry Schedule'!B29; 'Math Week 3'!A36</a:t>
-            </a:r>
-          </a:p>
-          <a:p>
-            <a:r>
-              <a:t>Navigation/resource slides support these scheduled steps and do not add instructional time.</a:t>
-            </a:r>
-          </a:p>
-          <a:p>
-            <a:r>
-              <a:t>SLIDE PLACEMENT: Practise, 2:55 PM–3:15 PM. All slides with this phase share these 20 minutes; do not restart the time allocation for each slide.</a:t>
+              <a:t>Keep activities within the allocated phase time.</a:t>
+            </a:r>
+          </a:p>
+          <a:p>
+            <a:r>
+              <a:t>PHASE TIMING: Practise, 2:55 PM–3:15 PM. All slides with this phase share these 20 minutes; do not restart the time allocation for each slide.</a:t>
             </a:r>
           </a:p>
           <a:p/>
@@ -12049,11 +10599,6 @@
               <a:t>Materials/check: Notebook; calculator</a:t>
             </a:r>
           </a:p>
-          <a:p>
-            <a:r>
-              <a:t>Source: 'Math Week 3'!A42:F42</a:t>
-            </a:r>
-          </a:p>
           <a:p/>
           <a:p>
             <a:r>
@@ -12075,11 +10620,6 @@
               <a:t>Materials/check: Identify support needs</a:t>
             </a:r>
           </a:p>
-          <a:p>
-            <a:r>
-              <a:t>Source: 'Math Week 3'!A43:F43</a:t>
-            </a:r>
-          </a:p>
           <a:p/>
           <a:p>
             <a:r>
@@ -12101,11 +10641,6 @@
               <a:t>Materials/check: Textbook; worked example</a:t>
             </a:r>
           </a:p>
-          <a:p>
-            <a:r>
-              <a:t>Source: 'Math Week 3'!A44:F44</a:t>
-            </a:r>
-          </a:p>
           <a:p/>
           <a:p>
             <a:r>
@@ -12127,11 +10662,6 @@
               <a:t>Materials/check: Exercise Book; tool above</a:t>
             </a:r>
           </a:p>
-          <a:p>
-            <a:r>
-              <a:t>Source: 'Math Week 3'!A45:F45</a:t>
-            </a:r>
-          </a:p>
           <a:p/>
           <a:p>
             <a:r>
@@ -12153,11 +10683,6 @@
               <a:t>Materials/check: Paper first; tool second</a:t>
             </a:r>
           </a:p>
-          <a:p>
-            <a:r>
-              <a:t>Source: 'Math Week 3'!A46:F46</a:t>
-            </a:r>
-          </a:p>
           <a:p/>
           <a:p>
             <a:r>
@@ -12179,11 +10704,6 @@
               <a:t>Materials/check: Teacher answers below</a:t>
             </a:r>
           </a:p>
-          <a:p>
-            <a:r>
-              <a:t>Source: 'Math Week 3'!A47:F47</a:t>
-            </a:r>
-          </a:p>
           <a:p/>
           <a:p>
             <a:r>
@@ -12205,11 +10725,6 @@
               <a:t>Materials/check: Notebook / error log</a:t>
             </a:r>
           </a:p>
-          <a:p>
-            <a:r>
-              <a:t>Source: 'Math Week 3'!A48:F48</a:t>
-            </a:r>
-          </a:p>
           <a:p/>
           <a:p>
             <a:r>
@@ -12230,17 +10745,12 @@
           <a:p/>
           <a:p>
             <a:r>
-              <a:t>Sources: 'Math Week 3'!A11:E11; 'Carpentry Schedule'!B29; 'Math Week 3'!A36</a:t>
-            </a:r>
-          </a:p>
-          <a:p>
-            <a:r>
-              <a:t>Navigation/resource slides support these scheduled steps and do not add instructional time.</a:t>
-            </a:r>
-          </a:p>
-          <a:p>
-            <a:r>
-              <a:t>SLIDE PLACEMENT: Practise, 2:55 PM–3:15 PM. All slides with this phase share these 20 minutes; do not restart the time allocation for each slide.</a:t>
+              <a:t>Keep activities within the allocated phase time.</a:t>
+            </a:r>
+          </a:p>
+          <a:p>
+            <a:r>
+              <a:t>PHASE TIMING: Practise, 2:55 PM–3:15 PM. All slides with this phase share these 20 minutes; do not restart the time allocation for each slide.</a:t>
             </a:r>
           </a:p>
           <a:p/>
@@ -12395,11 +10905,6 @@
               <a:t>Materials/check: Notebook; calculator</a:t>
             </a:r>
           </a:p>
-          <a:p>
-            <a:r>
-              <a:t>Source: 'Math Week 3'!A42:F42</a:t>
-            </a:r>
-          </a:p>
           <a:p/>
           <a:p>
             <a:r>
@@ -12421,11 +10926,6 @@
               <a:t>Materials/check: Identify support needs</a:t>
             </a:r>
           </a:p>
-          <a:p>
-            <a:r>
-              <a:t>Source: 'Math Week 3'!A43:F43</a:t>
-            </a:r>
-          </a:p>
           <a:p/>
           <a:p>
             <a:r>
@@ -12447,11 +10947,6 @@
               <a:t>Materials/check: Textbook; worked example</a:t>
             </a:r>
           </a:p>
-          <a:p>
-            <a:r>
-              <a:t>Source: 'Math Week 3'!A44:F44</a:t>
-            </a:r>
-          </a:p>
           <a:p/>
           <a:p>
             <a:r>
@@ -12473,11 +10968,6 @@
               <a:t>Materials/check: Exercise Book; tool above</a:t>
             </a:r>
           </a:p>
-          <a:p>
-            <a:r>
-              <a:t>Source: 'Math Week 3'!A45:F45</a:t>
-            </a:r>
-          </a:p>
           <a:p/>
           <a:p>
             <a:r>
@@ -12499,11 +10989,6 @@
               <a:t>Materials/check: Paper first; tool second</a:t>
             </a:r>
           </a:p>
-          <a:p>
-            <a:r>
-              <a:t>Source: 'Math Week 3'!A46:F46</a:t>
-            </a:r>
-          </a:p>
           <a:p/>
           <a:p>
             <a:r>
@@ -12525,11 +11010,6 @@
               <a:t>Materials/check: Teacher answers below</a:t>
             </a:r>
           </a:p>
-          <a:p>
-            <a:r>
-              <a:t>Source: 'Math Week 3'!A47:F47</a:t>
-            </a:r>
-          </a:p>
           <a:p/>
           <a:p>
             <a:r>
@@ -12551,11 +11031,6 @@
               <a:t>Materials/check: Notebook / error log</a:t>
             </a:r>
           </a:p>
-          <a:p>
-            <a:r>
-              <a:t>Source: 'Math Week 3'!A48:F48</a:t>
-            </a:r>
-          </a:p>
           <a:p/>
           <a:p>
             <a:r>
@@ -12576,17 +11051,12 @@
           <a:p/>
           <a:p>
             <a:r>
-              <a:t>Sources: 'Math Week 3'!A11:E11; 'Carpentry Schedule'!B29; 'Math Week 3'!A36</a:t>
-            </a:r>
-          </a:p>
-          <a:p>
-            <a:r>
-              <a:t>Navigation/resource slides support these scheduled steps and do not add instructional time.</a:t>
-            </a:r>
-          </a:p>
-          <a:p>
-            <a:r>
-              <a:t>SLIDE PLACEMENT: Check, 3:15 PM–3:25 PM. All slides with this phase share these 10 minutes; do not restart the time allocation for each slide.</a:t>
+              <a:t>Keep activities within the allocated phase time.</a:t>
+            </a:r>
+          </a:p>
+          <a:p>
+            <a:r>
+              <a:t>PHASE TIMING: Check, 3:15 PM–3:25 PM. All slides with this phase share these 10 minutes; do not restart the time allocation for each slide.</a:t>
             </a:r>
           </a:p>
         </p:txBody>
@@ -12715,11 +11185,6 @@
               <a:t>Materials/check: Notebook; calculator</a:t>
             </a:r>
           </a:p>
-          <a:p>
-            <a:r>
-              <a:t>Source: 'Math Week 3'!A42:F42</a:t>
-            </a:r>
-          </a:p>
           <a:p/>
           <a:p>
             <a:r>
@@ -12741,11 +11206,6 @@
               <a:t>Materials/check: Identify support needs</a:t>
             </a:r>
           </a:p>
-          <a:p>
-            <a:r>
-              <a:t>Source: 'Math Week 3'!A43:F43</a:t>
-            </a:r>
-          </a:p>
           <a:p/>
           <a:p>
             <a:r>
@@ -12767,11 +11227,6 @@
               <a:t>Materials/check: Textbook; worked example</a:t>
             </a:r>
           </a:p>
-          <a:p>
-            <a:r>
-              <a:t>Source: 'Math Week 3'!A44:F44</a:t>
-            </a:r>
-          </a:p>
           <a:p/>
           <a:p>
             <a:r>
@@ -12793,11 +11248,6 @@
               <a:t>Materials/check: Exercise Book; tool above</a:t>
             </a:r>
           </a:p>
-          <a:p>
-            <a:r>
-              <a:t>Source: 'Math Week 3'!A45:F45</a:t>
-            </a:r>
-          </a:p>
           <a:p/>
           <a:p>
             <a:r>
@@ -12819,11 +11269,6 @@
               <a:t>Materials/check: Paper first; tool second</a:t>
             </a:r>
           </a:p>
-          <a:p>
-            <a:r>
-              <a:t>Source: 'Math Week 3'!A46:F46</a:t>
-            </a:r>
-          </a:p>
           <a:p/>
           <a:p>
             <a:r>
@@ -12845,11 +11290,6 @@
               <a:t>Materials/check: Teacher answers below</a:t>
             </a:r>
           </a:p>
-          <a:p>
-            <a:r>
-              <a:t>Source: 'Math Week 3'!A47:F47</a:t>
-            </a:r>
-          </a:p>
           <a:p/>
           <a:p>
             <a:r>
@@ -12871,11 +11311,6 @@
               <a:t>Materials/check: Notebook / error log</a:t>
             </a:r>
           </a:p>
-          <a:p>
-            <a:r>
-              <a:t>Source: 'Math Week 3'!A48:F48</a:t>
-            </a:r>
-          </a:p>
           <a:p/>
           <a:p>
             <a:r>
@@ -12896,17 +11331,12 @@
           <a:p/>
           <a:p>
             <a:r>
-              <a:t>Sources: 'Math Week 3'!A11:E11; 'Carpentry Schedule'!B29; 'Math Week 3'!A36</a:t>
-            </a:r>
-          </a:p>
-          <a:p>
-            <a:r>
-              <a:t>Navigation/resource slides support these scheduled steps and do not add instructional time.</a:t>
-            </a:r>
-          </a:p>
-          <a:p>
-            <a:r>
-              <a:t>SLIDE PLACEMENT: Check, 3:15 PM–3:25 PM. All slides with this phase share these 10 minutes; do not restart the time allocation for each slide.</a:t>
+              <a:t>Keep activities within the allocated phase time.</a:t>
+            </a:r>
+          </a:p>
+          <a:p>
+            <a:r>
+              <a:t>PHASE TIMING: Check, 3:15 PM–3:25 PM. All slides with this phase share these 10 minutes; do not restart the time allocation for each slide.</a:t>
             </a:r>
           </a:p>
           <a:p/>
@@ -13061,11 +11491,6 @@
               <a:t>Materials/check: Notebook; calculator</a:t>
             </a:r>
           </a:p>
-          <a:p>
-            <a:r>
-              <a:t>Source: 'Math Week 3'!A42:F42</a:t>
-            </a:r>
-          </a:p>
           <a:p/>
           <a:p>
             <a:r>
@@ -13087,11 +11512,6 @@
               <a:t>Materials/check: Identify support needs</a:t>
             </a:r>
           </a:p>
-          <a:p>
-            <a:r>
-              <a:t>Source: 'Math Week 3'!A43:F43</a:t>
-            </a:r>
-          </a:p>
           <a:p/>
           <a:p>
             <a:r>
@@ -13113,11 +11533,6 @@
               <a:t>Materials/check: Textbook; worked example</a:t>
             </a:r>
           </a:p>
-          <a:p>
-            <a:r>
-              <a:t>Source: 'Math Week 3'!A44:F44</a:t>
-            </a:r>
-          </a:p>
           <a:p/>
           <a:p>
             <a:r>
@@ -13139,11 +11554,6 @@
               <a:t>Materials/check: Exercise Book; tool above</a:t>
             </a:r>
           </a:p>
-          <a:p>
-            <a:r>
-              <a:t>Source: 'Math Week 3'!A45:F45</a:t>
-            </a:r>
-          </a:p>
           <a:p/>
           <a:p>
             <a:r>
@@ -13165,11 +11575,6 @@
               <a:t>Materials/check: Paper first; tool second</a:t>
             </a:r>
           </a:p>
-          <a:p>
-            <a:r>
-              <a:t>Source: 'Math Week 3'!A46:F46</a:t>
-            </a:r>
-          </a:p>
           <a:p/>
           <a:p>
             <a:r>
@@ -13191,11 +11596,6 @@
               <a:t>Materials/check: Teacher answers below</a:t>
             </a:r>
           </a:p>
-          <a:p>
-            <a:r>
-              <a:t>Source: 'Math Week 3'!A47:F47</a:t>
-            </a:r>
-          </a:p>
           <a:p/>
           <a:p>
             <a:r>
@@ -13217,11 +11617,6 @@
               <a:t>Materials/check: Notebook / error log</a:t>
             </a:r>
           </a:p>
-          <a:p>
-            <a:r>
-              <a:t>Source: 'Math Week 3'!A48:F48</a:t>
-            </a:r>
-          </a:p>
           <a:p/>
           <a:p>
             <a:r>
@@ -13242,17 +11637,12 @@
           <a:p/>
           <a:p>
             <a:r>
-              <a:t>Sources: 'Math Week 3'!A11:E11; 'Carpentry Schedule'!B29; 'Math Week 3'!A36</a:t>
-            </a:r>
-          </a:p>
-          <a:p>
-            <a:r>
-              <a:t>Navigation/resource slides support these scheduled steps and do not add instructional time.</a:t>
-            </a:r>
-          </a:p>
-          <a:p>
-            <a:r>
-              <a:t>SLIDE PLACEMENT: Check, 3:15 PM–3:25 PM. All slides with this phase share these 10 minutes; do not restart the time allocation for each slide.</a:t>
+              <a:t>Keep activities within the allocated phase time.</a:t>
+            </a:r>
+          </a:p>
+          <a:p>
+            <a:r>
+              <a:t>PHASE TIMING: Check, 3:15 PM–3:25 PM. All slides with this phase share these 10 minutes; do not restart the time allocation for each slide.</a:t>
             </a:r>
           </a:p>
           <a:p/>
@@ -13407,11 +11797,6 @@
               <a:t>Materials/check: Notebook; calculator</a:t>
             </a:r>
           </a:p>
-          <a:p>
-            <a:r>
-              <a:t>Source: 'Math Week 3'!A42:F42</a:t>
-            </a:r>
-          </a:p>
           <a:p/>
           <a:p>
             <a:r>
@@ -13433,11 +11818,6 @@
               <a:t>Materials/check: Identify support needs</a:t>
             </a:r>
           </a:p>
-          <a:p>
-            <a:r>
-              <a:t>Source: 'Math Week 3'!A43:F43</a:t>
-            </a:r>
-          </a:p>
           <a:p/>
           <a:p>
             <a:r>
@@ -13459,11 +11839,6 @@
               <a:t>Materials/check: Textbook; worked example</a:t>
             </a:r>
           </a:p>
-          <a:p>
-            <a:r>
-              <a:t>Source: 'Math Week 3'!A44:F44</a:t>
-            </a:r>
-          </a:p>
           <a:p/>
           <a:p>
             <a:r>
@@ -13485,11 +11860,6 @@
               <a:t>Materials/check: Exercise Book; tool above</a:t>
             </a:r>
           </a:p>
-          <a:p>
-            <a:r>
-              <a:t>Source: 'Math Week 3'!A45:F45</a:t>
-            </a:r>
-          </a:p>
           <a:p/>
           <a:p>
             <a:r>
@@ -13511,11 +11881,6 @@
               <a:t>Materials/check: Paper first; tool second</a:t>
             </a:r>
           </a:p>
-          <a:p>
-            <a:r>
-              <a:t>Source: 'Math Week 3'!A46:F46</a:t>
-            </a:r>
-          </a:p>
           <a:p/>
           <a:p>
             <a:r>
@@ -13537,11 +11902,6 @@
               <a:t>Materials/check: Teacher answers below</a:t>
             </a:r>
           </a:p>
-          <a:p>
-            <a:r>
-              <a:t>Source: 'Math Week 3'!A47:F47</a:t>
-            </a:r>
-          </a:p>
           <a:p/>
           <a:p>
             <a:r>
@@ -13563,11 +11923,6 @@
               <a:t>Materials/check: Notebook / error log</a:t>
             </a:r>
           </a:p>
-          <a:p>
-            <a:r>
-              <a:t>Source: 'Math Week 3'!A48:F48</a:t>
-            </a:r>
-          </a:p>
           <a:p/>
           <a:p>
             <a:r>
@@ -13588,17 +11943,12 @@
           <a:p/>
           <a:p>
             <a:r>
-              <a:t>Sources: 'Math Week 3'!A11:E11; 'Carpentry Schedule'!B29; 'Math Week 3'!A36</a:t>
-            </a:r>
-          </a:p>
-          <a:p>
-            <a:r>
-              <a:t>Navigation/resource slides support these scheduled steps and do not add instructional time.</a:t>
-            </a:r>
-          </a:p>
-          <a:p>
-            <a:r>
-              <a:t>SLIDE PLACEMENT: Wrap up, 3:25 PM–3:30 PM. All slides with this phase share these 5 minutes; do not restart the time allocation for each slide.</a:t>
+              <a:t>Keep activities within the allocated phase time.</a:t>
+            </a:r>
+          </a:p>
+          <a:p>
+            <a:r>
+              <a:t>PHASE TIMING: Wrap up, 3:25 PM–3:30 PM. All slides with this phase share these 5 minutes; do not restart the time allocation for each slide.</a:t>
             </a:r>
           </a:p>
           <a:p/>
@@ -13733,11 +12083,6 @@
               <a:t>Materials/check: Notebook; calculator</a:t>
             </a:r>
           </a:p>
-          <a:p>
-            <a:r>
-              <a:t>Source: 'Math Week 3'!A25:F25</a:t>
-            </a:r>
-          </a:p>
           <a:p/>
           <a:p>
             <a:r>
@@ -13759,11 +12104,6 @@
               <a:t>Materials/check: Identify support needs</a:t>
             </a:r>
           </a:p>
-          <a:p>
-            <a:r>
-              <a:t>Source: 'Math Week 3'!A26:F26</a:t>
-            </a:r>
-          </a:p>
           <a:p/>
           <a:p>
             <a:r>
@@ -13785,11 +12125,6 @@
               <a:t>Materials/check: Textbook; worked example</a:t>
             </a:r>
           </a:p>
-          <a:p>
-            <a:r>
-              <a:t>Source: 'Math Week 3'!A27:F27</a:t>
-            </a:r>
-          </a:p>
           <a:p/>
           <a:p>
             <a:r>
@@ -13811,11 +12146,6 @@
               <a:t>Materials/check: Exercise Book; tool above</a:t>
             </a:r>
           </a:p>
-          <a:p>
-            <a:r>
-              <a:t>Source: 'Math Week 3'!A28:F28</a:t>
-            </a:r>
-          </a:p>
           <a:p/>
           <a:p>
             <a:r>
@@ -13837,11 +12167,6 @@
               <a:t>Materials/check: Paper first; tool second</a:t>
             </a:r>
           </a:p>
-          <a:p>
-            <a:r>
-              <a:t>Source: 'Math Week 3'!A29:F29</a:t>
-            </a:r>
-          </a:p>
           <a:p/>
           <a:p>
             <a:r>
@@ -13863,11 +12188,6 @@
               <a:t>Materials/check: Teacher answers below</a:t>
             </a:r>
           </a:p>
-          <a:p>
-            <a:r>
-              <a:t>Source: 'Math Week 3'!A30:F30</a:t>
-            </a:r>
-          </a:p>
           <a:p/>
           <a:p>
             <a:r>
@@ -13889,11 +12209,6 @@
               <a:t>Materials/check: Notebook / error log</a:t>
             </a:r>
           </a:p>
-          <a:p>
-            <a:r>
-              <a:t>Source: 'Math Week 3'!A31:F31</a:t>
-            </a:r>
-          </a:p>
           <a:p/>
           <a:p>
             <a:r>
@@ -13914,17 +12229,12 @@
           <a:p/>
           <a:p>
             <a:r>
-              <a:t>Sources: 'Math Week 3'!A10:E10; 'Carpentry Schedule'!B27; 'Math Week 3'!A19</a:t>
-            </a:r>
-          </a:p>
-          <a:p>
-            <a:r>
-              <a:t>Navigation/resource slides support these scheduled steps and do not add instructional time.</a:t>
-            </a:r>
-          </a:p>
-          <a:p>
-            <a:r>
-              <a:t>Worked teaching example retained from original slide 49. Use within the scheduled Teach block.</a:t>
+              <a:t>Keep activities within the allocated phase time.</a:t>
+            </a:r>
+          </a:p>
+          <a:p>
+            <a:r>
+              <a:t>Use this worked example within the scheduled Teach block.</a:t>
             </a:r>
           </a:p>
         </p:txBody>
@@ -14069,11 +12379,6 @@
               <a:t>Materials/check: Notebook; calculator</a:t>
             </a:r>
           </a:p>
-          <a:p>
-            <a:r>
-              <a:t>Source: 'Math Week 3'!A42:F42</a:t>
-            </a:r>
-          </a:p>
           <a:p/>
           <a:p>
             <a:r>
@@ -14095,11 +12400,6 @@
               <a:t>Materials/check: Identify support needs</a:t>
             </a:r>
           </a:p>
-          <a:p>
-            <a:r>
-              <a:t>Source: 'Math Week 3'!A43:F43</a:t>
-            </a:r>
-          </a:p>
           <a:p/>
           <a:p>
             <a:r>
@@ -14121,11 +12421,6 @@
               <a:t>Materials/check: Textbook; worked example</a:t>
             </a:r>
           </a:p>
-          <a:p>
-            <a:r>
-              <a:t>Source: 'Math Week 3'!A44:F44</a:t>
-            </a:r>
-          </a:p>
           <a:p/>
           <a:p>
             <a:r>
@@ -14147,11 +12442,6 @@
               <a:t>Materials/check: Exercise Book; tool above</a:t>
             </a:r>
           </a:p>
-          <a:p>
-            <a:r>
-              <a:t>Source: 'Math Week 3'!A45:F45</a:t>
-            </a:r>
-          </a:p>
           <a:p/>
           <a:p>
             <a:r>
@@ -14173,11 +12463,6 @@
               <a:t>Materials/check: Paper first; tool second</a:t>
             </a:r>
           </a:p>
-          <a:p>
-            <a:r>
-              <a:t>Source: 'Math Week 3'!A46:F46</a:t>
-            </a:r>
-          </a:p>
           <a:p/>
           <a:p>
             <a:r>
@@ -14199,11 +12484,6 @@
               <a:t>Materials/check: Teacher answers below</a:t>
             </a:r>
           </a:p>
-          <a:p>
-            <a:r>
-              <a:t>Source: 'Math Week 3'!A47:F47</a:t>
-            </a:r>
-          </a:p>
           <a:p/>
           <a:p>
             <a:r>
@@ -14225,11 +12505,6 @@
               <a:t>Materials/check: Notebook / error log</a:t>
             </a:r>
           </a:p>
-          <a:p>
-            <a:r>
-              <a:t>Source: 'Math Week 3'!A48:F48</a:t>
-            </a:r>
-          </a:p>
           <a:p/>
           <a:p>
             <a:r>
@@ -14250,17 +12525,12 @@
           <a:p/>
           <a:p>
             <a:r>
-              <a:t>Sources: 'Math Week 3'!A11:E11; 'Carpentry Schedule'!B29; 'Math Week 3'!A36</a:t>
-            </a:r>
-          </a:p>
-          <a:p>
-            <a:r>
-              <a:t>Navigation/resource slides support these scheduled steps and do not add instructional time.</a:t>
-            </a:r>
-          </a:p>
-          <a:p>
-            <a:r>
-              <a:t>Worked teaching example retained from original slide 52. Use within the scheduled Teach block.</a:t>
+              <a:t>Keep activities within the allocated phase time.</a:t>
+            </a:r>
+          </a:p>
+          <a:p>
+            <a:r>
+              <a:t>Use this worked example within the scheduled Teach block.</a:t>
             </a:r>
           </a:p>
         </p:txBody>

--- a/carpentry/intake-141/PowerPoint/Day-08_2026-11-09_Week-3.pptx
+++ b/carpentry/intake-141/PowerPoint/Day-08_2026-11-09_Week-3.pptx
@@ -4181,407 +4181,6 @@
       </p:sp>
       <p:sp>
         <p:nvSpPr>
-          <p:cNvPr id="21" name="Rectangle 20"/>
-          <p:cNvSpPr/>
-          <p:nvPr/>
-        </p:nvSpPr>
-        <p:spPr>
-          <a:xfrm>
-            <a:off x="9308592" y="868680"/>
-            <a:ext cx="2889504" cy="5413248"/>
-          </a:xfrm>
-          <a:prstGeom prst="rect">
-            <a:avLst/>
-          </a:prstGeom>
-          <a:solidFill>
-            <a:srgbClr val="5A1018"/>
-          </a:solidFill>
-          <a:ln>
-            <a:noFill/>
-          </a:ln>
-        </p:spPr>
-        <p:style>
-          <a:lnRef idx="1">
-            <a:schemeClr val="accent1"/>
-          </a:lnRef>
-          <a:fillRef idx="3">
-            <a:schemeClr val="accent1"/>
-          </a:fillRef>
-          <a:effectRef idx="2">
-            <a:schemeClr val="accent1"/>
-          </a:effectRef>
-          <a:fontRef idx="minor">
-            <a:schemeClr val="lt1"/>
-          </a:fontRef>
-        </p:style>
-        <p:txBody>
-          <a:bodyPr rtlCol="0" anchor="ctr"/>
-          <a:lstStyle/>
-          <a:p>
-            <a:pPr algn="ctr"/>
-          </a:p>
-        </p:txBody>
-      </p:sp>
-      <p:sp>
-        <p:nvSpPr>
-          <p:cNvPr id="22" name="Rectangle 21"/>
-          <p:cNvSpPr/>
-          <p:nvPr/>
-        </p:nvSpPr>
-        <p:spPr>
-          <a:xfrm>
-            <a:off x="9308592" y="969264"/>
-            <a:ext cx="100584" cy="4251960"/>
-          </a:xfrm>
-          <a:prstGeom prst="rect">
-            <a:avLst/>
-          </a:prstGeom>
-          <a:solidFill>
-            <a:srgbClr val="C60016"/>
-          </a:solidFill>
-          <a:ln>
-            <a:noFill/>
-          </a:ln>
-        </p:spPr>
-        <p:style>
-          <a:lnRef idx="1">
-            <a:schemeClr val="accent1"/>
-          </a:lnRef>
-          <a:fillRef idx="3">
-            <a:schemeClr val="accent1"/>
-          </a:fillRef>
-          <a:effectRef idx="2">
-            <a:schemeClr val="accent1"/>
-          </a:effectRef>
-          <a:fontRef idx="minor">
-            <a:schemeClr val="lt1"/>
-          </a:fontRef>
-        </p:style>
-        <p:txBody>
-          <a:bodyPr rtlCol="0" anchor="ctr"/>
-          <a:lstStyle/>
-          <a:p>
-            <a:pPr algn="ctr"/>
-          </a:p>
-        </p:txBody>
-      </p:sp>
-      <p:cxnSp>
-        <p:nvCxnSpPr>
-          <p:cNvPr id="23" name="Connector 22"/>
-          <p:cNvCxnSpPr/>
-          <p:nvPr/>
-        </p:nvCxnSpPr>
-        <p:spPr>
-          <a:xfrm>
-            <a:off x="9692640" y="1280160"/>
-            <a:ext cx="2066544" cy="0"/>
-          </a:xfrm>
-          <a:prstGeom prst="line">
-            <a:avLst/>
-          </a:prstGeom>
-          <a:ln w="7620">
-            <a:solidFill>
-              <a:srgbClr val="7E2630"/>
-            </a:solidFill>
-          </a:ln>
-        </p:spPr>
-        <p:style>
-          <a:lnRef idx="2">
-            <a:schemeClr val="accent1"/>
-          </a:lnRef>
-          <a:fillRef idx="0">
-            <a:schemeClr val="accent1"/>
-          </a:fillRef>
-          <a:effectRef idx="1">
-            <a:schemeClr val="accent1"/>
-          </a:effectRef>
-          <a:fontRef idx="minor">
-            <a:schemeClr val="tx1"/>
-          </a:fontRef>
-        </p:style>
-      </p:cxnSp>
-      <p:cxnSp>
-        <p:nvCxnSpPr>
-          <p:cNvPr id="24" name="Connector 23"/>
-          <p:cNvCxnSpPr/>
-          <p:nvPr/>
-        </p:nvCxnSpPr>
-        <p:spPr>
-          <a:xfrm>
-            <a:off x="9692640" y="1783080"/>
-            <a:ext cx="2066544" cy="0"/>
-          </a:xfrm>
-          <a:prstGeom prst="line">
-            <a:avLst/>
-          </a:prstGeom>
-          <a:ln w="7620">
-            <a:solidFill>
-              <a:srgbClr val="7E2630"/>
-            </a:solidFill>
-          </a:ln>
-        </p:spPr>
-        <p:style>
-          <a:lnRef idx="2">
-            <a:schemeClr val="accent1"/>
-          </a:lnRef>
-          <a:fillRef idx="0">
-            <a:schemeClr val="accent1"/>
-          </a:fillRef>
-          <a:effectRef idx="1">
-            <a:schemeClr val="accent1"/>
-          </a:effectRef>
-          <a:fontRef idx="minor">
-            <a:schemeClr val="tx1"/>
-          </a:fontRef>
-        </p:style>
-      </p:cxnSp>
-      <p:cxnSp>
-        <p:nvCxnSpPr>
-          <p:cNvPr id="25" name="Connector 24"/>
-          <p:cNvCxnSpPr/>
-          <p:nvPr/>
-        </p:nvCxnSpPr>
-        <p:spPr>
-          <a:xfrm>
-            <a:off x="9692640" y="2286000"/>
-            <a:ext cx="2066544" cy="0"/>
-          </a:xfrm>
-          <a:prstGeom prst="line">
-            <a:avLst/>
-          </a:prstGeom>
-          <a:ln w="7620">
-            <a:solidFill>
-              <a:srgbClr val="7E2630"/>
-            </a:solidFill>
-          </a:ln>
-        </p:spPr>
-        <p:style>
-          <a:lnRef idx="2">
-            <a:schemeClr val="accent1"/>
-          </a:lnRef>
-          <a:fillRef idx="0">
-            <a:schemeClr val="accent1"/>
-          </a:fillRef>
-          <a:effectRef idx="1">
-            <a:schemeClr val="accent1"/>
-          </a:effectRef>
-          <a:fontRef idx="minor">
-            <a:schemeClr val="tx1"/>
-          </a:fontRef>
-        </p:style>
-      </p:cxnSp>
-      <p:cxnSp>
-        <p:nvCxnSpPr>
-          <p:cNvPr id="26" name="Connector 25"/>
-          <p:cNvCxnSpPr/>
-          <p:nvPr/>
-        </p:nvCxnSpPr>
-        <p:spPr>
-          <a:xfrm>
-            <a:off x="9692640" y="2788920"/>
-            <a:ext cx="2066544" cy="0"/>
-          </a:xfrm>
-          <a:prstGeom prst="line">
-            <a:avLst/>
-          </a:prstGeom>
-          <a:ln w="7620">
-            <a:solidFill>
-              <a:srgbClr val="7E2630"/>
-            </a:solidFill>
-          </a:ln>
-        </p:spPr>
-        <p:style>
-          <a:lnRef idx="2">
-            <a:schemeClr val="accent1"/>
-          </a:lnRef>
-          <a:fillRef idx="0">
-            <a:schemeClr val="accent1"/>
-          </a:fillRef>
-          <a:effectRef idx="1">
-            <a:schemeClr val="accent1"/>
-          </a:effectRef>
-          <a:fontRef idx="minor">
-            <a:schemeClr val="tx1"/>
-          </a:fontRef>
-        </p:style>
-      </p:cxnSp>
-      <p:cxnSp>
-        <p:nvCxnSpPr>
-          <p:cNvPr id="27" name="Connector 26"/>
-          <p:cNvCxnSpPr/>
-          <p:nvPr/>
-        </p:nvCxnSpPr>
-        <p:spPr>
-          <a:xfrm>
-            <a:off x="9692640" y="3291840"/>
-            <a:ext cx="2066544" cy="0"/>
-          </a:xfrm>
-          <a:prstGeom prst="line">
-            <a:avLst/>
-          </a:prstGeom>
-          <a:ln w="7620">
-            <a:solidFill>
-              <a:srgbClr val="7E2630"/>
-            </a:solidFill>
-          </a:ln>
-        </p:spPr>
-        <p:style>
-          <a:lnRef idx="2">
-            <a:schemeClr val="accent1"/>
-          </a:lnRef>
-          <a:fillRef idx="0">
-            <a:schemeClr val="accent1"/>
-          </a:fillRef>
-          <a:effectRef idx="1">
-            <a:schemeClr val="accent1"/>
-          </a:effectRef>
-          <a:fontRef idx="minor">
-            <a:schemeClr val="tx1"/>
-          </a:fontRef>
-        </p:style>
-      </p:cxnSp>
-      <p:cxnSp>
-        <p:nvCxnSpPr>
-          <p:cNvPr id="28" name="Connector 27"/>
-          <p:cNvCxnSpPr/>
-          <p:nvPr/>
-        </p:nvCxnSpPr>
-        <p:spPr>
-          <a:xfrm>
-            <a:off x="9692640" y="3794760"/>
-            <a:ext cx="2066544" cy="0"/>
-          </a:xfrm>
-          <a:prstGeom prst="line">
-            <a:avLst/>
-          </a:prstGeom>
-          <a:ln w="7620">
-            <a:solidFill>
-              <a:srgbClr val="7E2630"/>
-            </a:solidFill>
-          </a:ln>
-        </p:spPr>
-        <p:style>
-          <a:lnRef idx="2">
-            <a:schemeClr val="accent1"/>
-          </a:lnRef>
-          <a:fillRef idx="0">
-            <a:schemeClr val="accent1"/>
-          </a:fillRef>
-          <a:effectRef idx="1">
-            <a:schemeClr val="accent1"/>
-          </a:effectRef>
-          <a:fontRef idx="minor">
-            <a:schemeClr val="tx1"/>
-          </a:fontRef>
-        </p:style>
-      </p:cxnSp>
-      <p:cxnSp>
-        <p:nvCxnSpPr>
-          <p:cNvPr id="29" name="Connector 28"/>
-          <p:cNvCxnSpPr/>
-          <p:nvPr/>
-        </p:nvCxnSpPr>
-        <p:spPr>
-          <a:xfrm>
-            <a:off x="9692640" y="4297680"/>
-            <a:ext cx="2066544" cy="0"/>
-          </a:xfrm>
-          <a:prstGeom prst="line">
-            <a:avLst/>
-          </a:prstGeom>
-          <a:ln w="7620">
-            <a:solidFill>
-              <a:srgbClr val="7E2630"/>
-            </a:solidFill>
-          </a:ln>
-        </p:spPr>
-        <p:style>
-          <a:lnRef idx="2">
-            <a:schemeClr val="accent1"/>
-          </a:lnRef>
-          <a:fillRef idx="0">
-            <a:schemeClr val="accent1"/>
-          </a:fillRef>
-          <a:effectRef idx="1">
-            <a:schemeClr val="accent1"/>
-          </a:effectRef>
-          <a:fontRef idx="minor">
-            <a:schemeClr val="tx1"/>
-          </a:fontRef>
-        </p:style>
-      </p:cxnSp>
-      <p:cxnSp>
-        <p:nvCxnSpPr>
-          <p:cNvPr id="30" name="Connector 29"/>
-          <p:cNvCxnSpPr/>
-          <p:nvPr/>
-        </p:nvCxnSpPr>
-        <p:spPr>
-          <a:xfrm>
-            <a:off x="9692640" y="4800600"/>
-            <a:ext cx="2066544" cy="0"/>
-          </a:xfrm>
-          <a:prstGeom prst="line">
-            <a:avLst/>
-          </a:prstGeom>
-          <a:ln w="7620">
-            <a:solidFill>
-              <a:srgbClr val="7E2630"/>
-            </a:solidFill>
-          </a:ln>
-        </p:spPr>
-        <p:style>
-          <a:lnRef idx="2">
-            <a:schemeClr val="accent1"/>
-          </a:lnRef>
-          <a:fillRef idx="0">
-            <a:schemeClr val="accent1"/>
-          </a:fillRef>
-          <a:effectRef idx="1">
-            <a:schemeClr val="accent1"/>
-          </a:effectRef>
-          <a:fontRef idx="minor">
-            <a:schemeClr val="tx1"/>
-          </a:fontRef>
-        </p:style>
-      </p:cxnSp>
-      <p:cxnSp>
-        <p:nvCxnSpPr>
-          <p:cNvPr id="31" name="Connector 30"/>
-          <p:cNvCxnSpPr/>
-          <p:nvPr/>
-        </p:nvCxnSpPr>
-        <p:spPr>
-          <a:xfrm>
-            <a:off x="9692640" y="5303520"/>
-            <a:ext cx="2066544" cy="0"/>
-          </a:xfrm>
-          <a:prstGeom prst="line">
-            <a:avLst/>
-          </a:prstGeom>
-          <a:ln w="7620">
-            <a:solidFill>
-              <a:srgbClr val="7E2630"/>
-            </a:solidFill>
-          </a:ln>
-        </p:spPr>
-        <p:style>
-          <a:lnRef idx="2">
-            <a:schemeClr val="accent1"/>
-          </a:lnRef>
-          <a:fillRef idx="0">
-            <a:schemeClr val="accent1"/>
-          </a:fillRef>
-          <a:effectRef idx="1">
-            <a:schemeClr val="accent1"/>
-          </a:effectRef>
-          <a:fontRef idx="minor">
-            <a:schemeClr val="tx1"/>
-          </a:fontRef>
-        </p:style>
-      </p:cxnSp>
-      <p:sp>
-        <p:nvSpPr>
           <p:cNvPr id="32" name="Rounded Rectangle 31"/>
           <p:cNvSpPr/>
           <p:nvPr/>
@@ -4627,49 +4226,6 @@
       </p:sp>
       <p:sp>
         <p:nvSpPr>
-          <p:cNvPr id="33" name="Rectangle 32"/>
-          <p:cNvSpPr/>
-          <p:nvPr/>
-        </p:nvSpPr>
-        <p:spPr>
-          <a:xfrm>
-            <a:off x="585216" y="2587752"/>
-            <a:ext cx="82296" cy="978408"/>
-          </a:xfrm>
-          <a:prstGeom prst="rect">
-            <a:avLst/>
-          </a:prstGeom>
-          <a:solidFill>
-            <a:srgbClr val="FFBC00"/>
-          </a:solidFill>
-          <a:ln>
-            <a:noFill/>
-          </a:ln>
-        </p:spPr>
-        <p:style>
-          <a:lnRef idx="1">
-            <a:schemeClr val="accent1"/>
-          </a:lnRef>
-          <a:fillRef idx="3">
-            <a:schemeClr val="accent1"/>
-          </a:fillRef>
-          <a:effectRef idx="2">
-            <a:schemeClr val="accent1"/>
-          </a:effectRef>
-          <a:fontRef idx="minor">
-            <a:schemeClr val="lt1"/>
-          </a:fontRef>
-        </p:style>
-        <p:txBody>
-          <a:bodyPr rtlCol="0" anchor="ctr"/>
-          <a:lstStyle/>
-          <a:p>
-            <a:pPr algn="ctr"/>
-          </a:p>
-        </p:txBody>
-      </p:sp>
-      <p:sp>
-        <p:nvSpPr>
           <p:cNvPr id="34" name="Rounded Rectangle 33"/>
           <p:cNvSpPr/>
           <p:nvPr/>
@@ -4715,49 +4271,6 @@
       </p:sp>
       <p:sp>
         <p:nvSpPr>
-          <p:cNvPr id="35" name="Rectangle 34"/>
-          <p:cNvSpPr/>
-          <p:nvPr/>
-        </p:nvSpPr>
-        <p:spPr>
-          <a:xfrm>
-            <a:off x="585216" y="3685032"/>
-            <a:ext cx="82296" cy="978408"/>
-          </a:xfrm>
-          <a:prstGeom prst="rect">
-            <a:avLst/>
-          </a:prstGeom>
-          <a:solidFill>
-            <a:srgbClr val="C60016"/>
-          </a:solidFill>
-          <a:ln>
-            <a:noFill/>
-          </a:ln>
-        </p:spPr>
-        <p:style>
-          <a:lnRef idx="1">
-            <a:schemeClr val="accent1"/>
-          </a:lnRef>
-          <a:fillRef idx="3">
-            <a:schemeClr val="accent1"/>
-          </a:fillRef>
-          <a:effectRef idx="2">
-            <a:schemeClr val="accent1"/>
-          </a:effectRef>
-          <a:fontRef idx="minor">
-            <a:schemeClr val="lt1"/>
-          </a:fontRef>
-        </p:style>
-        <p:txBody>
-          <a:bodyPr rtlCol="0" anchor="ctr"/>
-          <a:lstStyle/>
-          <a:p>
-            <a:pPr algn="ctr"/>
-          </a:p>
-        </p:txBody>
-      </p:sp>
-      <p:sp>
-        <p:nvSpPr>
           <p:cNvPr id="2" name="TextBox 1"/>
           <p:cNvSpPr txBox="1"/>
           <p:nvPr/>
@@ -4897,62 +4410,6 @@
               </a:rPr>
               <a:t>November 9, 2026</a:t>
             </a:r>
-          </a:p>
-        </p:txBody>
-      </p:sp>
-      <p:sp>
-        <p:nvSpPr>
-          <p:cNvPr id="5" name="Rectangle 4"/>
-          <p:cNvSpPr/>
-          <p:nvPr/>
-        </p:nvSpPr>
-        <p:spPr>
-          <a:xfrm>
-            <a:off x="612648" y="2633472"/>
-            <a:ext cx="109728" cy="2194560"/>
-          </a:xfrm>
-          <a:prstGeom prst="rect">
-            <a:avLst/>
-          </a:prstGeom>
-          <a:solidFill>
-            <a:srgbClr val="D2181F"/>
-          </a:solidFill>
-          <a:ln>
-            <a:noFill/>
-          </a:ln>
-        </p:spPr>
-        <p:style>
-          <a:lnRef idx="1">
-            <a:schemeClr val="accent1"/>
-          </a:lnRef>
-          <a:fillRef idx="3">
-            <a:schemeClr val="accent1"/>
-          </a:fillRef>
-          <a:effectRef idx="2">
-            <a:schemeClr val="accent1"/>
-          </a:effectRef>
-          <a:fontRef idx="minor">
-            <a:schemeClr val="lt1"/>
-          </a:fontRef>
-        </p:style>
-        <p:txBody>
-          <a:bodyPr rtlCol="0" anchor="ctr" wrap="square" lIns="0" rIns="0" tIns="0" bIns="0"/>
-          <a:lstStyle/>
-          <a:p>
-            <a:pPr algn="ctr">
-              <a:spcBef>
-                <a:spcPts val="0"/>
-              </a:spcBef>
-              <a:spcAft>
-                <a:spcPts val="300"/>
-              </a:spcAft>
-              <a:defRPr sz="1800" b="0">
-                <a:solidFill>
-                  <a:srgbClr val="1A1A1A"/>
-                </a:solidFill>
-                <a:latin typeface="Arial"/>
-              </a:defRPr>
-            </a:pPr>
           </a:p>
         </p:txBody>
       </p:sp>
@@ -5268,62 +4725,6 @@
           </a:prstGeom>
         </p:spPr>
       </p:pic>
-      <p:sp>
-        <p:nvSpPr>
-          <p:cNvPr id="13" name="Rectangle 12"/>
-          <p:cNvSpPr/>
-          <p:nvPr/>
-        </p:nvSpPr>
-        <p:spPr>
-          <a:xfrm>
-            <a:off x="612648" y="6620256"/>
-            <a:ext cx="10972800" cy="16459"/>
-          </a:xfrm>
-          <a:prstGeom prst="rect">
-            <a:avLst/>
-          </a:prstGeom>
-          <a:solidFill>
-            <a:srgbClr val="FFBC00"/>
-          </a:solidFill>
-          <a:ln>
-            <a:noFill/>
-          </a:ln>
-        </p:spPr>
-        <p:style>
-          <a:lnRef idx="1">
-            <a:schemeClr val="accent1"/>
-          </a:lnRef>
-          <a:fillRef idx="3">
-            <a:schemeClr val="accent1"/>
-          </a:fillRef>
-          <a:effectRef idx="2">
-            <a:schemeClr val="accent1"/>
-          </a:effectRef>
-          <a:fontRef idx="minor">
-            <a:schemeClr val="lt1"/>
-          </a:fontRef>
-        </p:style>
-        <p:txBody>
-          <a:bodyPr rtlCol="0" anchor="ctr" wrap="square" lIns="0" rIns="0" tIns="0" bIns="0"/>
-          <a:lstStyle/>
-          <a:p>
-            <a:pPr algn="ctr">
-              <a:spcBef>
-                <a:spcPts val="0"/>
-              </a:spcBef>
-              <a:spcAft>
-                <a:spcPts val="300"/>
-              </a:spcAft>
-              <a:defRPr sz="1800" b="0">
-                <a:solidFill>
-                  <a:srgbClr val="1A1A1A"/>
-                </a:solidFill>
-                <a:latin typeface="Arial"/>
-              </a:defRPr>
-            </a:pPr>
-          </a:p>
-        </p:txBody>
-      </p:sp>
       <p:sp>
         <p:nvSpPr>
           <p:cNvPr id="14" name="TextBox 13"/>
@@ -5716,92 +5117,6 @@
       </p:sp>
       <p:sp>
         <p:nvSpPr>
-          <p:cNvPr id="17" name="Rectangle 16"/>
-          <p:cNvSpPr/>
-          <p:nvPr/>
-        </p:nvSpPr>
-        <p:spPr>
-          <a:xfrm>
-            <a:off x="0" y="0"/>
-            <a:ext cx="146304" cy="1645920"/>
-          </a:xfrm>
-          <a:prstGeom prst="rect">
-            <a:avLst/>
-          </a:prstGeom>
-          <a:solidFill>
-            <a:srgbClr val="C60016"/>
-          </a:solidFill>
-          <a:ln>
-            <a:noFill/>
-          </a:ln>
-        </p:spPr>
-        <p:style>
-          <a:lnRef idx="1">
-            <a:schemeClr val="accent1"/>
-          </a:lnRef>
-          <a:fillRef idx="3">
-            <a:schemeClr val="accent1"/>
-          </a:fillRef>
-          <a:effectRef idx="2">
-            <a:schemeClr val="accent1"/>
-          </a:effectRef>
-          <a:fontRef idx="minor">
-            <a:schemeClr val="lt1"/>
-          </a:fontRef>
-        </p:style>
-        <p:txBody>
-          <a:bodyPr rtlCol="0" anchor="ctr"/>
-          <a:lstStyle/>
-          <a:p>
-            <a:pPr algn="ctr"/>
-          </a:p>
-        </p:txBody>
-      </p:sp>
-      <p:sp>
-        <p:nvSpPr>
-          <p:cNvPr id="18" name="Rectangle 17"/>
-          <p:cNvSpPr/>
-          <p:nvPr/>
-        </p:nvSpPr>
-        <p:spPr>
-          <a:xfrm>
-            <a:off x="612648" y="1581912"/>
-            <a:ext cx="822960" cy="50292"/>
-          </a:xfrm>
-          <a:prstGeom prst="rect">
-            <a:avLst/>
-          </a:prstGeom>
-          <a:solidFill>
-            <a:srgbClr val="FFBC00"/>
-          </a:solidFill>
-          <a:ln>
-            <a:noFill/>
-          </a:ln>
-        </p:spPr>
-        <p:style>
-          <a:lnRef idx="1">
-            <a:schemeClr val="accent1"/>
-          </a:lnRef>
-          <a:fillRef idx="3">
-            <a:schemeClr val="accent1"/>
-          </a:fillRef>
-          <a:effectRef idx="2">
-            <a:schemeClr val="accent1"/>
-          </a:effectRef>
-          <a:fontRef idx="minor">
-            <a:schemeClr val="lt1"/>
-          </a:fontRef>
-        </p:style>
-        <p:txBody>
-          <a:bodyPr rtlCol="0" anchor="ctr"/>
-          <a:lstStyle/>
-          <a:p>
-            <a:pPr algn="ctr"/>
-          </a:p>
-        </p:txBody>
-      </p:sp>
-      <p:sp>
-        <p:nvSpPr>
           <p:cNvPr id="19" name="Rounded Rectangle 18"/>
           <p:cNvSpPr/>
           <p:nvPr/>
@@ -5863,49 +5178,6 @@
           </a:prstGeom>
           <a:solidFill>
             <a:srgbClr val="F7F4F1"/>
-          </a:solidFill>
-          <a:ln>
-            <a:noFill/>
-          </a:ln>
-        </p:spPr>
-        <p:style>
-          <a:lnRef idx="1">
-            <a:schemeClr val="accent1"/>
-          </a:lnRef>
-          <a:fillRef idx="3">
-            <a:schemeClr val="accent1"/>
-          </a:fillRef>
-          <a:effectRef idx="2">
-            <a:schemeClr val="accent1"/>
-          </a:effectRef>
-          <a:fontRef idx="minor">
-            <a:schemeClr val="lt1"/>
-          </a:fontRef>
-        </p:style>
-        <p:txBody>
-          <a:bodyPr rtlCol="0" anchor="ctr"/>
-          <a:lstStyle/>
-          <a:p>
-            <a:pPr algn="ctr"/>
-          </a:p>
-        </p:txBody>
-      </p:sp>
-      <p:sp>
-        <p:nvSpPr>
-          <p:cNvPr id="21" name="Rectangle 20"/>
-          <p:cNvSpPr/>
-          <p:nvPr/>
-        </p:nvSpPr>
-        <p:spPr>
-          <a:xfrm>
-            <a:off x="493776" y="4453128"/>
-            <a:ext cx="64008" cy="1481328"/>
-          </a:xfrm>
-          <a:prstGeom prst="rect">
-            <a:avLst/>
-          </a:prstGeom>
-          <a:solidFill>
-            <a:srgbClr val="FFBC00"/>
           </a:solidFill>
           <a:ln>
             <a:noFill/>
@@ -6245,62 +5517,6 @@
           </a:prstGeom>
         </p:spPr>
       </p:pic>
-      <p:sp>
-        <p:nvSpPr>
-          <p:cNvPr id="9" name="Rectangle 8"/>
-          <p:cNvSpPr/>
-          <p:nvPr/>
-        </p:nvSpPr>
-        <p:spPr>
-          <a:xfrm>
-            <a:off x="612648" y="6620256"/>
-            <a:ext cx="10972800" cy="16459"/>
-          </a:xfrm>
-          <a:prstGeom prst="rect">
-            <a:avLst/>
-          </a:prstGeom>
-          <a:solidFill>
-            <a:srgbClr val="FFBC00"/>
-          </a:solidFill>
-          <a:ln>
-            <a:noFill/>
-          </a:ln>
-        </p:spPr>
-        <p:style>
-          <a:lnRef idx="1">
-            <a:schemeClr val="accent1"/>
-          </a:lnRef>
-          <a:fillRef idx="3">
-            <a:schemeClr val="accent1"/>
-          </a:fillRef>
-          <a:effectRef idx="2">
-            <a:schemeClr val="accent1"/>
-          </a:effectRef>
-          <a:fontRef idx="minor">
-            <a:schemeClr val="lt1"/>
-          </a:fontRef>
-        </p:style>
-        <p:txBody>
-          <a:bodyPr rtlCol="0" anchor="ctr" wrap="square" lIns="0" rIns="0" tIns="0" bIns="0"/>
-          <a:lstStyle/>
-          <a:p>
-            <a:pPr algn="ctr">
-              <a:spcBef>
-                <a:spcPts val="0"/>
-              </a:spcBef>
-              <a:spcAft>
-                <a:spcPts val="300"/>
-              </a:spcAft>
-              <a:defRPr sz="1800" b="0">
-                <a:solidFill>
-                  <a:srgbClr val="1A1A1A"/>
-                </a:solidFill>
-                <a:latin typeface="Arial"/>
-              </a:defRPr>
-            </a:pPr>
-          </a:p>
-        </p:txBody>
-      </p:sp>
       <p:sp>
         <p:nvSpPr>
           <p:cNvPr id="10" name="TextBox 9"/>
@@ -6659,92 +5875,6 @@
       </p:sp>
       <p:sp>
         <p:nvSpPr>
-          <p:cNvPr id="18" name="Rectangle 17"/>
-          <p:cNvSpPr/>
-          <p:nvPr/>
-        </p:nvSpPr>
-        <p:spPr>
-          <a:xfrm>
-            <a:off x="0" y="0"/>
-            <a:ext cx="146304" cy="1645920"/>
-          </a:xfrm>
-          <a:prstGeom prst="rect">
-            <a:avLst/>
-          </a:prstGeom>
-          <a:solidFill>
-            <a:srgbClr val="C60016"/>
-          </a:solidFill>
-          <a:ln>
-            <a:noFill/>
-          </a:ln>
-        </p:spPr>
-        <p:style>
-          <a:lnRef idx="1">
-            <a:schemeClr val="accent1"/>
-          </a:lnRef>
-          <a:fillRef idx="3">
-            <a:schemeClr val="accent1"/>
-          </a:fillRef>
-          <a:effectRef idx="2">
-            <a:schemeClr val="accent1"/>
-          </a:effectRef>
-          <a:fontRef idx="minor">
-            <a:schemeClr val="lt1"/>
-          </a:fontRef>
-        </p:style>
-        <p:txBody>
-          <a:bodyPr rtlCol="0" anchor="ctr"/>
-          <a:lstStyle/>
-          <a:p>
-            <a:pPr algn="ctr"/>
-          </a:p>
-        </p:txBody>
-      </p:sp>
-      <p:sp>
-        <p:nvSpPr>
-          <p:cNvPr id="19" name="Rectangle 18"/>
-          <p:cNvSpPr/>
-          <p:nvPr/>
-        </p:nvSpPr>
-        <p:spPr>
-          <a:xfrm>
-            <a:off x="612648" y="1581912"/>
-            <a:ext cx="822960" cy="50292"/>
-          </a:xfrm>
-          <a:prstGeom prst="rect">
-            <a:avLst/>
-          </a:prstGeom>
-          <a:solidFill>
-            <a:srgbClr val="FFBC00"/>
-          </a:solidFill>
-          <a:ln>
-            <a:noFill/>
-          </a:ln>
-        </p:spPr>
-        <p:style>
-          <a:lnRef idx="1">
-            <a:schemeClr val="accent1"/>
-          </a:lnRef>
-          <a:fillRef idx="3">
-            <a:schemeClr val="accent1"/>
-          </a:fillRef>
-          <a:effectRef idx="2">
-            <a:schemeClr val="accent1"/>
-          </a:effectRef>
-          <a:fontRef idx="minor">
-            <a:schemeClr val="lt1"/>
-          </a:fontRef>
-        </p:style>
-        <p:txBody>
-          <a:bodyPr rtlCol="0" anchor="ctr"/>
-          <a:lstStyle/>
-          <a:p>
-            <a:pPr algn="ctr"/>
-          </a:p>
-        </p:txBody>
-      </p:sp>
-      <p:sp>
-        <p:nvSpPr>
           <p:cNvPr id="20" name="Rounded Rectangle 19"/>
           <p:cNvSpPr/>
           <p:nvPr/>
@@ -6806,49 +5936,6 @@
           </a:prstGeom>
           <a:solidFill>
             <a:srgbClr val="5A1018"/>
-          </a:solidFill>
-          <a:ln>
-            <a:noFill/>
-          </a:ln>
-        </p:spPr>
-        <p:style>
-          <a:lnRef idx="1">
-            <a:schemeClr val="accent1"/>
-          </a:lnRef>
-          <a:fillRef idx="3">
-            <a:schemeClr val="accent1"/>
-          </a:fillRef>
-          <a:effectRef idx="2">
-            <a:schemeClr val="accent1"/>
-          </a:effectRef>
-          <a:fontRef idx="minor">
-            <a:schemeClr val="lt1"/>
-          </a:fontRef>
-        </p:style>
-        <p:txBody>
-          <a:bodyPr rtlCol="0" anchor="ctr"/>
-          <a:lstStyle/>
-          <a:p>
-            <a:pPr algn="ctr"/>
-          </a:p>
-        </p:txBody>
-      </p:sp>
-      <p:sp>
-        <p:nvSpPr>
-          <p:cNvPr id="22" name="Rectangle 21"/>
-          <p:cNvSpPr/>
-          <p:nvPr/>
-        </p:nvSpPr>
-        <p:spPr>
-          <a:xfrm>
-            <a:off x="493776" y="1773936"/>
-            <a:ext cx="64008" cy="2240280"/>
-          </a:xfrm>
-          <a:prstGeom prst="rect">
-            <a:avLst/>
-          </a:prstGeom>
-          <a:solidFill>
-            <a:srgbClr val="FFBC00"/>
           </a:solidFill>
           <a:ln>
             <a:noFill/>
@@ -7244,62 +6331,6 @@
           </a:prstGeom>
         </p:spPr>
       </p:pic>
-      <p:sp>
-        <p:nvSpPr>
-          <p:cNvPr id="10" name="Rectangle 9"/>
-          <p:cNvSpPr/>
-          <p:nvPr/>
-        </p:nvSpPr>
-        <p:spPr>
-          <a:xfrm>
-            <a:off x="612648" y="6620256"/>
-            <a:ext cx="10972800" cy="16459"/>
-          </a:xfrm>
-          <a:prstGeom prst="rect">
-            <a:avLst/>
-          </a:prstGeom>
-          <a:solidFill>
-            <a:srgbClr val="FFBC00"/>
-          </a:solidFill>
-          <a:ln>
-            <a:noFill/>
-          </a:ln>
-        </p:spPr>
-        <p:style>
-          <a:lnRef idx="1">
-            <a:schemeClr val="accent1"/>
-          </a:lnRef>
-          <a:fillRef idx="3">
-            <a:schemeClr val="accent1"/>
-          </a:fillRef>
-          <a:effectRef idx="2">
-            <a:schemeClr val="accent1"/>
-          </a:effectRef>
-          <a:fontRef idx="minor">
-            <a:schemeClr val="lt1"/>
-          </a:fontRef>
-        </p:style>
-        <p:txBody>
-          <a:bodyPr rtlCol="0" anchor="ctr" wrap="square" lIns="0" rIns="0" tIns="0" bIns="0"/>
-          <a:lstStyle/>
-          <a:p>
-            <a:pPr algn="ctr">
-              <a:spcBef>
-                <a:spcPts val="0"/>
-              </a:spcBef>
-              <a:spcAft>
-                <a:spcPts val="300"/>
-              </a:spcAft>
-              <a:defRPr sz="1800" b="0">
-                <a:solidFill>
-                  <a:srgbClr val="1A1A1A"/>
-                </a:solidFill>
-                <a:latin typeface="Arial"/>
-              </a:defRPr>
-            </a:pPr>
-          </a:p>
-        </p:txBody>
-      </p:sp>
       <p:sp>
         <p:nvSpPr>
           <p:cNvPr id="11" name="TextBox 10"/>
@@ -7658,92 +6689,6 @@
       </p:sp>
       <p:sp>
         <p:nvSpPr>
-          <p:cNvPr id="16" name="Rectangle 15"/>
-          <p:cNvSpPr/>
-          <p:nvPr/>
-        </p:nvSpPr>
-        <p:spPr>
-          <a:xfrm>
-            <a:off x="0" y="0"/>
-            <a:ext cx="146304" cy="1645920"/>
-          </a:xfrm>
-          <a:prstGeom prst="rect">
-            <a:avLst/>
-          </a:prstGeom>
-          <a:solidFill>
-            <a:srgbClr val="C60016"/>
-          </a:solidFill>
-          <a:ln>
-            <a:noFill/>
-          </a:ln>
-        </p:spPr>
-        <p:style>
-          <a:lnRef idx="1">
-            <a:schemeClr val="accent1"/>
-          </a:lnRef>
-          <a:fillRef idx="3">
-            <a:schemeClr val="accent1"/>
-          </a:fillRef>
-          <a:effectRef idx="2">
-            <a:schemeClr val="accent1"/>
-          </a:effectRef>
-          <a:fontRef idx="minor">
-            <a:schemeClr val="lt1"/>
-          </a:fontRef>
-        </p:style>
-        <p:txBody>
-          <a:bodyPr rtlCol="0" anchor="ctr"/>
-          <a:lstStyle/>
-          <a:p>
-            <a:pPr algn="ctr"/>
-          </a:p>
-        </p:txBody>
-      </p:sp>
-      <p:sp>
-        <p:nvSpPr>
-          <p:cNvPr id="17" name="Rectangle 16"/>
-          <p:cNvSpPr/>
-          <p:nvPr/>
-        </p:nvSpPr>
-        <p:spPr>
-          <a:xfrm>
-            <a:off x="612648" y="1581912"/>
-            <a:ext cx="822960" cy="50292"/>
-          </a:xfrm>
-          <a:prstGeom prst="rect">
-            <a:avLst/>
-          </a:prstGeom>
-          <a:solidFill>
-            <a:srgbClr val="FFBC00"/>
-          </a:solidFill>
-          <a:ln>
-            <a:noFill/>
-          </a:ln>
-        </p:spPr>
-        <p:style>
-          <a:lnRef idx="1">
-            <a:schemeClr val="accent1"/>
-          </a:lnRef>
-          <a:fillRef idx="3">
-            <a:schemeClr val="accent1"/>
-          </a:fillRef>
-          <a:effectRef idx="2">
-            <a:schemeClr val="accent1"/>
-          </a:effectRef>
-          <a:fontRef idx="minor">
-            <a:schemeClr val="lt1"/>
-          </a:fontRef>
-        </p:style>
-        <p:txBody>
-          <a:bodyPr rtlCol="0" anchor="ctr"/>
-          <a:lstStyle/>
-          <a:p>
-            <a:pPr algn="ctr"/>
-          </a:p>
-        </p:txBody>
-      </p:sp>
-      <p:sp>
-        <p:nvSpPr>
           <p:cNvPr id="18" name="Rounded Rectangle 17"/>
           <p:cNvSpPr/>
           <p:nvPr/>
@@ -7805,49 +6750,6 @@
           </a:prstGeom>
           <a:solidFill>
             <a:srgbClr val="FFFFFF"/>
-          </a:solidFill>
-          <a:ln>
-            <a:noFill/>
-          </a:ln>
-        </p:spPr>
-        <p:style>
-          <a:lnRef idx="1">
-            <a:schemeClr val="accent1"/>
-          </a:lnRef>
-          <a:fillRef idx="3">
-            <a:schemeClr val="accent1"/>
-          </a:fillRef>
-          <a:effectRef idx="2">
-            <a:schemeClr val="accent1"/>
-          </a:effectRef>
-          <a:fontRef idx="minor">
-            <a:schemeClr val="lt1"/>
-          </a:fontRef>
-        </p:style>
-        <p:txBody>
-          <a:bodyPr rtlCol="0" anchor="ctr"/>
-          <a:lstStyle/>
-          <a:p>
-            <a:pPr algn="ctr"/>
-          </a:p>
-        </p:txBody>
-      </p:sp>
-      <p:sp>
-        <p:nvSpPr>
-          <p:cNvPr id="20" name="Rectangle 19"/>
-          <p:cNvSpPr/>
-          <p:nvPr/>
-        </p:nvSpPr>
-        <p:spPr>
-          <a:xfrm>
-            <a:off x="512064" y="1773936"/>
-            <a:ext cx="50292" cy="3776472"/>
-          </a:xfrm>
-          <a:prstGeom prst="rect">
-            <a:avLst/>
-          </a:prstGeom>
-          <a:solidFill>
-            <a:srgbClr val="C60016"/>
           </a:solidFill>
           <a:ln>
             <a:noFill/>
@@ -8115,62 +7017,6 @@
           </a:prstGeom>
         </p:spPr>
       </p:pic>
-      <p:sp>
-        <p:nvSpPr>
-          <p:cNvPr id="8" name="Rectangle 7"/>
-          <p:cNvSpPr/>
-          <p:nvPr/>
-        </p:nvSpPr>
-        <p:spPr>
-          <a:xfrm>
-            <a:off x="612648" y="6620256"/>
-            <a:ext cx="10972800" cy="16459"/>
-          </a:xfrm>
-          <a:prstGeom prst="rect">
-            <a:avLst/>
-          </a:prstGeom>
-          <a:solidFill>
-            <a:srgbClr val="FFBC00"/>
-          </a:solidFill>
-          <a:ln>
-            <a:noFill/>
-          </a:ln>
-        </p:spPr>
-        <p:style>
-          <a:lnRef idx="1">
-            <a:schemeClr val="accent1"/>
-          </a:lnRef>
-          <a:fillRef idx="3">
-            <a:schemeClr val="accent1"/>
-          </a:fillRef>
-          <a:effectRef idx="2">
-            <a:schemeClr val="accent1"/>
-          </a:effectRef>
-          <a:fontRef idx="minor">
-            <a:schemeClr val="lt1"/>
-          </a:fontRef>
-        </p:style>
-        <p:txBody>
-          <a:bodyPr rtlCol="0" anchor="ctr" wrap="square" lIns="0" rIns="0" tIns="0" bIns="0"/>
-          <a:lstStyle/>
-          <a:p>
-            <a:pPr algn="ctr">
-              <a:spcBef>
-                <a:spcPts val="0"/>
-              </a:spcBef>
-              <a:spcAft>
-                <a:spcPts val="300"/>
-              </a:spcAft>
-              <a:defRPr sz="1800" b="0">
-                <a:solidFill>
-                  <a:srgbClr val="1A1A1A"/>
-                </a:solidFill>
-                <a:latin typeface="Arial"/>
-              </a:defRPr>
-            </a:pPr>
-          </a:p>
-        </p:txBody>
-      </p:sp>
       <p:sp>
         <p:nvSpPr>
           <p:cNvPr id="9" name="TextBox 8"/>
@@ -8529,92 +7375,6 @@
       </p:sp>
       <p:sp>
         <p:nvSpPr>
-          <p:cNvPr id="17" name="Rectangle 16"/>
-          <p:cNvSpPr/>
-          <p:nvPr/>
-        </p:nvSpPr>
-        <p:spPr>
-          <a:xfrm>
-            <a:off x="0" y="0"/>
-            <a:ext cx="146304" cy="1645920"/>
-          </a:xfrm>
-          <a:prstGeom prst="rect">
-            <a:avLst/>
-          </a:prstGeom>
-          <a:solidFill>
-            <a:srgbClr val="C60016"/>
-          </a:solidFill>
-          <a:ln>
-            <a:noFill/>
-          </a:ln>
-        </p:spPr>
-        <p:style>
-          <a:lnRef idx="1">
-            <a:schemeClr val="accent1"/>
-          </a:lnRef>
-          <a:fillRef idx="3">
-            <a:schemeClr val="accent1"/>
-          </a:fillRef>
-          <a:effectRef idx="2">
-            <a:schemeClr val="accent1"/>
-          </a:effectRef>
-          <a:fontRef idx="minor">
-            <a:schemeClr val="lt1"/>
-          </a:fontRef>
-        </p:style>
-        <p:txBody>
-          <a:bodyPr rtlCol="0" anchor="ctr"/>
-          <a:lstStyle/>
-          <a:p>
-            <a:pPr algn="ctr"/>
-          </a:p>
-        </p:txBody>
-      </p:sp>
-      <p:sp>
-        <p:nvSpPr>
-          <p:cNvPr id="18" name="Rectangle 17"/>
-          <p:cNvSpPr/>
-          <p:nvPr/>
-        </p:nvSpPr>
-        <p:spPr>
-          <a:xfrm>
-            <a:off x="612648" y="1581912"/>
-            <a:ext cx="822960" cy="50292"/>
-          </a:xfrm>
-          <a:prstGeom prst="rect">
-            <a:avLst/>
-          </a:prstGeom>
-          <a:solidFill>
-            <a:srgbClr val="FFBC00"/>
-          </a:solidFill>
-          <a:ln>
-            <a:noFill/>
-          </a:ln>
-        </p:spPr>
-        <p:style>
-          <a:lnRef idx="1">
-            <a:schemeClr val="accent1"/>
-          </a:lnRef>
-          <a:fillRef idx="3">
-            <a:schemeClr val="accent1"/>
-          </a:fillRef>
-          <a:effectRef idx="2">
-            <a:schemeClr val="accent1"/>
-          </a:effectRef>
-          <a:fontRef idx="minor">
-            <a:schemeClr val="lt1"/>
-          </a:fontRef>
-        </p:style>
-        <p:txBody>
-          <a:bodyPr rtlCol="0" anchor="ctr"/>
-          <a:lstStyle/>
-          <a:p>
-            <a:pPr algn="ctr"/>
-          </a:p>
-        </p:txBody>
-      </p:sp>
-      <p:sp>
-        <p:nvSpPr>
           <p:cNvPr id="19" name="Rounded Rectangle 18"/>
           <p:cNvSpPr/>
           <p:nvPr/>
@@ -8676,49 +7436,6 @@
           </a:prstGeom>
           <a:solidFill>
             <a:srgbClr val="FFFFFF"/>
-          </a:solidFill>
-          <a:ln>
-            <a:noFill/>
-          </a:ln>
-        </p:spPr>
-        <p:style>
-          <a:lnRef idx="1">
-            <a:schemeClr val="accent1"/>
-          </a:lnRef>
-          <a:fillRef idx="3">
-            <a:schemeClr val="accent1"/>
-          </a:fillRef>
-          <a:effectRef idx="2">
-            <a:schemeClr val="accent1"/>
-          </a:effectRef>
-          <a:fontRef idx="minor">
-            <a:schemeClr val="lt1"/>
-          </a:fontRef>
-        </p:style>
-        <p:txBody>
-          <a:bodyPr rtlCol="0" anchor="ctr"/>
-          <a:lstStyle/>
-          <a:p>
-            <a:pPr algn="ctr"/>
-          </a:p>
-        </p:txBody>
-      </p:sp>
-      <p:sp>
-        <p:nvSpPr>
-          <p:cNvPr id="21" name="Rectangle 20"/>
-          <p:cNvSpPr/>
-          <p:nvPr/>
-        </p:nvSpPr>
-        <p:spPr>
-          <a:xfrm>
-            <a:off x="512064" y="1764792"/>
-            <a:ext cx="50292" cy="1645920"/>
-          </a:xfrm>
-          <a:prstGeom prst="rect">
-            <a:avLst/>
-          </a:prstGeom>
-          <a:solidFill>
-            <a:srgbClr val="C60016"/>
           </a:solidFill>
           <a:ln>
             <a:noFill/>
@@ -9079,62 +7796,6 @@
           </a:prstGeom>
         </p:spPr>
       </p:pic>
-      <p:sp>
-        <p:nvSpPr>
-          <p:cNvPr id="9" name="Rectangle 8"/>
-          <p:cNvSpPr/>
-          <p:nvPr/>
-        </p:nvSpPr>
-        <p:spPr>
-          <a:xfrm>
-            <a:off x="612648" y="6620256"/>
-            <a:ext cx="10972800" cy="16459"/>
-          </a:xfrm>
-          <a:prstGeom prst="rect">
-            <a:avLst/>
-          </a:prstGeom>
-          <a:solidFill>
-            <a:srgbClr val="FFBC00"/>
-          </a:solidFill>
-          <a:ln>
-            <a:noFill/>
-          </a:ln>
-        </p:spPr>
-        <p:style>
-          <a:lnRef idx="1">
-            <a:schemeClr val="accent1"/>
-          </a:lnRef>
-          <a:fillRef idx="3">
-            <a:schemeClr val="accent1"/>
-          </a:fillRef>
-          <a:effectRef idx="2">
-            <a:schemeClr val="accent1"/>
-          </a:effectRef>
-          <a:fontRef idx="minor">
-            <a:schemeClr val="lt1"/>
-          </a:fontRef>
-        </p:style>
-        <p:txBody>
-          <a:bodyPr rtlCol="0" anchor="ctr" wrap="square" lIns="0" rIns="0" tIns="0" bIns="0"/>
-          <a:lstStyle/>
-          <a:p>
-            <a:pPr algn="ctr">
-              <a:spcBef>
-                <a:spcPts val="0"/>
-              </a:spcBef>
-              <a:spcAft>
-                <a:spcPts val="300"/>
-              </a:spcAft>
-              <a:defRPr sz="1800" b="0">
-                <a:solidFill>
-                  <a:srgbClr val="1A1A1A"/>
-                </a:solidFill>
-                <a:latin typeface="Arial"/>
-              </a:defRPr>
-            </a:pPr>
-          </a:p>
-        </p:txBody>
-      </p:sp>
       <p:sp>
         <p:nvSpPr>
           <p:cNvPr id="10" name="TextBox 9"/>
@@ -9493,92 +8154,6 @@
       </p:sp>
       <p:sp>
         <p:nvSpPr>
-          <p:cNvPr id="18" name="Rectangle 17"/>
-          <p:cNvSpPr/>
-          <p:nvPr/>
-        </p:nvSpPr>
-        <p:spPr>
-          <a:xfrm>
-            <a:off x="0" y="0"/>
-            <a:ext cx="146304" cy="1645920"/>
-          </a:xfrm>
-          <a:prstGeom prst="rect">
-            <a:avLst/>
-          </a:prstGeom>
-          <a:solidFill>
-            <a:srgbClr val="C60016"/>
-          </a:solidFill>
-          <a:ln>
-            <a:noFill/>
-          </a:ln>
-        </p:spPr>
-        <p:style>
-          <a:lnRef idx="1">
-            <a:schemeClr val="accent1"/>
-          </a:lnRef>
-          <a:fillRef idx="3">
-            <a:schemeClr val="accent1"/>
-          </a:fillRef>
-          <a:effectRef idx="2">
-            <a:schemeClr val="accent1"/>
-          </a:effectRef>
-          <a:fontRef idx="minor">
-            <a:schemeClr val="lt1"/>
-          </a:fontRef>
-        </p:style>
-        <p:txBody>
-          <a:bodyPr rtlCol="0" anchor="ctr"/>
-          <a:lstStyle/>
-          <a:p>
-            <a:pPr algn="ctr"/>
-          </a:p>
-        </p:txBody>
-      </p:sp>
-      <p:sp>
-        <p:nvSpPr>
-          <p:cNvPr id="19" name="Rectangle 18"/>
-          <p:cNvSpPr/>
-          <p:nvPr/>
-        </p:nvSpPr>
-        <p:spPr>
-          <a:xfrm>
-            <a:off x="612648" y="1581912"/>
-            <a:ext cx="822960" cy="50292"/>
-          </a:xfrm>
-          <a:prstGeom prst="rect">
-            <a:avLst/>
-          </a:prstGeom>
-          <a:solidFill>
-            <a:srgbClr val="FFBC00"/>
-          </a:solidFill>
-          <a:ln>
-            <a:noFill/>
-          </a:ln>
-        </p:spPr>
-        <p:style>
-          <a:lnRef idx="1">
-            <a:schemeClr val="accent1"/>
-          </a:lnRef>
-          <a:fillRef idx="3">
-            <a:schemeClr val="accent1"/>
-          </a:fillRef>
-          <a:effectRef idx="2">
-            <a:schemeClr val="accent1"/>
-          </a:effectRef>
-          <a:fontRef idx="minor">
-            <a:schemeClr val="lt1"/>
-          </a:fontRef>
-        </p:style>
-        <p:txBody>
-          <a:bodyPr rtlCol="0" anchor="ctr"/>
-          <a:lstStyle/>
-          <a:p>
-            <a:pPr algn="ctr"/>
-          </a:p>
-        </p:txBody>
-      </p:sp>
-      <p:sp>
-        <p:nvSpPr>
           <p:cNvPr id="20" name="Rounded Rectangle 19"/>
           <p:cNvSpPr/>
           <p:nvPr/>
@@ -9640,49 +8215,6 @@
           </a:prstGeom>
           <a:solidFill>
             <a:srgbClr val="5A1018"/>
-          </a:solidFill>
-          <a:ln>
-            <a:noFill/>
-          </a:ln>
-        </p:spPr>
-        <p:style>
-          <a:lnRef idx="1">
-            <a:schemeClr val="accent1"/>
-          </a:lnRef>
-          <a:fillRef idx="3">
-            <a:schemeClr val="accent1"/>
-          </a:fillRef>
-          <a:effectRef idx="2">
-            <a:schemeClr val="accent1"/>
-          </a:effectRef>
-          <a:fontRef idx="minor">
-            <a:schemeClr val="lt1"/>
-          </a:fontRef>
-        </p:style>
-        <p:txBody>
-          <a:bodyPr rtlCol="0" anchor="ctr"/>
-          <a:lstStyle/>
-          <a:p>
-            <a:pPr algn="ctr"/>
-          </a:p>
-        </p:txBody>
-      </p:sp>
-      <p:sp>
-        <p:nvSpPr>
-          <p:cNvPr id="22" name="Rectangle 21"/>
-          <p:cNvSpPr/>
-          <p:nvPr/>
-        </p:nvSpPr>
-        <p:spPr>
-          <a:xfrm>
-            <a:off x="493776" y="1773936"/>
-            <a:ext cx="64008" cy="2240280"/>
-          </a:xfrm>
-          <a:prstGeom prst="rect">
-            <a:avLst/>
-          </a:prstGeom>
-          <a:solidFill>
-            <a:srgbClr val="FFBC00"/>
           </a:solidFill>
           <a:ln>
             <a:noFill/>
@@ -10078,62 +8610,6 @@
           </a:prstGeom>
         </p:spPr>
       </p:pic>
-      <p:sp>
-        <p:nvSpPr>
-          <p:cNvPr id="10" name="Rectangle 9"/>
-          <p:cNvSpPr/>
-          <p:nvPr/>
-        </p:nvSpPr>
-        <p:spPr>
-          <a:xfrm>
-            <a:off x="612648" y="6620256"/>
-            <a:ext cx="10972800" cy="16459"/>
-          </a:xfrm>
-          <a:prstGeom prst="rect">
-            <a:avLst/>
-          </a:prstGeom>
-          <a:solidFill>
-            <a:srgbClr val="FFBC00"/>
-          </a:solidFill>
-          <a:ln>
-            <a:noFill/>
-          </a:ln>
-        </p:spPr>
-        <p:style>
-          <a:lnRef idx="1">
-            <a:schemeClr val="accent1"/>
-          </a:lnRef>
-          <a:fillRef idx="3">
-            <a:schemeClr val="accent1"/>
-          </a:fillRef>
-          <a:effectRef idx="2">
-            <a:schemeClr val="accent1"/>
-          </a:effectRef>
-          <a:fontRef idx="minor">
-            <a:schemeClr val="lt1"/>
-          </a:fontRef>
-        </p:style>
-        <p:txBody>
-          <a:bodyPr rtlCol="0" anchor="ctr" wrap="square" lIns="0" rIns="0" tIns="0" bIns="0"/>
-          <a:lstStyle/>
-          <a:p>
-            <a:pPr algn="ctr">
-              <a:spcBef>
-                <a:spcPts val="0"/>
-              </a:spcBef>
-              <a:spcAft>
-                <a:spcPts val="300"/>
-              </a:spcAft>
-              <a:defRPr sz="1800" b="0">
-                <a:solidFill>
-                  <a:srgbClr val="1A1A1A"/>
-                </a:solidFill>
-                <a:latin typeface="Arial"/>
-              </a:defRPr>
-            </a:pPr>
-          </a:p>
-        </p:txBody>
-      </p:sp>
       <p:sp>
         <p:nvSpPr>
           <p:cNvPr id="11" name="TextBox 10"/>
@@ -10492,92 +8968,6 @@
       </p:sp>
       <p:sp>
         <p:nvSpPr>
-          <p:cNvPr id="16" name="Rectangle 15"/>
-          <p:cNvSpPr/>
-          <p:nvPr/>
-        </p:nvSpPr>
-        <p:spPr>
-          <a:xfrm>
-            <a:off x="0" y="0"/>
-            <a:ext cx="146304" cy="1645920"/>
-          </a:xfrm>
-          <a:prstGeom prst="rect">
-            <a:avLst/>
-          </a:prstGeom>
-          <a:solidFill>
-            <a:srgbClr val="C60016"/>
-          </a:solidFill>
-          <a:ln>
-            <a:noFill/>
-          </a:ln>
-        </p:spPr>
-        <p:style>
-          <a:lnRef idx="1">
-            <a:schemeClr val="accent1"/>
-          </a:lnRef>
-          <a:fillRef idx="3">
-            <a:schemeClr val="accent1"/>
-          </a:fillRef>
-          <a:effectRef idx="2">
-            <a:schemeClr val="accent1"/>
-          </a:effectRef>
-          <a:fontRef idx="minor">
-            <a:schemeClr val="lt1"/>
-          </a:fontRef>
-        </p:style>
-        <p:txBody>
-          <a:bodyPr rtlCol="0" anchor="ctr"/>
-          <a:lstStyle/>
-          <a:p>
-            <a:pPr algn="ctr"/>
-          </a:p>
-        </p:txBody>
-      </p:sp>
-      <p:sp>
-        <p:nvSpPr>
-          <p:cNvPr id="17" name="Rectangle 16"/>
-          <p:cNvSpPr/>
-          <p:nvPr/>
-        </p:nvSpPr>
-        <p:spPr>
-          <a:xfrm>
-            <a:off x="612648" y="1581912"/>
-            <a:ext cx="822960" cy="50292"/>
-          </a:xfrm>
-          <a:prstGeom prst="rect">
-            <a:avLst/>
-          </a:prstGeom>
-          <a:solidFill>
-            <a:srgbClr val="FFBC00"/>
-          </a:solidFill>
-          <a:ln>
-            <a:noFill/>
-          </a:ln>
-        </p:spPr>
-        <p:style>
-          <a:lnRef idx="1">
-            <a:schemeClr val="accent1"/>
-          </a:lnRef>
-          <a:fillRef idx="3">
-            <a:schemeClr val="accent1"/>
-          </a:fillRef>
-          <a:effectRef idx="2">
-            <a:schemeClr val="accent1"/>
-          </a:effectRef>
-          <a:fontRef idx="minor">
-            <a:schemeClr val="lt1"/>
-          </a:fontRef>
-        </p:style>
-        <p:txBody>
-          <a:bodyPr rtlCol="0" anchor="ctr"/>
-          <a:lstStyle/>
-          <a:p>
-            <a:pPr algn="ctr"/>
-          </a:p>
-        </p:txBody>
-      </p:sp>
-      <p:sp>
-        <p:nvSpPr>
           <p:cNvPr id="18" name="Rounded Rectangle 17"/>
           <p:cNvSpPr/>
           <p:nvPr/>
@@ -10639,49 +9029,6 @@
           </a:prstGeom>
           <a:solidFill>
             <a:srgbClr val="FFFFFF"/>
-          </a:solidFill>
-          <a:ln>
-            <a:noFill/>
-          </a:ln>
-        </p:spPr>
-        <p:style>
-          <a:lnRef idx="1">
-            <a:schemeClr val="accent1"/>
-          </a:lnRef>
-          <a:fillRef idx="3">
-            <a:schemeClr val="accent1"/>
-          </a:fillRef>
-          <a:effectRef idx="2">
-            <a:schemeClr val="accent1"/>
-          </a:effectRef>
-          <a:fontRef idx="minor">
-            <a:schemeClr val="lt1"/>
-          </a:fontRef>
-        </p:style>
-        <p:txBody>
-          <a:bodyPr rtlCol="0" anchor="ctr"/>
-          <a:lstStyle/>
-          <a:p>
-            <a:pPr algn="ctr"/>
-          </a:p>
-        </p:txBody>
-      </p:sp>
-      <p:sp>
-        <p:nvSpPr>
-          <p:cNvPr id="20" name="Rectangle 19"/>
-          <p:cNvSpPr/>
-          <p:nvPr/>
-        </p:nvSpPr>
-        <p:spPr>
-          <a:xfrm>
-            <a:off x="512064" y="1664208"/>
-            <a:ext cx="50292" cy="4279392"/>
-          </a:xfrm>
-          <a:prstGeom prst="rect">
-            <a:avLst/>
-          </a:prstGeom>
-          <a:solidFill>
-            <a:srgbClr val="C60016"/>
           </a:solidFill>
           <a:ln>
             <a:noFill/>
@@ -10949,62 +9296,6 @@
           </a:prstGeom>
         </p:spPr>
       </p:pic>
-      <p:sp>
-        <p:nvSpPr>
-          <p:cNvPr id="8" name="Rectangle 7"/>
-          <p:cNvSpPr/>
-          <p:nvPr/>
-        </p:nvSpPr>
-        <p:spPr>
-          <a:xfrm>
-            <a:off x="612648" y="6620256"/>
-            <a:ext cx="10972800" cy="16459"/>
-          </a:xfrm>
-          <a:prstGeom prst="rect">
-            <a:avLst/>
-          </a:prstGeom>
-          <a:solidFill>
-            <a:srgbClr val="FFBC00"/>
-          </a:solidFill>
-          <a:ln>
-            <a:noFill/>
-          </a:ln>
-        </p:spPr>
-        <p:style>
-          <a:lnRef idx="1">
-            <a:schemeClr val="accent1"/>
-          </a:lnRef>
-          <a:fillRef idx="3">
-            <a:schemeClr val="accent1"/>
-          </a:fillRef>
-          <a:effectRef idx="2">
-            <a:schemeClr val="accent1"/>
-          </a:effectRef>
-          <a:fontRef idx="minor">
-            <a:schemeClr val="lt1"/>
-          </a:fontRef>
-        </p:style>
-        <p:txBody>
-          <a:bodyPr rtlCol="0" anchor="ctr" wrap="square" lIns="0" rIns="0" tIns="0" bIns="0"/>
-          <a:lstStyle/>
-          <a:p>
-            <a:pPr algn="ctr">
-              <a:spcBef>
-                <a:spcPts val="0"/>
-              </a:spcBef>
-              <a:spcAft>
-                <a:spcPts val="300"/>
-              </a:spcAft>
-              <a:defRPr sz="1800" b="0">
-                <a:solidFill>
-                  <a:srgbClr val="1A1A1A"/>
-                </a:solidFill>
-                <a:latin typeface="Arial"/>
-              </a:defRPr>
-            </a:pPr>
-          </a:p>
-        </p:txBody>
-      </p:sp>
       <p:sp>
         <p:nvSpPr>
           <p:cNvPr id="9" name="TextBox 8"/>
@@ -11363,92 +9654,6 @@
       </p:sp>
       <p:sp>
         <p:nvSpPr>
-          <p:cNvPr id="20" name="Rectangle 19"/>
-          <p:cNvSpPr/>
-          <p:nvPr/>
-        </p:nvSpPr>
-        <p:spPr>
-          <a:xfrm>
-            <a:off x="0" y="0"/>
-            <a:ext cx="146304" cy="1645920"/>
-          </a:xfrm>
-          <a:prstGeom prst="rect">
-            <a:avLst/>
-          </a:prstGeom>
-          <a:solidFill>
-            <a:srgbClr val="C60016"/>
-          </a:solidFill>
-          <a:ln>
-            <a:noFill/>
-          </a:ln>
-        </p:spPr>
-        <p:style>
-          <a:lnRef idx="1">
-            <a:schemeClr val="accent1"/>
-          </a:lnRef>
-          <a:fillRef idx="3">
-            <a:schemeClr val="accent1"/>
-          </a:fillRef>
-          <a:effectRef idx="2">
-            <a:schemeClr val="accent1"/>
-          </a:effectRef>
-          <a:fontRef idx="minor">
-            <a:schemeClr val="lt1"/>
-          </a:fontRef>
-        </p:style>
-        <p:txBody>
-          <a:bodyPr rtlCol="0" anchor="ctr"/>
-          <a:lstStyle/>
-          <a:p>
-            <a:pPr algn="ctr"/>
-          </a:p>
-        </p:txBody>
-      </p:sp>
-      <p:sp>
-        <p:nvSpPr>
-          <p:cNvPr id="21" name="Rectangle 20"/>
-          <p:cNvSpPr/>
-          <p:nvPr/>
-        </p:nvSpPr>
-        <p:spPr>
-          <a:xfrm>
-            <a:off x="612648" y="1581912"/>
-            <a:ext cx="822960" cy="50292"/>
-          </a:xfrm>
-          <a:prstGeom prst="rect">
-            <a:avLst/>
-          </a:prstGeom>
-          <a:solidFill>
-            <a:srgbClr val="FFBC00"/>
-          </a:solidFill>
-          <a:ln>
-            <a:noFill/>
-          </a:ln>
-        </p:spPr>
-        <p:style>
-          <a:lnRef idx="1">
-            <a:schemeClr val="accent1"/>
-          </a:lnRef>
-          <a:fillRef idx="3">
-            <a:schemeClr val="accent1"/>
-          </a:fillRef>
-          <a:effectRef idx="2">
-            <a:schemeClr val="accent1"/>
-          </a:effectRef>
-          <a:fontRef idx="minor">
-            <a:schemeClr val="lt1"/>
-          </a:fontRef>
-        </p:style>
-        <p:txBody>
-          <a:bodyPr rtlCol="0" anchor="ctr"/>
-          <a:lstStyle/>
-          <a:p>
-            <a:pPr algn="ctr"/>
-          </a:p>
-        </p:txBody>
-      </p:sp>
-      <p:sp>
-        <p:nvSpPr>
           <p:cNvPr id="22" name="Rounded Rectangle 21"/>
           <p:cNvSpPr/>
           <p:nvPr/>
@@ -12134,62 +10339,6 @@
           </a:prstGeom>
         </p:spPr>
       </p:pic>
-      <p:sp>
-        <p:nvSpPr>
-          <p:cNvPr id="12" name="Rectangle 11"/>
-          <p:cNvSpPr/>
-          <p:nvPr/>
-        </p:nvSpPr>
-        <p:spPr>
-          <a:xfrm>
-            <a:off x="612648" y="6620256"/>
-            <a:ext cx="10972800" cy="16459"/>
-          </a:xfrm>
-          <a:prstGeom prst="rect">
-            <a:avLst/>
-          </a:prstGeom>
-          <a:solidFill>
-            <a:srgbClr val="FFBC00"/>
-          </a:solidFill>
-          <a:ln>
-            <a:noFill/>
-          </a:ln>
-        </p:spPr>
-        <p:style>
-          <a:lnRef idx="1">
-            <a:schemeClr val="accent1"/>
-          </a:lnRef>
-          <a:fillRef idx="3">
-            <a:schemeClr val="accent1"/>
-          </a:fillRef>
-          <a:effectRef idx="2">
-            <a:schemeClr val="accent1"/>
-          </a:effectRef>
-          <a:fontRef idx="minor">
-            <a:schemeClr val="lt1"/>
-          </a:fontRef>
-        </p:style>
-        <p:txBody>
-          <a:bodyPr rtlCol="0" anchor="ctr" wrap="square" lIns="0" rIns="0" tIns="0" bIns="0"/>
-          <a:lstStyle/>
-          <a:p>
-            <a:pPr algn="ctr">
-              <a:spcBef>
-                <a:spcPts val="0"/>
-              </a:spcBef>
-              <a:spcAft>
-                <a:spcPts val="300"/>
-              </a:spcAft>
-              <a:defRPr sz="1800" b="0">
-                <a:solidFill>
-                  <a:srgbClr val="1A1A1A"/>
-                </a:solidFill>
-                <a:latin typeface="Arial"/>
-              </a:defRPr>
-            </a:pPr>
-          </a:p>
-        </p:txBody>
-      </p:sp>
       <p:sp>
         <p:nvSpPr>
           <p:cNvPr id="13" name="TextBox 12"/>
@@ -12548,92 +10697,6 @@
       </p:sp>
       <p:sp>
         <p:nvSpPr>
-          <p:cNvPr id="16" name="Rectangle 15"/>
-          <p:cNvSpPr/>
-          <p:nvPr/>
-        </p:nvSpPr>
-        <p:spPr>
-          <a:xfrm>
-            <a:off x="0" y="0"/>
-            <a:ext cx="146304" cy="1645920"/>
-          </a:xfrm>
-          <a:prstGeom prst="rect">
-            <a:avLst/>
-          </a:prstGeom>
-          <a:solidFill>
-            <a:srgbClr val="C60016"/>
-          </a:solidFill>
-          <a:ln>
-            <a:noFill/>
-          </a:ln>
-        </p:spPr>
-        <p:style>
-          <a:lnRef idx="1">
-            <a:schemeClr val="accent1"/>
-          </a:lnRef>
-          <a:fillRef idx="3">
-            <a:schemeClr val="accent1"/>
-          </a:fillRef>
-          <a:effectRef idx="2">
-            <a:schemeClr val="accent1"/>
-          </a:effectRef>
-          <a:fontRef idx="minor">
-            <a:schemeClr val="lt1"/>
-          </a:fontRef>
-        </p:style>
-        <p:txBody>
-          <a:bodyPr rtlCol="0" anchor="ctr"/>
-          <a:lstStyle/>
-          <a:p>
-            <a:pPr algn="ctr"/>
-          </a:p>
-        </p:txBody>
-      </p:sp>
-      <p:sp>
-        <p:nvSpPr>
-          <p:cNvPr id="17" name="Rectangle 16"/>
-          <p:cNvSpPr/>
-          <p:nvPr/>
-        </p:nvSpPr>
-        <p:spPr>
-          <a:xfrm>
-            <a:off x="612648" y="1581912"/>
-            <a:ext cx="822960" cy="50292"/>
-          </a:xfrm>
-          <a:prstGeom prst="rect">
-            <a:avLst/>
-          </a:prstGeom>
-          <a:solidFill>
-            <a:srgbClr val="FFBC00"/>
-          </a:solidFill>
-          <a:ln>
-            <a:noFill/>
-          </a:ln>
-        </p:spPr>
-        <p:style>
-          <a:lnRef idx="1">
-            <a:schemeClr val="accent1"/>
-          </a:lnRef>
-          <a:fillRef idx="3">
-            <a:schemeClr val="accent1"/>
-          </a:fillRef>
-          <a:effectRef idx="2">
-            <a:schemeClr val="accent1"/>
-          </a:effectRef>
-          <a:fontRef idx="minor">
-            <a:schemeClr val="lt1"/>
-          </a:fontRef>
-        </p:style>
-        <p:txBody>
-          <a:bodyPr rtlCol="0" anchor="ctr"/>
-          <a:lstStyle/>
-          <a:p>
-            <a:pPr algn="ctr"/>
-          </a:p>
-        </p:txBody>
-      </p:sp>
-      <p:sp>
-        <p:nvSpPr>
           <p:cNvPr id="18" name="Rounded Rectangle 17"/>
           <p:cNvSpPr/>
           <p:nvPr/>
@@ -12695,49 +10758,6 @@
           </a:prstGeom>
           <a:solidFill>
             <a:srgbClr val="FFFFFF"/>
-          </a:solidFill>
-          <a:ln>
-            <a:noFill/>
-          </a:ln>
-        </p:spPr>
-        <p:style>
-          <a:lnRef idx="1">
-            <a:schemeClr val="accent1"/>
-          </a:lnRef>
-          <a:fillRef idx="3">
-            <a:schemeClr val="accent1"/>
-          </a:fillRef>
-          <a:effectRef idx="2">
-            <a:schemeClr val="accent1"/>
-          </a:effectRef>
-          <a:fontRef idx="minor">
-            <a:schemeClr val="lt1"/>
-          </a:fontRef>
-        </p:style>
-        <p:txBody>
-          <a:bodyPr rtlCol="0" anchor="ctr"/>
-          <a:lstStyle/>
-          <a:p>
-            <a:pPr algn="ctr"/>
-          </a:p>
-        </p:txBody>
-      </p:sp>
-      <p:sp>
-        <p:nvSpPr>
-          <p:cNvPr id="20" name="Rectangle 19"/>
-          <p:cNvSpPr/>
-          <p:nvPr/>
-        </p:nvSpPr>
-        <p:spPr>
-          <a:xfrm>
-            <a:off x="512064" y="1773936"/>
-            <a:ext cx="50292" cy="3776472"/>
-          </a:xfrm>
-          <a:prstGeom prst="rect">
-            <a:avLst/>
-          </a:prstGeom>
-          <a:solidFill>
-            <a:srgbClr val="C60016"/>
           </a:solidFill>
           <a:ln>
             <a:noFill/>
@@ -13005,62 +11025,6 @@
           </a:prstGeom>
         </p:spPr>
       </p:pic>
-      <p:sp>
-        <p:nvSpPr>
-          <p:cNvPr id="8" name="Rectangle 7"/>
-          <p:cNvSpPr/>
-          <p:nvPr/>
-        </p:nvSpPr>
-        <p:spPr>
-          <a:xfrm>
-            <a:off x="612648" y="6620256"/>
-            <a:ext cx="10972800" cy="16459"/>
-          </a:xfrm>
-          <a:prstGeom prst="rect">
-            <a:avLst/>
-          </a:prstGeom>
-          <a:solidFill>
-            <a:srgbClr val="FFBC00"/>
-          </a:solidFill>
-          <a:ln>
-            <a:noFill/>
-          </a:ln>
-        </p:spPr>
-        <p:style>
-          <a:lnRef idx="1">
-            <a:schemeClr val="accent1"/>
-          </a:lnRef>
-          <a:fillRef idx="3">
-            <a:schemeClr val="accent1"/>
-          </a:fillRef>
-          <a:effectRef idx="2">
-            <a:schemeClr val="accent1"/>
-          </a:effectRef>
-          <a:fontRef idx="minor">
-            <a:schemeClr val="lt1"/>
-          </a:fontRef>
-        </p:style>
-        <p:txBody>
-          <a:bodyPr rtlCol="0" anchor="ctr" wrap="square" lIns="0" rIns="0" tIns="0" bIns="0"/>
-          <a:lstStyle/>
-          <a:p>
-            <a:pPr algn="ctr">
-              <a:spcBef>
-                <a:spcPts val="0"/>
-              </a:spcBef>
-              <a:spcAft>
-                <a:spcPts val="300"/>
-              </a:spcAft>
-              <a:defRPr sz="1800" b="0">
-                <a:solidFill>
-                  <a:srgbClr val="1A1A1A"/>
-                </a:solidFill>
-                <a:latin typeface="Arial"/>
-              </a:defRPr>
-            </a:pPr>
-          </a:p>
-        </p:txBody>
-      </p:sp>
       <p:sp>
         <p:nvSpPr>
           <p:cNvPr id="9" name="TextBox 8"/>
@@ -13419,92 +11383,6 @@
       </p:sp>
       <p:sp>
         <p:nvSpPr>
-          <p:cNvPr id="16" name="Rectangle 15"/>
-          <p:cNvSpPr/>
-          <p:nvPr/>
-        </p:nvSpPr>
-        <p:spPr>
-          <a:xfrm>
-            <a:off x="0" y="0"/>
-            <a:ext cx="146304" cy="1645920"/>
-          </a:xfrm>
-          <a:prstGeom prst="rect">
-            <a:avLst/>
-          </a:prstGeom>
-          <a:solidFill>
-            <a:srgbClr val="C60016"/>
-          </a:solidFill>
-          <a:ln>
-            <a:noFill/>
-          </a:ln>
-        </p:spPr>
-        <p:style>
-          <a:lnRef idx="1">
-            <a:schemeClr val="accent1"/>
-          </a:lnRef>
-          <a:fillRef idx="3">
-            <a:schemeClr val="accent1"/>
-          </a:fillRef>
-          <a:effectRef idx="2">
-            <a:schemeClr val="accent1"/>
-          </a:effectRef>
-          <a:fontRef idx="minor">
-            <a:schemeClr val="lt1"/>
-          </a:fontRef>
-        </p:style>
-        <p:txBody>
-          <a:bodyPr rtlCol="0" anchor="ctr"/>
-          <a:lstStyle/>
-          <a:p>
-            <a:pPr algn="ctr"/>
-          </a:p>
-        </p:txBody>
-      </p:sp>
-      <p:sp>
-        <p:nvSpPr>
-          <p:cNvPr id="17" name="Rectangle 16"/>
-          <p:cNvSpPr/>
-          <p:nvPr/>
-        </p:nvSpPr>
-        <p:spPr>
-          <a:xfrm>
-            <a:off x="612648" y="1581912"/>
-            <a:ext cx="822960" cy="50292"/>
-          </a:xfrm>
-          <a:prstGeom prst="rect">
-            <a:avLst/>
-          </a:prstGeom>
-          <a:solidFill>
-            <a:srgbClr val="FFBC00"/>
-          </a:solidFill>
-          <a:ln>
-            <a:noFill/>
-          </a:ln>
-        </p:spPr>
-        <p:style>
-          <a:lnRef idx="1">
-            <a:schemeClr val="accent1"/>
-          </a:lnRef>
-          <a:fillRef idx="3">
-            <a:schemeClr val="accent1"/>
-          </a:fillRef>
-          <a:effectRef idx="2">
-            <a:schemeClr val="accent1"/>
-          </a:effectRef>
-          <a:fontRef idx="minor">
-            <a:schemeClr val="lt1"/>
-          </a:fontRef>
-        </p:style>
-        <p:txBody>
-          <a:bodyPr rtlCol="0" anchor="ctr"/>
-          <a:lstStyle/>
-          <a:p>
-            <a:pPr algn="ctr"/>
-          </a:p>
-        </p:txBody>
-      </p:sp>
-      <p:sp>
-        <p:nvSpPr>
           <p:cNvPr id="18" name="Rounded Rectangle 17"/>
           <p:cNvSpPr/>
           <p:nvPr/>
@@ -13566,49 +11444,6 @@
           </a:prstGeom>
           <a:solidFill>
             <a:srgbClr val="FFFFFF"/>
-          </a:solidFill>
-          <a:ln>
-            <a:noFill/>
-          </a:ln>
-        </p:spPr>
-        <p:style>
-          <a:lnRef idx="1">
-            <a:schemeClr val="accent1"/>
-          </a:lnRef>
-          <a:fillRef idx="3">
-            <a:schemeClr val="accent1"/>
-          </a:fillRef>
-          <a:effectRef idx="2">
-            <a:schemeClr val="accent1"/>
-          </a:effectRef>
-          <a:fontRef idx="minor">
-            <a:schemeClr val="lt1"/>
-          </a:fontRef>
-        </p:style>
-        <p:txBody>
-          <a:bodyPr rtlCol="0" anchor="ctr"/>
-          <a:lstStyle/>
-          <a:p>
-            <a:pPr algn="ctr"/>
-          </a:p>
-        </p:txBody>
-      </p:sp>
-      <p:sp>
-        <p:nvSpPr>
-          <p:cNvPr id="20" name="Rectangle 19"/>
-          <p:cNvSpPr/>
-          <p:nvPr/>
-        </p:nvSpPr>
-        <p:spPr>
-          <a:xfrm>
-            <a:off x="512064" y="1773936"/>
-            <a:ext cx="50292" cy="3776472"/>
-          </a:xfrm>
-          <a:prstGeom prst="rect">
-            <a:avLst/>
-          </a:prstGeom>
-          <a:solidFill>
-            <a:srgbClr val="C60016"/>
           </a:solidFill>
           <a:ln>
             <a:noFill/>
@@ -13876,62 +11711,6 @@
           </a:prstGeom>
         </p:spPr>
       </p:pic>
-      <p:sp>
-        <p:nvSpPr>
-          <p:cNvPr id="8" name="Rectangle 7"/>
-          <p:cNvSpPr/>
-          <p:nvPr/>
-        </p:nvSpPr>
-        <p:spPr>
-          <a:xfrm>
-            <a:off x="612648" y="6620256"/>
-            <a:ext cx="10972800" cy="16459"/>
-          </a:xfrm>
-          <a:prstGeom prst="rect">
-            <a:avLst/>
-          </a:prstGeom>
-          <a:solidFill>
-            <a:srgbClr val="FFBC00"/>
-          </a:solidFill>
-          <a:ln>
-            <a:noFill/>
-          </a:ln>
-        </p:spPr>
-        <p:style>
-          <a:lnRef idx="1">
-            <a:schemeClr val="accent1"/>
-          </a:lnRef>
-          <a:fillRef idx="3">
-            <a:schemeClr val="accent1"/>
-          </a:fillRef>
-          <a:effectRef idx="2">
-            <a:schemeClr val="accent1"/>
-          </a:effectRef>
-          <a:fontRef idx="minor">
-            <a:schemeClr val="lt1"/>
-          </a:fontRef>
-        </p:style>
-        <p:txBody>
-          <a:bodyPr rtlCol="0" anchor="ctr" wrap="square" lIns="0" rIns="0" tIns="0" bIns="0"/>
-          <a:lstStyle/>
-          <a:p>
-            <a:pPr algn="ctr">
-              <a:spcBef>
-                <a:spcPts val="0"/>
-              </a:spcBef>
-              <a:spcAft>
-                <a:spcPts val="300"/>
-              </a:spcAft>
-              <a:defRPr sz="1800" b="0">
-                <a:solidFill>
-                  <a:srgbClr val="1A1A1A"/>
-                </a:solidFill>
-                <a:latin typeface="Arial"/>
-              </a:defRPr>
-            </a:pPr>
-          </a:p>
-        </p:txBody>
-      </p:sp>
       <p:sp>
         <p:nvSpPr>
           <p:cNvPr id="9" name="TextBox 8"/>
@@ -14290,92 +12069,6 @@
       </p:sp>
       <p:sp>
         <p:nvSpPr>
-          <p:cNvPr id="18" name="Rectangle 17"/>
-          <p:cNvSpPr/>
-          <p:nvPr/>
-        </p:nvSpPr>
-        <p:spPr>
-          <a:xfrm>
-            <a:off x="0" y="0"/>
-            <a:ext cx="146304" cy="1645920"/>
-          </a:xfrm>
-          <a:prstGeom prst="rect">
-            <a:avLst/>
-          </a:prstGeom>
-          <a:solidFill>
-            <a:srgbClr val="C60016"/>
-          </a:solidFill>
-          <a:ln>
-            <a:noFill/>
-          </a:ln>
-        </p:spPr>
-        <p:style>
-          <a:lnRef idx="1">
-            <a:schemeClr val="accent1"/>
-          </a:lnRef>
-          <a:fillRef idx="3">
-            <a:schemeClr val="accent1"/>
-          </a:fillRef>
-          <a:effectRef idx="2">
-            <a:schemeClr val="accent1"/>
-          </a:effectRef>
-          <a:fontRef idx="minor">
-            <a:schemeClr val="lt1"/>
-          </a:fontRef>
-        </p:style>
-        <p:txBody>
-          <a:bodyPr rtlCol="0" anchor="ctr"/>
-          <a:lstStyle/>
-          <a:p>
-            <a:pPr algn="ctr"/>
-          </a:p>
-        </p:txBody>
-      </p:sp>
-      <p:sp>
-        <p:nvSpPr>
-          <p:cNvPr id="19" name="Rectangle 18"/>
-          <p:cNvSpPr/>
-          <p:nvPr/>
-        </p:nvSpPr>
-        <p:spPr>
-          <a:xfrm>
-            <a:off x="612648" y="1581912"/>
-            <a:ext cx="822960" cy="50292"/>
-          </a:xfrm>
-          <a:prstGeom prst="rect">
-            <a:avLst/>
-          </a:prstGeom>
-          <a:solidFill>
-            <a:srgbClr val="FFBC00"/>
-          </a:solidFill>
-          <a:ln>
-            <a:noFill/>
-          </a:ln>
-        </p:spPr>
-        <p:style>
-          <a:lnRef idx="1">
-            <a:schemeClr val="accent1"/>
-          </a:lnRef>
-          <a:fillRef idx="3">
-            <a:schemeClr val="accent1"/>
-          </a:fillRef>
-          <a:effectRef idx="2">
-            <a:schemeClr val="accent1"/>
-          </a:effectRef>
-          <a:fontRef idx="minor">
-            <a:schemeClr val="lt1"/>
-          </a:fontRef>
-        </p:style>
-        <p:txBody>
-          <a:bodyPr rtlCol="0" anchor="ctr"/>
-          <a:lstStyle/>
-          <a:p>
-            <a:pPr algn="ctr"/>
-          </a:p>
-        </p:txBody>
-      </p:sp>
-      <p:sp>
-        <p:nvSpPr>
           <p:cNvPr id="20" name="Rounded Rectangle 19"/>
           <p:cNvSpPr/>
           <p:nvPr/>
@@ -14437,49 +12130,6 @@
           </a:prstGeom>
           <a:solidFill>
             <a:srgbClr val="1A1512"/>
-          </a:solidFill>
-          <a:ln>
-            <a:noFill/>
-          </a:ln>
-        </p:spPr>
-        <p:style>
-          <a:lnRef idx="1">
-            <a:schemeClr val="accent1"/>
-          </a:lnRef>
-          <a:fillRef idx="3">
-            <a:schemeClr val="accent1"/>
-          </a:fillRef>
-          <a:effectRef idx="2">
-            <a:schemeClr val="accent1"/>
-          </a:effectRef>
-          <a:fontRef idx="minor">
-            <a:schemeClr val="lt1"/>
-          </a:fontRef>
-        </p:style>
-        <p:txBody>
-          <a:bodyPr rtlCol="0" anchor="ctr"/>
-          <a:lstStyle/>
-          <a:p>
-            <a:pPr algn="ctr"/>
-          </a:p>
-        </p:txBody>
-      </p:sp>
-      <p:sp>
-        <p:nvSpPr>
-          <p:cNvPr id="22" name="Rectangle 21"/>
-          <p:cNvSpPr/>
-          <p:nvPr/>
-        </p:nvSpPr>
-        <p:spPr>
-          <a:xfrm>
-            <a:off x="493776" y="1773936"/>
-            <a:ext cx="64008" cy="2240280"/>
-          </a:xfrm>
-          <a:prstGeom prst="rect">
-            <a:avLst/>
-          </a:prstGeom>
-          <a:solidFill>
-            <a:srgbClr val="FFBC00"/>
           </a:solidFill>
           <a:ln>
             <a:noFill/>
@@ -14875,62 +12525,6 @@
           </a:prstGeom>
         </p:spPr>
       </p:pic>
-      <p:sp>
-        <p:nvSpPr>
-          <p:cNvPr id="10" name="Rectangle 9"/>
-          <p:cNvSpPr/>
-          <p:nvPr/>
-        </p:nvSpPr>
-        <p:spPr>
-          <a:xfrm>
-            <a:off x="612648" y="6620256"/>
-            <a:ext cx="10972800" cy="16459"/>
-          </a:xfrm>
-          <a:prstGeom prst="rect">
-            <a:avLst/>
-          </a:prstGeom>
-          <a:solidFill>
-            <a:srgbClr val="FFBC00"/>
-          </a:solidFill>
-          <a:ln>
-            <a:noFill/>
-          </a:ln>
-        </p:spPr>
-        <p:style>
-          <a:lnRef idx="1">
-            <a:schemeClr val="accent1"/>
-          </a:lnRef>
-          <a:fillRef idx="3">
-            <a:schemeClr val="accent1"/>
-          </a:fillRef>
-          <a:effectRef idx="2">
-            <a:schemeClr val="accent1"/>
-          </a:effectRef>
-          <a:fontRef idx="minor">
-            <a:schemeClr val="lt1"/>
-          </a:fontRef>
-        </p:style>
-        <p:txBody>
-          <a:bodyPr rtlCol="0" anchor="ctr" wrap="square" lIns="0" rIns="0" tIns="0" bIns="0"/>
-          <a:lstStyle/>
-          <a:p>
-            <a:pPr algn="ctr">
-              <a:spcBef>
-                <a:spcPts val="0"/>
-              </a:spcBef>
-              <a:spcAft>
-                <a:spcPts val="300"/>
-              </a:spcAft>
-              <a:defRPr sz="1800" b="0">
-                <a:solidFill>
-                  <a:srgbClr val="1A1A1A"/>
-                </a:solidFill>
-                <a:latin typeface="Arial"/>
-              </a:defRPr>
-            </a:pPr>
-          </a:p>
-        </p:txBody>
-      </p:sp>
       <p:sp>
         <p:nvSpPr>
           <p:cNvPr id="11" name="TextBox 10"/>
@@ -15289,92 +12883,6 @@
       </p:sp>
       <p:sp>
         <p:nvSpPr>
-          <p:cNvPr id="62" name="Rectangle 61"/>
-          <p:cNvSpPr/>
-          <p:nvPr/>
-        </p:nvSpPr>
-        <p:spPr>
-          <a:xfrm>
-            <a:off x="0" y="0"/>
-            <a:ext cx="146304" cy="1645920"/>
-          </a:xfrm>
-          <a:prstGeom prst="rect">
-            <a:avLst/>
-          </a:prstGeom>
-          <a:solidFill>
-            <a:srgbClr val="C60016"/>
-          </a:solidFill>
-          <a:ln>
-            <a:noFill/>
-          </a:ln>
-        </p:spPr>
-        <p:style>
-          <a:lnRef idx="1">
-            <a:schemeClr val="accent1"/>
-          </a:lnRef>
-          <a:fillRef idx="3">
-            <a:schemeClr val="accent1"/>
-          </a:fillRef>
-          <a:effectRef idx="2">
-            <a:schemeClr val="accent1"/>
-          </a:effectRef>
-          <a:fontRef idx="minor">
-            <a:schemeClr val="lt1"/>
-          </a:fontRef>
-        </p:style>
-        <p:txBody>
-          <a:bodyPr rtlCol="0" anchor="ctr"/>
-          <a:lstStyle/>
-          <a:p>
-            <a:pPr algn="ctr"/>
-          </a:p>
-        </p:txBody>
-      </p:sp>
-      <p:sp>
-        <p:nvSpPr>
-          <p:cNvPr id="63" name="Rectangle 62"/>
-          <p:cNvSpPr/>
-          <p:nvPr/>
-        </p:nvSpPr>
-        <p:spPr>
-          <a:xfrm>
-            <a:off x="612648" y="1581912"/>
-            <a:ext cx="822960" cy="50292"/>
-          </a:xfrm>
-          <a:prstGeom prst="rect">
-            <a:avLst/>
-          </a:prstGeom>
-          <a:solidFill>
-            <a:srgbClr val="FFBC00"/>
-          </a:solidFill>
-          <a:ln>
-            <a:noFill/>
-          </a:ln>
-        </p:spPr>
-        <p:style>
-          <a:lnRef idx="1">
-            <a:schemeClr val="accent1"/>
-          </a:lnRef>
-          <a:fillRef idx="3">
-            <a:schemeClr val="accent1"/>
-          </a:fillRef>
-          <a:effectRef idx="2">
-            <a:schemeClr val="accent1"/>
-          </a:effectRef>
-          <a:fontRef idx="minor">
-            <a:schemeClr val="lt1"/>
-          </a:fontRef>
-        </p:style>
-        <p:txBody>
-          <a:bodyPr rtlCol="0" anchor="ctr"/>
-          <a:lstStyle/>
-          <a:p>
-            <a:pPr algn="ctr"/>
-          </a:p>
-        </p:txBody>
-      </p:sp>
-      <p:sp>
-        <p:nvSpPr>
           <p:cNvPr id="64" name="Rounded Rectangle 63"/>
           <p:cNvSpPr/>
           <p:nvPr/>
@@ -15465,49 +12973,6 @@
       </p:sp>
       <p:sp>
         <p:nvSpPr>
-          <p:cNvPr id="66" name="Rectangle 65"/>
-          <p:cNvSpPr/>
-          <p:nvPr/>
-        </p:nvSpPr>
-        <p:spPr>
-          <a:xfrm>
-            <a:off x="466344" y="1773936"/>
-            <a:ext cx="59436" cy="4169663"/>
-          </a:xfrm>
-          <a:prstGeom prst="rect">
-            <a:avLst/>
-          </a:prstGeom>
-          <a:solidFill>
-            <a:srgbClr val="FFBC00"/>
-          </a:solidFill>
-          <a:ln>
-            <a:noFill/>
-          </a:ln>
-        </p:spPr>
-        <p:style>
-          <a:lnRef idx="1">
-            <a:schemeClr val="accent1"/>
-          </a:lnRef>
-          <a:fillRef idx="3">
-            <a:schemeClr val="accent1"/>
-          </a:fillRef>
-          <a:effectRef idx="2">
-            <a:schemeClr val="accent1"/>
-          </a:effectRef>
-          <a:fontRef idx="minor">
-            <a:schemeClr val="lt1"/>
-          </a:fontRef>
-        </p:style>
-        <p:txBody>
-          <a:bodyPr rtlCol="0" anchor="ctr"/>
-          <a:lstStyle/>
-          <a:p>
-            <a:pPr algn="ctr"/>
-          </a:p>
-        </p:txBody>
-      </p:sp>
-      <p:sp>
-        <p:nvSpPr>
           <p:cNvPr id="67" name="Rectangle 66"/>
           <p:cNvSpPr/>
           <p:nvPr/>
@@ -15696,49 +13161,6 @@
           </a:prstGeom>
           <a:solidFill>
             <a:srgbClr val="FFFFFF"/>
-          </a:solidFill>
-          <a:ln>
-            <a:noFill/>
-          </a:ln>
-        </p:spPr>
-        <p:style>
-          <a:lnRef idx="1">
-            <a:schemeClr val="accent1"/>
-          </a:lnRef>
-          <a:fillRef idx="3">
-            <a:schemeClr val="accent1"/>
-          </a:fillRef>
-          <a:effectRef idx="2">
-            <a:schemeClr val="accent1"/>
-          </a:effectRef>
-          <a:fontRef idx="minor">
-            <a:schemeClr val="lt1"/>
-          </a:fontRef>
-        </p:style>
-        <p:txBody>
-          <a:bodyPr rtlCol="0" anchor="ctr"/>
-          <a:lstStyle/>
-          <a:p>
-            <a:pPr algn="ctr"/>
-          </a:p>
-        </p:txBody>
-      </p:sp>
-      <p:sp>
-        <p:nvSpPr>
-          <p:cNvPr id="72" name="Rectangle 71"/>
-          <p:cNvSpPr/>
-          <p:nvPr/>
-        </p:nvSpPr>
-        <p:spPr>
-          <a:xfrm>
-            <a:off x="6089904" y="1773936"/>
-            <a:ext cx="59436" cy="4169663"/>
-          </a:xfrm>
-          <a:prstGeom prst="rect">
-            <a:avLst/>
-          </a:prstGeom>
-          <a:solidFill>
-            <a:srgbClr val="FFBC00"/>
           </a:solidFill>
           <a:ln>
             <a:noFill/>
@@ -18455,62 +15877,6 @@
           </a:prstGeom>
         </p:spPr>
       </p:pic>
-      <p:sp>
-        <p:nvSpPr>
-          <p:cNvPr id="54" name="Rectangle 53"/>
-          <p:cNvSpPr/>
-          <p:nvPr/>
-        </p:nvSpPr>
-        <p:spPr>
-          <a:xfrm>
-            <a:off x="612648" y="6620256"/>
-            <a:ext cx="10972800" cy="16459"/>
-          </a:xfrm>
-          <a:prstGeom prst="rect">
-            <a:avLst/>
-          </a:prstGeom>
-          <a:solidFill>
-            <a:srgbClr val="FFBC00"/>
-          </a:solidFill>
-          <a:ln>
-            <a:noFill/>
-          </a:ln>
-        </p:spPr>
-        <p:style>
-          <a:lnRef idx="1">
-            <a:schemeClr val="accent1"/>
-          </a:lnRef>
-          <a:fillRef idx="3">
-            <a:schemeClr val="accent1"/>
-          </a:fillRef>
-          <a:effectRef idx="2">
-            <a:schemeClr val="accent1"/>
-          </a:effectRef>
-          <a:fontRef idx="minor">
-            <a:schemeClr val="lt1"/>
-          </a:fontRef>
-        </p:style>
-        <p:txBody>
-          <a:bodyPr rtlCol="0" anchor="ctr" wrap="square" lIns="0" rIns="0" tIns="0" bIns="0"/>
-          <a:lstStyle/>
-          <a:p>
-            <a:pPr algn="ctr">
-              <a:spcBef>
-                <a:spcPts val="0"/>
-              </a:spcBef>
-              <a:spcAft>
-                <a:spcPts val="300"/>
-              </a:spcAft>
-              <a:defRPr sz="1800" b="0">
-                <a:solidFill>
-                  <a:srgbClr val="1A1A1A"/>
-                </a:solidFill>
-                <a:latin typeface="Arial"/>
-              </a:defRPr>
-            </a:pPr>
-          </a:p>
-        </p:txBody>
-      </p:sp>
       <p:sp>
         <p:nvSpPr>
           <p:cNvPr id="55" name="TextBox 54"/>
@@ -18869,92 +16235,6 @@
       </p:sp>
       <p:sp>
         <p:nvSpPr>
-          <p:cNvPr id="16" name="Rectangle 15"/>
-          <p:cNvSpPr/>
-          <p:nvPr/>
-        </p:nvSpPr>
-        <p:spPr>
-          <a:xfrm>
-            <a:off x="0" y="0"/>
-            <a:ext cx="146304" cy="1645920"/>
-          </a:xfrm>
-          <a:prstGeom prst="rect">
-            <a:avLst/>
-          </a:prstGeom>
-          <a:solidFill>
-            <a:srgbClr val="C60016"/>
-          </a:solidFill>
-          <a:ln>
-            <a:noFill/>
-          </a:ln>
-        </p:spPr>
-        <p:style>
-          <a:lnRef idx="1">
-            <a:schemeClr val="accent1"/>
-          </a:lnRef>
-          <a:fillRef idx="3">
-            <a:schemeClr val="accent1"/>
-          </a:fillRef>
-          <a:effectRef idx="2">
-            <a:schemeClr val="accent1"/>
-          </a:effectRef>
-          <a:fontRef idx="minor">
-            <a:schemeClr val="lt1"/>
-          </a:fontRef>
-        </p:style>
-        <p:txBody>
-          <a:bodyPr rtlCol="0" anchor="ctr"/>
-          <a:lstStyle/>
-          <a:p>
-            <a:pPr algn="ctr"/>
-          </a:p>
-        </p:txBody>
-      </p:sp>
-      <p:sp>
-        <p:nvSpPr>
-          <p:cNvPr id="17" name="Rectangle 16"/>
-          <p:cNvSpPr/>
-          <p:nvPr/>
-        </p:nvSpPr>
-        <p:spPr>
-          <a:xfrm>
-            <a:off x="612648" y="1581912"/>
-            <a:ext cx="822960" cy="50292"/>
-          </a:xfrm>
-          <a:prstGeom prst="rect">
-            <a:avLst/>
-          </a:prstGeom>
-          <a:solidFill>
-            <a:srgbClr val="FFBC00"/>
-          </a:solidFill>
-          <a:ln>
-            <a:noFill/>
-          </a:ln>
-        </p:spPr>
-        <p:style>
-          <a:lnRef idx="1">
-            <a:schemeClr val="accent1"/>
-          </a:lnRef>
-          <a:fillRef idx="3">
-            <a:schemeClr val="accent1"/>
-          </a:fillRef>
-          <a:effectRef idx="2">
-            <a:schemeClr val="accent1"/>
-          </a:effectRef>
-          <a:fontRef idx="minor">
-            <a:schemeClr val="lt1"/>
-          </a:fontRef>
-        </p:style>
-        <p:txBody>
-          <a:bodyPr rtlCol="0" anchor="ctr"/>
-          <a:lstStyle/>
-          <a:p>
-            <a:pPr algn="ctr"/>
-          </a:p>
-        </p:txBody>
-      </p:sp>
-      <p:sp>
-        <p:nvSpPr>
           <p:cNvPr id="18" name="Rounded Rectangle 17"/>
           <p:cNvSpPr/>
           <p:nvPr/>
@@ -19016,49 +16296,6 @@
           </a:prstGeom>
           <a:solidFill>
             <a:srgbClr val="FFFFFF"/>
-          </a:solidFill>
-          <a:ln>
-            <a:noFill/>
-          </a:ln>
-        </p:spPr>
-        <p:style>
-          <a:lnRef idx="1">
-            <a:schemeClr val="accent1"/>
-          </a:lnRef>
-          <a:fillRef idx="3">
-            <a:schemeClr val="accent1"/>
-          </a:fillRef>
-          <a:effectRef idx="2">
-            <a:schemeClr val="accent1"/>
-          </a:effectRef>
-          <a:fontRef idx="minor">
-            <a:schemeClr val="lt1"/>
-          </a:fontRef>
-        </p:style>
-        <p:txBody>
-          <a:bodyPr rtlCol="0" anchor="ctr"/>
-          <a:lstStyle/>
-          <a:p>
-            <a:pPr algn="ctr"/>
-          </a:p>
-        </p:txBody>
-      </p:sp>
-      <p:sp>
-        <p:nvSpPr>
-          <p:cNvPr id="20" name="Rectangle 19"/>
-          <p:cNvSpPr/>
-          <p:nvPr/>
-        </p:nvSpPr>
-        <p:spPr>
-          <a:xfrm>
-            <a:off x="512064" y="1773936"/>
-            <a:ext cx="50292" cy="3776472"/>
-          </a:xfrm>
-          <a:prstGeom prst="rect">
-            <a:avLst/>
-          </a:prstGeom>
-          <a:solidFill>
-            <a:srgbClr val="C60016"/>
           </a:solidFill>
           <a:ln>
             <a:noFill/>
@@ -19326,62 +16563,6 @@
           </a:prstGeom>
         </p:spPr>
       </p:pic>
-      <p:sp>
-        <p:nvSpPr>
-          <p:cNvPr id="8" name="Rectangle 7"/>
-          <p:cNvSpPr/>
-          <p:nvPr/>
-        </p:nvSpPr>
-        <p:spPr>
-          <a:xfrm>
-            <a:off x="612648" y="6620256"/>
-            <a:ext cx="10972800" cy="16459"/>
-          </a:xfrm>
-          <a:prstGeom prst="rect">
-            <a:avLst/>
-          </a:prstGeom>
-          <a:solidFill>
-            <a:srgbClr val="FFBC00"/>
-          </a:solidFill>
-          <a:ln>
-            <a:noFill/>
-          </a:ln>
-        </p:spPr>
-        <p:style>
-          <a:lnRef idx="1">
-            <a:schemeClr val="accent1"/>
-          </a:lnRef>
-          <a:fillRef idx="3">
-            <a:schemeClr val="accent1"/>
-          </a:fillRef>
-          <a:effectRef idx="2">
-            <a:schemeClr val="accent1"/>
-          </a:effectRef>
-          <a:fontRef idx="minor">
-            <a:schemeClr val="lt1"/>
-          </a:fontRef>
-        </p:style>
-        <p:txBody>
-          <a:bodyPr rtlCol="0" anchor="ctr" wrap="square" lIns="0" rIns="0" tIns="0" bIns="0"/>
-          <a:lstStyle/>
-          <a:p>
-            <a:pPr algn="ctr">
-              <a:spcBef>
-                <a:spcPts val="0"/>
-              </a:spcBef>
-              <a:spcAft>
-                <a:spcPts val="300"/>
-              </a:spcAft>
-              <a:defRPr sz="1800" b="0">
-                <a:solidFill>
-                  <a:srgbClr val="1A1A1A"/>
-                </a:solidFill>
-                <a:latin typeface="Arial"/>
-              </a:defRPr>
-            </a:pPr>
-          </a:p>
-        </p:txBody>
-      </p:sp>
       <p:sp>
         <p:nvSpPr>
           <p:cNvPr id="9" name="TextBox 8"/>
@@ -19740,92 +16921,6 @@
       </p:sp>
       <p:sp>
         <p:nvSpPr>
-          <p:cNvPr id="18" name="Rectangle 17"/>
-          <p:cNvSpPr/>
-          <p:nvPr/>
-        </p:nvSpPr>
-        <p:spPr>
-          <a:xfrm>
-            <a:off x="0" y="0"/>
-            <a:ext cx="146304" cy="1645920"/>
-          </a:xfrm>
-          <a:prstGeom prst="rect">
-            <a:avLst/>
-          </a:prstGeom>
-          <a:solidFill>
-            <a:srgbClr val="C60016"/>
-          </a:solidFill>
-          <a:ln>
-            <a:noFill/>
-          </a:ln>
-        </p:spPr>
-        <p:style>
-          <a:lnRef idx="1">
-            <a:schemeClr val="accent1"/>
-          </a:lnRef>
-          <a:fillRef idx="3">
-            <a:schemeClr val="accent1"/>
-          </a:fillRef>
-          <a:effectRef idx="2">
-            <a:schemeClr val="accent1"/>
-          </a:effectRef>
-          <a:fontRef idx="minor">
-            <a:schemeClr val="lt1"/>
-          </a:fontRef>
-        </p:style>
-        <p:txBody>
-          <a:bodyPr rtlCol="0" anchor="ctr"/>
-          <a:lstStyle/>
-          <a:p>
-            <a:pPr algn="ctr"/>
-          </a:p>
-        </p:txBody>
-      </p:sp>
-      <p:sp>
-        <p:nvSpPr>
-          <p:cNvPr id="19" name="Rectangle 18"/>
-          <p:cNvSpPr/>
-          <p:nvPr/>
-        </p:nvSpPr>
-        <p:spPr>
-          <a:xfrm>
-            <a:off x="612648" y="1581912"/>
-            <a:ext cx="822960" cy="50292"/>
-          </a:xfrm>
-          <a:prstGeom prst="rect">
-            <a:avLst/>
-          </a:prstGeom>
-          <a:solidFill>
-            <a:srgbClr val="FFBC00"/>
-          </a:solidFill>
-          <a:ln>
-            <a:noFill/>
-          </a:ln>
-        </p:spPr>
-        <p:style>
-          <a:lnRef idx="1">
-            <a:schemeClr val="accent1"/>
-          </a:lnRef>
-          <a:fillRef idx="3">
-            <a:schemeClr val="accent1"/>
-          </a:fillRef>
-          <a:effectRef idx="2">
-            <a:schemeClr val="accent1"/>
-          </a:effectRef>
-          <a:fontRef idx="minor">
-            <a:schemeClr val="lt1"/>
-          </a:fontRef>
-        </p:style>
-        <p:txBody>
-          <a:bodyPr rtlCol="0" anchor="ctr"/>
-          <a:lstStyle/>
-          <a:p>
-            <a:pPr algn="ctr"/>
-          </a:p>
-        </p:txBody>
-      </p:sp>
-      <p:sp>
-        <p:nvSpPr>
           <p:cNvPr id="20" name="Rounded Rectangle 19"/>
           <p:cNvSpPr/>
           <p:nvPr/>
@@ -19887,49 +16982,6 @@
           </a:prstGeom>
           <a:solidFill>
             <a:srgbClr val="1A1512"/>
-          </a:solidFill>
-          <a:ln>
-            <a:noFill/>
-          </a:ln>
-        </p:spPr>
-        <p:style>
-          <a:lnRef idx="1">
-            <a:schemeClr val="accent1"/>
-          </a:lnRef>
-          <a:fillRef idx="3">
-            <a:schemeClr val="accent1"/>
-          </a:fillRef>
-          <a:effectRef idx="2">
-            <a:schemeClr val="accent1"/>
-          </a:effectRef>
-          <a:fontRef idx="minor">
-            <a:schemeClr val="lt1"/>
-          </a:fontRef>
-        </p:style>
-        <p:txBody>
-          <a:bodyPr rtlCol="0" anchor="ctr"/>
-          <a:lstStyle/>
-          <a:p>
-            <a:pPr algn="ctr"/>
-          </a:p>
-        </p:txBody>
-      </p:sp>
-      <p:sp>
-        <p:nvSpPr>
-          <p:cNvPr id="22" name="Rectangle 21"/>
-          <p:cNvSpPr/>
-          <p:nvPr/>
-        </p:nvSpPr>
-        <p:spPr>
-          <a:xfrm>
-            <a:off x="493776" y="1773936"/>
-            <a:ext cx="64008" cy="2240280"/>
-          </a:xfrm>
-          <a:prstGeom prst="rect">
-            <a:avLst/>
-          </a:prstGeom>
-          <a:solidFill>
-            <a:srgbClr val="FFBC00"/>
           </a:solidFill>
           <a:ln>
             <a:noFill/>
@@ -20325,62 +17377,6 @@
           </a:prstGeom>
         </p:spPr>
       </p:pic>
-      <p:sp>
-        <p:nvSpPr>
-          <p:cNvPr id="10" name="Rectangle 9"/>
-          <p:cNvSpPr/>
-          <p:nvPr/>
-        </p:nvSpPr>
-        <p:spPr>
-          <a:xfrm>
-            <a:off x="612648" y="6620256"/>
-            <a:ext cx="10972800" cy="16459"/>
-          </a:xfrm>
-          <a:prstGeom prst="rect">
-            <a:avLst/>
-          </a:prstGeom>
-          <a:solidFill>
-            <a:srgbClr val="FFBC00"/>
-          </a:solidFill>
-          <a:ln>
-            <a:noFill/>
-          </a:ln>
-        </p:spPr>
-        <p:style>
-          <a:lnRef idx="1">
-            <a:schemeClr val="accent1"/>
-          </a:lnRef>
-          <a:fillRef idx="3">
-            <a:schemeClr val="accent1"/>
-          </a:fillRef>
-          <a:effectRef idx="2">
-            <a:schemeClr val="accent1"/>
-          </a:effectRef>
-          <a:fontRef idx="minor">
-            <a:schemeClr val="lt1"/>
-          </a:fontRef>
-        </p:style>
-        <p:txBody>
-          <a:bodyPr rtlCol="0" anchor="ctr" wrap="square" lIns="0" rIns="0" tIns="0" bIns="0"/>
-          <a:lstStyle/>
-          <a:p>
-            <a:pPr algn="ctr">
-              <a:spcBef>
-                <a:spcPts val="0"/>
-              </a:spcBef>
-              <a:spcAft>
-                <a:spcPts val="300"/>
-              </a:spcAft>
-              <a:defRPr sz="1800" b="0">
-                <a:solidFill>
-                  <a:srgbClr val="1A1A1A"/>
-                </a:solidFill>
-                <a:latin typeface="Arial"/>
-              </a:defRPr>
-            </a:pPr>
-          </a:p>
-        </p:txBody>
-      </p:sp>
       <p:sp>
         <p:nvSpPr>
           <p:cNvPr id="11" name="TextBox 10"/>
@@ -20739,92 +17735,6 @@
       </p:sp>
       <p:sp>
         <p:nvSpPr>
-          <p:cNvPr id="16" name="Rectangle 15"/>
-          <p:cNvSpPr/>
-          <p:nvPr/>
-        </p:nvSpPr>
-        <p:spPr>
-          <a:xfrm>
-            <a:off x="0" y="0"/>
-            <a:ext cx="146304" cy="1645920"/>
-          </a:xfrm>
-          <a:prstGeom prst="rect">
-            <a:avLst/>
-          </a:prstGeom>
-          <a:solidFill>
-            <a:srgbClr val="C60016"/>
-          </a:solidFill>
-          <a:ln>
-            <a:noFill/>
-          </a:ln>
-        </p:spPr>
-        <p:style>
-          <a:lnRef idx="1">
-            <a:schemeClr val="accent1"/>
-          </a:lnRef>
-          <a:fillRef idx="3">
-            <a:schemeClr val="accent1"/>
-          </a:fillRef>
-          <a:effectRef idx="2">
-            <a:schemeClr val="accent1"/>
-          </a:effectRef>
-          <a:fontRef idx="minor">
-            <a:schemeClr val="lt1"/>
-          </a:fontRef>
-        </p:style>
-        <p:txBody>
-          <a:bodyPr rtlCol="0" anchor="ctr"/>
-          <a:lstStyle/>
-          <a:p>
-            <a:pPr algn="ctr"/>
-          </a:p>
-        </p:txBody>
-      </p:sp>
-      <p:sp>
-        <p:nvSpPr>
-          <p:cNvPr id="17" name="Rectangle 16"/>
-          <p:cNvSpPr/>
-          <p:nvPr/>
-        </p:nvSpPr>
-        <p:spPr>
-          <a:xfrm>
-            <a:off x="612648" y="1581912"/>
-            <a:ext cx="822960" cy="50292"/>
-          </a:xfrm>
-          <a:prstGeom prst="rect">
-            <a:avLst/>
-          </a:prstGeom>
-          <a:solidFill>
-            <a:srgbClr val="FFBC00"/>
-          </a:solidFill>
-          <a:ln>
-            <a:noFill/>
-          </a:ln>
-        </p:spPr>
-        <p:style>
-          <a:lnRef idx="1">
-            <a:schemeClr val="accent1"/>
-          </a:lnRef>
-          <a:fillRef idx="3">
-            <a:schemeClr val="accent1"/>
-          </a:fillRef>
-          <a:effectRef idx="2">
-            <a:schemeClr val="accent1"/>
-          </a:effectRef>
-          <a:fontRef idx="minor">
-            <a:schemeClr val="lt1"/>
-          </a:fontRef>
-        </p:style>
-        <p:txBody>
-          <a:bodyPr rtlCol="0" anchor="ctr"/>
-          <a:lstStyle/>
-          <a:p>
-            <a:pPr algn="ctr"/>
-          </a:p>
-        </p:txBody>
-      </p:sp>
-      <p:sp>
-        <p:nvSpPr>
           <p:cNvPr id="18" name="Rounded Rectangle 17"/>
           <p:cNvSpPr/>
           <p:nvPr/>
@@ -20886,49 +17796,6 @@
           </a:prstGeom>
           <a:solidFill>
             <a:srgbClr val="5A1018"/>
-          </a:solidFill>
-          <a:ln>
-            <a:noFill/>
-          </a:ln>
-        </p:spPr>
-        <p:style>
-          <a:lnRef idx="1">
-            <a:schemeClr val="accent1"/>
-          </a:lnRef>
-          <a:fillRef idx="3">
-            <a:schemeClr val="accent1"/>
-          </a:fillRef>
-          <a:effectRef idx="2">
-            <a:schemeClr val="accent1"/>
-          </a:effectRef>
-          <a:fontRef idx="minor">
-            <a:schemeClr val="lt1"/>
-          </a:fontRef>
-        </p:style>
-        <p:txBody>
-          <a:bodyPr rtlCol="0" anchor="ctr"/>
-          <a:lstStyle/>
-          <a:p>
-            <a:pPr algn="ctr"/>
-          </a:p>
-        </p:txBody>
-      </p:sp>
-      <p:sp>
-        <p:nvSpPr>
-          <p:cNvPr id="20" name="Rectangle 19"/>
-          <p:cNvSpPr/>
-          <p:nvPr/>
-        </p:nvSpPr>
-        <p:spPr>
-          <a:xfrm>
-            <a:off x="493776" y="1773936"/>
-            <a:ext cx="64008" cy="2240280"/>
-          </a:xfrm>
-          <a:prstGeom prst="rect">
-            <a:avLst/>
-          </a:prstGeom>
-          <a:solidFill>
-            <a:srgbClr val="FFBC00"/>
           </a:solidFill>
           <a:ln>
             <a:noFill/>
@@ -21220,62 +18087,6 @@
           </a:prstGeom>
         </p:spPr>
       </p:pic>
-      <p:sp>
-        <p:nvSpPr>
-          <p:cNvPr id="8" name="Rectangle 7"/>
-          <p:cNvSpPr/>
-          <p:nvPr/>
-        </p:nvSpPr>
-        <p:spPr>
-          <a:xfrm>
-            <a:off x="612648" y="6620256"/>
-            <a:ext cx="10972800" cy="16459"/>
-          </a:xfrm>
-          <a:prstGeom prst="rect">
-            <a:avLst/>
-          </a:prstGeom>
-          <a:solidFill>
-            <a:srgbClr val="FFBC00"/>
-          </a:solidFill>
-          <a:ln>
-            <a:noFill/>
-          </a:ln>
-        </p:spPr>
-        <p:style>
-          <a:lnRef idx="1">
-            <a:schemeClr val="accent1"/>
-          </a:lnRef>
-          <a:fillRef idx="3">
-            <a:schemeClr val="accent1"/>
-          </a:fillRef>
-          <a:effectRef idx="2">
-            <a:schemeClr val="accent1"/>
-          </a:effectRef>
-          <a:fontRef idx="minor">
-            <a:schemeClr val="lt1"/>
-          </a:fontRef>
-        </p:style>
-        <p:txBody>
-          <a:bodyPr rtlCol="0" anchor="ctr" wrap="square" lIns="0" rIns="0" tIns="0" bIns="0"/>
-          <a:lstStyle/>
-          <a:p>
-            <a:pPr algn="ctr">
-              <a:spcBef>
-                <a:spcPts val="0"/>
-              </a:spcBef>
-              <a:spcAft>
-                <a:spcPts val="300"/>
-              </a:spcAft>
-              <a:defRPr sz="1800" b="0">
-                <a:solidFill>
-                  <a:srgbClr val="1A1A1A"/>
-                </a:solidFill>
-                <a:latin typeface="Arial"/>
-              </a:defRPr>
-            </a:pPr>
-          </a:p>
-        </p:txBody>
-      </p:sp>
       <p:sp>
         <p:nvSpPr>
           <p:cNvPr id="9" name="TextBox 8"/>
@@ -21634,92 +18445,6 @@
       </p:sp>
       <p:sp>
         <p:nvSpPr>
-          <p:cNvPr id="20" name="Rectangle 19"/>
-          <p:cNvSpPr/>
-          <p:nvPr/>
-        </p:nvSpPr>
-        <p:spPr>
-          <a:xfrm>
-            <a:off x="0" y="0"/>
-            <a:ext cx="146304" cy="1645920"/>
-          </a:xfrm>
-          <a:prstGeom prst="rect">
-            <a:avLst/>
-          </a:prstGeom>
-          <a:solidFill>
-            <a:srgbClr val="C60016"/>
-          </a:solidFill>
-          <a:ln>
-            <a:noFill/>
-          </a:ln>
-        </p:spPr>
-        <p:style>
-          <a:lnRef idx="1">
-            <a:schemeClr val="accent1"/>
-          </a:lnRef>
-          <a:fillRef idx="3">
-            <a:schemeClr val="accent1"/>
-          </a:fillRef>
-          <a:effectRef idx="2">
-            <a:schemeClr val="accent1"/>
-          </a:effectRef>
-          <a:fontRef idx="minor">
-            <a:schemeClr val="lt1"/>
-          </a:fontRef>
-        </p:style>
-        <p:txBody>
-          <a:bodyPr rtlCol="0" anchor="ctr"/>
-          <a:lstStyle/>
-          <a:p>
-            <a:pPr algn="ctr"/>
-          </a:p>
-        </p:txBody>
-      </p:sp>
-      <p:sp>
-        <p:nvSpPr>
-          <p:cNvPr id="21" name="Rectangle 20"/>
-          <p:cNvSpPr/>
-          <p:nvPr/>
-        </p:nvSpPr>
-        <p:spPr>
-          <a:xfrm>
-            <a:off x="612648" y="1581912"/>
-            <a:ext cx="822960" cy="50292"/>
-          </a:xfrm>
-          <a:prstGeom prst="rect">
-            <a:avLst/>
-          </a:prstGeom>
-          <a:solidFill>
-            <a:srgbClr val="FFBC00"/>
-          </a:solidFill>
-          <a:ln>
-            <a:noFill/>
-          </a:ln>
-        </p:spPr>
-        <p:style>
-          <a:lnRef idx="1">
-            <a:schemeClr val="accent1"/>
-          </a:lnRef>
-          <a:fillRef idx="3">
-            <a:schemeClr val="accent1"/>
-          </a:fillRef>
-          <a:effectRef idx="2">
-            <a:schemeClr val="accent1"/>
-          </a:effectRef>
-          <a:fontRef idx="minor">
-            <a:schemeClr val="lt1"/>
-          </a:fontRef>
-        </p:style>
-        <p:txBody>
-          <a:bodyPr rtlCol="0" anchor="ctr"/>
-          <a:lstStyle/>
-          <a:p>
-            <a:pPr algn="ctr"/>
-          </a:p>
-        </p:txBody>
-      </p:sp>
-      <p:sp>
-        <p:nvSpPr>
           <p:cNvPr id="22" name="Rounded Rectangle 21"/>
           <p:cNvSpPr/>
           <p:nvPr/>
@@ -21736,49 +18461,6 @@
           </a:prstGeom>
           <a:solidFill>
             <a:srgbClr val="F7F4F1"/>
-          </a:solidFill>
-          <a:ln>
-            <a:noFill/>
-          </a:ln>
-        </p:spPr>
-        <p:style>
-          <a:lnRef idx="1">
-            <a:schemeClr val="accent1"/>
-          </a:lnRef>
-          <a:fillRef idx="3">
-            <a:schemeClr val="accent1"/>
-          </a:fillRef>
-          <a:effectRef idx="2">
-            <a:schemeClr val="accent1"/>
-          </a:effectRef>
-          <a:fontRef idx="minor">
-            <a:schemeClr val="lt1"/>
-          </a:fontRef>
-        </p:style>
-        <p:txBody>
-          <a:bodyPr rtlCol="0" anchor="ctr"/>
-          <a:lstStyle/>
-          <a:p>
-            <a:pPr algn="ctr"/>
-          </a:p>
-        </p:txBody>
-      </p:sp>
-      <p:sp>
-        <p:nvSpPr>
-          <p:cNvPr id="23" name="Rectangle 22"/>
-          <p:cNvSpPr/>
-          <p:nvPr/>
-        </p:nvSpPr>
-        <p:spPr>
-          <a:xfrm>
-            <a:off x="521207" y="1801368"/>
-            <a:ext cx="50292" cy="1207008"/>
-          </a:xfrm>
-          <a:prstGeom prst="rect">
-            <a:avLst/>
-          </a:prstGeom>
-          <a:solidFill>
-            <a:srgbClr val="FFBC00"/>
           </a:solidFill>
           <a:ln>
             <a:noFill/>
@@ -22270,62 +18952,6 @@
           </a:prstGeom>
         </p:spPr>
       </p:pic>
-      <p:sp>
-        <p:nvSpPr>
-          <p:cNvPr id="12" name="Rectangle 11"/>
-          <p:cNvSpPr/>
-          <p:nvPr/>
-        </p:nvSpPr>
-        <p:spPr>
-          <a:xfrm>
-            <a:off x="612648" y="6620256"/>
-            <a:ext cx="10972800" cy="16459"/>
-          </a:xfrm>
-          <a:prstGeom prst="rect">
-            <a:avLst/>
-          </a:prstGeom>
-          <a:solidFill>
-            <a:srgbClr val="FFBC00"/>
-          </a:solidFill>
-          <a:ln>
-            <a:noFill/>
-          </a:ln>
-        </p:spPr>
-        <p:style>
-          <a:lnRef idx="1">
-            <a:schemeClr val="accent1"/>
-          </a:lnRef>
-          <a:fillRef idx="3">
-            <a:schemeClr val="accent1"/>
-          </a:fillRef>
-          <a:effectRef idx="2">
-            <a:schemeClr val="accent1"/>
-          </a:effectRef>
-          <a:fontRef idx="minor">
-            <a:schemeClr val="lt1"/>
-          </a:fontRef>
-        </p:style>
-        <p:txBody>
-          <a:bodyPr rtlCol="0" anchor="ctr" wrap="square" lIns="0" rIns="0" tIns="0" bIns="0"/>
-          <a:lstStyle/>
-          <a:p>
-            <a:pPr algn="ctr">
-              <a:spcBef>
-                <a:spcPts val="0"/>
-              </a:spcBef>
-              <a:spcAft>
-                <a:spcPts val="300"/>
-              </a:spcAft>
-              <a:defRPr sz="1800" b="0">
-                <a:solidFill>
-                  <a:srgbClr val="1A1A1A"/>
-                </a:solidFill>
-                <a:latin typeface="Arial"/>
-              </a:defRPr>
-            </a:pPr>
-          </a:p>
-        </p:txBody>
-      </p:sp>
       <p:sp>
         <p:nvSpPr>
           <p:cNvPr id="13" name="TextBox 12"/>
@@ -22684,92 +19310,6 @@
       </p:sp>
       <p:sp>
         <p:nvSpPr>
-          <p:cNvPr id="18" name="Rectangle 17"/>
-          <p:cNvSpPr/>
-          <p:nvPr/>
-        </p:nvSpPr>
-        <p:spPr>
-          <a:xfrm>
-            <a:off x="0" y="0"/>
-            <a:ext cx="146304" cy="1645920"/>
-          </a:xfrm>
-          <a:prstGeom prst="rect">
-            <a:avLst/>
-          </a:prstGeom>
-          <a:solidFill>
-            <a:srgbClr val="C60016"/>
-          </a:solidFill>
-          <a:ln>
-            <a:noFill/>
-          </a:ln>
-        </p:spPr>
-        <p:style>
-          <a:lnRef idx="1">
-            <a:schemeClr val="accent1"/>
-          </a:lnRef>
-          <a:fillRef idx="3">
-            <a:schemeClr val="accent1"/>
-          </a:fillRef>
-          <a:effectRef idx="2">
-            <a:schemeClr val="accent1"/>
-          </a:effectRef>
-          <a:fontRef idx="minor">
-            <a:schemeClr val="lt1"/>
-          </a:fontRef>
-        </p:style>
-        <p:txBody>
-          <a:bodyPr rtlCol="0" anchor="ctr"/>
-          <a:lstStyle/>
-          <a:p>
-            <a:pPr algn="ctr"/>
-          </a:p>
-        </p:txBody>
-      </p:sp>
-      <p:sp>
-        <p:nvSpPr>
-          <p:cNvPr id="19" name="Rectangle 18"/>
-          <p:cNvSpPr/>
-          <p:nvPr/>
-        </p:nvSpPr>
-        <p:spPr>
-          <a:xfrm>
-            <a:off x="612648" y="1581912"/>
-            <a:ext cx="822960" cy="50292"/>
-          </a:xfrm>
-          <a:prstGeom prst="rect">
-            <a:avLst/>
-          </a:prstGeom>
-          <a:solidFill>
-            <a:srgbClr val="FFBC00"/>
-          </a:solidFill>
-          <a:ln>
-            <a:noFill/>
-          </a:ln>
-        </p:spPr>
-        <p:style>
-          <a:lnRef idx="1">
-            <a:schemeClr val="accent1"/>
-          </a:lnRef>
-          <a:fillRef idx="3">
-            <a:schemeClr val="accent1"/>
-          </a:fillRef>
-          <a:effectRef idx="2">
-            <a:schemeClr val="accent1"/>
-          </a:effectRef>
-          <a:fontRef idx="minor">
-            <a:schemeClr val="lt1"/>
-          </a:fontRef>
-        </p:style>
-        <p:txBody>
-          <a:bodyPr rtlCol="0" anchor="ctr"/>
-          <a:lstStyle/>
-          <a:p>
-            <a:pPr algn="ctr"/>
-          </a:p>
-        </p:txBody>
-      </p:sp>
-      <p:sp>
-        <p:nvSpPr>
           <p:cNvPr id="20" name="Rounded Rectangle 19"/>
           <p:cNvSpPr/>
           <p:nvPr/>
@@ -22831,49 +19371,6 @@
           </a:prstGeom>
           <a:solidFill>
             <a:srgbClr val="5A1018"/>
-          </a:solidFill>
-          <a:ln>
-            <a:noFill/>
-          </a:ln>
-        </p:spPr>
-        <p:style>
-          <a:lnRef idx="1">
-            <a:schemeClr val="accent1"/>
-          </a:lnRef>
-          <a:fillRef idx="3">
-            <a:schemeClr val="accent1"/>
-          </a:fillRef>
-          <a:effectRef idx="2">
-            <a:schemeClr val="accent1"/>
-          </a:effectRef>
-          <a:fontRef idx="minor">
-            <a:schemeClr val="lt1"/>
-          </a:fontRef>
-        </p:style>
-        <p:txBody>
-          <a:bodyPr rtlCol="0" anchor="ctr"/>
-          <a:lstStyle/>
-          <a:p>
-            <a:pPr algn="ctr"/>
-          </a:p>
-        </p:txBody>
-      </p:sp>
-      <p:sp>
-        <p:nvSpPr>
-          <p:cNvPr id="22" name="Rectangle 21"/>
-          <p:cNvSpPr/>
-          <p:nvPr/>
-        </p:nvSpPr>
-        <p:spPr>
-          <a:xfrm>
-            <a:off x="493776" y="1773936"/>
-            <a:ext cx="64008" cy="2240280"/>
-          </a:xfrm>
-          <a:prstGeom prst="rect">
-            <a:avLst/>
-          </a:prstGeom>
-          <a:solidFill>
-            <a:srgbClr val="FFBC00"/>
           </a:solidFill>
           <a:ln>
             <a:noFill/>
@@ -23269,62 +19766,6 @@
           </a:prstGeom>
         </p:spPr>
       </p:pic>
-      <p:sp>
-        <p:nvSpPr>
-          <p:cNvPr id="10" name="Rectangle 9"/>
-          <p:cNvSpPr/>
-          <p:nvPr/>
-        </p:nvSpPr>
-        <p:spPr>
-          <a:xfrm>
-            <a:off x="612648" y="6620256"/>
-            <a:ext cx="10972800" cy="16459"/>
-          </a:xfrm>
-          <a:prstGeom prst="rect">
-            <a:avLst/>
-          </a:prstGeom>
-          <a:solidFill>
-            <a:srgbClr val="FFBC00"/>
-          </a:solidFill>
-          <a:ln>
-            <a:noFill/>
-          </a:ln>
-        </p:spPr>
-        <p:style>
-          <a:lnRef idx="1">
-            <a:schemeClr val="accent1"/>
-          </a:lnRef>
-          <a:fillRef idx="3">
-            <a:schemeClr val="accent1"/>
-          </a:fillRef>
-          <a:effectRef idx="2">
-            <a:schemeClr val="accent1"/>
-          </a:effectRef>
-          <a:fontRef idx="minor">
-            <a:schemeClr val="lt1"/>
-          </a:fontRef>
-        </p:style>
-        <p:txBody>
-          <a:bodyPr rtlCol="0" anchor="ctr" wrap="square" lIns="0" rIns="0" tIns="0" bIns="0"/>
-          <a:lstStyle/>
-          <a:p>
-            <a:pPr algn="ctr">
-              <a:spcBef>
-                <a:spcPts val="0"/>
-              </a:spcBef>
-              <a:spcAft>
-                <a:spcPts val="300"/>
-              </a:spcAft>
-              <a:defRPr sz="1800" b="0">
-                <a:solidFill>
-                  <a:srgbClr val="1A1A1A"/>
-                </a:solidFill>
-                <a:latin typeface="Arial"/>
-              </a:defRPr>
-            </a:pPr>
-          </a:p>
-        </p:txBody>
-      </p:sp>
       <p:sp>
         <p:nvSpPr>
           <p:cNvPr id="11" name="TextBox 10"/>
@@ -23683,92 +20124,6 @@
       </p:sp>
       <p:sp>
         <p:nvSpPr>
-          <p:cNvPr id="22" name="Rectangle 21"/>
-          <p:cNvSpPr/>
-          <p:nvPr/>
-        </p:nvSpPr>
-        <p:spPr>
-          <a:xfrm>
-            <a:off x="0" y="0"/>
-            <a:ext cx="146304" cy="1645920"/>
-          </a:xfrm>
-          <a:prstGeom prst="rect">
-            <a:avLst/>
-          </a:prstGeom>
-          <a:solidFill>
-            <a:srgbClr val="C60016"/>
-          </a:solidFill>
-          <a:ln>
-            <a:noFill/>
-          </a:ln>
-        </p:spPr>
-        <p:style>
-          <a:lnRef idx="1">
-            <a:schemeClr val="accent1"/>
-          </a:lnRef>
-          <a:fillRef idx="3">
-            <a:schemeClr val="accent1"/>
-          </a:fillRef>
-          <a:effectRef idx="2">
-            <a:schemeClr val="accent1"/>
-          </a:effectRef>
-          <a:fontRef idx="minor">
-            <a:schemeClr val="lt1"/>
-          </a:fontRef>
-        </p:style>
-        <p:txBody>
-          <a:bodyPr rtlCol="0" anchor="ctr"/>
-          <a:lstStyle/>
-          <a:p>
-            <a:pPr algn="ctr"/>
-          </a:p>
-        </p:txBody>
-      </p:sp>
-      <p:sp>
-        <p:nvSpPr>
-          <p:cNvPr id="23" name="Rectangle 22"/>
-          <p:cNvSpPr/>
-          <p:nvPr/>
-        </p:nvSpPr>
-        <p:spPr>
-          <a:xfrm>
-            <a:off x="612648" y="1581912"/>
-            <a:ext cx="822960" cy="50292"/>
-          </a:xfrm>
-          <a:prstGeom prst="rect">
-            <a:avLst/>
-          </a:prstGeom>
-          <a:solidFill>
-            <a:srgbClr val="FFBC00"/>
-          </a:solidFill>
-          <a:ln>
-            <a:noFill/>
-          </a:ln>
-        </p:spPr>
-        <p:style>
-          <a:lnRef idx="1">
-            <a:schemeClr val="accent1"/>
-          </a:lnRef>
-          <a:fillRef idx="3">
-            <a:schemeClr val="accent1"/>
-          </a:fillRef>
-          <a:effectRef idx="2">
-            <a:schemeClr val="accent1"/>
-          </a:effectRef>
-          <a:fontRef idx="minor">
-            <a:schemeClr val="lt1"/>
-          </a:fontRef>
-        </p:style>
-        <p:txBody>
-          <a:bodyPr rtlCol="0" anchor="ctr"/>
-          <a:lstStyle/>
-          <a:p>
-            <a:pPr algn="ctr"/>
-          </a:p>
-        </p:txBody>
-      </p:sp>
-      <p:sp>
-        <p:nvSpPr>
           <p:cNvPr id="24" name="Rounded Rectangle 23"/>
           <p:cNvSpPr/>
           <p:nvPr/>
@@ -23859,49 +20214,6 @@
       </p:sp>
       <p:sp>
         <p:nvSpPr>
-          <p:cNvPr id="26" name="Rectangle 25"/>
-          <p:cNvSpPr/>
-          <p:nvPr/>
-        </p:nvSpPr>
-        <p:spPr>
-          <a:xfrm>
-            <a:off x="612648" y="1865376"/>
-            <a:ext cx="50292" cy="1901952"/>
-          </a:xfrm>
-          <a:prstGeom prst="rect">
-            <a:avLst/>
-          </a:prstGeom>
-          <a:solidFill>
-            <a:srgbClr val="C60016"/>
-          </a:solidFill>
-          <a:ln>
-            <a:noFill/>
-          </a:ln>
-        </p:spPr>
-        <p:style>
-          <a:lnRef idx="1">
-            <a:schemeClr val="accent1"/>
-          </a:lnRef>
-          <a:fillRef idx="3">
-            <a:schemeClr val="accent1"/>
-          </a:fillRef>
-          <a:effectRef idx="2">
-            <a:schemeClr val="accent1"/>
-          </a:effectRef>
-          <a:fontRef idx="minor">
-            <a:schemeClr val="lt1"/>
-          </a:fontRef>
-        </p:style>
-        <p:txBody>
-          <a:bodyPr rtlCol="0" anchor="ctr"/>
-          <a:lstStyle/>
-          <a:p>
-            <a:pPr algn="ctr"/>
-          </a:p>
-        </p:txBody>
-      </p:sp>
-      <p:sp>
-        <p:nvSpPr>
           <p:cNvPr id="27" name="Rounded Rectangle 26"/>
           <p:cNvSpPr/>
           <p:nvPr/>
@@ -23947,49 +20259,6 @@
       </p:sp>
       <p:sp>
         <p:nvSpPr>
-          <p:cNvPr id="28" name="Rectangle 27"/>
-          <p:cNvSpPr/>
-          <p:nvPr/>
-        </p:nvSpPr>
-        <p:spPr>
-          <a:xfrm>
-            <a:off x="6217920" y="1865376"/>
-            <a:ext cx="50292" cy="1901952"/>
-          </a:xfrm>
-          <a:prstGeom prst="rect">
-            <a:avLst/>
-          </a:prstGeom>
-          <a:solidFill>
-            <a:srgbClr val="FFBC00"/>
-          </a:solidFill>
-          <a:ln>
-            <a:noFill/>
-          </a:ln>
-        </p:spPr>
-        <p:style>
-          <a:lnRef idx="1">
-            <a:schemeClr val="accent1"/>
-          </a:lnRef>
-          <a:fillRef idx="3">
-            <a:schemeClr val="accent1"/>
-          </a:fillRef>
-          <a:effectRef idx="2">
-            <a:schemeClr val="accent1"/>
-          </a:effectRef>
-          <a:fontRef idx="minor">
-            <a:schemeClr val="lt1"/>
-          </a:fontRef>
-        </p:style>
-        <p:txBody>
-          <a:bodyPr rtlCol="0" anchor="ctr"/>
-          <a:lstStyle/>
-          <a:p>
-            <a:pPr algn="ctr"/>
-          </a:p>
-        </p:txBody>
-      </p:sp>
-      <p:sp>
-        <p:nvSpPr>
           <p:cNvPr id="29" name="Rounded Rectangle 28"/>
           <p:cNvSpPr/>
           <p:nvPr/>
@@ -24035,49 +20304,6 @@
       </p:sp>
       <p:sp>
         <p:nvSpPr>
-          <p:cNvPr id="30" name="Rectangle 29"/>
-          <p:cNvSpPr/>
-          <p:nvPr/>
-        </p:nvSpPr>
-        <p:spPr>
-          <a:xfrm>
-            <a:off x="612648" y="3895344"/>
-            <a:ext cx="50292" cy="1901952"/>
-          </a:xfrm>
-          <a:prstGeom prst="rect">
-            <a:avLst/>
-          </a:prstGeom>
-          <a:solidFill>
-            <a:srgbClr val="FFBC00"/>
-          </a:solidFill>
-          <a:ln>
-            <a:noFill/>
-          </a:ln>
-        </p:spPr>
-        <p:style>
-          <a:lnRef idx="1">
-            <a:schemeClr val="accent1"/>
-          </a:lnRef>
-          <a:fillRef idx="3">
-            <a:schemeClr val="accent1"/>
-          </a:fillRef>
-          <a:effectRef idx="2">
-            <a:schemeClr val="accent1"/>
-          </a:effectRef>
-          <a:fontRef idx="minor">
-            <a:schemeClr val="lt1"/>
-          </a:fontRef>
-        </p:style>
-        <p:txBody>
-          <a:bodyPr rtlCol="0" anchor="ctr"/>
-          <a:lstStyle/>
-          <a:p>
-            <a:pPr algn="ctr"/>
-          </a:p>
-        </p:txBody>
-      </p:sp>
-      <p:sp>
-        <p:nvSpPr>
           <p:cNvPr id="31" name="Rounded Rectangle 30"/>
           <p:cNvSpPr/>
           <p:nvPr/>
@@ -24094,49 +20320,6 @@
           </a:prstGeom>
           <a:solidFill>
             <a:srgbClr val="FFFFFF"/>
-          </a:solidFill>
-          <a:ln>
-            <a:noFill/>
-          </a:ln>
-        </p:spPr>
-        <p:style>
-          <a:lnRef idx="1">
-            <a:schemeClr val="accent1"/>
-          </a:lnRef>
-          <a:fillRef idx="3">
-            <a:schemeClr val="accent1"/>
-          </a:fillRef>
-          <a:effectRef idx="2">
-            <a:schemeClr val="accent1"/>
-          </a:effectRef>
-          <a:fontRef idx="minor">
-            <a:schemeClr val="lt1"/>
-          </a:fontRef>
-        </p:style>
-        <p:txBody>
-          <a:bodyPr rtlCol="0" anchor="ctr"/>
-          <a:lstStyle/>
-          <a:p>
-            <a:pPr algn="ctr"/>
-          </a:p>
-        </p:txBody>
-      </p:sp>
-      <p:sp>
-        <p:nvSpPr>
-          <p:cNvPr id="32" name="Rectangle 31"/>
-          <p:cNvSpPr/>
-          <p:nvPr/>
-        </p:nvSpPr>
-        <p:spPr>
-          <a:xfrm>
-            <a:off x="6217920" y="3895344"/>
-            <a:ext cx="50292" cy="1901952"/>
-          </a:xfrm>
-          <a:prstGeom prst="rect">
-            <a:avLst/>
-          </a:prstGeom>
-          <a:solidFill>
-            <a:srgbClr val="C60016"/>
           </a:solidFill>
           <a:ln>
             <a:noFill/>
@@ -24796,62 +20979,6 @@
           </a:prstGeom>
         </p:spPr>
       </p:pic>
-      <p:sp>
-        <p:nvSpPr>
-          <p:cNvPr id="14" name="Rectangle 13"/>
-          <p:cNvSpPr/>
-          <p:nvPr/>
-        </p:nvSpPr>
-        <p:spPr>
-          <a:xfrm>
-            <a:off x="612648" y="6620256"/>
-            <a:ext cx="10972800" cy="16459"/>
-          </a:xfrm>
-          <a:prstGeom prst="rect">
-            <a:avLst/>
-          </a:prstGeom>
-          <a:solidFill>
-            <a:srgbClr val="FFBC00"/>
-          </a:solidFill>
-          <a:ln>
-            <a:noFill/>
-          </a:ln>
-        </p:spPr>
-        <p:style>
-          <a:lnRef idx="1">
-            <a:schemeClr val="accent1"/>
-          </a:lnRef>
-          <a:fillRef idx="3">
-            <a:schemeClr val="accent1"/>
-          </a:fillRef>
-          <a:effectRef idx="2">
-            <a:schemeClr val="accent1"/>
-          </a:effectRef>
-          <a:fontRef idx="minor">
-            <a:schemeClr val="lt1"/>
-          </a:fontRef>
-        </p:style>
-        <p:txBody>
-          <a:bodyPr rtlCol="0" anchor="ctr" wrap="square" lIns="0" rIns="0" tIns="0" bIns="0"/>
-          <a:lstStyle/>
-          <a:p>
-            <a:pPr algn="ctr">
-              <a:spcBef>
-                <a:spcPts val="0"/>
-              </a:spcBef>
-              <a:spcAft>
-                <a:spcPts val="300"/>
-              </a:spcAft>
-              <a:defRPr sz="1800" b="0">
-                <a:solidFill>
-                  <a:srgbClr val="1A1A1A"/>
-                </a:solidFill>
-                <a:latin typeface="Arial"/>
-              </a:defRPr>
-            </a:pPr>
-          </a:p>
-        </p:txBody>
-      </p:sp>
       <p:sp>
         <p:nvSpPr>
           <p:cNvPr id="15" name="TextBox 14"/>
@@ -25210,92 +21337,6 @@
       </p:sp>
       <p:sp>
         <p:nvSpPr>
-          <p:cNvPr id="22" name="Rectangle 21"/>
-          <p:cNvSpPr/>
-          <p:nvPr/>
-        </p:nvSpPr>
-        <p:spPr>
-          <a:xfrm>
-            <a:off x="0" y="0"/>
-            <a:ext cx="146304" cy="1645920"/>
-          </a:xfrm>
-          <a:prstGeom prst="rect">
-            <a:avLst/>
-          </a:prstGeom>
-          <a:solidFill>
-            <a:srgbClr val="C60016"/>
-          </a:solidFill>
-          <a:ln>
-            <a:noFill/>
-          </a:ln>
-        </p:spPr>
-        <p:style>
-          <a:lnRef idx="1">
-            <a:schemeClr val="accent1"/>
-          </a:lnRef>
-          <a:fillRef idx="3">
-            <a:schemeClr val="accent1"/>
-          </a:fillRef>
-          <a:effectRef idx="2">
-            <a:schemeClr val="accent1"/>
-          </a:effectRef>
-          <a:fontRef idx="minor">
-            <a:schemeClr val="lt1"/>
-          </a:fontRef>
-        </p:style>
-        <p:txBody>
-          <a:bodyPr rtlCol="0" anchor="ctr"/>
-          <a:lstStyle/>
-          <a:p>
-            <a:pPr algn="ctr"/>
-          </a:p>
-        </p:txBody>
-      </p:sp>
-      <p:sp>
-        <p:nvSpPr>
-          <p:cNvPr id="23" name="Rectangle 22"/>
-          <p:cNvSpPr/>
-          <p:nvPr/>
-        </p:nvSpPr>
-        <p:spPr>
-          <a:xfrm>
-            <a:off x="612648" y="1581912"/>
-            <a:ext cx="822960" cy="50292"/>
-          </a:xfrm>
-          <a:prstGeom prst="rect">
-            <a:avLst/>
-          </a:prstGeom>
-          <a:solidFill>
-            <a:srgbClr val="FFBC00"/>
-          </a:solidFill>
-          <a:ln>
-            <a:noFill/>
-          </a:ln>
-        </p:spPr>
-        <p:style>
-          <a:lnRef idx="1">
-            <a:schemeClr val="accent1"/>
-          </a:lnRef>
-          <a:fillRef idx="3">
-            <a:schemeClr val="accent1"/>
-          </a:fillRef>
-          <a:effectRef idx="2">
-            <a:schemeClr val="accent1"/>
-          </a:effectRef>
-          <a:fontRef idx="minor">
-            <a:schemeClr val="lt1"/>
-          </a:fontRef>
-        </p:style>
-        <p:txBody>
-          <a:bodyPr rtlCol="0" anchor="ctr"/>
-          <a:lstStyle/>
-          <a:p>
-            <a:pPr algn="ctr"/>
-          </a:p>
-        </p:txBody>
-      </p:sp>
-      <p:sp>
-        <p:nvSpPr>
           <p:cNvPr id="24" name="Rounded Rectangle 23"/>
           <p:cNvSpPr/>
           <p:nvPr/>
@@ -25386,49 +21427,6 @@
       </p:sp>
       <p:sp>
         <p:nvSpPr>
-          <p:cNvPr id="26" name="Rectangle 25"/>
-          <p:cNvSpPr/>
-          <p:nvPr/>
-        </p:nvSpPr>
-        <p:spPr>
-          <a:xfrm>
-            <a:off x="612648" y="1865376"/>
-            <a:ext cx="50292" cy="1901952"/>
-          </a:xfrm>
-          <a:prstGeom prst="rect">
-            <a:avLst/>
-          </a:prstGeom>
-          <a:solidFill>
-            <a:srgbClr val="C60016"/>
-          </a:solidFill>
-          <a:ln>
-            <a:noFill/>
-          </a:ln>
-        </p:spPr>
-        <p:style>
-          <a:lnRef idx="1">
-            <a:schemeClr val="accent1"/>
-          </a:lnRef>
-          <a:fillRef idx="3">
-            <a:schemeClr val="accent1"/>
-          </a:fillRef>
-          <a:effectRef idx="2">
-            <a:schemeClr val="accent1"/>
-          </a:effectRef>
-          <a:fontRef idx="minor">
-            <a:schemeClr val="lt1"/>
-          </a:fontRef>
-        </p:style>
-        <p:txBody>
-          <a:bodyPr rtlCol="0" anchor="ctr"/>
-          <a:lstStyle/>
-          <a:p>
-            <a:pPr algn="ctr"/>
-          </a:p>
-        </p:txBody>
-      </p:sp>
-      <p:sp>
-        <p:nvSpPr>
           <p:cNvPr id="27" name="Rounded Rectangle 26"/>
           <p:cNvSpPr/>
           <p:nvPr/>
@@ -25474,49 +21472,6 @@
       </p:sp>
       <p:sp>
         <p:nvSpPr>
-          <p:cNvPr id="28" name="Rectangle 27"/>
-          <p:cNvSpPr/>
-          <p:nvPr/>
-        </p:nvSpPr>
-        <p:spPr>
-          <a:xfrm>
-            <a:off x="6217920" y="1865376"/>
-            <a:ext cx="50292" cy="1901952"/>
-          </a:xfrm>
-          <a:prstGeom prst="rect">
-            <a:avLst/>
-          </a:prstGeom>
-          <a:solidFill>
-            <a:srgbClr val="FFBC00"/>
-          </a:solidFill>
-          <a:ln>
-            <a:noFill/>
-          </a:ln>
-        </p:spPr>
-        <p:style>
-          <a:lnRef idx="1">
-            <a:schemeClr val="accent1"/>
-          </a:lnRef>
-          <a:fillRef idx="3">
-            <a:schemeClr val="accent1"/>
-          </a:fillRef>
-          <a:effectRef idx="2">
-            <a:schemeClr val="accent1"/>
-          </a:effectRef>
-          <a:fontRef idx="minor">
-            <a:schemeClr val="lt1"/>
-          </a:fontRef>
-        </p:style>
-        <p:txBody>
-          <a:bodyPr rtlCol="0" anchor="ctr"/>
-          <a:lstStyle/>
-          <a:p>
-            <a:pPr algn="ctr"/>
-          </a:p>
-        </p:txBody>
-      </p:sp>
-      <p:sp>
-        <p:nvSpPr>
           <p:cNvPr id="29" name="Rounded Rectangle 28"/>
           <p:cNvSpPr/>
           <p:nvPr/>
@@ -25562,49 +21517,6 @@
       </p:sp>
       <p:sp>
         <p:nvSpPr>
-          <p:cNvPr id="30" name="Rectangle 29"/>
-          <p:cNvSpPr/>
-          <p:nvPr/>
-        </p:nvSpPr>
-        <p:spPr>
-          <a:xfrm>
-            <a:off x="612648" y="3895344"/>
-            <a:ext cx="50292" cy="1901952"/>
-          </a:xfrm>
-          <a:prstGeom prst="rect">
-            <a:avLst/>
-          </a:prstGeom>
-          <a:solidFill>
-            <a:srgbClr val="FFBC00"/>
-          </a:solidFill>
-          <a:ln>
-            <a:noFill/>
-          </a:ln>
-        </p:spPr>
-        <p:style>
-          <a:lnRef idx="1">
-            <a:schemeClr val="accent1"/>
-          </a:lnRef>
-          <a:fillRef idx="3">
-            <a:schemeClr val="accent1"/>
-          </a:fillRef>
-          <a:effectRef idx="2">
-            <a:schemeClr val="accent1"/>
-          </a:effectRef>
-          <a:fontRef idx="minor">
-            <a:schemeClr val="lt1"/>
-          </a:fontRef>
-        </p:style>
-        <p:txBody>
-          <a:bodyPr rtlCol="0" anchor="ctr"/>
-          <a:lstStyle/>
-          <a:p>
-            <a:pPr algn="ctr"/>
-          </a:p>
-        </p:txBody>
-      </p:sp>
-      <p:sp>
-        <p:nvSpPr>
           <p:cNvPr id="31" name="Rounded Rectangle 30"/>
           <p:cNvSpPr/>
           <p:nvPr/>
@@ -25621,49 +21533,6 @@
           </a:prstGeom>
           <a:solidFill>
             <a:srgbClr val="FFFFFF"/>
-          </a:solidFill>
-          <a:ln>
-            <a:noFill/>
-          </a:ln>
-        </p:spPr>
-        <p:style>
-          <a:lnRef idx="1">
-            <a:schemeClr val="accent1"/>
-          </a:lnRef>
-          <a:fillRef idx="3">
-            <a:schemeClr val="accent1"/>
-          </a:fillRef>
-          <a:effectRef idx="2">
-            <a:schemeClr val="accent1"/>
-          </a:effectRef>
-          <a:fontRef idx="minor">
-            <a:schemeClr val="lt1"/>
-          </a:fontRef>
-        </p:style>
-        <p:txBody>
-          <a:bodyPr rtlCol="0" anchor="ctr"/>
-          <a:lstStyle/>
-          <a:p>
-            <a:pPr algn="ctr"/>
-          </a:p>
-        </p:txBody>
-      </p:sp>
-      <p:sp>
-        <p:nvSpPr>
-          <p:cNvPr id="32" name="Rectangle 31"/>
-          <p:cNvSpPr/>
-          <p:nvPr/>
-        </p:nvSpPr>
-        <p:spPr>
-          <a:xfrm>
-            <a:off x="6217920" y="3895344"/>
-            <a:ext cx="50292" cy="1901952"/>
-          </a:xfrm>
-          <a:prstGeom prst="rect">
-            <a:avLst/>
-          </a:prstGeom>
-          <a:solidFill>
-            <a:srgbClr val="C60016"/>
           </a:solidFill>
           <a:ln>
             <a:noFill/>
@@ -26323,62 +22192,6 @@
           </a:prstGeom>
         </p:spPr>
       </p:pic>
-      <p:sp>
-        <p:nvSpPr>
-          <p:cNvPr id="14" name="Rectangle 13"/>
-          <p:cNvSpPr/>
-          <p:nvPr/>
-        </p:nvSpPr>
-        <p:spPr>
-          <a:xfrm>
-            <a:off x="612648" y="6620256"/>
-            <a:ext cx="10972800" cy="16459"/>
-          </a:xfrm>
-          <a:prstGeom prst="rect">
-            <a:avLst/>
-          </a:prstGeom>
-          <a:solidFill>
-            <a:srgbClr val="FFBC00"/>
-          </a:solidFill>
-          <a:ln>
-            <a:noFill/>
-          </a:ln>
-        </p:spPr>
-        <p:style>
-          <a:lnRef idx="1">
-            <a:schemeClr val="accent1"/>
-          </a:lnRef>
-          <a:fillRef idx="3">
-            <a:schemeClr val="accent1"/>
-          </a:fillRef>
-          <a:effectRef idx="2">
-            <a:schemeClr val="accent1"/>
-          </a:effectRef>
-          <a:fontRef idx="minor">
-            <a:schemeClr val="lt1"/>
-          </a:fontRef>
-        </p:style>
-        <p:txBody>
-          <a:bodyPr rtlCol="0" anchor="ctr" wrap="square" lIns="0" rIns="0" tIns="0" bIns="0"/>
-          <a:lstStyle/>
-          <a:p>
-            <a:pPr algn="ctr">
-              <a:spcBef>
-                <a:spcPts val="0"/>
-              </a:spcBef>
-              <a:spcAft>
-                <a:spcPts val="300"/>
-              </a:spcAft>
-              <a:defRPr sz="1800" b="0">
-                <a:solidFill>
-                  <a:srgbClr val="1A1A1A"/>
-                </a:solidFill>
-                <a:latin typeface="Arial"/>
-              </a:defRPr>
-            </a:pPr>
-          </a:p>
-        </p:txBody>
-      </p:sp>
       <p:sp>
         <p:nvSpPr>
           <p:cNvPr id="15" name="TextBox 14"/>
@@ -26744,92 +22557,6 @@
       </p:sp>
       <p:sp>
         <p:nvSpPr>
-          <p:cNvPr id="18" name="Rectangle 17"/>
-          <p:cNvSpPr/>
-          <p:nvPr/>
-        </p:nvSpPr>
-        <p:spPr>
-          <a:xfrm>
-            <a:off x="0" y="0"/>
-            <a:ext cx="146304" cy="1645920"/>
-          </a:xfrm>
-          <a:prstGeom prst="rect">
-            <a:avLst/>
-          </a:prstGeom>
-          <a:solidFill>
-            <a:srgbClr val="C60016"/>
-          </a:solidFill>
-          <a:ln>
-            <a:noFill/>
-          </a:ln>
-        </p:spPr>
-        <p:style>
-          <a:lnRef idx="1">
-            <a:schemeClr val="accent1"/>
-          </a:lnRef>
-          <a:fillRef idx="3">
-            <a:schemeClr val="accent1"/>
-          </a:fillRef>
-          <a:effectRef idx="2">
-            <a:schemeClr val="accent1"/>
-          </a:effectRef>
-          <a:fontRef idx="minor">
-            <a:schemeClr val="lt1"/>
-          </a:fontRef>
-        </p:style>
-        <p:txBody>
-          <a:bodyPr rtlCol="0" anchor="ctr"/>
-          <a:lstStyle/>
-          <a:p>
-            <a:pPr algn="ctr"/>
-          </a:p>
-        </p:txBody>
-      </p:sp>
-      <p:sp>
-        <p:nvSpPr>
-          <p:cNvPr id="19" name="Rectangle 18"/>
-          <p:cNvSpPr/>
-          <p:nvPr/>
-        </p:nvSpPr>
-        <p:spPr>
-          <a:xfrm>
-            <a:off x="612648" y="1581912"/>
-            <a:ext cx="822960" cy="50292"/>
-          </a:xfrm>
-          <a:prstGeom prst="rect">
-            <a:avLst/>
-          </a:prstGeom>
-          <a:solidFill>
-            <a:srgbClr val="FFBC00"/>
-          </a:solidFill>
-          <a:ln>
-            <a:noFill/>
-          </a:ln>
-        </p:spPr>
-        <p:style>
-          <a:lnRef idx="1">
-            <a:schemeClr val="accent1"/>
-          </a:lnRef>
-          <a:fillRef idx="3">
-            <a:schemeClr val="accent1"/>
-          </a:fillRef>
-          <a:effectRef idx="2">
-            <a:schemeClr val="accent1"/>
-          </a:effectRef>
-          <a:fontRef idx="minor">
-            <a:schemeClr val="lt1"/>
-          </a:fontRef>
-        </p:style>
-        <p:txBody>
-          <a:bodyPr rtlCol="0" anchor="ctr"/>
-          <a:lstStyle/>
-          <a:p>
-            <a:pPr algn="ctr"/>
-          </a:p>
-        </p:txBody>
-      </p:sp>
-      <p:sp>
-        <p:nvSpPr>
           <p:cNvPr id="20" name="Rounded Rectangle 19"/>
           <p:cNvSpPr/>
           <p:nvPr/>
@@ -27231,62 +22958,6 @@
           </a:prstGeom>
         </p:spPr>
       </p:pic>
-      <p:sp>
-        <p:nvSpPr>
-          <p:cNvPr id="10" name="Rectangle 9"/>
-          <p:cNvSpPr/>
-          <p:nvPr/>
-        </p:nvSpPr>
-        <p:spPr>
-          <a:xfrm>
-            <a:off x="612648" y="6620256"/>
-            <a:ext cx="10972800" cy="16459"/>
-          </a:xfrm>
-          <a:prstGeom prst="rect">
-            <a:avLst/>
-          </a:prstGeom>
-          <a:solidFill>
-            <a:srgbClr val="FFBC00"/>
-          </a:solidFill>
-          <a:ln>
-            <a:noFill/>
-          </a:ln>
-        </p:spPr>
-        <p:style>
-          <a:lnRef idx="1">
-            <a:schemeClr val="accent1"/>
-          </a:lnRef>
-          <a:fillRef idx="3">
-            <a:schemeClr val="accent1"/>
-          </a:fillRef>
-          <a:effectRef idx="2">
-            <a:schemeClr val="accent1"/>
-          </a:effectRef>
-          <a:fontRef idx="minor">
-            <a:schemeClr val="lt1"/>
-          </a:fontRef>
-        </p:style>
-        <p:txBody>
-          <a:bodyPr rtlCol="0" anchor="ctr" wrap="square" lIns="0" rIns="0" tIns="0" bIns="0"/>
-          <a:lstStyle/>
-          <a:p>
-            <a:pPr algn="ctr">
-              <a:spcBef>
-                <a:spcPts val="0"/>
-              </a:spcBef>
-              <a:spcAft>
-                <a:spcPts val="300"/>
-              </a:spcAft>
-              <a:defRPr sz="1800" b="0">
-                <a:solidFill>
-                  <a:srgbClr val="1A1A1A"/>
-                </a:solidFill>
-                <a:latin typeface="Arial"/>
-              </a:defRPr>
-            </a:pPr>
-          </a:p>
-        </p:txBody>
-      </p:sp>
       <p:sp>
         <p:nvSpPr>
           <p:cNvPr id="11" name="TextBox 10"/>
@@ -27650,92 +23321,6 @@
       </p:sp>
       <p:sp>
         <p:nvSpPr>
-          <p:cNvPr id="16" name="Rectangle 15"/>
-          <p:cNvSpPr/>
-          <p:nvPr/>
-        </p:nvSpPr>
-        <p:spPr>
-          <a:xfrm>
-            <a:off x="0" y="0"/>
-            <a:ext cx="146304" cy="1645920"/>
-          </a:xfrm>
-          <a:prstGeom prst="rect">
-            <a:avLst/>
-          </a:prstGeom>
-          <a:solidFill>
-            <a:srgbClr val="C60016"/>
-          </a:solidFill>
-          <a:ln>
-            <a:noFill/>
-          </a:ln>
-        </p:spPr>
-        <p:style>
-          <a:lnRef idx="1">
-            <a:schemeClr val="accent1"/>
-          </a:lnRef>
-          <a:fillRef idx="3">
-            <a:schemeClr val="accent1"/>
-          </a:fillRef>
-          <a:effectRef idx="2">
-            <a:schemeClr val="accent1"/>
-          </a:effectRef>
-          <a:fontRef idx="minor">
-            <a:schemeClr val="lt1"/>
-          </a:fontRef>
-        </p:style>
-        <p:txBody>
-          <a:bodyPr rtlCol="0" anchor="ctr"/>
-          <a:lstStyle/>
-          <a:p>
-            <a:pPr algn="ctr"/>
-          </a:p>
-        </p:txBody>
-      </p:sp>
-      <p:sp>
-        <p:nvSpPr>
-          <p:cNvPr id="17" name="Rectangle 16"/>
-          <p:cNvSpPr/>
-          <p:nvPr/>
-        </p:nvSpPr>
-        <p:spPr>
-          <a:xfrm>
-            <a:off x="612648" y="1581912"/>
-            <a:ext cx="822960" cy="50292"/>
-          </a:xfrm>
-          <a:prstGeom prst="rect">
-            <a:avLst/>
-          </a:prstGeom>
-          <a:solidFill>
-            <a:srgbClr val="FFBC00"/>
-          </a:solidFill>
-          <a:ln>
-            <a:noFill/>
-          </a:ln>
-        </p:spPr>
-        <p:style>
-          <a:lnRef idx="1">
-            <a:schemeClr val="accent1"/>
-          </a:lnRef>
-          <a:fillRef idx="3">
-            <a:schemeClr val="accent1"/>
-          </a:fillRef>
-          <a:effectRef idx="2">
-            <a:schemeClr val="accent1"/>
-          </a:effectRef>
-          <a:fontRef idx="minor">
-            <a:schemeClr val="lt1"/>
-          </a:fontRef>
-        </p:style>
-        <p:txBody>
-          <a:bodyPr rtlCol="0" anchor="ctr"/>
-          <a:lstStyle/>
-          <a:p>
-            <a:pPr algn="ctr"/>
-          </a:p>
-        </p:txBody>
-      </p:sp>
-      <p:sp>
-        <p:nvSpPr>
           <p:cNvPr id="18" name="Rounded Rectangle 17"/>
           <p:cNvSpPr/>
           <p:nvPr/>
@@ -27797,49 +23382,6 @@
           </a:prstGeom>
           <a:solidFill>
             <a:srgbClr val="FFFFFF"/>
-          </a:solidFill>
-          <a:ln>
-            <a:noFill/>
-          </a:ln>
-        </p:spPr>
-        <p:style>
-          <a:lnRef idx="1">
-            <a:schemeClr val="accent1"/>
-          </a:lnRef>
-          <a:fillRef idx="3">
-            <a:schemeClr val="accent1"/>
-          </a:fillRef>
-          <a:effectRef idx="2">
-            <a:schemeClr val="accent1"/>
-          </a:effectRef>
-          <a:fontRef idx="minor">
-            <a:schemeClr val="lt1"/>
-          </a:fontRef>
-        </p:style>
-        <p:txBody>
-          <a:bodyPr rtlCol="0" anchor="ctr"/>
-          <a:lstStyle/>
-          <a:p>
-            <a:pPr algn="ctr"/>
-          </a:p>
-        </p:txBody>
-      </p:sp>
-      <p:sp>
-        <p:nvSpPr>
-          <p:cNvPr id="20" name="Rectangle 19"/>
-          <p:cNvSpPr/>
-          <p:nvPr/>
-        </p:nvSpPr>
-        <p:spPr>
-          <a:xfrm>
-            <a:off x="512064" y="1700784"/>
-            <a:ext cx="50292" cy="4142232"/>
-          </a:xfrm>
-          <a:prstGeom prst="rect">
-            <a:avLst/>
-          </a:prstGeom>
-          <a:solidFill>
-            <a:srgbClr val="C60016"/>
           </a:solidFill>
           <a:ln>
             <a:noFill/>
@@ -28107,62 +23649,6 @@
           </a:prstGeom>
         </p:spPr>
       </p:pic>
-      <p:sp>
-        <p:nvSpPr>
-          <p:cNvPr id="8" name="Rectangle 7"/>
-          <p:cNvSpPr/>
-          <p:nvPr/>
-        </p:nvSpPr>
-        <p:spPr>
-          <a:xfrm>
-            <a:off x="612648" y="6620256"/>
-            <a:ext cx="10972800" cy="16459"/>
-          </a:xfrm>
-          <a:prstGeom prst="rect">
-            <a:avLst/>
-          </a:prstGeom>
-          <a:solidFill>
-            <a:srgbClr val="FFBC00"/>
-          </a:solidFill>
-          <a:ln>
-            <a:noFill/>
-          </a:ln>
-        </p:spPr>
-        <p:style>
-          <a:lnRef idx="1">
-            <a:schemeClr val="accent1"/>
-          </a:lnRef>
-          <a:fillRef idx="3">
-            <a:schemeClr val="accent1"/>
-          </a:fillRef>
-          <a:effectRef idx="2">
-            <a:schemeClr val="accent1"/>
-          </a:effectRef>
-          <a:fontRef idx="minor">
-            <a:schemeClr val="lt1"/>
-          </a:fontRef>
-        </p:style>
-        <p:txBody>
-          <a:bodyPr rtlCol="0" anchor="ctr" wrap="square" lIns="0" rIns="0" tIns="0" bIns="0"/>
-          <a:lstStyle/>
-          <a:p>
-            <a:pPr algn="ctr">
-              <a:spcBef>
-                <a:spcPts val="0"/>
-              </a:spcBef>
-              <a:spcAft>
-                <a:spcPts val="300"/>
-              </a:spcAft>
-              <a:defRPr sz="1800" b="0">
-                <a:solidFill>
-                  <a:srgbClr val="1A1A1A"/>
-                </a:solidFill>
-                <a:latin typeface="Arial"/>
-              </a:defRPr>
-            </a:pPr>
-          </a:p>
-        </p:txBody>
-      </p:sp>
       <p:sp>
         <p:nvSpPr>
           <p:cNvPr id="9" name="TextBox 8"/>
@@ -28521,92 +24007,6 @@
       </p:sp>
       <p:sp>
         <p:nvSpPr>
-          <p:cNvPr id="16" name="Rectangle 15"/>
-          <p:cNvSpPr/>
-          <p:nvPr/>
-        </p:nvSpPr>
-        <p:spPr>
-          <a:xfrm>
-            <a:off x="0" y="0"/>
-            <a:ext cx="146304" cy="1645920"/>
-          </a:xfrm>
-          <a:prstGeom prst="rect">
-            <a:avLst/>
-          </a:prstGeom>
-          <a:solidFill>
-            <a:srgbClr val="C60016"/>
-          </a:solidFill>
-          <a:ln>
-            <a:noFill/>
-          </a:ln>
-        </p:spPr>
-        <p:style>
-          <a:lnRef idx="1">
-            <a:schemeClr val="accent1"/>
-          </a:lnRef>
-          <a:fillRef idx="3">
-            <a:schemeClr val="accent1"/>
-          </a:fillRef>
-          <a:effectRef idx="2">
-            <a:schemeClr val="accent1"/>
-          </a:effectRef>
-          <a:fontRef idx="minor">
-            <a:schemeClr val="lt1"/>
-          </a:fontRef>
-        </p:style>
-        <p:txBody>
-          <a:bodyPr rtlCol="0" anchor="ctr"/>
-          <a:lstStyle/>
-          <a:p>
-            <a:pPr algn="ctr"/>
-          </a:p>
-        </p:txBody>
-      </p:sp>
-      <p:sp>
-        <p:nvSpPr>
-          <p:cNvPr id="17" name="Rectangle 16"/>
-          <p:cNvSpPr/>
-          <p:nvPr/>
-        </p:nvSpPr>
-        <p:spPr>
-          <a:xfrm>
-            <a:off x="612648" y="1581912"/>
-            <a:ext cx="822960" cy="50292"/>
-          </a:xfrm>
-          <a:prstGeom prst="rect">
-            <a:avLst/>
-          </a:prstGeom>
-          <a:solidFill>
-            <a:srgbClr val="FFBC00"/>
-          </a:solidFill>
-          <a:ln>
-            <a:noFill/>
-          </a:ln>
-        </p:spPr>
-        <p:style>
-          <a:lnRef idx="1">
-            <a:schemeClr val="accent1"/>
-          </a:lnRef>
-          <a:fillRef idx="3">
-            <a:schemeClr val="accent1"/>
-          </a:fillRef>
-          <a:effectRef idx="2">
-            <a:schemeClr val="accent1"/>
-          </a:effectRef>
-          <a:fontRef idx="minor">
-            <a:schemeClr val="lt1"/>
-          </a:fontRef>
-        </p:style>
-        <p:txBody>
-          <a:bodyPr rtlCol="0" anchor="ctr"/>
-          <a:lstStyle/>
-          <a:p>
-            <a:pPr algn="ctr"/>
-          </a:p>
-        </p:txBody>
-      </p:sp>
-      <p:sp>
-        <p:nvSpPr>
           <p:cNvPr id="18" name="Rounded Rectangle 17"/>
           <p:cNvSpPr/>
           <p:nvPr/>
@@ -28668,49 +24068,6 @@
           </a:prstGeom>
           <a:solidFill>
             <a:srgbClr val="FFFFFF"/>
-          </a:solidFill>
-          <a:ln>
-            <a:noFill/>
-          </a:ln>
-        </p:spPr>
-        <p:style>
-          <a:lnRef idx="1">
-            <a:schemeClr val="accent1"/>
-          </a:lnRef>
-          <a:fillRef idx="3">
-            <a:schemeClr val="accent1"/>
-          </a:fillRef>
-          <a:effectRef idx="2">
-            <a:schemeClr val="accent1"/>
-          </a:effectRef>
-          <a:fontRef idx="minor">
-            <a:schemeClr val="lt1"/>
-          </a:fontRef>
-        </p:style>
-        <p:txBody>
-          <a:bodyPr rtlCol="0" anchor="ctr"/>
-          <a:lstStyle/>
-          <a:p>
-            <a:pPr algn="ctr"/>
-          </a:p>
-        </p:txBody>
-      </p:sp>
-      <p:sp>
-        <p:nvSpPr>
-          <p:cNvPr id="20" name="Rectangle 19"/>
-          <p:cNvSpPr/>
-          <p:nvPr/>
-        </p:nvSpPr>
-        <p:spPr>
-          <a:xfrm>
-            <a:off x="512064" y="1700784"/>
-            <a:ext cx="50292" cy="4142232"/>
-          </a:xfrm>
-          <a:prstGeom prst="rect">
-            <a:avLst/>
-          </a:prstGeom>
-          <a:solidFill>
-            <a:srgbClr val="C60016"/>
           </a:solidFill>
           <a:ln>
             <a:noFill/>
@@ -28978,62 +24335,6 @@
           </a:prstGeom>
         </p:spPr>
       </p:pic>
-      <p:sp>
-        <p:nvSpPr>
-          <p:cNvPr id="8" name="Rectangle 7"/>
-          <p:cNvSpPr/>
-          <p:nvPr/>
-        </p:nvSpPr>
-        <p:spPr>
-          <a:xfrm>
-            <a:off x="612648" y="6620256"/>
-            <a:ext cx="10972800" cy="16459"/>
-          </a:xfrm>
-          <a:prstGeom prst="rect">
-            <a:avLst/>
-          </a:prstGeom>
-          <a:solidFill>
-            <a:srgbClr val="FFBC00"/>
-          </a:solidFill>
-          <a:ln>
-            <a:noFill/>
-          </a:ln>
-        </p:spPr>
-        <p:style>
-          <a:lnRef idx="1">
-            <a:schemeClr val="accent1"/>
-          </a:lnRef>
-          <a:fillRef idx="3">
-            <a:schemeClr val="accent1"/>
-          </a:fillRef>
-          <a:effectRef idx="2">
-            <a:schemeClr val="accent1"/>
-          </a:effectRef>
-          <a:fontRef idx="minor">
-            <a:schemeClr val="lt1"/>
-          </a:fontRef>
-        </p:style>
-        <p:txBody>
-          <a:bodyPr rtlCol="0" anchor="ctr" wrap="square" lIns="0" rIns="0" tIns="0" bIns="0"/>
-          <a:lstStyle/>
-          <a:p>
-            <a:pPr algn="ctr">
-              <a:spcBef>
-                <a:spcPts val="0"/>
-              </a:spcBef>
-              <a:spcAft>
-                <a:spcPts val="300"/>
-              </a:spcAft>
-              <a:defRPr sz="1800" b="0">
-                <a:solidFill>
-                  <a:srgbClr val="1A1A1A"/>
-                </a:solidFill>
-                <a:latin typeface="Arial"/>
-              </a:defRPr>
-            </a:pPr>
-          </a:p>
-        </p:txBody>
-      </p:sp>
       <p:sp>
         <p:nvSpPr>
           <p:cNvPr id="9" name="TextBox 8"/>
@@ -29392,92 +24693,6 @@
       </p:sp>
       <p:sp>
         <p:nvSpPr>
-          <p:cNvPr id="20" name="Rectangle 19"/>
-          <p:cNvSpPr/>
-          <p:nvPr/>
-        </p:nvSpPr>
-        <p:spPr>
-          <a:xfrm>
-            <a:off x="0" y="0"/>
-            <a:ext cx="146304" cy="1645920"/>
-          </a:xfrm>
-          <a:prstGeom prst="rect">
-            <a:avLst/>
-          </a:prstGeom>
-          <a:solidFill>
-            <a:srgbClr val="C60016"/>
-          </a:solidFill>
-          <a:ln>
-            <a:noFill/>
-          </a:ln>
-        </p:spPr>
-        <p:style>
-          <a:lnRef idx="1">
-            <a:schemeClr val="accent1"/>
-          </a:lnRef>
-          <a:fillRef idx="3">
-            <a:schemeClr val="accent1"/>
-          </a:fillRef>
-          <a:effectRef idx="2">
-            <a:schemeClr val="accent1"/>
-          </a:effectRef>
-          <a:fontRef idx="minor">
-            <a:schemeClr val="lt1"/>
-          </a:fontRef>
-        </p:style>
-        <p:txBody>
-          <a:bodyPr rtlCol="0" anchor="ctr"/>
-          <a:lstStyle/>
-          <a:p>
-            <a:pPr algn="ctr"/>
-          </a:p>
-        </p:txBody>
-      </p:sp>
-      <p:sp>
-        <p:nvSpPr>
-          <p:cNvPr id="21" name="Rectangle 20"/>
-          <p:cNvSpPr/>
-          <p:nvPr/>
-        </p:nvSpPr>
-        <p:spPr>
-          <a:xfrm>
-            <a:off x="612648" y="1581912"/>
-            <a:ext cx="822960" cy="50292"/>
-          </a:xfrm>
-          <a:prstGeom prst="rect">
-            <a:avLst/>
-          </a:prstGeom>
-          <a:solidFill>
-            <a:srgbClr val="FFBC00"/>
-          </a:solidFill>
-          <a:ln>
-            <a:noFill/>
-          </a:ln>
-        </p:spPr>
-        <p:style>
-          <a:lnRef idx="1">
-            <a:schemeClr val="accent1"/>
-          </a:lnRef>
-          <a:fillRef idx="3">
-            <a:schemeClr val="accent1"/>
-          </a:fillRef>
-          <a:effectRef idx="2">
-            <a:schemeClr val="accent1"/>
-          </a:effectRef>
-          <a:fontRef idx="minor">
-            <a:schemeClr val="lt1"/>
-          </a:fontRef>
-        </p:style>
-        <p:txBody>
-          <a:bodyPr rtlCol="0" anchor="ctr"/>
-          <a:lstStyle/>
-          <a:p>
-            <a:pPr algn="ctr"/>
-          </a:p>
-        </p:txBody>
-      </p:sp>
-      <p:sp>
-        <p:nvSpPr>
           <p:cNvPr id="22" name="Rounded Rectangle 21"/>
           <p:cNvSpPr/>
           <p:nvPr/>
@@ -29494,49 +24709,6 @@
           </a:prstGeom>
           <a:solidFill>
             <a:srgbClr val="F7F4F1"/>
-          </a:solidFill>
-          <a:ln>
-            <a:noFill/>
-          </a:ln>
-        </p:spPr>
-        <p:style>
-          <a:lnRef idx="1">
-            <a:schemeClr val="accent1"/>
-          </a:lnRef>
-          <a:fillRef idx="3">
-            <a:schemeClr val="accent1"/>
-          </a:fillRef>
-          <a:effectRef idx="2">
-            <a:schemeClr val="accent1"/>
-          </a:effectRef>
-          <a:fontRef idx="minor">
-            <a:schemeClr val="lt1"/>
-          </a:fontRef>
-        </p:style>
-        <p:txBody>
-          <a:bodyPr rtlCol="0" anchor="ctr"/>
-          <a:lstStyle/>
-          <a:p>
-            <a:pPr algn="ctr"/>
-          </a:p>
-        </p:txBody>
-      </p:sp>
-      <p:sp>
-        <p:nvSpPr>
-          <p:cNvPr id="23" name="Rectangle 22"/>
-          <p:cNvSpPr/>
-          <p:nvPr/>
-        </p:nvSpPr>
-        <p:spPr>
-          <a:xfrm>
-            <a:off x="521207" y="1801368"/>
-            <a:ext cx="50292" cy="1207008"/>
-          </a:xfrm>
-          <a:prstGeom prst="rect">
-            <a:avLst/>
-          </a:prstGeom>
-          <a:solidFill>
-            <a:srgbClr val="FFBC00"/>
           </a:solidFill>
           <a:ln>
             <a:noFill/>
@@ -30028,62 +25200,6 @@
           </a:prstGeom>
         </p:spPr>
       </p:pic>
-      <p:sp>
-        <p:nvSpPr>
-          <p:cNvPr id="12" name="Rectangle 11"/>
-          <p:cNvSpPr/>
-          <p:nvPr/>
-        </p:nvSpPr>
-        <p:spPr>
-          <a:xfrm>
-            <a:off x="612648" y="6620256"/>
-            <a:ext cx="10972800" cy="16459"/>
-          </a:xfrm>
-          <a:prstGeom prst="rect">
-            <a:avLst/>
-          </a:prstGeom>
-          <a:solidFill>
-            <a:srgbClr val="FFBC00"/>
-          </a:solidFill>
-          <a:ln>
-            <a:noFill/>
-          </a:ln>
-        </p:spPr>
-        <p:style>
-          <a:lnRef idx="1">
-            <a:schemeClr val="accent1"/>
-          </a:lnRef>
-          <a:fillRef idx="3">
-            <a:schemeClr val="accent1"/>
-          </a:fillRef>
-          <a:effectRef idx="2">
-            <a:schemeClr val="accent1"/>
-          </a:effectRef>
-          <a:fontRef idx="minor">
-            <a:schemeClr val="lt1"/>
-          </a:fontRef>
-        </p:style>
-        <p:txBody>
-          <a:bodyPr rtlCol="0" anchor="ctr" wrap="square" lIns="0" rIns="0" tIns="0" bIns="0"/>
-          <a:lstStyle/>
-          <a:p>
-            <a:pPr algn="ctr">
-              <a:spcBef>
-                <a:spcPts val="0"/>
-              </a:spcBef>
-              <a:spcAft>
-                <a:spcPts val="300"/>
-              </a:spcAft>
-              <a:defRPr sz="1800" b="0">
-                <a:solidFill>
-                  <a:srgbClr val="1A1A1A"/>
-                </a:solidFill>
-                <a:latin typeface="Arial"/>
-              </a:defRPr>
-            </a:pPr>
-          </a:p>
-        </p:txBody>
-      </p:sp>
       <p:sp>
         <p:nvSpPr>
           <p:cNvPr id="13" name="TextBox 12"/>
@@ -30442,92 +25558,6 @@
       </p:sp>
       <p:sp>
         <p:nvSpPr>
-          <p:cNvPr id="17" name="Rectangle 16"/>
-          <p:cNvSpPr/>
-          <p:nvPr/>
-        </p:nvSpPr>
-        <p:spPr>
-          <a:xfrm>
-            <a:off x="0" y="0"/>
-            <a:ext cx="146304" cy="1645920"/>
-          </a:xfrm>
-          <a:prstGeom prst="rect">
-            <a:avLst/>
-          </a:prstGeom>
-          <a:solidFill>
-            <a:srgbClr val="C60016"/>
-          </a:solidFill>
-          <a:ln>
-            <a:noFill/>
-          </a:ln>
-        </p:spPr>
-        <p:style>
-          <a:lnRef idx="1">
-            <a:schemeClr val="accent1"/>
-          </a:lnRef>
-          <a:fillRef idx="3">
-            <a:schemeClr val="accent1"/>
-          </a:fillRef>
-          <a:effectRef idx="2">
-            <a:schemeClr val="accent1"/>
-          </a:effectRef>
-          <a:fontRef idx="minor">
-            <a:schemeClr val="lt1"/>
-          </a:fontRef>
-        </p:style>
-        <p:txBody>
-          <a:bodyPr rtlCol="0" anchor="ctr"/>
-          <a:lstStyle/>
-          <a:p>
-            <a:pPr algn="ctr"/>
-          </a:p>
-        </p:txBody>
-      </p:sp>
-      <p:sp>
-        <p:nvSpPr>
-          <p:cNvPr id="18" name="Rectangle 17"/>
-          <p:cNvSpPr/>
-          <p:nvPr/>
-        </p:nvSpPr>
-        <p:spPr>
-          <a:xfrm>
-            <a:off x="612648" y="1581912"/>
-            <a:ext cx="822960" cy="50292"/>
-          </a:xfrm>
-          <a:prstGeom prst="rect">
-            <a:avLst/>
-          </a:prstGeom>
-          <a:solidFill>
-            <a:srgbClr val="FFBC00"/>
-          </a:solidFill>
-          <a:ln>
-            <a:noFill/>
-          </a:ln>
-        </p:spPr>
-        <p:style>
-          <a:lnRef idx="1">
-            <a:schemeClr val="accent1"/>
-          </a:lnRef>
-          <a:fillRef idx="3">
-            <a:schemeClr val="accent1"/>
-          </a:fillRef>
-          <a:effectRef idx="2">
-            <a:schemeClr val="accent1"/>
-          </a:effectRef>
-          <a:fontRef idx="minor">
-            <a:schemeClr val="lt1"/>
-          </a:fontRef>
-        </p:style>
-        <p:txBody>
-          <a:bodyPr rtlCol="0" anchor="ctr"/>
-          <a:lstStyle/>
-          <a:p>
-            <a:pPr algn="ctr"/>
-          </a:p>
-        </p:txBody>
-      </p:sp>
-      <p:sp>
-        <p:nvSpPr>
           <p:cNvPr id="19" name="Rounded Rectangle 18"/>
           <p:cNvSpPr/>
           <p:nvPr/>
@@ -30589,49 +25619,6 @@
           </a:prstGeom>
           <a:solidFill>
             <a:srgbClr val="F7F4F1"/>
-          </a:solidFill>
-          <a:ln>
-            <a:noFill/>
-          </a:ln>
-        </p:spPr>
-        <p:style>
-          <a:lnRef idx="1">
-            <a:schemeClr val="accent1"/>
-          </a:lnRef>
-          <a:fillRef idx="3">
-            <a:schemeClr val="accent1"/>
-          </a:fillRef>
-          <a:effectRef idx="2">
-            <a:schemeClr val="accent1"/>
-          </a:effectRef>
-          <a:fontRef idx="minor">
-            <a:schemeClr val="lt1"/>
-          </a:fontRef>
-        </p:style>
-        <p:txBody>
-          <a:bodyPr rtlCol="0" anchor="ctr"/>
-          <a:lstStyle/>
-          <a:p>
-            <a:pPr algn="ctr"/>
-          </a:p>
-        </p:txBody>
-      </p:sp>
-      <p:sp>
-        <p:nvSpPr>
-          <p:cNvPr id="21" name="Rectangle 20"/>
-          <p:cNvSpPr/>
-          <p:nvPr/>
-        </p:nvSpPr>
-        <p:spPr>
-          <a:xfrm>
-            <a:off x="493776" y="4453128"/>
-            <a:ext cx="64008" cy="1481328"/>
-          </a:xfrm>
-          <a:prstGeom prst="rect">
-            <a:avLst/>
-          </a:prstGeom>
-          <a:solidFill>
-            <a:srgbClr val="FFBC00"/>
           </a:solidFill>
           <a:ln>
             <a:noFill/>
@@ -30971,62 +25958,6 @@
           </a:prstGeom>
         </p:spPr>
       </p:pic>
-      <p:sp>
-        <p:nvSpPr>
-          <p:cNvPr id="9" name="Rectangle 8"/>
-          <p:cNvSpPr/>
-          <p:nvPr/>
-        </p:nvSpPr>
-        <p:spPr>
-          <a:xfrm>
-            <a:off x="612648" y="6620256"/>
-            <a:ext cx="10972800" cy="16459"/>
-          </a:xfrm>
-          <a:prstGeom prst="rect">
-            <a:avLst/>
-          </a:prstGeom>
-          <a:solidFill>
-            <a:srgbClr val="FFBC00"/>
-          </a:solidFill>
-          <a:ln>
-            <a:noFill/>
-          </a:ln>
-        </p:spPr>
-        <p:style>
-          <a:lnRef idx="1">
-            <a:schemeClr val="accent1"/>
-          </a:lnRef>
-          <a:fillRef idx="3">
-            <a:schemeClr val="accent1"/>
-          </a:fillRef>
-          <a:effectRef idx="2">
-            <a:schemeClr val="accent1"/>
-          </a:effectRef>
-          <a:fontRef idx="minor">
-            <a:schemeClr val="lt1"/>
-          </a:fontRef>
-        </p:style>
-        <p:txBody>
-          <a:bodyPr rtlCol="0" anchor="ctr" wrap="square" lIns="0" rIns="0" tIns="0" bIns="0"/>
-          <a:lstStyle/>
-          <a:p>
-            <a:pPr algn="ctr">
-              <a:spcBef>
-                <a:spcPts val="0"/>
-              </a:spcBef>
-              <a:spcAft>
-                <a:spcPts val="300"/>
-              </a:spcAft>
-              <a:defRPr sz="1800" b="0">
-                <a:solidFill>
-                  <a:srgbClr val="1A1A1A"/>
-                </a:solidFill>
-                <a:latin typeface="Arial"/>
-              </a:defRPr>
-            </a:pPr>
-          </a:p>
-        </p:txBody>
-      </p:sp>
       <p:sp>
         <p:nvSpPr>
           <p:cNvPr id="10" name="TextBox 9"/>
@@ -31385,92 +26316,6 @@
       </p:sp>
       <p:sp>
         <p:nvSpPr>
-          <p:cNvPr id="18" name="Rectangle 17"/>
-          <p:cNvSpPr/>
-          <p:nvPr/>
-        </p:nvSpPr>
-        <p:spPr>
-          <a:xfrm>
-            <a:off x="0" y="0"/>
-            <a:ext cx="146304" cy="1645920"/>
-          </a:xfrm>
-          <a:prstGeom prst="rect">
-            <a:avLst/>
-          </a:prstGeom>
-          <a:solidFill>
-            <a:srgbClr val="C60016"/>
-          </a:solidFill>
-          <a:ln>
-            <a:noFill/>
-          </a:ln>
-        </p:spPr>
-        <p:style>
-          <a:lnRef idx="1">
-            <a:schemeClr val="accent1"/>
-          </a:lnRef>
-          <a:fillRef idx="3">
-            <a:schemeClr val="accent1"/>
-          </a:fillRef>
-          <a:effectRef idx="2">
-            <a:schemeClr val="accent1"/>
-          </a:effectRef>
-          <a:fontRef idx="minor">
-            <a:schemeClr val="lt1"/>
-          </a:fontRef>
-        </p:style>
-        <p:txBody>
-          <a:bodyPr rtlCol="0" anchor="ctr"/>
-          <a:lstStyle/>
-          <a:p>
-            <a:pPr algn="ctr"/>
-          </a:p>
-        </p:txBody>
-      </p:sp>
-      <p:sp>
-        <p:nvSpPr>
-          <p:cNvPr id="19" name="Rectangle 18"/>
-          <p:cNvSpPr/>
-          <p:nvPr/>
-        </p:nvSpPr>
-        <p:spPr>
-          <a:xfrm>
-            <a:off x="612648" y="1581912"/>
-            <a:ext cx="822960" cy="50292"/>
-          </a:xfrm>
-          <a:prstGeom prst="rect">
-            <a:avLst/>
-          </a:prstGeom>
-          <a:solidFill>
-            <a:srgbClr val="FFBC00"/>
-          </a:solidFill>
-          <a:ln>
-            <a:noFill/>
-          </a:ln>
-        </p:spPr>
-        <p:style>
-          <a:lnRef idx="1">
-            <a:schemeClr val="accent1"/>
-          </a:lnRef>
-          <a:fillRef idx="3">
-            <a:schemeClr val="accent1"/>
-          </a:fillRef>
-          <a:effectRef idx="2">
-            <a:schemeClr val="accent1"/>
-          </a:effectRef>
-          <a:fontRef idx="minor">
-            <a:schemeClr val="lt1"/>
-          </a:fontRef>
-        </p:style>
-        <p:txBody>
-          <a:bodyPr rtlCol="0" anchor="ctr"/>
-          <a:lstStyle/>
-          <a:p>
-            <a:pPr algn="ctr"/>
-          </a:p>
-        </p:txBody>
-      </p:sp>
-      <p:sp>
-        <p:nvSpPr>
           <p:cNvPr id="20" name="Rounded Rectangle 19"/>
           <p:cNvSpPr/>
           <p:nvPr/>
@@ -31532,49 +26377,6 @@
           </a:prstGeom>
           <a:solidFill>
             <a:srgbClr val="5A1018"/>
-          </a:solidFill>
-          <a:ln>
-            <a:noFill/>
-          </a:ln>
-        </p:spPr>
-        <p:style>
-          <a:lnRef idx="1">
-            <a:schemeClr val="accent1"/>
-          </a:lnRef>
-          <a:fillRef idx="3">
-            <a:schemeClr val="accent1"/>
-          </a:fillRef>
-          <a:effectRef idx="2">
-            <a:schemeClr val="accent1"/>
-          </a:effectRef>
-          <a:fontRef idx="minor">
-            <a:schemeClr val="lt1"/>
-          </a:fontRef>
-        </p:style>
-        <p:txBody>
-          <a:bodyPr rtlCol="0" anchor="ctr"/>
-          <a:lstStyle/>
-          <a:p>
-            <a:pPr algn="ctr"/>
-          </a:p>
-        </p:txBody>
-      </p:sp>
-      <p:sp>
-        <p:nvSpPr>
-          <p:cNvPr id="22" name="Rectangle 21"/>
-          <p:cNvSpPr/>
-          <p:nvPr/>
-        </p:nvSpPr>
-        <p:spPr>
-          <a:xfrm>
-            <a:off x="493776" y="1773936"/>
-            <a:ext cx="64008" cy="2240280"/>
-          </a:xfrm>
-          <a:prstGeom prst="rect">
-            <a:avLst/>
-          </a:prstGeom>
-          <a:solidFill>
-            <a:srgbClr val="FFBC00"/>
           </a:solidFill>
           <a:ln>
             <a:noFill/>
@@ -31970,62 +26772,6 @@
           </a:prstGeom>
         </p:spPr>
       </p:pic>
-      <p:sp>
-        <p:nvSpPr>
-          <p:cNvPr id="10" name="Rectangle 9"/>
-          <p:cNvSpPr/>
-          <p:nvPr/>
-        </p:nvSpPr>
-        <p:spPr>
-          <a:xfrm>
-            <a:off x="612648" y="6620256"/>
-            <a:ext cx="10972800" cy="16459"/>
-          </a:xfrm>
-          <a:prstGeom prst="rect">
-            <a:avLst/>
-          </a:prstGeom>
-          <a:solidFill>
-            <a:srgbClr val="FFBC00"/>
-          </a:solidFill>
-          <a:ln>
-            <a:noFill/>
-          </a:ln>
-        </p:spPr>
-        <p:style>
-          <a:lnRef idx="1">
-            <a:schemeClr val="accent1"/>
-          </a:lnRef>
-          <a:fillRef idx="3">
-            <a:schemeClr val="accent1"/>
-          </a:fillRef>
-          <a:effectRef idx="2">
-            <a:schemeClr val="accent1"/>
-          </a:effectRef>
-          <a:fontRef idx="minor">
-            <a:schemeClr val="lt1"/>
-          </a:fontRef>
-        </p:style>
-        <p:txBody>
-          <a:bodyPr rtlCol="0" anchor="ctr" wrap="square" lIns="0" rIns="0" tIns="0" bIns="0"/>
-          <a:lstStyle/>
-          <a:p>
-            <a:pPr algn="ctr">
-              <a:spcBef>
-                <a:spcPts val="0"/>
-              </a:spcBef>
-              <a:spcAft>
-                <a:spcPts val="300"/>
-              </a:spcAft>
-              <a:defRPr sz="1800" b="0">
-                <a:solidFill>
-                  <a:srgbClr val="1A1A1A"/>
-                </a:solidFill>
-                <a:latin typeface="Arial"/>
-              </a:defRPr>
-            </a:pPr>
-          </a:p>
-        </p:txBody>
-      </p:sp>
       <p:sp>
         <p:nvSpPr>
           <p:cNvPr id="11" name="TextBox 10"/>
@@ -32384,92 +27130,6 @@
       </p:sp>
       <p:sp>
         <p:nvSpPr>
-          <p:cNvPr id="16" name="Rectangle 15"/>
-          <p:cNvSpPr/>
-          <p:nvPr/>
-        </p:nvSpPr>
-        <p:spPr>
-          <a:xfrm>
-            <a:off x="0" y="0"/>
-            <a:ext cx="146304" cy="1645920"/>
-          </a:xfrm>
-          <a:prstGeom prst="rect">
-            <a:avLst/>
-          </a:prstGeom>
-          <a:solidFill>
-            <a:srgbClr val="C60016"/>
-          </a:solidFill>
-          <a:ln>
-            <a:noFill/>
-          </a:ln>
-        </p:spPr>
-        <p:style>
-          <a:lnRef idx="1">
-            <a:schemeClr val="accent1"/>
-          </a:lnRef>
-          <a:fillRef idx="3">
-            <a:schemeClr val="accent1"/>
-          </a:fillRef>
-          <a:effectRef idx="2">
-            <a:schemeClr val="accent1"/>
-          </a:effectRef>
-          <a:fontRef idx="minor">
-            <a:schemeClr val="lt1"/>
-          </a:fontRef>
-        </p:style>
-        <p:txBody>
-          <a:bodyPr rtlCol="0" anchor="ctr"/>
-          <a:lstStyle/>
-          <a:p>
-            <a:pPr algn="ctr"/>
-          </a:p>
-        </p:txBody>
-      </p:sp>
-      <p:sp>
-        <p:nvSpPr>
-          <p:cNvPr id="17" name="Rectangle 16"/>
-          <p:cNvSpPr/>
-          <p:nvPr/>
-        </p:nvSpPr>
-        <p:spPr>
-          <a:xfrm>
-            <a:off x="612648" y="1581912"/>
-            <a:ext cx="822960" cy="50292"/>
-          </a:xfrm>
-          <a:prstGeom prst="rect">
-            <a:avLst/>
-          </a:prstGeom>
-          <a:solidFill>
-            <a:srgbClr val="FFBC00"/>
-          </a:solidFill>
-          <a:ln>
-            <a:noFill/>
-          </a:ln>
-        </p:spPr>
-        <p:style>
-          <a:lnRef idx="1">
-            <a:schemeClr val="accent1"/>
-          </a:lnRef>
-          <a:fillRef idx="3">
-            <a:schemeClr val="accent1"/>
-          </a:fillRef>
-          <a:effectRef idx="2">
-            <a:schemeClr val="accent1"/>
-          </a:effectRef>
-          <a:fontRef idx="minor">
-            <a:schemeClr val="lt1"/>
-          </a:fontRef>
-        </p:style>
-        <p:txBody>
-          <a:bodyPr rtlCol="0" anchor="ctr"/>
-          <a:lstStyle/>
-          <a:p>
-            <a:pPr algn="ctr"/>
-          </a:p>
-        </p:txBody>
-      </p:sp>
-      <p:sp>
-        <p:nvSpPr>
           <p:cNvPr id="18" name="Rounded Rectangle 17"/>
           <p:cNvSpPr/>
           <p:nvPr/>
@@ -32531,49 +27191,6 @@
           </a:prstGeom>
           <a:solidFill>
             <a:srgbClr val="FFFFFF"/>
-          </a:solidFill>
-          <a:ln>
-            <a:noFill/>
-          </a:ln>
-        </p:spPr>
-        <p:style>
-          <a:lnRef idx="1">
-            <a:schemeClr val="accent1"/>
-          </a:lnRef>
-          <a:fillRef idx="3">
-            <a:schemeClr val="accent1"/>
-          </a:fillRef>
-          <a:effectRef idx="2">
-            <a:schemeClr val="accent1"/>
-          </a:effectRef>
-          <a:fontRef idx="minor">
-            <a:schemeClr val="lt1"/>
-          </a:fontRef>
-        </p:style>
-        <p:txBody>
-          <a:bodyPr rtlCol="0" anchor="ctr"/>
-          <a:lstStyle/>
-          <a:p>
-            <a:pPr algn="ctr"/>
-          </a:p>
-        </p:txBody>
-      </p:sp>
-      <p:sp>
-        <p:nvSpPr>
-          <p:cNvPr id="20" name="Rectangle 19"/>
-          <p:cNvSpPr/>
-          <p:nvPr/>
-        </p:nvSpPr>
-        <p:spPr>
-          <a:xfrm>
-            <a:off x="512064" y="1773936"/>
-            <a:ext cx="50292" cy="3776472"/>
-          </a:xfrm>
-          <a:prstGeom prst="rect">
-            <a:avLst/>
-          </a:prstGeom>
-          <a:solidFill>
-            <a:srgbClr val="C60016"/>
           </a:solidFill>
           <a:ln>
             <a:noFill/>
@@ -32841,62 +27458,6 @@
           </a:prstGeom>
         </p:spPr>
       </p:pic>
-      <p:sp>
-        <p:nvSpPr>
-          <p:cNvPr id="8" name="Rectangle 7"/>
-          <p:cNvSpPr/>
-          <p:nvPr/>
-        </p:nvSpPr>
-        <p:spPr>
-          <a:xfrm>
-            <a:off x="612648" y="6620256"/>
-            <a:ext cx="10972800" cy="16459"/>
-          </a:xfrm>
-          <a:prstGeom prst="rect">
-            <a:avLst/>
-          </a:prstGeom>
-          <a:solidFill>
-            <a:srgbClr val="FFBC00"/>
-          </a:solidFill>
-          <a:ln>
-            <a:noFill/>
-          </a:ln>
-        </p:spPr>
-        <p:style>
-          <a:lnRef idx="1">
-            <a:schemeClr val="accent1"/>
-          </a:lnRef>
-          <a:fillRef idx="3">
-            <a:schemeClr val="accent1"/>
-          </a:fillRef>
-          <a:effectRef idx="2">
-            <a:schemeClr val="accent1"/>
-          </a:effectRef>
-          <a:fontRef idx="minor">
-            <a:schemeClr val="lt1"/>
-          </a:fontRef>
-        </p:style>
-        <p:txBody>
-          <a:bodyPr rtlCol="0" anchor="ctr" wrap="square" lIns="0" rIns="0" tIns="0" bIns="0"/>
-          <a:lstStyle/>
-          <a:p>
-            <a:pPr algn="ctr">
-              <a:spcBef>
-                <a:spcPts val="0"/>
-              </a:spcBef>
-              <a:spcAft>
-                <a:spcPts val="300"/>
-              </a:spcAft>
-              <a:defRPr sz="1800" b="0">
-                <a:solidFill>
-                  <a:srgbClr val="1A1A1A"/>
-                </a:solidFill>
-                <a:latin typeface="Arial"/>
-              </a:defRPr>
-            </a:pPr>
-          </a:p>
-        </p:txBody>
-      </p:sp>
       <p:sp>
         <p:nvSpPr>
           <p:cNvPr id="9" name="TextBox 8"/>
@@ -33255,92 +27816,6 @@
       </p:sp>
       <p:sp>
         <p:nvSpPr>
-          <p:cNvPr id="17" name="Rectangle 16"/>
-          <p:cNvSpPr/>
-          <p:nvPr/>
-        </p:nvSpPr>
-        <p:spPr>
-          <a:xfrm>
-            <a:off x="0" y="0"/>
-            <a:ext cx="146304" cy="1645920"/>
-          </a:xfrm>
-          <a:prstGeom prst="rect">
-            <a:avLst/>
-          </a:prstGeom>
-          <a:solidFill>
-            <a:srgbClr val="C60016"/>
-          </a:solidFill>
-          <a:ln>
-            <a:noFill/>
-          </a:ln>
-        </p:spPr>
-        <p:style>
-          <a:lnRef idx="1">
-            <a:schemeClr val="accent1"/>
-          </a:lnRef>
-          <a:fillRef idx="3">
-            <a:schemeClr val="accent1"/>
-          </a:fillRef>
-          <a:effectRef idx="2">
-            <a:schemeClr val="accent1"/>
-          </a:effectRef>
-          <a:fontRef idx="minor">
-            <a:schemeClr val="lt1"/>
-          </a:fontRef>
-        </p:style>
-        <p:txBody>
-          <a:bodyPr rtlCol="0" anchor="ctr"/>
-          <a:lstStyle/>
-          <a:p>
-            <a:pPr algn="ctr"/>
-          </a:p>
-        </p:txBody>
-      </p:sp>
-      <p:sp>
-        <p:nvSpPr>
-          <p:cNvPr id="18" name="Rectangle 17"/>
-          <p:cNvSpPr/>
-          <p:nvPr/>
-        </p:nvSpPr>
-        <p:spPr>
-          <a:xfrm>
-            <a:off x="612648" y="1581912"/>
-            <a:ext cx="822960" cy="50292"/>
-          </a:xfrm>
-          <a:prstGeom prst="rect">
-            <a:avLst/>
-          </a:prstGeom>
-          <a:solidFill>
-            <a:srgbClr val="FFBC00"/>
-          </a:solidFill>
-          <a:ln>
-            <a:noFill/>
-          </a:ln>
-        </p:spPr>
-        <p:style>
-          <a:lnRef idx="1">
-            <a:schemeClr val="accent1"/>
-          </a:lnRef>
-          <a:fillRef idx="3">
-            <a:schemeClr val="accent1"/>
-          </a:fillRef>
-          <a:effectRef idx="2">
-            <a:schemeClr val="accent1"/>
-          </a:effectRef>
-          <a:fontRef idx="minor">
-            <a:schemeClr val="lt1"/>
-          </a:fontRef>
-        </p:style>
-        <p:txBody>
-          <a:bodyPr rtlCol="0" anchor="ctr"/>
-          <a:lstStyle/>
-          <a:p>
-            <a:pPr algn="ctr"/>
-          </a:p>
-        </p:txBody>
-      </p:sp>
-      <p:sp>
-        <p:nvSpPr>
           <p:cNvPr id="19" name="Rounded Rectangle 18"/>
           <p:cNvSpPr/>
           <p:nvPr/>
@@ -33402,49 +27877,6 @@
           </a:prstGeom>
           <a:solidFill>
             <a:srgbClr val="FFFFFF"/>
-          </a:solidFill>
-          <a:ln>
-            <a:noFill/>
-          </a:ln>
-        </p:spPr>
-        <p:style>
-          <a:lnRef idx="1">
-            <a:schemeClr val="accent1"/>
-          </a:lnRef>
-          <a:fillRef idx="3">
-            <a:schemeClr val="accent1"/>
-          </a:fillRef>
-          <a:effectRef idx="2">
-            <a:schemeClr val="accent1"/>
-          </a:effectRef>
-          <a:fontRef idx="minor">
-            <a:schemeClr val="lt1"/>
-          </a:fontRef>
-        </p:style>
-        <p:txBody>
-          <a:bodyPr rtlCol="0" anchor="ctr"/>
-          <a:lstStyle/>
-          <a:p>
-            <a:pPr algn="ctr"/>
-          </a:p>
-        </p:txBody>
-      </p:sp>
-      <p:sp>
-        <p:nvSpPr>
-          <p:cNvPr id="21" name="Rectangle 20"/>
-          <p:cNvSpPr/>
-          <p:nvPr/>
-        </p:nvSpPr>
-        <p:spPr>
-          <a:xfrm>
-            <a:off x="512064" y="1764792"/>
-            <a:ext cx="50292" cy="1645920"/>
-          </a:xfrm>
-          <a:prstGeom prst="rect">
-            <a:avLst/>
-          </a:prstGeom>
-          <a:solidFill>
-            <a:srgbClr val="C60016"/>
           </a:solidFill>
           <a:ln>
             <a:noFill/>
@@ -33805,62 +28237,6 @@
           </a:prstGeom>
         </p:spPr>
       </p:pic>
-      <p:sp>
-        <p:nvSpPr>
-          <p:cNvPr id="9" name="Rectangle 8"/>
-          <p:cNvSpPr/>
-          <p:nvPr/>
-        </p:nvSpPr>
-        <p:spPr>
-          <a:xfrm>
-            <a:off x="612648" y="6620256"/>
-            <a:ext cx="10972800" cy="16459"/>
-          </a:xfrm>
-          <a:prstGeom prst="rect">
-            <a:avLst/>
-          </a:prstGeom>
-          <a:solidFill>
-            <a:srgbClr val="FFBC00"/>
-          </a:solidFill>
-          <a:ln>
-            <a:noFill/>
-          </a:ln>
-        </p:spPr>
-        <p:style>
-          <a:lnRef idx="1">
-            <a:schemeClr val="accent1"/>
-          </a:lnRef>
-          <a:fillRef idx="3">
-            <a:schemeClr val="accent1"/>
-          </a:fillRef>
-          <a:effectRef idx="2">
-            <a:schemeClr val="accent1"/>
-          </a:effectRef>
-          <a:fontRef idx="minor">
-            <a:schemeClr val="lt1"/>
-          </a:fontRef>
-        </p:style>
-        <p:txBody>
-          <a:bodyPr rtlCol="0" anchor="ctr" wrap="square" lIns="0" rIns="0" tIns="0" bIns="0"/>
-          <a:lstStyle/>
-          <a:p>
-            <a:pPr algn="ctr">
-              <a:spcBef>
-                <a:spcPts val="0"/>
-              </a:spcBef>
-              <a:spcAft>
-                <a:spcPts val="300"/>
-              </a:spcAft>
-              <a:defRPr sz="1800" b="0">
-                <a:solidFill>
-                  <a:srgbClr val="1A1A1A"/>
-                </a:solidFill>
-                <a:latin typeface="Arial"/>
-              </a:defRPr>
-            </a:pPr>
-          </a:p>
-        </p:txBody>
-      </p:sp>
       <p:sp>
         <p:nvSpPr>
           <p:cNvPr id="10" name="TextBox 9"/>
@@ -34219,92 +28595,6 @@
       </p:sp>
       <p:sp>
         <p:nvSpPr>
-          <p:cNvPr id="18" name="Rectangle 17"/>
-          <p:cNvSpPr/>
-          <p:nvPr/>
-        </p:nvSpPr>
-        <p:spPr>
-          <a:xfrm>
-            <a:off x="0" y="0"/>
-            <a:ext cx="146304" cy="1645920"/>
-          </a:xfrm>
-          <a:prstGeom prst="rect">
-            <a:avLst/>
-          </a:prstGeom>
-          <a:solidFill>
-            <a:srgbClr val="C60016"/>
-          </a:solidFill>
-          <a:ln>
-            <a:noFill/>
-          </a:ln>
-        </p:spPr>
-        <p:style>
-          <a:lnRef idx="1">
-            <a:schemeClr val="accent1"/>
-          </a:lnRef>
-          <a:fillRef idx="3">
-            <a:schemeClr val="accent1"/>
-          </a:fillRef>
-          <a:effectRef idx="2">
-            <a:schemeClr val="accent1"/>
-          </a:effectRef>
-          <a:fontRef idx="minor">
-            <a:schemeClr val="lt1"/>
-          </a:fontRef>
-        </p:style>
-        <p:txBody>
-          <a:bodyPr rtlCol="0" anchor="ctr"/>
-          <a:lstStyle/>
-          <a:p>
-            <a:pPr algn="ctr"/>
-          </a:p>
-        </p:txBody>
-      </p:sp>
-      <p:sp>
-        <p:nvSpPr>
-          <p:cNvPr id="19" name="Rectangle 18"/>
-          <p:cNvSpPr/>
-          <p:nvPr/>
-        </p:nvSpPr>
-        <p:spPr>
-          <a:xfrm>
-            <a:off x="612648" y="1581912"/>
-            <a:ext cx="822960" cy="50292"/>
-          </a:xfrm>
-          <a:prstGeom prst="rect">
-            <a:avLst/>
-          </a:prstGeom>
-          <a:solidFill>
-            <a:srgbClr val="FFBC00"/>
-          </a:solidFill>
-          <a:ln>
-            <a:noFill/>
-          </a:ln>
-        </p:spPr>
-        <p:style>
-          <a:lnRef idx="1">
-            <a:schemeClr val="accent1"/>
-          </a:lnRef>
-          <a:fillRef idx="3">
-            <a:schemeClr val="accent1"/>
-          </a:fillRef>
-          <a:effectRef idx="2">
-            <a:schemeClr val="accent1"/>
-          </a:effectRef>
-          <a:fontRef idx="minor">
-            <a:schemeClr val="lt1"/>
-          </a:fontRef>
-        </p:style>
-        <p:txBody>
-          <a:bodyPr rtlCol="0" anchor="ctr"/>
-          <a:lstStyle/>
-          <a:p>
-            <a:pPr algn="ctr"/>
-          </a:p>
-        </p:txBody>
-      </p:sp>
-      <p:sp>
-        <p:nvSpPr>
           <p:cNvPr id="20" name="Rounded Rectangle 19"/>
           <p:cNvSpPr/>
           <p:nvPr/>
@@ -34366,49 +28656,6 @@
           </a:prstGeom>
           <a:solidFill>
             <a:srgbClr val="5A1018"/>
-          </a:solidFill>
-          <a:ln>
-            <a:noFill/>
-          </a:ln>
-        </p:spPr>
-        <p:style>
-          <a:lnRef idx="1">
-            <a:schemeClr val="accent1"/>
-          </a:lnRef>
-          <a:fillRef idx="3">
-            <a:schemeClr val="accent1"/>
-          </a:fillRef>
-          <a:effectRef idx="2">
-            <a:schemeClr val="accent1"/>
-          </a:effectRef>
-          <a:fontRef idx="minor">
-            <a:schemeClr val="lt1"/>
-          </a:fontRef>
-        </p:style>
-        <p:txBody>
-          <a:bodyPr rtlCol="0" anchor="ctr"/>
-          <a:lstStyle/>
-          <a:p>
-            <a:pPr algn="ctr"/>
-          </a:p>
-        </p:txBody>
-      </p:sp>
-      <p:sp>
-        <p:nvSpPr>
-          <p:cNvPr id="22" name="Rectangle 21"/>
-          <p:cNvSpPr/>
-          <p:nvPr/>
-        </p:nvSpPr>
-        <p:spPr>
-          <a:xfrm>
-            <a:off x="493776" y="1773936"/>
-            <a:ext cx="64008" cy="2240280"/>
-          </a:xfrm>
-          <a:prstGeom prst="rect">
-            <a:avLst/>
-          </a:prstGeom>
-          <a:solidFill>
-            <a:srgbClr val="FFBC00"/>
           </a:solidFill>
           <a:ln>
             <a:noFill/>
@@ -34804,62 +29051,6 @@
           </a:prstGeom>
         </p:spPr>
       </p:pic>
-      <p:sp>
-        <p:nvSpPr>
-          <p:cNvPr id="10" name="Rectangle 9"/>
-          <p:cNvSpPr/>
-          <p:nvPr/>
-        </p:nvSpPr>
-        <p:spPr>
-          <a:xfrm>
-            <a:off x="612648" y="6620256"/>
-            <a:ext cx="10972800" cy="16459"/>
-          </a:xfrm>
-          <a:prstGeom prst="rect">
-            <a:avLst/>
-          </a:prstGeom>
-          <a:solidFill>
-            <a:srgbClr val="FFBC00"/>
-          </a:solidFill>
-          <a:ln>
-            <a:noFill/>
-          </a:ln>
-        </p:spPr>
-        <p:style>
-          <a:lnRef idx="1">
-            <a:schemeClr val="accent1"/>
-          </a:lnRef>
-          <a:fillRef idx="3">
-            <a:schemeClr val="accent1"/>
-          </a:fillRef>
-          <a:effectRef idx="2">
-            <a:schemeClr val="accent1"/>
-          </a:effectRef>
-          <a:fontRef idx="minor">
-            <a:schemeClr val="lt1"/>
-          </a:fontRef>
-        </p:style>
-        <p:txBody>
-          <a:bodyPr rtlCol="0" anchor="ctr" wrap="square" lIns="0" rIns="0" tIns="0" bIns="0"/>
-          <a:lstStyle/>
-          <a:p>
-            <a:pPr algn="ctr">
-              <a:spcBef>
-                <a:spcPts val="0"/>
-              </a:spcBef>
-              <a:spcAft>
-                <a:spcPts val="300"/>
-              </a:spcAft>
-              <a:defRPr sz="1800" b="0">
-                <a:solidFill>
-                  <a:srgbClr val="1A1A1A"/>
-                </a:solidFill>
-                <a:latin typeface="Arial"/>
-              </a:defRPr>
-            </a:pPr>
-          </a:p>
-        </p:txBody>
-      </p:sp>
       <p:sp>
         <p:nvSpPr>
           <p:cNvPr id="11" name="TextBox 10"/>
@@ -35218,92 +29409,6 @@
       </p:sp>
       <p:sp>
         <p:nvSpPr>
-          <p:cNvPr id="16" name="Rectangle 15"/>
-          <p:cNvSpPr/>
-          <p:nvPr/>
-        </p:nvSpPr>
-        <p:spPr>
-          <a:xfrm>
-            <a:off x="0" y="0"/>
-            <a:ext cx="146304" cy="1645920"/>
-          </a:xfrm>
-          <a:prstGeom prst="rect">
-            <a:avLst/>
-          </a:prstGeom>
-          <a:solidFill>
-            <a:srgbClr val="C60016"/>
-          </a:solidFill>
-          <a:ln>
-            <a:noFill/>
-          </a:ln>
-        </p:spPr>
-        <p:style>
-          <a:lnRef idx="1">
-            <a:schemeClr val="accent1"/>
-          </a:lnRef>
-          <a:fillRef idx="3">
-            <a:schemeClr val="accent1"/>
-          </a:fillRef>
-          <a:effectRef idx="2">
-            <a:schemeClr val="accent1"/>
-          </a:effectRef>
-          <a:fontRef idx="minor">
-            <a:schemeClr val="lt1"/>
-          </a:fontRef>
-        </p:style>
-        <p:txBody>
-          <a:bodyPr rtlCol="0" anchor="ctr"/>
-          <a:lstStyle/>
-          <a:p>
-            <a:pPr algn="ctr"/>
-          </a:p>
-        </p:txBody>
-      </p:sp>
-      <p:sp>
-        <p:nvSpPr>
-          <p:cNvPr id="17" name="Rectangle 16"/>
-          <p:cNvSpPr/>
-          <p:nvPr/>
-        </p:nvSpPr>
-        <p:spPr>
-          <a:xfrm>
-            <a:off x="612648" y="1581912"/>
-            <a:ext cx="822960" cy="50292"/>
-          </a:xfrm>
-          <a:prstGeom prst="rect">
-            <a:avLst/>
-          </a:prstGeom>
-          <a:solidFill>
-            <a:srgbClr val="FFBC00"/>
-          </a:solidFill>
-          <a:ln>
-            <a:noFill/>
-          </a:ln>
-        </p:spPr>
-        <p:style>
-          <a:lnRef idx="1">
-            <a:schemeClr val="accent1"/>
-          </a:lnRef>
-          <a:fillRef idx="3">
-            <a:schemeClr val="accent1"/>
-          </a:fillRef>
-          <a:effectRef idx="2">
-            <a:schemeClr val="accent1"/>
-          </a:effectRef>
-          <a:fontRef idx="minor">
-            <a:schemeClr val="lt1"/>
-          </a:fontRef>
-        </p:style>
-        <p:txBody>
-          <a:bodyPr rtlCol="0" anchor="ctr"/>
-          <a:lstStyle/>
-          <a:p>
-            <a:pPr algn="ctr"/>
-          </a:p>
-        </p:txBody>
-      </p:sp>
-      <p:sp>
-        <p:nvSpPr>
           <p:cNvPr id="18" name="Rounded Rectangle 17"/>
           <p:cNvSpPr/>
           <p:nvPr/>
@@ -35365,49 +29470,6 @@
           </a:prstGeom>
           <a:solidFill>
             <a:srgbClr val="FFFFFF"/>
-          </a:solidFill>
-          <a:ln>
-            <a:noFill/>
-          </a:ln>
-        </p:spPr>
-        <p:style>
-          <a:lnRef idx="1">
-            <a:schemeClr val="accent1"/>
-          </a:lnRef>
-          <a:fillRef idx="3">
-            <a:schemeClr val="accent1"/>
-          </a:fillRef>
-          <a:effectRef idx="2">
-            <a:schemeClr val="accent1"/>
-          </a:effectRef>
-          <a:fontRef idx="minor">
-            <a:schemeClr val="lt1"/>
-          </a:fontRef>
-        </p:style>
-        <p:txBody>
-          <a:bodyPr rtlCol="0" anchor="ctr"/>
-          <a:lstStyle/>
-          <a:p>
-            <a:pPr algn="ctr"/>
-          </a:p>
-        </p:txBody>
-      </p:sp>
-      <p:sp>
-        <p:nvSpPr>
-          <p:cNvPr id="20" name="Rectangle 19"/>
-          <p:cNvSpPr/>
-          <p:nvPr/>
-        </p:nvSpPr>
-        <p:spPr>
-          <a:xfrm>
-            <a:off x="512064" y="1664208"/>
-            <a:ext cx="50292" cy="4279392"/>
-          </a:xfrm>
-          <a:prstGeom prst="rect">
-            <a:avLst/>
-          </a:prstGeom>
-          <a:solidFill>
-            <a:srgbClr val="C60016"/>
           </a:solidFill>
           <a:ln>
             <a:noFill/>
@@ -35675,62 +29737,6 @@
           </a:prstGeom>
         </p:spPr>
       </p:pic>
-      <p:sp>
-        <p:nvSpPr>
-          <p:cNvPr id="8" name="Rectangle 7"/>
-          <p:cNvSpPr/>
-          <p:nvPr/>
-        </p:nvSpPr>
-        <p:spPr>
-          <a:xfrm>
-            <a:off x="612648" y="6620256"/>
-            <a:ext cx="10972800" cy="16459"/>
-          </a:xfrm>
-          <a:prstGeom prst="rect">
-            <a:avLst/>
-          </a:prstGeom>
-          <a:solidFill>
-            <a:srgbClr val="FFBC00"/>
-          </a:solidFill>
-          <a:ln>
-            <a:noFill/>
-          </a:ln>
-        </p:spPr>
-        <p:style>
-          <a:lnRef idx="1">
-            <a:schemeClr val="accent1"/>
-          </a:lnRef>
-          <a:fillRef idx="3">
-            <a:schemeClr val="accent1"/>
-          </a:fillRef>
-          <a:effectRef idx="2">
-            <a:schemeClr val="accent1"/>
-          </a:effectRef>
-          <a:fontRef idx="minor">
-            <a:schemeClr val="lt1"/>
-          </a:fontRef>
-        </p:style>
-        <p:txBody>
-          <a:bodyPr rtlCol="0" anchor="ctr" wrap="square" lIns="0" rIns="0" tIns="0" bIns="0"/>
-          <a:lstStyle/>
-          <a:p>
-            <a:pPr algn="ctr">
-              <a:spcBef>
-                <a:spcPts val="0"/>
-              </a:spcBef>
-              <a:spcAft>
-                <a:spcPts val="300"/>
-              </a:spcAft>
-              <a:defRPr sz="1800" b="0">
-                <a:solidFill>
-                  <a:srgbClr val="1A1A1A"/>
-                </a:solidFill>
-                <a:latin typeface="Arial"/>
-              </a:defRPr>
-            </a:pPr>
-          </a:p>
-        </p:txBody>
-      </p:sp>
       <p:sp>
         <p:nvSpPr>
           <p:cNvPr id="9" name="TextBox 8"/>
@@ -36089,92 +30095,6 @@
       </p:sp>
       <p:sp>
         <p:nvSpPr>
-          <p:cNvPr id="20" name="Rectangle 19"/>
-          <p:cNvSpPr/>
-          <p:nvPr/>
-        </p:nvSpPr>
-        <p:spPr>
-          <a:xfrm>
-            <a:off x="0" y="0"/>
-            <a:ext cx="146304" cy="1645920"/>
-          </a:xfrm>
-          <a:prstGeom prst="rect">
-            <a:avLst/>
-          </a:prstGeom>
-          <a:solidFill>
-            <a:srgbClr val="C60016"/>
-          </a:solidFill>
-          <a:ln>
-            <a:noFill/>
-          </a:ln>
-        </p:spPr>
-        <p:style>
-          <a:lnRef idx="1">
-            <a:schemeClr val="accent1"/>
-          </a:lnRef>
-          <a:fillRef idx="3">
-            <a:schemeClr val="accent1"/>
-          </a:fillRef>
-          <a:effectRef idx="2">
-            <a:schemeClr val="accent1"/>
-          </a:effectRef>
-          <a:fontRef idx="minor">
-            <a:schemeClr val="lt1"/>
-          </a:fontRef>
-        </p:style>
-        <p:txBody>
-          <a:bodyPr rtlCol="0" anchor="ctr"/>
-          <a:lstStyle/>
-          <a:p>
-            <a:pPr algn="ctr"/>
-          </a:p>
-        </p:txBody>
-      </p:sp>
-      <p:sp>
-        <p:nvSpPr>
-          <p:cNvPr id="21" name="Rectangle 20"/>
-          <p:cNvSpPr/>
-          <p:nvPr/>
-        </p:nvSpPr>
-        <p:spPr>
-          <a:xfrm>
-            <a:off x="612648" y="1581912"/>
-            <a:ext cx="822960" cy="50292"/>
-          </a:xfrm>
-          <a:prstGeom prst="rect">
-            <a:avLst/>
-          </a:prstGeom>
-          <a:solidFill>
-            <a:srgbClr val="FFBC00"/>
-          </a:solidFill>
-          <a:ln>
-            <a:noFill/>
-          </a:ln>
-        </p:spPr>
-        <p:style>
-          <a:lnRef idx="1">
-            <a:schemeClr val="accent1"/>
-          </a:lnRef>
-          <a:fillRef idx="3">
-            <a:schemeClr val="accent1"/>
-          </a:fillRef>
-          <a:effectRef idx="2">
-            <a:schemeClr val="accent1"/>
-          </a:effectRef>
-          <a:fontRef idx="minor">
-            <a:schemeClr val="lt1"/>
-          </a:fontRef>
-        </p:style>
-        <p:txBody>
-          <a:bodyPr rtlCol="0" anchor="ctr"/>
-          <a:lstStyle/>
-          <a:p>
-            <a:pPr algn="ctr"/>
-          </a:p>
-        </p:txBody>
-      </p:sp>
-      <p:sp>
-        <p:nvSpPr>
           <p:cNvPr id="22" name="Rounded Rectangle 21"/>
           <p:cNvSpPr/>
           <p:nvPr/>
@@ -36860,62 +30780,6 @@
           </a:prstGeom>
         </p:spPr>
       </p:pic>
-      <p:sp>
-        <p:nvSpPr>
-          <p:cNvPr id="12" name="Rectangle 11"/>
-          <p:cNvSpPr/>
-          <p:nvPr/>
-        </p:nvSpPr>
-        <p:spPr>
-          <a:xfrm>
-            <a:off x="612648" y="6620256"/>
-            <a:ext cx="10972800" cy="16459"/>
-          </a:xfrm>
-          <a:prstGeom prst="rect">
-            <a:avLst/>
-          </a:prstGeom>
-          <a:solidFill>
-            <a:srgbClr val="FFBC00"/>
-          </a:solidFill>
-          <a:ln>
-            <a:noFill/>
-          </a:ln>
-        </p:spPr>
-        <p:style>
-          <a:lnRef idx="1">
-            <a:schemeClr val="accent1"/>
-          </a:lnRef>
-          <a:fillRef idx="3">
-            <a:schemeClr val="accent1"/>
-          </a:fillRef>
-          <a:effectRef idx="2">
-            <a:schemeClr val="accent1"/>
-          </a:effectRef>
-          <a:fontRef idx="minor">
-            <a:schemeClr val="lt1"/>
-          </a:fontRef>
-        </p:style>
-        <p:txBody>
-          <a:bodyPr rtlCol="0" anchor="ctr" wrap="square" lIns="0" rIns="0" tIns="0" bIns="0"/>
-          <a:lstStyle/>
-          <a:p>
-            <a:pPr algn="ctr">
-              <a:spcBef>
-                <a:spcPts val="0"/>
-              </a:spcBef>
-              <a:spcAft>
-                <a:spcPts val="300"/>
-              </a:spcAft>
-              <a:defRPr sz="1800" b="0">
-                <a:solidFill>
-                  <a:srgbClr val="1A1A1A"/>
-                </a:solidFill>
-                <a:latin typeface="Arial"/>
-              </a:defRPr>
-            </a:pPr>
-          </a:p>
-        </p:txBody>
-      </p:sp>
       <p:sp>
         <p:nvSpPr>
           <p:cNvPr id="13" name="TextBox 12"/>
@@ -37274,92 +31138,6 @@
       </p:sp>
       <p:sp>
         <p:nvSpPr>
-          <p:cNvPr id="16" name="Rectangle 15"/>
-          <p:cNvSpPr/>
-          <p:nvPr/>
-        </p:nvSpPr>
-        <p:spPr>
-          <a:xfrm>
-            <a:off x="0" y="0"/>
-            <a:ext cx="146304" cy="1645920"/>
-          </a:xfrm>
-          <a:prstGeom prst="rect">
-            <a:avLst/>
-          </a:prstGeom>
-          <a:solidFill>
-            <a:srgbClr val="C60016"/>
-          </a:solidFill>
-          <a:ln>
-            <a:noFill/>
-          </a:ln>
-        </p:spPr>
-        <p:style>
-          <a:lnRef idx="1">
-            <a:schemeClr val="accent1"/>
-          </a:lnRef>
-          <a:fillRef idx="3">
-            <a:schemeClr val="accent1"/>
-          </a:fillRef>
-          <a:effectRef idx="2">
-            <a:schemeClr val="accent1"/>
-          </a:effectRef>
-          <a:fontRef idx="minor">
-            <a:schemeClr val="lt1"/>
-          </a:fontRef>
-        </p:style>
-        <p:txBody>
-          <a:bodyPr rtlCol="0" anchor="ctr"/>
-          <a:lstStyle/>
-          <a:p>
-            <a:pPr algn="ctr"/>
-          </a:p>
-        </p:txBody>
-      </p:sp>
-      <p:sp>
-        <p:nvSpPr>
-          <p:cNvPr id="17" name="Rectangle 16"/>
-          <p:cNvSpPr/>
-          <p:nvPr/>
-        </p:nvSpPr>
-        <p:spPr>
-          <a:xfrm>
-            <a:off x="612648" y="1581912"/>
-            <a:ext cx="822960" cy="50292"/>
-          </a:xfrm>
-          <a:prstGeom prst="rect">
-            <a:avLst/>
-          </a:prstGeom>
-          <a:solidFill>
-            <a:srgbClr val="FFBC00"/>
-          </a:solidFill>
-          <a:ln>
-            <a:noFill/>
-          </a:ln>
-        </p:spPr>
-        <p:style>
-          <a:lnRef idx="1">
-            <a:schemeClr val="accent1"/>
-          </a:lnRef>
-          <a:fillRef idx="3">
-            <a:schemeClr val="accent1"/>
-          </a:fillRef>
-          <a:effectRef idx="2">
-            <a:schemeClr val="accent1"/>
-          </a:effectRef>
-          <a:fontRef idx="minor">
-            <a:schemeClr val="lt1"/>
-          </a:fontRef>
-        </p:style>
-        <p:txBody>
-          <a:bodyPr rtlCol="0" anchor="ctr"/>
-          <a:lstStyle/>
-          <a:p>
-            <a:pPr algn="ctr"/>
-          </a:p>
-        </p:txBody>
-      </p:sp>
-      <p:sp>
-        <p:nvSpPr>
           <p:cNvPr id="18" name="Rounded Rectangle 17"/>
           <p:cNvSpPr/>
           <p:nvPr/>
@@ -37421,49 +31199,6 @@
           </a:prstGeom>
           <a:solidFill>
             <a:srgbClr val="FFFFFF"/>
-          </a:solidFill>
-          <a:ln>
-            <a:noFill/>
-          </a:ln>
-        </p:spPr>
-        <p:style>
-          <a:lnRef idx="1">
-            <a:schemeClr val="accent1"/>
-          </a:lnRef>
-          <a:fillRef idx="3">
-            <a:schemeClr val="accent1"/>
-          </a:fillRef>
-          <a:effectRef idx="2">
-            <a:schemeClr val="accent1"/>
-          </a:effectRef>
-          <a:fontRef idx="minor">
-            <a:schemeClr val="lt1"/>
-          </a:fontRef>
-        </p:style>
-        <p:txBody>
-          <a:bodyPr rtlCol="0" anchor="ctr"/>
-          <a:lstStyle/>
-          <a:p>
-            <a:pPr algn="ctr"/>
-          </a:p>
-        </p:txBody>
-      </p:sp>
-      <p:sp>
-        <p:nvSpPr>
-          <p:cNvPr id="20" name="Rectangle 19"/>
-          <p:cNvSpPr/>
-          <p:nvPr/>
-        </p:nvSpPr>
-        <p:spPr>
-          <a:xfrm>
-            <a:off x="512064" y="1773936"/>
-            <a:ext cx="50292" cy="3776472"/>
-          </a:xfrm>
-          <a:prstGeom prst="rect">
-            <a:avLst/>
-          </a:prstGeom>
-          <a:solidFill>
-            <a:srgbClr val="C60016"/>
           </a:solidFill>
           <a:ln>
             <a:noFill/>
@@ -37731,62 +31466,6 @@
           </a:prstGeom>
         </p:spPr>
       </p:pic>
-      <p:sp>
-        <p:nvSpPr>
-          <p:cNvPr id="8" name="Rectangle 7"/>
-          <p:cNvSpPr/>
-          <p:nvPr/>
-        </p:nvSpPr>
-        <p:spPr>
-          <a:xfrm>
-            <a:off x="612648" y="6620256"/>
-            <a:ext cx="10972800" cy="16459"/>
-          </a:xfrm>
-          <a:prstGeom prst="rect">
-            <a:avLst/>
-          </a:prstGeom>
-          <a:solidFill>
-            <a:srgbClr val="FFBC00"/>
-          </a:solidFill>
-          <a:ln>
-            <a:noFill/>
-          </a:ln>
-        </p:spPr>
-        <p:style>
-          <a:lnRef idx="1">
-            <a:schemeClr val="accent1"/>
-          </a:lnRef>
-          <a:fillRef idx="3">
-            <a:schemeClr val="accent1"/>
-          </a:fillRef>
-          <a:effectRef idx="2">
-            <a:schemeClr val="accent1"/>
-          </a:effectRef>
-          <a:fontRef idx="minor">
-            <a:schemeClr val="lt1"/>
-          </a:fontRef>
-        </p:style>
-        <p:txBody>
-          <a:bodyPr rtlCol="0" anchor="ctr" wrap="square" lIns="0" rIns="0" tIns="0" bIns="0"/>
-          <a:lstStyle/>
-          <a:p>
-            <a:pPr algn="ctr">
-              <a:spcBef>
-                <a:spcPts val="0"/>
-              </a:spcBef>
-              <a:spcAft>
-                <a:spcPts val="300"/>
-              </a:spcAft>
-              <a:defRPr sz="1800" b="0">
-                <a:solidFill>
-                  <a:srgbClr val="1A1A1A"/>
-                </a:solidFill>
-                <a:latin typeface="Arial"/>
-              </a:defRPr>
-            </a:pPr>
-          </a:p>
-        </p:txBody>
-      </p:sp>
       <p:sp>
         <p:nvSpPr>
           <p:cNvPr id="9" name="TextBox 8"/>
@@ -38145,92 +31824,6 @@
       </p:sp>
       <p:sp>
         <p:nvSpPr>
-          <p:cNvPr id="16" name="Rectangle 15"/>
-          <p:cNvSpPr/>
-          <p:nvPr/>
-        </p:nvSpPr>
-        <p:spPr>
-          <a:xfrm>
-            <a:off x="0" y="0"/>
-            <a:ext cx="146304" cy="1645920"/>
-          </a:xfrm>
-          <a:prstGeom prst="rect">
-            <a:avLst/>
-          </a:prstGeom>
-          <a:solidFill>
-            <a:srgbClr val="C60016"/>
-          </a:solidFill>
-          <a:ln>
-            <a:noFill/>
-          </a:ln>
-        </p:spPr>
-        <p:style>
-          <a:lnRef idx="1">
-            <a:schemeClr val="accent1"/>
-          </a:lnRef>
-          <a:fillRef idx="3">
-            <a:schemeClr val="accent1"/>
-          </a:fillRef>
-          <a:effectRef idx="2">
-            <a:schemeClr val="accent1"/>
-          </a:effectRef>
-          <a:fontRef idx="minor">
-            <a:schemeClr val="lt1"/>
-          </a:fontRef>
-        </p:style>
-        <p:txBody>
-          <a:bodyPr rtlCol="0" anchor="ctr"/>
-          <a:lstStyle/>
-          <a:p>
-            <a:pPr algn="ctr"/>
-          </a:p>
-        </p:txBody>
-      </p:sp>
-      <p:sp>
-        <p:nvSpPr>
-          <p:cNvPr id="17" name="Rectangle 16"/>
-          <p:cNvSpPr/>
-          <p:nvPr/>
-        </p:nvSpPr>
-        <p:spPr>
-          <a:xfrm>
-            <a:off x="612648" y="1581912"/>
-            <a:ext cx="822960" cy="50292"/>
-          </a:xfrm>
-          <a:prstGeom prst="rect">
-            <a:avLst/>
-          </a:prstGeom>
-          <a:solidFill>
-            <a:srgbClr val="FFBC00"/>
-          </a:solidFill>
-          <a:ln>
-            <a:noFill/>
-          </a:ln>
-        </p:spPr>
-        <p:style>
-          <a:lnRef idx="1">
-            <a:schemeClr val="accent1"/>
-          </a:lnRef>
-          <a:fillRef idx="3">
-            <a:schemeClr val="accent1"/>
-          </a:fillRef>
-          <a:effectRef idx="2">
-            <a:schemeClr val="accent1"/>
-          </a:effectRef>
-          <a:fontRef idx="minor">
-            <a:schemeClr val="lt1"/>
-          </a:fontRef>
-        </p:style>
-        <p:txBody>
-          <a:bodyPr rtlCol="0" anchor="ctr"/>
-          <a:lstStyle/>
-          <a:p>
-            <a:pPr algn="ctr"/>
-          </a:p>
-        </p:txBody>
-      </p:sp>
-      <p:sp>
-        <p:nvSpPr>
           <p:cNvPr id="18" name="Rounded Rectangle 17"/>
           <p:cNvSpPr/>
           <p:nvPr/>
@@ -38292,49 +31885,6 @@
           </a:prstGeom>
           <a:solidFill>
             <a:srgbClr val="FFFFFF"/>
-          </a:solidFill>
-          <a:ln>
-            <a:noFill/>
-          </a:ln>
-        </p:spPr>
-        <p:style>
-          <a:lnRef idx="1">
-            <a:schemeClr val="accent1"/>
-          </a:lnRef>
-          <a:fillRef idx="3">
-            <a:schemeClr val="accent1"/>
-          </a:fillRef>
-          <a:effectRef idx="2">
-            <a:schemeClr val="accent1"/>
-          </a:effectRef>
-          <a:fontRef idx="minor">
-            <a:schemeClr val="lt1"/>
-          </a:fontRef>
-        </p:style>
-        <p:txBody>
-          <a:bodyPr rtlCol="0" anchor="ctr"/>
-          <a:lstStyle/>
-          <a:p>
-            <a:pPr algn="ctr"/>
-          </a:p>
-        </p:txBody>
-      </p:sp>
-      <p:sp>
-        <p:nvSpPr>
-          <p:cNvPr id="20" name="Rectangle 19"/>
-          <p:cNvSpPr/>
-          <p:nvPr/>
-        </p:nvSpPr>
-        <p:spPr>
-          <a:xfrm>
-            <a:off x="512064" y="1773936"/>
-            <a:ext cx="50292" cy="3776472"/>
-          </a:xfrm>
-          <a:prstGeom prst="rect">
-            <a:avLst/>
-          </a:prstGeom>
-          <a:solidFill>
-            <a:srgbClr val="C60016"/>
           </a:solidFill>
           <a:ln>
             <a:noFill/>
@@ -38602,62 +32152,6 @@
           </a:prstGeom>
         </p:spPr>
       </p:pic>
-      <p:sp>
-        <p:nvSpPr>
-          <p:cNvPr id="8" name="Rectangle 7"/>
-          <p:cNvSpPr/>
-          <p:nvPr/>
-        </p:nvSpPr>
-        <p:spPr>
-          <a:xfrm>
-            <a:off x="612648" y="6620256"/>
-            <a:ext cx="10972800" cy="16459"/>
-          </a:xfrm>
-          <a:prstGeom prst="rect">
-            <a:avLst/>
-          </a:prstGeom>
-          <a:solidFill>
-            <a:srgbClr val="FFBC00"/>
-          </a:solidFill>
-          <a:ln>
-            <a:noFill/>
-          </a:ln>
-        </p:spPr>
-        <p:style>
-          <a:lnRef idx="1">
-            <a:schemeClr val="accent1"/>
-          </a:lnRef>
-          <a:fillRef idx="3">
-            <a:schemeClr val="accent1"/>
-          </a:fillRef>
-          <a:effectRef idx="2">
-            <a:schemeClr val="accent1"/>
-          </a:effectRef>
-          <a:fontRef idx="minor">
-            <a:schemeClr val="lt1"/>
-          </a:fontRef>
-        </p:style>
-        <p:txBody>
-          <a:bodyPr rtlCol="0" anchor="ctr" wrap="square" lIns="0" rIns="0" tIns="0" bIns="0"/>
-          <a:lstStyle/>
-          <a:p>
-            <a:pPr algn="ctr">
-              <a:spcBef>
-                <a:spcPts val="0"/>
-              </a:spcBef>
-              <a:spcAft>
-                <a:spcPts val="300"/>
-              </a:spcAft>
-              <a:defRPr sz="1800" b="0">
-                <a:solidFill>
-                  <a:srgbClr val="1A1A1A"/>
-                </a:solidFill>
-                <a:latin typeface="Arial"/>
-              </a:defRPr>
-            </a:pPr>
-          </a:p>
-        </p:txBody>
-      </p:sp>
       <p:sp>
         <p:nvSpPr>
           <p:cNvPr id="9" name="TextBox 8"/>
@@ -39016,92 +32510,6 @@
       </p:sp>
       <p:sp>
         <p:nvSpPr>
-          <p:cNvPr id="18" name="Rectangle 17"/>
-          <p:cNvSpPr/>
-          <p:nvPr/>
-        </p:nvSpPr>
-        <p:spPr>
-          <a:xfrm>
-            <a:off x="0" y="0"/>
-            <a:ext cx="146304" cy="1645920"/>
-          </a:xfrm>
-          <a:prstGeom prst="rect">
-            <a:avLst/>
-          </a:prstGeom>
-          <a:solidFill>
-            <a:srgbClr val="C60016"/>
-          </a:solidFill>
-          <a:ln>
-            <a:noFill/>
-          </a:ln>
-        </p:spPr>
-        <p:style>
-          <a:lnRef idx="1">
-            <a:schemeClr val="accent1"/>
-          </a:lnRef>
-          <a:fillRef idx="3">
-            <a:schemeClr val="accent1"/>
-          </a:fillRef>
-          <a:effectRef idx="2">
-            <a:schemeClr val="accent1"/>
-          </a:effectRef>
-          <a:fontRef idx="minor">
-            <a:schemeClr val="lt1"/>
-          </a:fontRef>
-        </p:style>
-        <p:txBody>
-          <a:bodyPr rtlCol="0" anchor="ctr"/>
-          <a:lstStyle/>
-          <a:p>
-            <a:pPr algn="ctr"/>
-          </a:p>
-        </p:txBody>
-      </p:sp>
-      <p:sp>
-        <p:nvSpPr>
-          <p:cNvPr id="19" name="Rectangle 18"/>
-          <p:cNvSpPr/>
-          <p:nvPr/>
-        </p:nvSpPr>
-        <p:spPr>
-          <a:xfrm>
-            <a:off x="612648" y="1581912"/>
-            <a:ext cx="822960" cy="50292"/>
-          </a:xfrm>
-          <a:prstGeom prst="rect">
-            <a:avLst/>
-          </a:prstGeom>
-          <a:solidFill>
-            <a:srgbClr val="FFBC00"/>
-          </a:solidFill>
-          <a:ln>
-            <a:noFill/>
-          </a:ln>
-        </p:spPr>
-        <p:style>
-          <a:lnRef idx="1">
-            <a:schemeClr val="accent1"/>
-          </a:lnRef>
-          <a:fillRef idx="3">
-            <a:schemeClr val="accent1"/>
-          </a:fillRef>
-          <a:effectRef idx="2">
-            <a:schemeClr val="accent1"/>
-          </a:effectRef>
-          <a:fontRef idx="minor">
-            <a:schemeClr val="lt1"/>
-          </a:fontRef>
-        </p:style>
-        <p:txBody>
-          <a:bodyPr rtlCol="0" anchor="ctr"/>
-          <a:lstStyle/>
-          <a:p>
-            <a:pPr algn="ctr"/>
-          </a:p>
-        </p:txBody>
-      </p:sp>
-      <p:sp>
-        <p:nvSpPr>
           <p:cNvPr id="20" name="Rounded Rectangle 19"/>
           <p:cNvSpPr/>
           <p:nvPr/>
@@ -39163,49 +32571,6 @@
           </a:prstGeom>
           <a:solidFill>
             <a:srgbClr val="1A1512"/>
-          </a:solidFill>
-          <a:ln>
-            <a:noFill/>
-          </a:ln>
-        </p:spPr>
-        <p:style>
-          <a:lnRef idx="1">
-            <a:schemeClr val="accent1"/>
-          </a:lnRef>
-          <a:fillRef idx="3">
-            <a:schemeClr val="accent1"/>
-          </a:fillRef>
-          <a:effectRef idx="2">
-            <a:schemeClr val="accent1"/>
-          </a:effectRef>
-          <a:fontRef idx="minor">
-            <a:schemeClr val="lt1"/>
-          </a:fontRef>
-        </p:style>
-        <p:txBody>
-          <a:bodyPr rtlCol="0" anchor="ctr"/>
-          <a:lstStyle/>
-          <a:p>
-            <a:pPr algn="ctr"/>
-          </a:p>
-        </p:txBody>
-      </p:sp>
-      <p:sp>
-        <p:nvSpPr>
-          <p:cNvPr id="22" name="Rectangle 21"/>
-          <p:cNvSpPr/>
-          <p:nvPr/>
-        </p:nvSpPr>
-        <p:spPr>
-          <a:xfrm>
-            <a:off x="493776" y="1773936"/>
-            <a:ext cx="64008" cy="2240280"/>
-          </a:xfrm>
-          <a:prstGeom prst="rect">
-            <a:avLst/>
-          </a:prstGeom>
-          <a:solidFill>
-            <a:srgbClr val="FFBC00"/>
           </a:solidFill>
           <a:ln>
             <a:noFill/>
@@ -39601,62 +32966,6 @@
           </a:prstGeom>
         </p:spPr>
       </p:pic>
-      <p:sp>
-        <p:nvSpPr>
-          <p:cNvPr id="10" name="Rectangle 9"/>
-          <p:cNvSpPr/>
-          <p:nvPr/>
-        </p:nvSpPr>
-        <p:spPr>
-          <a:xfrm>
-            <a:off x="612648" y="6620256"/>
-            <a:ext cx="10972800" cy="16459"/>
-          </a:xfrm>
-          <a:prstGeom prst="rect">
-            <a:avLst/>
-          </a:prstGeom>
-          <a:solidFill>
-            <a:srgbClr val="FFBC00"/>
-          </a:solidFill>
-          <a:ln>
-            <a:noFill/>
-          </a:ln>
-        </p:spPr>
-        <p:style>
-          <a:lnRef idx="1">
-            <a:schemeClr val="accent1"/>
-          </a:lnRef>
-          <a:fillRef idx="3">
-            <a:schemeClr val="accent1"/>
-          </a:fillRef>
-          <a:effectRef idx="2">
-            <a:schemeClr val="accent1"/>
-          </a:effectRef>
-          <a:fontRef idx="minor">
-            <a:schemeClr val="lt1"/>
-          </a:fontRef>
-        </p:style>
-        <p:txBody>
-          <a:bodyPr rtlCol="0" anchor="ctr" wrap="square" lIns="0" rIns="0" tIns="0" bIns="0"/>
-          <a:lstStyle/>
-          <a:p>
-            <a:pPr algn="ctr">
-              <a:spcBef>
-                <a:spcPts val="0"/>
-              </a:spcBef>
-              <a:spcAft>
-                <a:spcPts val="300"/>
-              </a:spcAft>
-              <a:defRPr sz="1800" b="0">
-                <a:solidFill>
-                  <a:srgbClr val="1A1A1A"/>
-                </a:solidFill>
-                <a:latin typeface="Arial"/>
-              </a:defRPr>
-            </a:pPr>
-          </a:p>
-        </p:txBody>
-      </p:sp>
       <p:sp>
         <p:nvSpPr>
           <p:cNvPr id="11" name="TextBox 10"/>
@@ -40015,92 +33324,6 @@
       </p:sp>
       <p:sp>
         <p:nvSpPr>
-          <p:cNvPr id="18" name="Rectangle 17"/>
-          <p:cNvSpPr/>
-          <p:nvPr/>
-        </p:nvSpPr>
-        <p:spPr>
-          <a:xfrm>
-            <a:off x="0" y="0"/>
-            <a:ext cx="146304" cy="1645920"/>
-          </a:xfrm>
-          <a:prstGeom prst="rect">
-            <a:avLst/>
-          </a:prstGeom>
-          <a:solidFill>
-            <a:srgbClr val="C60016"/>
-          </a:solidFill>
-          <a:ln>
-            <a:noFill/>
-          </a:ln>
-        </p:spPr>
-        <p:style>
-          <a:lnRef idx="1">
-            <a:schemeClr val="accent1"/>
-          </a:lnRef>
-          <a:fillRef idx="3">
-            <a:schemeClr val="accent1"/>
-          </a:fillRef>
-          <a:effectRef idx="2">
-            <a:schemeClr val="accent1"/>
-          </a:effectRef>
-          <a:fontRef idx="minor">
-            <a:schemeClr val="lt1"/>
-          </a:fontRef>
-        </p:style>
-        <p:txBody>
-          <a:bodyPr rtlCol="0" anchor="ctr"/>
-          <a:lstStyle/>
-          <a:p>
-            <a:pPr algn="ctr"/>
-          </a:p>
-        </p:txBody>
-      </p:sp>
-      <p:sp>
-        <p:nvSpPr>
-          <p:cNvPr id="19" name="Rectangle 18"/>
-          <p:cNvSpPr/>
-          <p:nvPr/>
-        </p:nvSpPr>
-        <p:spPr>
-          <a:xfrm>
-            <a:off x="612648" y="1581912"/>
-            <a:ext cx="822960" cy="50292"/>
-          </a:xfrm>
-          <a:prstGeom prst="rect">
-            <a:avLst/>
-          </a:prstGeom>
-          <a:solidFill>
-            <a:srgbClr val="FFBC00"/>
-          </a:solidFill>
-          <a:ln>
-            <a:noFill/>
-          </a:ln>
-        </p:spPr>
-        <p:style>
-          <a:lnRef idx="1">
-            <a:schemeClr val="accent1"/>
-          </a:lnRef>
-          <a:fillRef idx="3">
-            <a:schemeClr val="accent1"/>
-          </a:fillRef>
-          <a:effectRef idx="2">
-            <a:schemeClr val="accent1"/>
-          </a:effectRef>
-          <a:fontRef idx="minor">
-            <a:schemeClr val="lt1"/>
-          </a:fontRef>
-        </p:style>
-        <p:txBody>
-          <a:bodyPr rtlCol="0" anchor="ctr"/>
-          <a:lstStyle/>
-          <a:p>
-            <a:pPr algn="ctr"/>
-          </a:p>
-        </p:txBody>
-      </p:sp>
-      <p:sp>
-        <p:nvSpPr>
           <p:cNvPr id="20" name="Rounded Rectangle 19"/>
           <p:cNvSpPr/>
           <p:nvPr/>
@@ -40162,49 +33385,6 @@
           </a:prstGeom>
           <a:solidFill>
             <a:srgbClr val="5A1018"/>
-          </a:solidFill>
-          <a:ln>
-            <a:noFill/>
-          </a:ln>
-        </p:spPr>
-        <p:style>
-          <a:lnRef idx="1">
-            <a:schemeClr val="accent1"/>
-          </a:lnRef>
-          <a:fillRef idx="3">
-            <a:schemeClr val="accent1"/>
-          </a:fillRef>
-          <a:effectRef idx="2">
-            <a:schemeClr val="accent1"/>
-          </a:effectRef>
-          <a:fontRef idx="minor">
-            <a:schemeClr val="lt1"/>
-          </a:fontRef>
-        </p:style>
-        <p:txBody>
-          <a:bodyPr rtlCol="0" anchor="ctr"/>
-          <a:lstStyle/>
-          <a:p>
-            <a:pPr algn="ctr"/>
-          </a:p>
-        </p:txBody>
-      </p:sp>
-      <p:sp>
-        <p:nvSpPr>
-          <p:cNvPr id="22" name="Rectangle 21"/>
-          <p:cNvSpPr/>
-          <p:nvPr/>
-        </p:nvSpPr>
-        <p:spPr>
-          <a:xfrm>
-            <a:off x="493776" y="1773936"/>
-            <a:ext cx="64008" cy="2240280"/>
-          </a:xfrm>
-          <a:prstGeom prst="rect">
-            <a:avLst/>
-          </a:prstGeom>
-          <a:solidFill>
-            <a:srgbClr val="FFBC00"/>
           </a:solidFill>
           <a:ln>
             <a:noFill/>
@@ -40600,62 +33780,6 @@
           </a:prstGeom>
         </p:spPr>
       </p:pic>
-      <p:sp>
-        <p:nvSpPr>
-          <p:cNvPr id="10" name="Rectangle 9"/>
-          <p:cNvSpPr/>
-          <p:nvPr/>
-        </p:nvSpPr>
-        <p:spPr>
-          <a:xfrm>
-            <a:off x="612648" y="6620256"/>
-            <a:ext cx="10972800" cy="16459"/>
-          </a:xfrm>
-          <a:prstGeom prst="rect">
-            <a:avLst/>
-          </a:prstGeom>
-          <a:solidFill>
-            <a:srgbClr val="FFBC00"/>
-          </a:solidFill>
-          <a:ln>
-            <a:noFill/>
-          </a:ln>
-        </p:spPr>
-        <p:style>
-          <a:lnRef idx="1">
-            <a:schemeClr val="accent1"/>
-          </a:lnRef>
-          <a:fillRef idx="3">
-            <a:schemeClr val="accent1"/>
-          </a:fillRef>
-          <a:effectRef idx="2">
-            <a:schemeClr val="accent1"/>
-          </a:effectRef>
-          <a:fontRef idx="minor">
-            <a:schemeClr val="lt1"/>
-          </a:fontRef>
-        </p:style>
-        <p:txBody>
-          <a:bodyPr rtlCol="0" anchor="ctr" wrap="square" lIns="0" rIns="0" tIns="0" bIns="0"/>
-          <a:lstStyle/>
-          <a:p>
-            <a:pPr algn="ctr">
-              <a:spcBef>
-                <a:spcPts val="0"/>
-              </a:spcBef>
-              <a:spcAft>
-                <a:spcPts val="300"/>
-              </a:spcAft>
-              <a:defRPr sz="1800" b="0">
-                <a:solidFill>
-                  <a:srgbClr val="1A1A1A"/>
-                </a:solidFill>
-                <a:latin typeface="Arial"/>
-              </a:defRPr>
-            </a:pPr>
-          </a:p>
-        </p:txBody>
-      </p:sp>
       <p:sp>
         <p:nvSpPr>
           <p:cNvPr id="11" name="TextBox 10"/>
@@ -41014,92 +34138,6 @@
       </p:sp>
       <p:sp>
         <p:nvSpPr>
-          <p:cNvPr id="16" name="Rectangle 15"/>
-          <p:cNvSpPr/>
-          <p:nvPr/>
-        </p:nvSpPr>
-        <p:spPr>
-          <a:xfrm>
-            <a:off x="0" y="0"/>
-            <a:ext cx="146304" cy="1645920"/>
-          </a:xfrm>
-          <a:prstGeom prst="rect">
-            <a:avLst/>
-          </a:prstGeom>
-          <a:solidFill>
-            <a:srgbClr val="C60016"/>
-          </a:solidFill>
-          <a:ln>
-            <a:noFill/>
-          </a:ln>
-        </p:spPr>
-        <p:style>
-          <a:lnRef idx="1">
-            <a:schemeClr val="accent1"/>
-          </a:lnRef>
-          <a:fillRef idx="3">
-            <a:schemeClr val="accent1"/>
-          </a:fillRef>
-          <a:effectRef idx="2">
-            <a:schemeClr val="accent1"/>
-          </a:effectRef>
-          <a:fontRef idx="minor">
-            <a:schemeClr val="lt1"/>
-          </a:fontRef>
-        </p:style>
-        <p:txBody>
-          <a:bodyPr rtlCol="0" anchor="ctr"/>
-          <a:lstStyle/>
-          <a:p>
-            <a:pPr algn="ctr"/>
-          </a:p>
-        </p:txBody>
-      </p:sp>
-      <p:sp>
-        <p:nvSpPr>
-          <p:cNvPr id="17" name="Rectangle 16"/>
-          <p:cNvSpPr/>
-          <p:nvPr/>
-        </p:nvSpPr>
-        <p:spPr>
-          <a:xfrm>
-            <a:off x="612648" y="1581912"/>
-            <a:ext cx="822960" cy="50292"/>
-          </a:xfrm>
-          <a:prstGeom prst="rect">
-            <a:avLst/>
-          </a:prstGeom>
-          <a:solidFill>
-            <a:srgbClr val="FFBC00"/>
-          </a:solidFill>
-          <a:ln>
-            <a:noFill/>
-          </a:ln>
-        </p:spPr>
-        <p:style>
-          <a:lnRef idx="1">
-            <a:schemeClr val="accent1"/>
-          </a:lnRef>
-          <a:fillRef idx="3">
-            <a:schemeClr val="accent1"/>
-          </a:fillRef>
-          <a:effectRef idx="2">
-            <a:schemeClr val="accent1"/>
-          </a:effectRef>
-          <a:fontRef idx="minor">
-            <a:schemeClr val="lt1"/>
-          </a:fontRef>
-        </p:style>
-        <p:txBody>
-          <a:bodyPr rtlCol="0" anchor="ctr"/>
-          <a:lstStyle/>
-          <a:p>
-            <a:pPr algn="ctr"/>
-          </a:p>
-        </p:txBody>
-      </p:sp>
-      <p:sp>
-        <p:nvSpPr>
           <p:cNvPr id="18" name="Rounded Rectangle 17"/>
           <p:cNvSpPr/>
           <p:nvPr/>
@@ -41161,49 +34199,6 @@
           </a:prstGeom>
           <a:solidFill>
             <a:srgbClr val="FFFFFF"/>
-          </a:solidFill>
-          <a:ln>
-            <a:noFill/>
-          </a:ln>
-        </p:spPr>
-        <p:style>
-          <a:lnRef idx="1">
-            <a:schemeClr val="accent1"/>
-          </a:lnRef>
-          <a:fillRef idx="3">
-            <a:schemeClr val="accent1"/>
-          </a:fillRef>
-          <a:effectRef idx="2">
-            <a:schemeClr val="accent1"/>
-          </a:effectRef>
-          <a:fontRef idx="minor">
-            <a:schemeClr val="lt1"/>
-          </a:fontRef>
-        </p:style>
-        <p:txBody>
-          <a:bodyPr rtlCol="0" anchor="ctr"/>
-          <a:lstStyle/>
-          <a:p>
-            <a:pPr algn="ctr"/>
-          </a:p>
-        </p:txBody>
-      </p:sp>
-      <p:sp>
-        <p:nvSpPr>
-          <p:cNvPr id="20" name="Rectangle 19"/>
-          <p:cNvSpPr/>
-          <p:nvPr/>
-        </p:nvSpPr>
-        <p:spPr>
-          <a:xfrm>
-            <a:off x="512064" y="1773936"/>
-            <a:ext cx="50292" cy="3776472"/>
-          </a:xfrm>
-          <a:prstGeom prst="rect">
-            <a:avLst/>
-          </a:prstGeom>
-          <a:solidFill>
-            <a:srgbClr val="C60016"/>
           </a:solidFill>
           <a:ln>
             <a:noFill/>
@@ -41471,62 +34466,6 @@
           </a:prstGeom>
         </p:spPr>
       </p:pic>
-      <p:sp>
-        <p:nvSpPr>
-          <p:cNvPr id="8" name="Rectangle 7"/>
-          <p:cNvSpPr/>
-          <p:nvPr/>
-        </p:nvSpPr>
-        <p:spPr>
-          <a:xfrm>
-            <a:off x="612648" y="6620256"/>
-            <a:ext cx="10972800" cy="16459"/>
-          </a:xfrm>
-          <a:prstGeom prst="rect">
-            <a:avLst/>
-          </a:prstGeom>
-          <a:solidFill>
-            <a:srgbClr val="FFBC00"/>
-          </a:solidFill>
-          <a:ln>
-            <a:noFill/>
-          </a:ln>
-        </p:spPr>
-        <p:style>
-          <a:lnRef idx="1">
-            <a:schemeClr val="accent1"/>
-          </a:lnRef>
-          <a:fillRef idx="3">
-            <a:schemeClr val="accent1"/>
-          </a:fillRef>
-          <a:effectRef idx="2">
-            <a:schemeClr val="accent1"/>
-          </a:effectRef>
-          <a:fontRef idx="minor">
-            <a:schemeClr val="lt1"/>
-          </a:fontRef>
-        </p:style>
-        <p:txBody>
-          <a:bodyPr rtlCol="0" anchor="ctr" wrap="square" lIns="0" rIns="0" tIns="0" bIns="0"/>
-          <a:lstStyle/>
-          <a:p>
-            <a:pPr algn="ctr">
-              <a:spcBef>
-                <a:spcPts val="0"/>
-              </a:spcBef>
-              <a:spcAft>
-                <a:spcPts val="300"/>
-              </a:spcAft>
-              <a:defRPr sz="1800" b="0">
-                <a:solidFill>
-                  <a:srgbClr val="1A1A1A"/>
-                </a:solidFill>
-                <a:latin typeface="Arial"/>
-              </a:defRPr>
-            </a:pPr>
-          </a:p>
-        </p:txBody>
-      </p:sp>
       <p:sp>
         <p:nvSpPr>
           <p:cNvPr id="9" name="TextBox 8"/>
@@ -41885,92 +34824,6 @@
       </p:sp>
       <p:sp>
         <p:nvSpPr>
-          <p:cNvPr id="16" name="Rectangle 15"/>
-          <p:cNvSpPr/>
-          <p:nvPr/>
-        </p:nvSpPr>
-        <p:spPr>
-          <a:xfrm>
-            <a:off x="0" y="0"/>
-            <a:ext cx="146304" cy="1645920"/>
-          </a:xfrm>
-          <a:prstGeom prst="rect">
-            <a:avLst/>
-          </a:prstGeom>
-          <a:solidFill>
-            <a:srgbClr val="C60016"/>
-          </a:solidFill>
-          <a:ln>
-            <a:noFill/>
-          </a:ln>
-        </p:spPr>
-        <p:style>
-          <a:lnRef idx="1">
-            <a:schemeClr val="accent1"/>
-          </a:lnRef>
-          <a:fillRef idx="3">
-            <a:schemeClr val="accent1"/>
-          </a:fillRef>
-          <a:effectRef idx="2">
-            <a:schemeClr val="accent1"/>
-          </a:effectRef>
-          <a:fontRef idx="minor">
-            <a:schemeClr val="lt1"/>
-          </a:fontRef>
-        </p:style>
-        <p:txBody>
-          <a:bodyPr rtlCol="0" anchor="ctr"/>
-          <a:lstStyle/>
-          <a:p>
-            <a:pPr algn="ctr"/>
-          </a:p>
-        </p:txBody>
-      </p:sp>
-      <p:sp>
-        <p:nvSpPr>
-          <p:cNvPr id="17" name="Rectangle 16"/>
-          <p:cNvSpPr/>
-          <p:nvPr/>
-        </p:nvSpPr>
-        <p:spPr>
-          <a:xfrm>
-            <a:off x="612648" y="1581912"/>
-            <a:ext cx="822960" cy="50292"/>
-          </a:xfrm>
-          <a:prstGeom prst="rect">
-            <a:avLst/>
-          </a:prstGeom>
-          <a:solidFill>
-            <a:srgbClr val="FFBC00"/>
-          </a:solidFill>
-          <a:ln>
-            <a:noFill/>
-          </a:ln>
-        </p:spPr>
-        <p:style>
-          <a:lnRef idx="1">
-            <a:schemeClr val="accent1"/>
-          </a:lnRef>
-          <a:fillRef idx="3">
-            <a:schemeClr val="accent1"/>
-          </a:fillRef>
-          <a:effectRef idx="2">
-            <a:schemeClr val="accent1"/>
-          </a:effectRef>
-          <a:fontRef idx="minor">
-            <a:schemeClr val="lt1"/>
-          </a:fontRef>
-        </p:style>
-        <p:txBody>
-          <a:bodyPr rtlCol="0" anchor="ctr"/>
-          <a:lstStyle/>
-          <a:p>
-            <a:pPr algn="ctr"/>
-          </a:p>
-        </p:txBody>
-      </p:sp>
-      <p:sp>
-        <p:nvSpPr>
           <p:cNvPr id="18" name="Rounded Rectangle 17"/>
           <p:cNvSpPr/>
           <p:nvPr/>
@@ -42032,49 +34885,6 @@
           </a:prstGeom>
           <a:solidFill>
             <a:srgbClr val="FFFFFF"/>
-          </a:solidFill>
-          <a:ln>
-            <a:noFill/>
-          </a:ln>
-        </p:spPr>
-        <p:style>
-          <a:lnRef idx="1">
-            <a:schemeClr val="accent1"/>
-          </a:lnRef>
-          <a:fillRef idx="3">
-            <a:schemeClr val="accent1"/>
-          </a:fillRef>
-          <a:effectRef idx="2">
-            <a:schemeClr val="accent1"/>
-          </a:effectRef>
-          <a:fontRef idx="minor">
-            <a:schemeClr val="lt1"/>
-          </a:fontRef>
-        </p:style>
-        <p:txBody>
-          <a:bodyPr rtlCol="0" anchor="ctr"/>
-          <a:lstStyle/>
-          <a:p>
-            <a:pPr algn="ctr"/>
-          </a:p>
-        </p:txBody>
-      </p:sp>
-      <p:sp>
-        <p:nvSpPr>
-          <p:cNvPr id="20" name="Rectangle 19"/>
-          <p:cNvSpPr/>
-          <p:nvPr/>
-        </p:nvSpPr>
-        <p:spPr>
-          <a:xfrm>
-            <a:off x="512064" y="1773936"/>
-            <a:ext cx="50292" cy="3776472"/>
-          </a:xfrm>
-          <a:prstGeom prst="rect">
-            <a:avLst/>
-          </a:prstGeom>
-          <a:solidFill>
-            <a:srgbClr val="C60016"/>
           </a:solidFill>
           <a:ln>
             <a:noFill/>
@@ -42342,62 +35152,6 @@
           </a:prstGeom>
         </p:spPr>
       </p:pic>
-      <p:sp>
-        <p:nvSpPr>
-          <p:cNvPr id="8" name="Rectangle 7"/>
-          <p:cNvSpPr/>
-          <p:nvPr/>
-        </p:nvSpPr>
-        <p:spPr>
-          <a:xfrm>
-            <a:off x="612648" y="6620256"/>
-            <a:ext cx="10972800" cy="16459"/>
-          </a:xfrm>
-          <a:prstGeom prst="rect">
-            <a:avLst/>
-          </a:prstGeom>
-          <a:solidFill>
-            <a:srgbClr val="FFBC00"/>
-          </a:solidFill>
-          <a:ln>
-            <a:noFill/>
-          </a:ln>
-        </p:spPr>
-        <p:style>
-          <a:lnRef idx="1">
-            <a:schemeClr val="accent1"/>
-          </a:lnRef>
-          <a:fillRef idx="3">
-            <a:schemeClr val="accent1"/>
-          </a:fillRef>
-          <a:effectRef idx="2">
-            <a:schemeClr val="accent1"/>
-          </a:effectRef>
-          <a:fontRef idx="minor">
-            <a:schemeClr val="lt1"/>
-          </a:fontRef>
-        </p:style>
-        <p:txBody>
-          <a:bodyPr rtlCol="0" anchor="ctr" wrap="square" lIns="0" rIns="0" tIns="0" bIns="0"/>
-          <a:lstStyle/>
-          <a:p>
-            <a:pPr algn="ctr">
-              <a:spcBef>
-                <a:spcPts val="0"/>
-              </a:spcBef>
-              <a:spcAft>
-                <a:spcPts val="300"/>
-              </a:spcAft>
-              <a:defRPr sz="1800" b="0">
-                <a:solidFill>
-                  <a:srgbClr val="1A1A1A"/>
-                </a:solidFill>
-                <a:latin typeface="Arial"/>
-              </a:defRPr>
-            </a:pPr>
-          </a:p>
-        </p:txBody>
-      </p:sp>
       <p:sp>
         <p:nvSpPr>
           <p:cNvPr id="9" name="TextBox 8"/>
@@ -42756,92 +35510,6 @@
       </p:sp>
       <p:sp>
         <p:nvSpPr>
-          <p:cNvPr id="18" name="Rectangle 17"/>
-          <p:cNvSpPr/>
-          <p:nvPr/>
-        </p:nvSpPr>
-        <p:spPr>
-          <a:xfrm>
-            <a:off x="0" y="0"/>
-            <a:ext cx="146304" cy="1645920"/>
-          </a:xfrm>
-          <a:prstGeom prst="rect">
-            <a:avLst/>
-          </a:prstGeom>
-          <a:solidFill>
-            <a:srgbClr val="C60016"/>
-          </a:solidFill>
-          <a:ln>
-            <a:noFill/>
-          </a:ln>
-        </p:spPr>
-        <p:style>
-          <a:lnRef idx="1">
-            <a:schemeClr val="accent1"/>
-          </a:lnRef>
-          <a:fillRef idx="3">
-            <a:schemeClr val="accent1"/>
-          </a:fillRef>
-          <a:effectRef idx="2">
-            <a:schemeClr val="accent1"/>
-          </a:effectRef>
-          <a:fontRef idx="minor">
-            <a:schemeClr val="lt1"/>
-          </a:fontRef>
-        </p:style>
-        <p:txBody>
-          <a:bodyPr rtlCol="0" anchor="ctr"/>
-          <a:lstStyle/>
-          <a:p>
-            <a:pPr algn="ctr"/>
-          </a:p>
-        </p:txBody>
-      </p:sp>
-      <p:sp>
-        <p:nvSpPr>
-          <p:cNvPr id="19" name="Rectangle 18"/>
-          <p:cNvSpPr/>
-          <p:nvPr/>
-        </p:nvSpPr>
-        <p:spPr>
-          <a:xfrm>
-            <a:off x="612648" y="1581912"/>
-            <a:ext cx="822960" cy="50292"/>
-          </a:xfrm>
-          <a:prstGeom prst="rect">
-            <a:avLst/>
-          </a:prstGeom>
-          <a:solidFill>
-            <a:srgbClr val="FFBC00"/>
-          </a:solidFill>
-          <a:ln>
-            <a:noFill/>
-          </a:ln>
-        </p:spPr>
-        <p:style>
-          <a:lnRef idx="1">
-            <a:schemeClr val="accent1"/>
-          </a:lnRef>
-          <a:fillRef idx="3">
-            <a:schemeClr val="accent1"/>
-          </a:fillRef>
-          <a:effectRef idx="2">
-            <a:schemeClr val="accent1"/>
-          </a:effectRef>
-          <a:fontRef idx="minor">
-            <a:schemeClr val="lt1"/>
-          </a:fontRef>
-        </p:style>
-        <p:txBody>
-          <a:bodyPr rtlCol="0" anchor="ctr"/>
-          <a:lstStyle/>
-          <a:p>
-            <a:pPr algn="ctr"/>
-          </a:p>
-        </p:txBody>
-      </p:sp>
-      <p:sp>
-        <p:nvSpPr>
           <p:cNvPr id="20" name="Rounded Rectangle 19"/>
           <p:cNvSpPr/>
           <p:nvPr/>
@@ -42903,49 +35571,6 @@
           </a:prstGeom>
           <a:solidFill>
             <a:srgbClr val="1A1512"/>
-          </a:solidFill>
-          <a:ln>
-            <a:noFill/>
-          </a:ln>
-        </p:spPr>
-        <p:style>
-          <a:lnRef idx="1">
-            <a:schemeClr val="accent1"/>
-          </a:lnRef>
-          <a:fillRef idx="3">
-            <a:schemeClr val="accent1"/>
-          </a:fillRef>
-          <a:effectRef idx="2">
-            <a:schemeClr val="accent1"/>
-          </a:effectRef>
-          <a:fontRef idx="minor">
-            <a:schemeClr val="lt1"/>
-          </a:fontRef>
-        </p:style>
-        <p:txBody>
-          <a:bodyPr rtlCol="0" anchor="ctr"/>
-          <a:lstStyle/>
-          <a:p>
-            <a:pPr algn="ctr"/>
-          </a:p>
-        </p:txBody>
-      </p:sp>
-      <p:sp>
-        <p:nvSpPr>
-          <p:cNvPr id="22" name="Rectangle 21"/>
-          <p:cNvSpPr/>
-          <p:nvPr/>
-        </p:nvSpPr>
-        <p:spPr>
-          <a:xfrm>
-            <a:off x="493776" y="1773936"/>
-            <a:ext cx="64008" cy="2240280"/>
-          </a:xfrm>
-          <a:prstGeom prst="rect">
-            <a:avLst/>
-          </a:prstGeom>
-          <a:solidFill>
-            <a:srgbClr val="FFBC00"/>
           </a:solidFill>
           <a:ln>
             <a:noFill/>
@@ -43341,62 +35966,6 @@
           </a:prstGeom>
         </p:spPr>
       </p:pic>
-      <p:sp>
-        <p:nvSpPr>
-          <p:cNvPr id="10" name="Rectangle 9"/>
-          <p:cNvSpPr/>
-          <p:nvPr/>
-        </p:nvSpPr>
-        <p:spPr>
-          <a:xfrm>
-            <a:off x="612648" y="6620256"/>
-            <a:ext cx="10972800" cy="16459"/>
-          </a:xfrm>
-          <a:prstGeom prst="rect">
-            <a:avLst/>
-          </a:prstGeom>
-          <a:solidFill>
-            <a:srgbClr val="FFBC00"/>
-          </a:solidFill>
-          <a:ln>
-            <a:noFill/>
-          </a:ln>
-        </p:spPr>
-        <p:style>
-          <a:lnRef idx="1">
-            <a:schemeClr val="accent1"/>
-          </a:lnRef>
-          <a:fillRef idx="3">
-            <a:schemeClr val="accent1"/>
-          </a:fillRef>
-          <a:effectRef idx="2">
-            <a:schemeClr val="accent1"/>
-          </a:effectRef>
-          <a:fontRef idx="minor">
-            <a:schemeClr val="lt1"/>
-          </a:fontRef>
-        </p:style>
-        <p:txBody>
-          <a:bodyPr rtlCol="0" anchor="ctr" wrap="square" lIns="0" rIns="0" tIns="0" bIns="0"/>
-          <a:lstStyle/>
-          <a:p>
-            <a:pPr algn="ctr">
-              <a:spcBef>
-                <a:spcPts val="0"/>
-              </a:spcBef>
-              <a:spcAft>
-                <a:spcPts val="300"/>
-              </a:spcAft>
-              <a:defRPr sz="1800" b="0">
-                <a:solidFill>
-                  <a:srgbClr val="1A1A1A"/>
-                </a:solidFill>
-                <a:latin typeface="Arial"/>
-              </a:defRPr>
-            </a:pPr>
-          </a:p>
-        </p:txBody>
-      </p:sp>
       <p:sp>
         <p:nvSpPr>
           <p:cNvPr id="11" name="TextBox 10"/>
@@ -43755,92 +36324,6 @@
       </p:sp>
       <p:sp>
         <p:nvSpPr>
-          <p:cNvPr id="22" name="Rectangle 21"/>
-          <p:cNvSpPr/>
-          <p:nvPr/>
-        </p:nvSpPr>
-        <p:spPr>
-          <a:xfrm>
-            <a:off x="0" y="0"/>
-            <a:ext cx="146304" cy="1645920"/>
-          </a:xfrm>
-          <a:prstGeom prst="rect">
-            <a:avLst/>
-          </a:prstGeom>
-          <a:solidFill>
-            <a:srgbClr val="C60016"/>
-          </a:solidFill>
-          <a:ln>
-            <a:noFill/>
-          </a:ln>
-        </p:spPr>
-        <p:style>
-          <a:lnRef idx="1">
-            <a:schemeClr val="accent1"/>
-          </a:lnRef>
-          <a:fillRef idx="3">
-            <a:schemeClr val="accent1"/>
-          </a:fillRef>
-          <a:effectRef idx="2">
-            <a:schemeClr val="accent1"/>
-          </a:effectRef>
-          <a:fontRef idx="minor">
-            <a:schemeClr val="lt1"/>
-          </a:fontRef>
-        </p:style>
-        <p:txBody>
-          <a:bodyPr rtlCol="0" anchor="ctr"/>
-          <a:lstStyle/>
-          <a:p>
-            <a:pPr algn="ctr"/>
-          </a:p>
-        </p:txBody>
-      </p:sp>
-      <p:sp>
-        <p:nvSpPr>
-          <p:cNvPr id="23" name="Rectangle 22"/>
-          <p:cNvSpPr/>
-          <p:nvPr/>
-        </p:nvSpPr>
-        <p:spPr>
-          <a:xfrm>
-            <a:off x="612648" y="1581912"/>
-            <a:ext cx="822960" cy="50292"/>
-          </a:xfrm>
-          <a:prstGeom prst="rect">
-            <a:avLst/>
-          </a:prstGeom>
-          <a:solidFill>
-            <a:srgbClr val="FFBC00"/>
-          </a:solidFill>
-          <a:ln>
-            <a:noFill/>
-          </a:ln>
-        </p:spPr>
-        <p:style>
-          <a:lnRef idx="1">
-            <a:schemeClr val="accent1"/>
-          </a:lnRef>
-          <a:fillRef idx="3">
-            <a:schemeClr val="accent1"/>
-          </a:fillRef>
-          <a:effectRef idx="2">
-            <a:schemeClr val="accent1"/>
-          </a:effectRef>
-          <a:fontRef idx="minor">
-            <a:schemeClr val="lt1"/>
-          </a:fontRef>
-        </p:style>
-        <p:txBody>
-          <a:bodyPr rtlCol="0" anchor="ctr"/>
-          <a:lstStyle/>
-          <a:p>
-            <a:pPr algn="ctr"/>
-          </a:p>
-        </p:txBody>
-      </p:sp>
-      <p:sp>
-        <p:nvSpPr>
           <p:cNvPr id="24" name="Rounded Rectangle 23"/>
           <p:cNvSpPr/>
           <p:nvPr/>
@@ -43931,49 +36414,6 @@
       </p:sp>
       <p:sp>
         <p:nvSpPr>
-          <p:cNvPr id="26" name="Rectangle 25"/>
-          <p:cNvSpPr/>
-          <p:nvPr/>
-        </p:nvSpPr>
-        <p:spPr>
-          <a:xfrm>
-            <a:off x="612648" y="1865376"/>
-            <a:ext cx="50292" cy="1901952"/>
-          </a:xfrm>
-          <a:prstGeom prst="rect">
-            <a:avLst/>
-          </a:prstGeom>
-          <a:solidFill>
-            <a:srgbClr val="C60016"/>
-          </a:solidFill>
-          <a:ln>
-            <a:noFill/>
-          </a:ln>
-        </p:spPr>
-        <p:style>
-          <a:lnRef idx="1">
-            <a:schemeClr val="accent1"/>
-          </a:lnRef>
-          <a:fillRef idx="3">
-            <a:schemeClr val="accent1"/>
-          </a:fillRef>
-          <a:effectRef idx="2">
-            <a:schemeClr val="accent1"/>
-          </a:effectRef>
-          <a:fontRef idx="minor">
-            <a:schemeClr val="lt1"/>
-          </a:fontRef>
-        </p:style>
-        <p:txBody>
-          <a:bodyPr rtlCol="0" anchor="ctr"/>
-          <a:lstStyle/>
-          <a:p>
-            <a:pPr algn="ctr"/>
-          </a:p>
-        </p:txBody>
-      </p:sp>
-      <p:sp>
-        <p:nvSpPr>
           <p:cNvPr id="27" name="Rounded Rectangle 26"/>
           <p:cNvSpPr/>
           <p:nvPr/>
@@ -44019,49 +36459,6 @@
       </p:sp>
       <p:sp>
         <p:nvSpPr>
-          <p:cNvPr id="28" name="Rectangle 27"/>
-          <p:cNvSpPr/>
-          <p:nvPr/>
-        </p:nvSpPr>
-        <p:spPr>
-          <a:xfrm>
-            <a:off x="6217920" y="1865376"/>
-            <a:ext cx="50292" cy="1901952"/>
-          </a:xfrm>
-          <a:prstGeom prst="rect">
-            <a:avLst/>
-          </a:prstGeom>
-          <a:solidFill>
-            <a:srgbClr val="FFBC00"/>
-          </a:solidFill>
-          <a:ln>
-            <a:noFill/>
-          </a:ln>
-        </p:spPr>
-        <p:style>
-          <a:lnRef idx="1">
-            <a:schemeClr val="accent1"/>
-          </a:lnRef>
-          <a:fillRef idx="3">
-            <a:schemeClr val="accent1"/>
-          </a:fillRef>
-          <a:effectRef idx="2">
-            <a:schemeClr val="accent1"/>
-          </a:effectRef>
-          <a:fontRef idx="minor">
-            <a:schemeClr val="lt1"/>
-          </a:fontRef>
-        </p:style>
-        <p:txBody>
-          <a:bodyPr rtlCol="0" anchor="ctr"/>
-          <a:lstStyle/>
-          <a:p>
-            <a:pPr algn="ctr"/>
-          </a:p>
-        </p:txBody>
-      </p:sp>
-      <p:sp>
-        <p:nvSpPr>
           <p:cNvPr id="29" name="Rounded Rectangle 28"/>
           <p:cNvSpPr/>
           <p:nvPr/>
@@ -44107,49 +36504,6 @@
       </p:sp>
       <p:sp>
         <p:nvSpPr>
-          <p:cNvPr id="30" name="Rectangle 29"/>
-          <p:cNvSpPr/>
-          <p:nvPr/>
-        </p:nvSpPr>
-        <p:spPr>
-          <a:xfrm>
-            <a:off x="612648" y="3895344"/>
-            <a:ext cx="50292" cy="1901952"/>
-          </a:xfrm>
-          <a:prstGeom prst="rect">
-            <a:avLst/>
-          </a:prstGeom>
-          <a:solidFill>
-            <a:srgbClr val="FFBC00"/>
-          </a:solidFill>
-          <a:ln>
-            <a:noFill/>
-          </a:ln>
-        </p:spPr>
-        <p:style>
-          <a:lnRef idx="1">
-            <a:schemeClr val="accent1"/>
-          </a:lnRef>
-          <a:fillRef idx="3">
-            <a:schemeClr val="accent1"/>
-          </a:fillRef>
-          <a:effectRef idx="2">
-            <a:schemeClr val="accent1"/>
-          </a:effectRef>
-          <a:fontRef idx="minor">
-            <a:schemeClr val="lt1"/>
-          </a:fontRef>
-        </p:style>
-        <p:txBody>
-          <a:bodyPr rtlCol="0" anchor="ctr"/>
-          <a:lstStyle/>
-          <a:p>
-            <a:pPr algn="ctr"/>
-          </a:p>
-        </p:txBody>
-      </p:sp>
-      <p:sp>
-        <p:nvSpPr>
           <p:cNvPr id="31" name="Rounded Rectangle 30"/>
           <p:cNvSpPr/>
           <p:nvPr/>
@@ -44166,49 +36520,6 @@
           </a:prstGeom>
           <a:solidFill>
             <a:srgbClr val="FFFFFF"/>
-          </a:solidFill>
-          <a:ln>
-            <a:noFill/>
-          </a:ln>
-        </p:spPr>
-        <p:style>
-          <a:lnRef idx="1">
-            <a:schemeClr val="accent1"/>
-          </a:lnRef>
-          <a:fillRef idx="3">
-            <a:schemeClr val="accent1"/>
-          </a:fillRef>
-          <a:effectRef idx="2">
-            <a:schemeClr val="accent1"/>
-          </a:effectRef>
-          <a:fontRef idx="minor">
-            <a:schemeClr val="lt1"/>
-          </a:fontRef>
-        </p:style>
-        <p:txBody>
-          <a:bodyPr rtlCol="0" anchor="ctr"/>
-          <a:lstStyle/>
-          <a:p>
-            <a:pPr algn="ctr"/>
-          </a:p>
-        </p:txBody>
-      </p:sp>
-      <p:sp>
-        <p:nvSpPr>
-          <p:cNvPr id="32" name="Rectangle 31"/>
-          <p:cNvSpPr/>
-          <p:nvPr/>
-        </p:nvSpPr>
-        <p:spPr>
-          <a:xfrm>
-            <a:off x="6217920" y="3895344"/>
-            <a:ext cx="50292" cy="1901952"/>
-          </a:xfrm>
-          <a:prstGeom prst="rect">
-            <a:avLst/>
-          </a:prstGeom>
-          <a:solidFill>
-            <a:srgbClr val="C60016"/>
           </a:solidFill>
           <a:ln>
             <a:noFill/>
@@ -44868,62 +37179,6 @@
           </a:prstGeom>
         </p:spPr>
       </p:pic>
-      <p:sp>
-        <p:nvSpPr>
-          <p:cNvPr id="14" name="Rectangle 13"/>
-          <p:cNvSpPr/>
-          <p:nvPr/>
-        </p:nvSpPr>
-        <p:spPr>
-          <a:xfrm>
-            <a:off x="612648" y="6620256"/>
-            <a:ext cx="10972800" cy="16459"/>
-          </a:xfrm>
-          <a:prstGeom prst="rect">
-            <a:avLst/>
-          </a:prstGeom>
-          <a:solidFill>
-            <a:srgbClr val="FFBC00"/>
-          </a:solidFill>
-          <a:ln>
-            <a:noFill/>
-          </a:ln>
-        </p:spPr>
-        <p:style>
-          <a:lnRef idx="1">
-            <a:schemeClr val="accent1"/>
-          </a:lnRef>
-          <a:fillRef idx="3">
-            <a:schemeClr val="accent1"/>
-          </a:fillRef>
-          <a:effectRef idx="2">
-            <a:schemeClr val="accent1"/>
-          </a:effectRef>
-          <a:fontRef idx="minor">
-            <a:schemeClr val="lt1"/>
-          </a:fontRef>
-        </p:style>
-        <p:txBody>
-          <a:bodyPr rtlCol="0" anchor="ctr" wrap="square" lIns="0" rIns="0" tIns="0" bIns="0"/>
-          <a:lstStyle/>
-          <a:p>
-            <a:pPr algn="ctr">
-              <a:spcBef>
-                <a:spcPts val="0"/>
-              </a:spcBef>
-              <a:spcAft>
-                <a:spcPts val="300"/>
-              </a:spcAft>
-              <a:defRPr sz="1800" b="0">
-                <a:solidFill>
-                  <a:srgbClr val="1A1A1A"/>
-                </a:solidFill>
-                <a:latin typeface="Arial"/>
-              </a:defRPr>
-            </a:pPr>
-          </a:p>
-        </p:txBody>
-      </p:sp>
       <p:sp>
         <p:nvSpPr>
           <p:cNvPr id="15" name="TextBox 14"/>
@@ -45282,92 +37537,6 @@
       </p:sp>
       <p:sp>
         <p:nvSpPr>
-          <p:cNvPr id="22" name="Rectangle 21"/>
-          <p:cNvSpPr/>
-          <p:nvPr/>
-        </p:nvSpPr>
-        <p:spPr>
-          <a:xfrm>
-            <a:off x="0" y="0"/>
-            <a:ext cx="146304" cy="1645920"/>
-          </a:xfrm>
-          <a:prstGeom prst="rect">
-            <a:avLst/>
-          </a:prstGeom>
-          <a:solidFill>
-            <a:srgbClr val="C60016"/>
-          </a:solidFill>
-          <a:ln>
-            <a:noFill/>
-          </a:ln>
-        </p:spPr>
-        <p:style>
-          <a:lnRef idx="1">
-            <a:schemeClr val="accent1"/>
-          </a:lnRef>
-          <a:fillRef idx="3">
-            <a:schemeClr val="accent1"/>
-          </a:fillRef>
-          <a:effectRef idx="2">
-            <a:schemeClr val="accent1"/>
-          </a:effectRef>
-          <a:fontRef idx="minor">
-            <a:schemeClr val="lt1"/>
-          </a:fontRef>
-        </p:style>
-        <p:txBody>
-          <a:bodyPr rtlCol="0" anchor="ctr"/>
-          <a:lstStyle/>
-          <a:p>
-            <a:pPr algn="ctr"/>
-          </a:p>
-        </p:txBody>
-      </p:sp>
-      <p:sp>
-        <p:nvSpPr>
-          <p:cNvPr id="23" name="Rectangle 22"/>
-          <p:cNvSpPr/>
-          <p:nvPr/>
-        </p:nvSpPr>
-        <p:spPr>
-          <a:xfrm>
-            <a:off x="612648" y="1581912"/>
-            <a:ext cx="822960" cy="50292"/>
-          </a:xfrm>
-          <a:prstGeom prst="rect">
-            <a:avLst/>
-          </a:prstGeom>
-          <a:solidFill>
-            <a:srgbClr val="FFBC00"/>
-          </a:solidFill>
-          <a:ln>
-            <a:noFill/>
-          </a:ln>
-        </p:spPr>
-        <p:style>
-          <a:lnRef idx="1">
-            <a:schemeClr val="accent1"/>
-          </a:lnRef>
-          <a:fillRef idx="3">
-            <a:schemeClr val="accent1"/>
-          </a:fillRef>
-          <a:effectRef idx="2">
-            <a:schemeClr val="accent1"/>
-          </a:effectRef>
-          <a:fontRef idx="minor">
-            <a:schemeClr val="lt1"/>
-          </a:fontRef>
-        </p:style>
-        <p:txBody>
-          <a:bodyPr rtlCol="0" anchor="ctr"/>
-          <a:lstStyle/>
-          <a:p>
-            <a:pPr algn="ctr"/>
-          </a:p>
-        </p:txBody>
-      </p:sp>
-      <p:sp>
-        <p:nvSpPr>
           <p:cNvPr id="24" name="Rounded Rectangle 23"/>
           <p:cNvSpPr/>
           <p:nvPr/>
@@ -45458,49 +37627,6 @@
       </p:sp>
       <p:sp>
         <p:nvSpPr>
-          <p:cNvPr id="26" name="Rectangle 25"/>
-          <p:cNvSpPr/>
-          <p:nvPr/>
-        </p:nvSpPr>
-        <p:spPr>
-          <a:xfrm>
-            <a:off x="612648" y="1865376"/>
-            <a:ext cx="50292" cy="1901952"/>
-          </a:xfrm>
-          <a:prstGeom prst="rect">
-            <a:avLst/>
-          </a:prstGeom>
-          <a:solidFill>
-            <a:srgbClr val="C60016"/>
-          </a:solidFill>
-          <a:ln>
-            <a:noFill/>
-          </a:ln>
-        </p:spPr>
-        <p:style>
-          <a:lnRef idx="1">
-            <a:schemeClr val="accent1"/>
-          </a:lnRef>
-          <a:fillRef idx="3">
-            <a:schemeClr val="accent1"/>
-          </a:fillRef>
-          <a:effectRef idx="2">
-            <a:schemeClr val="accent1"/>
-          </a:effectRef>
-          <a:fontRef idx="minor">
-            <a:schemeClr val="lt1"/>
-          </a:fontRef>
-        </p:style>
-        <p:txBody>
-          <a:bodyPr rtlCol="0" anchor="ctr"/>
-          <a:lstStyle/>
-          <a:p>
-            <a:pPr algn="ctr"/>
-          </a:p>
-        </p:txBody>
-      </p:sp>
-      <p:sp>
-        <p:nvSpPr>
           <p:cNvPr id="27" name="Rounded Rectangle 26"/>
           <p:cNvSpPr/>
           <p:nvPr/>
@@ -45546,49 +37672,6 @@
       </p:sp>
       <p:sp>
         <p:nvSpPr>
-          <p:cNvPr id="28" name="Rectangle 27"/>
-          <p:cNvSpPr/>
-          <p:nvPr/>
-        </p:nvSpPr>
-        <p:spPr>
-          <a:xfrm>
-            <a:off x="6217920" y="1865376"/>
-            <a:ext cx="50292" cy="1901952"/>
-          </a:xfrm>
-          <a:prstGeom prst="rect">
-            <a:avLst/>
-          </a:prstGeom>
-          <a:solidFill>
-            <a:srgbClr val="FFBC00"/>
-          </a:solidFill>
-          <a:ln>
-            <a:noFill/>
-          </a:ln>
-        </p:spPr>
-        <p:style>
-          <a:lnRef idx="1">
-            <a:schemeClr val="accent1"/>
-          </a:lnRef>
-          <a:fillRef idx="3">
-            <a:schemeClr val="accent1"/>
-          </a:fillRef>
-          <a:effectRef idx="2">
-            <a:schemeClr val="accent1"/>
-          </a:effectRef>
-          <a:fontRef idx="minor">
-            <a:schemeClr val="lt1"/>
-          </a:fontRef>
-        </p:style>
-        <p:txBody>
-          <a:bodyPr rtlCol="0" anchor="ctr"/>
-          <a:lstStyle/>
-          <a:p>
-            <a:pPr algn="ctr"/>
-          </a:p>
-        </p:txBody>
-      </p:sp>
-      <p:sp>
-        <p:nvSpPr>
           <p:cNvPr id="29" name="Rounded Rectangle 28"/>
           <p:cNvSpPr/>
           <p:nvPr/>
@@ -45634,49 +37717,6 @@
       </p:sp>
       <p:sp>
         <p:nvSpPr>
-          <p:cNvPr id="30" name="Rectangle 29"/>
-          <p:cNvSpPr/>
-          <p:nvPr/>
-        </p:nvSpPr>
-        <p:spPr>
-          <a:xfrm>
-            <a:off x="612648" y="3895344"/>
-            <a:ext cx="50292" cy="1901952"/>
-          </a:xfrm>
-          <a:prstGeom prst="rect">
-            <a:avLst/>
-          </a:prstGeom>
-          <a:solidFill>
-            <a:srgbClr val="FFBC00"/>
-          </a:solidFill>
-          <a:ln>
-            <a:noFill/>
-          </a:ln>
-        </p:spPr>
-        <p:style>
-          <a:lnRef idx="1">
-            <a:schemeClr val="accent1"/>
-          </a:lnRef>
-          <a:fillRef idx="3">
-            <a:schemeClr val="accent1"/>
-          </a:fillRef>
-          <a:effectRef idx="2">
-            <a:schemeClr val="accent1"/>
-          </a:effectRef>
-          <a:fontRef idx="minor">
-            <a:schemeClr val="lt1"/>
-          </a:fontRef>
-        </p:style>
-        <p:txBody>
-          <a:bodyPr rtlCol="0" anchor="ctr"/>
-          <a:lstStyle/>
-          <a:p>
-            <a:pPr algn="ctr"/>
-          </a:p>
-        </p:txBody>
-      </p:sp>
-      <p:sp>
-        <p:nvSpPr>
           <p:cNvPr id="31" name="Rounded Rectangle 30"/>
           <p:cNvSpPr/>
           <p:nvPr/>
@@ -45693,49 +37733,6 @@
           </a:prstGeom>
           <a:solidFill>
             <a:srgbClr val="FFFFFF"/>
-          </a:solidFill>
-          <a:ln>
-            <a:noFill/>
-          </a:ln>
-        </p:spPr>
-        <p:style>
-          <a:lnRef idx="1">
-            <a:schemeClr val="accent1"/>
-          </a:lnRef>
-          <a:fillRef idx="3">
-            <a:schemeClr val="accent1"/>
-          </a:fillRef>
-          <a:effectRef idx="2">
-            <a:schemeClr val="accent1"/>
-          </a:effectRef>
-          <a:fontRef idx="minor">
-            <a:schemeClr val="lt1"/>
-          </a:fontRef>
-        </p:style>
-        <p:txBody>
-          <a:bodyPr rtlCol="0" anchor="ctr"/>
-          <a:lstStyle/>
-          <a:p>
-            <a:pPr algn="ctr"/>
-          </a:p>
-        </p:txBody>
-      </p:sp>
-      <p:sp>
-        <p:nvSpPr>
-          <p:cNvPr id="32" name="Rectangle 31"/>
-          <p:cNvSpPr/>
-          <p:nvPr/>
-        </p:nvSpPr>
-        <p:spPr>
-          <a:xfrm>
-            <a:off x="6217920" y="3895344"/>
-            <a:ext cx="50292" cy="1901952"/>
-          </a:xfrm>
-          <a:prstGeom prst="rect">
-            <a:avLst/>
-          </a:prstGeom>
-          <a:solidFill>
-            <a:srgbClr val="C60016"/>
           </a:solidFill>
           <a:ln>
             <a:noFill/>
@@ -46395,62 +38392,6 @@
           </a:prstGeom>
         </p:spPr>
       </p:pic>
-      <p:sp>
-        <p:nvSpPr>
-          <p:cNvPr id="14" name="Rectangle 13"/>
-          <p:cNvSpPr/>
-          <p:nvPr/>
-        </p:nvSpPr>
-        <p:spPr>
-          <a:xfrm>
-            <a:off x="612648" y="6620256"/>
-            <a:ext cx="10972800" cy="16459"/>
-          </a:xfrm>
-          <a:prstGeom prst="rect">
-            <a:avLst/>
-          </a:prstGeom>
-          <a:solidFill>
-            <a:srgbClr val="FFBC00"/>
-          </a:solidFill>
-          <a:ln>
-            <a:noFill/>
-          </a:ln>
-        </p:spPr>
-        <p:style>
-          <a:lnRef idx="1">
-            <a:schemeClr val="accent1"/>
-          </a:lnRef>
-          <a:fillRef idx="3">
-            <a:schemeClr val="accent1"/>
-          </a:fillRef>
-          <a:effectRef idx="2">
-            <a:schemeClr val="accent1"/>
-          </a:effectRef>
-          <a:fontRef idx="minor">
-            <a:schemeClr val="lt1"/>
-          </a:fontRef>
-        </p:style>
-        <p:txBody>
-          <a:bodyPr rtlCol="0" anchor="ctr" wrap="square" lIns="0" rIns="0" tIns="0" bIns="0"/>
-          <a:lstStyle/>
-          <a:p>
-            <a:pPr algn="ctr">
-              <a:spcBef>
-                <a:spcPts val="0"/>
-              </a:spcBef>
-              <a:spcAft>
-                <a:spcPts val="300"/>
-              </a:spcAft>
-              <a:defRPr sz="1800" b="0">
-                <a:solidFill>
-                  <a:srgbClr val="1A1A1A"/>
-                </a:solidFill>
-                <a:latin typeface="Arial"/>
-              </a:defRPr>
-            </a:pPr>
-          </a:p>
-        </p:txBody>
-      </p:sp>
       <p:sp>
         <p:nvSpPr>
           <p:cNvPr id="15" name="TextBox 14"/>
@@ -46816,92 +38757,6 @@
       </p:sp>
       <p:sp>
         <p:nvSpPr>
-          <p:cNvPr id="18" name="Rectangle 17"/>
-          <p:cNvSpPr/>
-          <p:nvPr/>
-        </p:nvSpPr>
-        <p:spPr>
-          <a:xfrm>
-            <a:off x="0" y="0"/>
-            <a:ext cx="146304" cy="1645920"/>
-          </a:xfrm>
-          <a:prstGeom prst="rect">
-            <a:avLst/>
-          </a:prstGeom>
-          <a:solidFill>
-            <a:srgbClr val="C60016"/>
-          </a:solidFill>
-          <a:ln>
-            <a:noFill/>
-          </a:ln>
-        </p:spPr>
-        <p:style>
-          <a:lnRef idx="1">
-            <a:schemeClr val="accent1"/>
-          </a:lnRef>
-          <a:fillRef idx="3">
-            <a:schemeClr val="accent1"/>
-          </a:fillRef>
-          <a:effectRef idx="2">
-            <a:schemeClr val="accent1"/>
-          </a:effectRef>
-          <a:fontRef idx="minor">
-            <a:schemeClr val="lt1"/>
-          </a:fontRef>
-        </p:style>
-        <p:txBody>
-          <a:bodyPr rtlCol="0" anchor="ctr"/>
-          <a:lstStyle/>
-          <a:p>
-            <a:pPr algn="ctr"/>
-          </a:p>
-        </p:txBody>
-      </p:sp>
-      <p:sp>
-        <p:nvSpPr>
-          <p:cNvPr id="19" name="Rectangle 18"/>
-          <p:cNvSpPr/>
-          <p:nvPr/>
-        </p:nvSpPr>
-        <p:spPr>
-          <a:xfrm>
-            <a:off x="612648" y="1581912"/>
-            <a:ext cx="822960" cy="50292"/>
-          </a:xfrm>
-          <a:prstGeom prst="rect">
-            <a:avLst/>
-          </a:prstGeom>
-          <a:solidFill>
-            <a:srgbClr val="FFBC00"/>
-          </a:solidFill>
-          <a:ln>
-            <a:noFill/>
-          </a:ln>
-        </p:spPr>
-        <p:style>
-          <a:lnRef idx="1">
-            <a:schemeClr val="accent1"/>
-          </a:lnRef>
-          <a:fillRef idx="3">
-            <a:schemeClr val="accent1"/>
-          </a:fillRef>
-          <a:effectRef idx="2">
-            <a:schemeClr val="accent1"/>
-          </a:effectRef>
-          <a:fontRef idx="minor">
-            <a:schemeClr val="lt1"/>
-          </a:fontRef>
-        </p:style>
-        <p:txBody>
-          <a:bodyPr rtlCol="0" anchor="ctr"/>
-          <a:lstStyle/>
-          <a:p>
-            <a:pPr algn="ctr"/>
-          </a:p>
-        </p:txBody>
-      </p:sp>
-      <p:sp>
-        <p:nvSpPr>
           <p:cNvPr id="20" name="Rounded Rectangle 19"/>
           <p:cNvSpPr/>
           <p:nvPr/>
@@ -47303,62 +39158,6 @@
           </a:prstGeom>
         </p:spPr>
       </p:pic>
-      <p:sp>
-        <p:nvSpPr>
-          <p:cNvPr id="10" name="Rectangle 9"/>
-          <p:cNvSpPr/>
-          <p:nvPr/>
-        </p:nvSpPr>
-        <p:spPr>
-          <a:xfrm>
-            <a:off x="612648" y="6620256"/>
-            <a:ext cx="10972800" cy="16459"/>
-          </a:xfrm>
-          <a:prstGeom prst="rect">
-            <a:avLst/>
-          </a:prstGeom>
-          <a:solidFill>
-            <a:srgbClr val="FFBC00"/>
-          </a:solidFill>
-          <a:ln>
-            <a:noFill/>
-          </a:ln>
-        </p:spPr>
-        <p:style>
-          <a:lnRef idx="1">
-            <a:schemeClr val="accent1"/>
-          </a:lnRef>
-          <a:fillRef idx="3">
-            <a:schemeClr val="accent1"/>
-          </a:fillRef>
-          <a:effectRef idx="2">
-            <a:schemeClr val="accent1"/>
-          </a:effectRef>
-          <a:fontRef idx="minor">
-            <a:schemeClr val="lt1"/>
-          </a:fontRef>
-        </p:style>
-        <p:txBody>
-          <a:bodyPr rtlCol="0" anchor="ctr" wrap="square" lIns="0" rIns="0" tIns="0" bIns="0"/>
-          <a:lstStyle/>
-          <a:p>
-            <a:pPr algn="ctr">
-              <a:spcBef>
-                <a:spcPts val="0"/>
-              </a:spcBef>
-              <a:spcAft>
-                <a:spcPts val="300"/>
-              </a:spcAft>
-              <a:defRPr sz="1800" b="0">
-                <a:solidFill>
-                  <a:srgbClr val="1A1A1A"/>
-                </a:solidFill>
-                <a:latin typeface="Arial"/>
-              </a:defRPr>
-            </a:pPr>
-          </a:p>
-        </p:txBody>
-      </p:sp>
       <p:sp>
         <p:nvSpPr>
           <p:cNvPr id="11" name="TextBox 10"/>
@@ -47722,92 +39521,6 @@
       </p:sp>
       <p:sp>
         <p:nvSpPr>
-          <p:cNvPr id="16" name="Rectangle 15"/>
-          <p:cNvSpPr/>
-          <p:nvPr/>
-        </p:nvSpPr>
-        <p:spPr>
-          <a:xfrm>
-            <a:off x="0" y="0"/>
-            <a:ext cx="146304" cy="1645920"/>
-          </a:xfrm>
-          <a:prstGeom prst="rect">
-            <a:avLst/>
-          </a:prstGeom>
-          <a:solidFill>
-            <a:srgbClr val="C60016"/>
-          </a:solidFill>
-          <a:ln>
-            <a:noFill/>
-          </a:ln>
-        </p:spPr>
-        <p:style>
-          <a:lnRef idx="1">
-            <a:schemeClr val="accent1"/>
-          </a:lnRef>
-          <a:fillRef idx="3">
-            <a:schemeClr val="accent1"/>
-          </a:fillRef>
-          <a:effectRef idx="2">
-            <a:schemeClr val="accent1"/>
-          </a:effectRef>
-          <a:fontRef idx="minor">
-            <a:schemeClr val="lt1"/>
-          </a:fontRef>
-        </p:style>
-        <p:txBody>
-          <a:bodyPr rtlCol="0" anchor="ctr"/>
-          <a:lstStyle/>
-          <a:p>
-            <a:pPr algn="ctr"/>
-          </a:p>
-        </p:txBody>
-      </p:sp>
-      <p:sp>
-        <p:nvSpPr>
-          <p:cNvPr id="17" name="Rectangle 16"/>
-          <p:cNvSpPr/>
-          <p:nvPr/>
-        </p:nvSpPr>
-        <p:spPr>
-          <a:xfrm>
-            <a:off x="612648" y="1581912"/>
-            <a:ext cx="822960" cy="50292"/>
-          </a:xfrm>
-          <a:prstGeom prst="rect">
-            <a:avLst/>
-          </a:prstGeom>
-          <a:solidFill>
-            <a:srgbClr val="FFBC00"/>
-          </a:solidFill>
-          <a:ln>
-            <a:noFill/>
-          </a:ln>
-        </p:spPr>
-        <p:style>
-          <a:lnRef idx="1">
-            <a:schemeClr val="accent1"/>
-          </a:lnRef>
-          <a:fillRef idx="3">
-            <a:schemeClr val="accent1"/>
-          </a:fillRef>
-          <a:effectRef idx="2">
-            <a:schemeClr val="accent1"/>
-          </a:effectRef>
-          <a:fontRef idx="minor">
-            <a:schemeClr val="lt1"/>
-          </a:fontRef>
-        </p:style>
-        <p:txBody>
-          <a:bodyPr rtlCol="0" anchor="ctr"/>
-          <a:lstStyle/>
-          <a:p>
-            <a:pPr algn="ctr"/>
-          </a:p>
-        </p:txBody>
-      </p:sp>
-      <p:sp>
-        <p:nvSpPr>
           <p:cNvPr id="18" name="Rounded Rectangle 17"/>
           <p:cNvSpPr/>
           <p:nvPr/>
@@ -47869,49 +39582,6 @@
           </a:prstGeom>
           <a:solidFill>
             <a:srgbClr val="FFFFFF"/>
-          </a:solidFill>
-          <a:ln>
-            <a:noFill/>
-          </a:ln>
-        </p:spPr>
-        <p:style>
-          <a:lnRef idx="1">
-            <a:schemeClr val="accent1"/>
-          </a:lnRef>
-          <a:fillRef idx="3">
-            <a:schemeClr val="accent1"/>
-          </a:fillRef>
-          <a:effectRef idx="2">
-            <a:schemeClr val="accent1"/>
-          </a:effectRef>
-          <a:fontRef idx="minor">
-            <a:schemeClr val="lt1"/>
-          </a:fontRef>
-        </p:style>
-        <p:txBody>
-          <a:bodyPr rtlCol="0" anchor="ctr"/>
-          <a:lstStyle/>
-          <a:p>
-            <a:pPr algn="ctr"/>
-          </a:p>
-        </p:txBody>
-      </p:sp>
-      <p:sp>
-        <p:nvSpPr>
-          <p:cNvPr id="20" name="Rectangle 19"/>
-          <p:cNvSpPr/>
-          <p:nvPr/>
-        </p:nvSpPr>
-        <p:spPr>
-          <a:xfrm>
-            <a:off x="512064" y="1700784"/>
-            <a:ext cx="50292" cy="4142232"/>
-          </a:xfrm>
-          <a:prstGeom prst="rect">
-            <a:avLst/>
-          </a:prstGeom>
-          <a:solidFill>
-            <a:srgbClr val="C60016"/>
           </a:solidFill>
           <a:ln>
             <a:noFill/>
@@ -48179,62 +39849,6 @@
           </a:prstGeom>
         </p:spPr>
       </p:pic>
-      <p:sp>
-        <p:nvSpPr>
-          <p:cNvPr id="8" name="Rectangle 7"/>
-          <p:cNvSpPr/>
-          <p:nvPr/>
-        </p:nvSpPr>
-        <p:spPr>
-          <a:xfrm>
-            <a:off x="612648" y="6620256"/>
-            <a:ext cx="10972800" cy="16459"/>
-          </a:xfrm>
-          <a:prstGeom prst="rect">
-            <a:avLst/>
-          </a:prstGeom>
-          <a:solidFill>
-            <a:srgbClr val="FFBC00"/>
-          </a:solidFill>
-          <a:ln>
-            <a:noFill/>
-          </a:ln>
-        </p:spPr>
-        <p:style>
-          <a:lnRef idx="1">
-            <a:schemeClr val="accent1"/>
-          </a:lnRef>
-          <a:fillRef idx="3">
-            <a:schemeClr val="accent1"/>
-          </a:fillRef>
-          <a:effectRef idx="2">
-            <a:schemeClr val="accent1"/>
-          </a:effectRef>
-          <a:fontRef idx="minor">
-            <a:schemeClr val="lt1"/>
-          </a:fontRef>
-        </p:style>
-        <p:txBody>
-          <a:bodyPr rtlCol="0" anchor="ctr" wrap="square" lIns="0" rIns="0" tIns="0" bIns="0"/>
-          <a:lstStyle/>
-          <a:p>
-            <a:pPr algn="ctr">
-              <a:spcBef>
-                <a:spcPts val="0"/>
-              </a:spcBef>
-              <a:spcAft>
-                <a:spcPts val="300"/>
-              </a:spcAft>
-              <a:defRPr sz="1800" b="0">
-                <a:solidFill>
-                  <a:srgbClr val="1A1A1A"/>
-                </a:solidFill>
-                <a:latin typeface="Arial"/>
-              </a:defRPr>
-            </a:pPr>
-          </a:p>
-        </p:txBody>
-      </p:sp>
       <p:sp>
         <p:nvSpPr>
           <p:cNvPr id="9" name="TextBox 8"/>
@@ -48593,92 +40207,6 @@
       </p:sp>
       <p:sp>
         <p:nvSpPr>
-          <p:cNvPr id="16" name="Rectangle 15"/>
-          <p:cNvSpPr/>
-          <p:nvPr/>
-        </p:nvSpPr>
-        <p:spPr>
-          <a:xfrm>
-            <a:off x="0" y="0"/>
-            <a:ext cx="146304" cy="1645920"/>
-          </a:xfrm>
-          <a:prstGeom prst="rect">
-            <a:avLst/>
-          </a:prstGeom>
-          <a:solidFill>
-            <a:srgbClr val="C60016"/>
-          </a:solidFill>
-          <a:ln>
-            <a:noFill/>
-          </a:ln>
-        </p:spPr>
-        <p:style>
-          <a:lnRef idx="1">
-            <a:schemeClr val="accent1"/>
-          </a:lnRef>
-          <a:fillRef idx="3">
-            <a:schemeClr val="accent1"/>
-          </a:fillRef>
-          <a:effectRef idx="2">
-            <a:schemeClr val="accent1"/>
-          </a:effectRef>
-          <a:fontRef idx="minor">
-            <a:schemeClr val="lt1"/>
-          </a:fontRef>
-        </p:style>
-        <p:txBody>
-          <a:bodyPr rtlCol="0" anchor="ctr"/>
-          <a:lstStyle/>
-          <a:p>
-            <a:pPr algn="ctr"/>
-          </a:p>
-        </p:txBody>
-      </p:sp>
-      <p:sp>
-        <p:nvSpPr>
-          <p:cNvPr id="17" name="Rectangle 16"/>
-          <p:cNvSpPr/>
-          <p:nvPr/>
-        </p:nvSpPr>
-        <p:spPr>
-          <a:xfrm>
-            <a:off x="612648" y="1581912"/>
-            <a:ext cx="822960" cy="50292"/>
-          </a:xfrm>
-          <a:prstGeom prst="rect">
-            <a:avLst/>
-          </a:prstGeom>
-          <a:solidFill>
-            <a:srgbClr val="FFBC00"/>
-          </a:solidFill>
-          <a:ln>
-            <a:noFill/>
-          </a:ln>
-        </p:spPr>
-        <p:style>
-          <a:lnRef idx="1">
-            <a:schemeClr val="accent1"/>
-          </a:lnRef>
-          <a:fillRef idx="3">
-            <a:schemeClr val="accent1"/>
-          </a:fillRef>
-          <a:effectRef idx="2">
-            <a:schemeClr val="accent1"/>
-          </a:effectRef>
-          <a:fontRef idx="minor">
-            <a:schemeClr val="lt1"/>
-          </a:fontRef>
-        </p:style>
-        <p:txBody>
-          <a:bodyPr rtlCol="0" anchor="ctr"/>
-          <a:lstStyle/>
-          <a:p>
-            <a:pPr algn="ctr"/>
-          </a:p>
-        </p:txBody>
-      </p:sp>
-      <p:sp>
-        <p:nvSpPr>
           <p:cNvPr id="18" name="Rounded Rectangle 17"/>
           <p:cNvSpPr/>
           <p:nvPr/>
@@ -48740,49 +40268,6 @@
           </a:prstGeom>
           <a:solidFill>
             <a:srgbClr val="FFFFFF"/>
-          </a:solidFill>
-          <a:ln>
-            <a:noFill/>
-          </a:ln>
-        </p:spPr>
-        <p:style>
-          <a:lnRef idx="1">
-            <a:schemeClr val="accent1"/>
-          </a:lnRef>
-          <a:fillRef idx="3">
-            <a:schemeClr val="accent1"/>
-          </a:fillRef>
-          <a:effectRef idx="2">
-            <a:schemeClr val="accent1"/>
-          </a:effectRef>
-          <a:fontRef idx="minor">
-            <a:schemeClr val="lt1"/>
-          </a:fontRef>
-        </p:style>
-        <p:txBody>
-          <a:bodyPr rtlCol="0" anchor="ctr"/>
-          <a:lstStyle/>
-          <a:p>
-            <a:pPr algn="ctr"/>
-          </a:p>
-        </p:txBody>
-      </p:sp>
-      <p:sp>
-        <p:nvSpPr>
-          <p:cNvPr id="20" name="Rectangle 19"/>
-          <p:cNvSpPr/>
-          <p:nvPr/>
-        </p:nvSpPr>
-        <p:spPr>
-          <a:xfrm>
-            <a:off x="512064" y="1700784"/>
-            <a:ext cx="50292" cy="4142232"/>
-          </a:xfrm>
-          <a:prstGeom prst="rect">
-            <a:avLst/>
-          </a:prstGeom>
-          <a:solidFill>
-            <a:srgbClr val="C60016"/>
           </a:solidFill>
           <a:ln>
             <a:noFill/>
@@ -49050,62 +40535,6 @@
           </a:prstGeom>
         </p:spPr>
       </p:pic>
-      <p:sp>
-        <p:nvSpPr>
-          <p:cNvPr id="8" name="Rectangle 7"/>
-          <p:cNvSpPr/>
-          <p:nvPr/>
-        </p:nvSpPr>
-        <p:spPr>
-          <a:xfrm>
-            <a:off x="612648" y="6620256"/>
-            <a:ext cx="10972800" cy="16459"/>
-          </a:xfrm>
-          <a:prstGeom prst="rect">
-            <a:avLst/>
-          </a:prstGeom>
-          <a:solidFill>
-            <a:srgbClr val="FFBC00"/>
-          </a:solidFill>
-          <a:ln>
-            <a:noFill/>
-          </a:ln>
-        </p:spPr>
-        <p:style>
-          <a:lnRef idx="1">
-            <a:schemeClr val="accent1"/>
-          </a:lnRef>
-          <a:fillRef idx="3">
-            <a:schemeClr val="accent1"/>
-          </a:fillRef>
-          <a:effectRef idx="2">
-            <a:schemeClr val="accent1"/>
-          </a:effectRef>
-          <a:fontRef idx="minor">
-            <a:schemeClr val="lt1"/>
-          </a:fontRef>
-        </p:style>
-        <p:txBody>
-          <a:bodyPr rtlCol="0" anchor="ctr" wrap="square" lIns="0" rIns="0" tIns="0" bIns="0"/>
-          <a:lstStyle/>
-          <a:p>
-            <a:pPr algn="ctr">
-              <a:spcBef>
-                <a:spcPts val="0"/>
-              </a:spcBef>
-              <a:spcAft>
-                <a:spcPts val="300"/>
-              </a:spcAft>
-              <a:defRPr sz="1800" b="0">
-                <a:solidFill>
-                  <a:srgbClr val="1A1A1A"/>
-                </a:solidFill>
-                <a:latin typeface="Arial"/>
-              </a:defRPr>
-            </a:pPr>
-          </a:p>
-        </p:txBody>
-      </p:sp>
       <p:sp>
         <p:nvSpPr>
           <p:cNvPr id="9" name="TextBox 8"/>
